--- a/slides/CSC336-Lecture-04-Semantic-HTML-and-Forms.pptx
+++ b/slides/CSC336-Lecture-04-Semantic-HTML-and-Forms.pptx
@@ -3422,13 +3422,14 @@
         </p:nvPicPr>
         <p:blipFill>
           <a:blip r:embed="rId1"/>
-          <a:srcRect l="0" r="0" t="0" b="0"/>
-          <a:stretch/>
+          <a:stretch>
+            <a:fillRect/>
+          </a:stretch>
         </p:blipFill>
         <p:spPr>
           <a:xfrm>
-            <a:off x="640080" y="2057400"/>
-            <a:ext cx="10911535" cy="4114800"/>
+            <a:off x="640080" y="3692628"/>
+            <a:ext cx="10911535" cy="844345"/>
           </a:xfrm>
           <a:prstGeom prst="rect">
             <a:avLst/>
@@ -5081,13 +5082,14 @@
         </p:nvPicPr>
         <p:blipFill>
           <a:blip r:embed="rId1"/>
-          <a:srcRect l="0" r="0" t="0" b="0"/>
-          <a:stretch/>
+          <a:stretch>
+            <a:fillRect/>
+          </a:stretch>
         </p:blipFill>
         <p:spPr>
           <a:xfrm>
-            <a:off x="640080" y="2057400"/>
-            <a:ext cx="10911535" cy="4114800"/>
+            <a:off x="640080" y="3468410"/>
+            <a:ext cx="10911535" cy="1292780"/>
           </a:xfrm>
           <a:prstGeom prst="rect">
             <a:avLst/>
@@ -6549,13 +6551,14 @@
         </p:nvPicPr>
         <p:blipFill>
           <a:blip r:embed="rId1"/>
-          <a:srcRect l="0" r="0" t="0" b="0"/>
-          <a:stretch/>
+          <a:stretch>
+            <a:fillRect/>
+          </a:stretch>
         </p:blipFill>
         <p:spPr>
           <a:xfrm>
-            <a:off x="640080" y="2331720"/>
-            <a:ext cx="10911535" cy="3840480"/>
+            <a:off x="5156959" y="2331720"/>
+            <a:ext cx="1877778" cy="3840480"/>
           </a:xfrm>
           <a:prstGeom prst="rect">
             <a:avLst/>
@@ -8865,13 +8868,14 @@
         </p:nvPicPr>
         <p:blipFill>
           <a:blip r:embed="rId1"/>
-          <a:srcRect l="0" r="0" t="0" b="0"/>
-          <a:stretch/>
+          <a:stretch>
+            <a:fillRect/>
+          </a:stretch>
         </p:blipFill>
         <p:spPr>
           <a:xfrm>
-            <a:off x="640080" y="2423160"/>
-            <a:ext cx="5272888" cy="3611880"/>
+            <a:off x="640080" y="3907947"/>
+            <a:ext cx="5272888" cy="642306"/>
           </a:xfrm>
           <a:prstGeom prst="rect">
             <a:avLst/>
@@ -8961,13 +8965,14 @@
         </p:nvPicPr>
         <p:blipFill>
           <a:blip r:embed="rId2"/>
-          <a:srcRect l="0" r="0" t="0" b="0"/>
-          <a:stretch/>
+          <a:stretch>
+            <a:fillRect/>
+          </a:stretch>
         </p:blipFill>
         <p:spPr>
           <a:xfrm>
-            <a:off x="6278728" y="2423160"/>
-            <a:ext cx="5272888" cy="3611880"/>
+            <a:off x="6278728" y="3516377"/>
+            <a:ext cx="5272888" cy="1425446"/>
           </a:xfrm>
           <a:prstGeom prst="rect">
             <a:avLst/>
@@ -9245,13 +9250,14 @@
         </p:nvPicPr>
         <p:blipFill>
           <a:blip r:embed="rId1"/>
-          <a:srcRect l="0" r="0" t="0" b="0"/>
-          <a:stretch/>
+          <a:stretch>
+            <a:fillRect/>
+          </a:stretch>
         </p:blipFill>
         <p:spPr>
           <a:xfrm>
-            <a:off x="640080" y="2331720"/>
-            <a:ext cx="10911535" cy="3840480"/>
+            <a:off x="640080" y="3638270"/>
+            <a:ext cx="10911535" cy="1227379"/>
           </a:xfrm>
           <a:prstGeom prst="rect">
             <a:avLst/>
@@ -10437,13 +10443,14 @@
         </p:nvPicPr>
         <p:blipFill>
           <a:blip r:embed="rId1"/>
-          <a:srcRect l="0" r="0" t="0" b="0"/>
-          <a:stretch/>
+          <a:stretch>
+            <a:fillRect/>
+          </a:stretch>
         </p:blipFill>
         <p:spPr>
           <a:xfrm>
-            <a:off x="640080" y="2331720"/>
-            <a:ext cx="10911535" cy="3840480"/>
+            <a:off x="640080" y="3631355"/>
+            <a:ext cx="10911535" cy="1241210"/>
           </a:xfrm>
           <a:prstGeom prst="rect">
             <a:avLst/>
@@ -11790,13 +11797,14 @@
         </p:nvPicPr>
         <p:blipFill>
           <a:blip r:embed="rId1"/>
-          <a:srcRect l="0" r="0" t="0" b="0"/>
-          <a:stretch/>
+          <a:stretch>
+            <a:fillRect/>
+          </a:stretch>
         </p:blipFill>
         <p:spPr>
           <a:xfrm>
-            <a:off x="640080" y="2331720"/>
-            <a:ext cx="10911535" cy="3840480"/>
+            <a:off x="640080" y="3368019"/>
+            <a:ext cx="10911535" cy="1767882"/>
           </a:xfrm>
           <a:prstGeom prst="rect">
             <a:avLst/>
@@ -12074,13 +12082,14 @@
         </p:nvPicPr>
         <p:blipFill>
           <a:blip r:embed="rId1"/>
-          <a:srcRect l="0" r="0" t="0" b="0"/>
-          <a:stretch/>
+          <a:stretch>
+            <a:fillRect/>
+          </a:stretch>
         </p:blipFill>
         <p:spPr>
           <a:xfrm>
-            <a:off x="640080" y="2331720"/>
-            <a:ext cx="10911535" cy="3840480"/>
+            <a:off x="640080" y="3502626"/>
+            <a:ext cx="10911535" cy="1498668"/>
           </a:xfrm>
           <a:prstGeom prst="rect">
             <a:avLst/>
@@ -14074,13 +14083,14 @@
         </p:nvPicPr>
         <p:blipFill>
           <a:blip r:embed="rId1"/>
-          <a:srcRect l="0" r="0" t="0" b="0"/>
-          <a:stretch/>
+          <a:stretch>
+            <a:fillRect/>
+          </a:stretch>
         </p:blipFill>
         <p:spPr>
           <a:xfrm>
-            <a:off x="640080" y="2331720"/>
-            <a:ext cx="10911535" cy="3840480"/>
+            <a:off x="2221244" y="2331720"/>
+            <a:ext cx="7749208" cy="3840480"/>
           </a:xfrm>
           <a:prstGeom prst="rect">
             <a:avLst/>

--- a/slides/CSC336-Lecture-04-Semantic-HTML-and-Forms.pptx
+++ b/slides/CSC336-Lecture-04-Semantic-HTML-and-Forms.pptx
@@ -30,9 +30,11 @@
     <p:sldId id="278" r:id="rId24"/>
     <p:sldId id="279" r:id="rId25"/>
     <p:sldId id="280" r:id="rId26"/>
+    <p:sldId id="281" r:id="rId27"/>
+    <p:sldId id="282" r:id="rId28"/>
   </p:sldIdLst>
   <p:notesMasterIdLst>
-    <p:notesMasterId r:id="rId27"/>
+    <p:notesMasterId r:id="rId29"/>
   </p:notesMasterIdLst>
   <p:sldSz cx="12192000" cy="6858000"/>
   <p:notesSz cx="6858000" cy="12192000"/>
@@ -2046,6 +2048,182 @@
             <a:fld id="{F7021451-1387-4CA6-816F-3879F97B5CBC}" type="slidenum">
               <a:rPr lang="en-US"/>
               <a:t>25</a:t>
+            </a:fld>
+            <a:endParaRPr lang="en-US"/>
+          </a:p>
+        </p:txBody>
+      </p:sp>
+    </p:spTree>
+    <p:extLst>
+      <p:ext uri="{BB962C8B-B14F-4D97-AF65-F5344CB8AC3E}">
+        <p14:creationId xmlns:p14="http://schemas.microsoft.com/office/powerpoint/2010/main" val="1024086991"/>
+      </p:ext>
+    </p:extLst>
+  </p:cSld>
+  <p:clrMapOvr>
+    <a:masterClrMapping/>
+  </p:clrMapOvr>
+</p:notes>
+</file>
+
+<file path=ppt/notesSlides/notesSlide26.xml><?xml version="1.0" encoding="utf-8"?>
+<p:notes xmlns:a="http://schemas.openxmlformats.org/drawingml/2006/main" xmlns:r="http://schemas.openxmlformats.org/officeDocument/2006/relationships" xmlns:p="http://schemas.openxmlformats.org/presentationml/2006/main">
+  <p:cSld>
+    <p:spTree>
+      <p:nvGrpSpPr>
+        <p:cNvPr id="1" name=""/>
+        <p:cNvGrpSpPr/>
+        <p:nvPr/>
+      </p:nvGrpSpPr>
+      <p:grpSpPr>
+        <a:xfrm>
+          <a:off x="0" y="0"/>
+          <a:ext cx="0" cy="0"/>
+          <a:chOff x="0" y="0"/>
+          <a:chExt cx="0" cy="0"/>
+        </a:xfrm>
+      </p:grpSpPr>
+      <p:sp>
+        <p:nvSpPr>
+          <p:cNvPr id="2" name="Slide Image Placeholder 1"/>
+          <p:cNvSpPr>
+            <a:spLocks noGrp="1" noRot="1" noChangeAspect="1"/>
+          </p:cNvSpPr>
+          <p:nvPr>
+            <p:ph type="sldImg"/>
+          </p:nvPr>
+        </p:nvSpPr>
+        <p:spPr/>
+      </p:sp>
+      <p:sp>
+        <p:nvSpPr>
+          <p:cNvPr id="3" name="Notes Placeholder 2"/>
+          <p:cNvSpPr>
+            <a:spLocks noGrp="1"/>
+          </p:cNvSpPr>
+          <p:nvPr>
+            <p:ph type="body" idx="1"/>
+          </p:nvPr>
+        </p:nvSpPr>
+        <p:spPr/>
+        <p:txBody>
+          <a:bodyPr/>
+          <a:lstStyle/>
+          <a:p>
+            <a:r>
+              <a:rPr lang="en-US" dirty="0"/>
+              <a:t/>
+            </a:r>
+            <a:endParaRPr lang="en-US" dirty="0"/>
+          </a:p>
+        </p:txBody>
+      </p:sp>
+      <p:sp>
+        <p:nvSpPr>
+          <p:cNvPr id="4" name="Slide Number Placeholder 3"/>
+          <p:cNvSpPr>
+            <a:spLocks noGrp="1"/>
+          </p:cNvSpPr>
+          <p:nvPr>
+            <p:ph type="sldNum" sz="quarter" idx="10"/>
+          </p:nvPr>
+        </p:nvSpPr>
+        <p:spPr/>
+        <p:txBody>
+          <a:bodyPr/>
+          <a:lstStyle/>
+          <a:p>
+            <a:fld id="{F7021451-1387-4CA6-816F-3879F97B5CBC}" type="slidenum">
+              <a:rPr lang="en-US"/>
+              <a:t>26</a:t>
+            </a:fld>
+            <a:endParaRPr lang="en-US"/>
+          </a:p>
+        </p:txBody>
+      </p:sp>
+    </p:spTree>
+    <p:extLst>
+      <p:ext uri="{BB962C8B-B14F-4D97-AF65-F5344CB8AC3E}">
+        <p14:creationId xmlns:p14="http://schemas.microsoft.com/office/powerpoint/2010/main" val="1024086991"/>
+      </p:ext>
+    </p:extLst>
+  </p:cSld>
+  <p:clrMapOvr>
+    <a:masterClrMapping/>
+  </p:clrMapOvr>
+</p:notes>
+</file>
+
+<file path=ppt/notesSlides/notesSlide27.xml><?xml version="1.0" encoding="utf-8"?>
+<p:notes xmlns:a="http://schemas.openxmlformats.org/drawingml/2006/main" xmlns:r="http://schemas.openxmlformats.org/officeDocument/2006/relationships" xmlns:p="http://schemas.openxmlformats.org/presentationml/2006/main">
+  <p:cSld>
+    <p:spTree>
+      <p:nvGrpSpPr>
+        <p:cNvPr id="1" name=""/>
+        <p:cNvGrpSpPr/>
+        <p:nvPr/>
+      </p:nvGrpSpPr>
+      <p:grpSpPr>
+        <a:xfrm>
+          <a:off x="0" y="0"/>
+          <a:ext cx="0" cy="0"/>
+          <a:chOff x="0" y="0"/>
+          <a:chExt cx="0" cy="0"/>
+        </a:xfrm>
+      </p:grpSpPr>
+      <p:sp>
+        <p:nvSpPr>
+          <p:cNvPr id="2" name="Slide Image Placeholder 1"/>
+          <p:cNvSpPr>
+            <a:spLocks noGrp="1" noRot="1" noChangeAspect="1"/>
+          </p:cNvSpPr>
+          <p:nvPr>
+            <p:ph type="sldImg"/>
+          </p:nvPr>
+        </p:nvSpPr>
+        <p:spPr/>
+      </p:sp>
+      <p:sp>
+        <p:nvSpPr>
+          <p:cNvPr id="3" name="Notes Placeholder 2"/>
+          <p:cNvSpPr>
+            <a:spLocks noGrp="1"/>
+          </p:cNvSpPr>
+          <p:nvPr>
+            <p:ph type="body" idx="1"/>
+          </p:nvPr>
+        </p:nvSpPr>
+        <p:spPr/>
+        <p:txBody>
+          <a:bodyPr/>
+          <a:lstStyle/>
+          <a:p>
+            <a:r>
+              <a:rPr lang="en-US" dirty="0"/>
+              <a:t/>
+            </a:r>
+            <a:endParaRPr lang="en-US" dirty="0"/>
+          </a:p>
+        </p:txBody>
+      </p:sp>
+      <p:sp>
+        <p:nvSpPr>
+          <p:cNvPr id="4" name="Slide Number Placeholder 3"/>
+          <p:cNvSpPr>
+            <a:spLocks noGrp="1"/>
+          </p:cNvSpPr>
+          <p:nvPr>
+            <p:ph type="sldNum" sz="quarter" idx="10"/>
+          </p:nvPr>
+        </p:nvSpPr>
+        <p:spPr/>
+        <p:txBody>
+          <a:bodyPr/>
+          <a:lstStyle/>
+          <a:p>
+            <a:fld id="{F7021451-1387-4CA6-816F-3879F97B5CBC}" type="slidenum">
+              <a:rPr lang="en-US"/>
+              <a:t>27</a:t>
             </a:fld>
             <a:endParaRPr lang="en-US"/>
           </a:p>
@@ -3372,7 +3550,7 @@
                 <a:ea typeface="Cambria" pitchFamily="34" charset="-122"/>
                 <a:cs typeface="Cambria" pitchFamily="34" charset="-120"/>
               </a:rPr>
-              <a:t>A Basic Form, Rendered</a:t>
+              <a:t>A Basic Form</a:t>
             </a:r>
             <a:endParaRPr lang="en-US" sz="3400" dirty="0"/>
           </a:p>
@@ -3386,12 +3564,214 @@
         </p:nvSpPr>
         <p:spPr>
           <a:xfrm>
-            <a:off x="530352" y="1947672"/>
-            <a:ext cx="11130991" cy="4334256"/>
+            <a:off x="640080" y="1965960"/>
+            <a:ext cx="10911535" cy="2691765"/>
           </a:xfrm>
           <a:prstGeom prst="roundRect">
             <a:avLst>
-              <a:gd name="adj" fmla="val 1266"/>
+              <a:gd name="adj" fmla="val 2718"/>
+            </a:avLst>
+          </a:prstGeom>
+          <a:solidFill>
+            <a:srgbClr val="1E1E4C"/>
+          </a:solidFill>
+          <a:ln/>
+        </p:spPr>
+      </p:sp>
+      <p:sp>
+        <p:nvSpPr>
+          <p:cNvPr id="5" name="Text 3"/>
+          <p:cNvSpPr txBox="1"/>
+          <p:nvPr/>
+        </p:nvSpPr>
+        <p:spPr>
+          <a:xfrm>
+            <a:off x="960120" y="2194560"/>
+            <a:ext cx="10271455" cy="2234565"/>
+          </a:xfrm>
+          <a:prstGeom prst="rect">
+            <a:avLst/>
+          </a:prstGeom>
+          <a:noFill/>
+          <a:ln/>
+        </p:spPr>
+        <p:txBody>
+          <a:bodyPr wrap="square" lIns="0" tIns="0" rIns="0" bIns="0" rtlCol="0" anchor="t"/>
+          <a:lstStyle/>
+          <a:p>
+            <a:pPr indent="0" marL="0">
+              <a:lnSpc>
+                <a:spcPct val="125000"/>
+              </a:lnSpc>
+              <a:buNone/>
+            </a:pPr>
+            <a:r>
+              <a:rPr lang="en-US" sz="1250" dirty="0">
+                <a:solidFill>
+                  <a:srgbClr val="C9D3F5"/>
+                </a:solidFill>
+                <a:latin typeface="Courier New" pitchFamily="34" charset="0"/>
+                <a:ea typeface="Courier New" pitchFamily="34" charset="-122"/>
+                <a:cs typeface="Courier New" pitchFamily="34" charset="-120"/>
+              </a:rPr>
+              <a:t>&lt;form action="/submit-login" method="POST"&gt;</a:t>
+            </a:r>
+            <a:endParaRPr lang="en-US" sz="1250" dirty="0"/>
+          </a:p>
+          <a:p>
+            <a:pPr indent="0" marL="0">
+              <a:lnSpc>
+                <a:spcPct val="125000"/>
+              </a:lnSpc>
+              <a:buNone/>
+            </a:pPr>
+            <a:r>
+              <a:rPr lang="en-US" sz="1250" dirty="0">
+                <a:solidFill>
+                  <a:srgbClr val="C9D3F5"/>
+                </a:solidFill>
+                <a:latin typeface="Courier New" pitchFamily="34" charset="0"/>
+                <a:ea typeface="Courier New" pitchFamily="34" charset="-122"/>
+                <a:cs typeface="Courier New" pitchFamily="34" charset="-120"/>
+              </a:rPr>
+              <a:t>    &lt;label for="username"&gt;Username:&lt;/label&gt;</a:t>
+            </a:r>
+            <a:endParaRPr lang="en-US" sz="1250" dirty="0"/>
+          </a:p>
+          <a:p>
+            <a:pPr indent="0" marL="0">
+              <a:lnSpc>
+                <a:spcPct val="125000"/>
+              </a:lnSpc>
+              <a:buNone/>
+            </a:pPr>
+            <a:r>
+              <a:rPr lang="en-US" sz="1250" dirty="0">
+                <a:solidFill>
+                  <a:srgbClr val="C9D3F5"/>
+                </a:solidFill>
+                <a:latin typeface="Courier New" pitchFamily="34" charset="0"/>
+                <a:ea typeface="Courier New" pitchFamily="34" charset="-122"/>
+                <a:cs typeface="Courier New" pitchFamily="34" charset="-120"/>
+              </a:rPr>
+              <a:t>    &lt;input type="text" id="username" name="username"&gt;</a:t>
+            </a:r>
+            <a:endParaRPr lang="en-US" sz="1250" dirty="0"/>
+          </a:p>
+          <a:p>
+            <a:pPr indent="0" marL="0">
+              <a:lnSpc>
+                <a:spcPct val="125000"/>
+              </a:lnSpc>
+              <a:buNone/>
+            </a:pPr>
+            <a:endParaRPr lang="en-US" sz="1250" dirty="0"/>
+          </a:p>
+          <a:p>
+            <a:pPr indent="0" marL="0">
+              <a:lnSpc>
+                <a:spcPct val="125000"/>
+              </a:lnSpc>
+              <a:buNone/>
+            </a:pPr>
+            <a:r>
+              <a:rPr lang="en-US" sz="1250" dirty="0">
+                <a:solidFill>
+                  <a:srgbClr val="C9D3F5"/>
+                </a:solidFill>
+                <a:latin typeface="Courier New" pitchFamily="34" charset="0"/>
+                <a:ea typeface="Courier New" pitchFamily="34" charset="-122"/>
+                <a:cs typeface="Courier New" pitchFamily="34" charset="-120"/>
+              </a:rPr>
+              <a:t>    &lt;label for="password"&gt;Password:&lt;/label&gt;</a:t>
+            </a:r>
+            <a:endParaRPr lang="en-US" sz="1250" dirty="0"/>
+          </a:p>
+          <a:p>
+            <a:pPr indent="0" marL="0">
+              <a:lnSpc>
+                <a:spcPct val="125000"/>
+              </a:lnSpc>
+              <a:buNone/>
+            </a:pPr>
+            <a:r>
+              <a:rPr lang="en-US" sz="1250" dirty="0">
+                <a:solidFill>
+                  <a:srgbClr val="C9D3F5"/>
+                </a:solidFill>
+                <a:latin typeface="Courier New" pitchFamily="34" charset="0"/>
+                <a:ea typeface="Courier New" pitchFamily="34" charset="-122"/>
+                <a:cs typeface="Courier New" pitchFamily="34" charset="-120"/>
+              </a:rPr>
+              <a:t>    &lt;input type="password" id="password" name="password"&gt;</a:t>
+            </a:r>
+            <a:endParaRPr lang="en-US" sz="1250" dirty="0"/>
+          </a:p>
+          <a:p>
+            <a:pPr indent="0" marL="0">
+              <a:lnSpc>
+                <a:spcPct val="125000"/>
+              </a:lnSpc>
+              <a:buNone/>
+            </a:pPr>
+            <a:endParaRPr lang="en-US" sz="1250" dirty="0"/>
+          </a:p>
+          <a:p>
+            <a:pPr indent="0" marL="0">
+              <a:lnSpc>
+                <a:spcPct val="125000"/>
+              </a:lnSpc>
+              <a:buNone/>
+            </a:pPr>
+            <a:r>
+              <a:rPr lang="en-US" sz="1250" dirty="0">
+                <a:solidFill>
+                  <a:srgbClr val="C9D3F5"/>
+                </a:solidFill>
+                <a:latin typeface="Courier New" pitchFamily="34" charset="0"/>
+                <a:ea typeface="Courier New" pitchFamily="34" charset="-122"/>
+                <a:cs typeface="Courier New" pitchFamily="34" charset="-120"/>
+              </a:rPr>
+              <a:t>    &lt;button type="submit"&gt;Log In&lt;/button&gt;</a:t>
+            </a:r>
+            <a:endParaRPr lang="en-US" sz="1250" dirty="0"/>
+          </a:p>
+          <a:p>
+            <a:pPr indent="0" marL="0">
+              <a:lnSpc>
+                <a:spcPct val="125000"/>
+              </a:lnSpc>
+              <a:buNone/>
+            </a:pPr>
+            <a:r>
+              <a:rPr lang="en-US" sz="1250" dirty="0">
+                <a:solidFill>
+                  <a:srgbClr val="C9D3F5"/>
+                </a:solidFill>
+                <a:latin typeface="Courier New" pitchFamily="34" charset="0"/>
+                <a:ea typeface="Courier New" pitchFamily="34" charset="-122"/>
+                <a:cs typeface="Courier New" pitchFamily="34" charset="-120"/>
+              </a:rPr>
+              <a:t>&lt;/form&gt;</a:t>
+            </a:r>
+            <a:endParaRPr lang="en-US" sz="1250" dirty="0"/>
+          </a:p>
+        </p:txBody>
+      </p:sp>
+      <p:sp>
+        <p:nvSpPr>
+          <p:cNvPr id="6" name="Shape 4"/>
+          <p:cNvSpPr/>
+          <p:nvPr/>
+        </p:nvSpPr>
+        <p:spPr>
+          <a:xfrm>
+            <a:off x="530352" y="4822317"/>
+            <a:ext cx="11130991" cy="1505331"/>
+          </a:xfrm>
+          <a:prstGeom prst="roundRect">
+            <a:avLst>
+              <a:gd name="adj" fmla="val 3645"/>
             </a:avLst>
           </a:prstGeom>
           <a:solidFill>
@@ -3414,7 +3794,7 @@
       </p:sp>
       <p:pic>
         <p:nvPicPr>
-          <p:cNvPr id="5" name="Image 0" descr="D:/GitHub/mern-web-book/docs/assets/img/lecture-04/login-form.png">    </p:cNvPr>
+          <p:cNvPr id="7" name="Image 0" descr="D:/GitHub/mern-web-book/docs/assets/img/lecture-04/login-form.png">    </p:cNvPr>
           <p:cNvPicPr>
             <a:picLocks noChangeAspect="1"/>
           </p:cNvPicPr>
@@ -3428,7 +3808,7 @@
         </p:blipFill>
         <p:spPr>
           <a:xfrm>
-            <a:off x="640080" y="3692628"/>
+            <a:off x="640080" y="5152810"/>
             <a:ext cx="10911535" cy="844345"/>
           </a:xfrm>
           <a:prstGeom prst="rect">
@@ -3438,7 +3818,7 @@
       </p:pic>
       <p:sp>
         <p:nvSpPr>
-          <p:cNvPr id="6" name="Text 3"/>
+          <p:cNvPr id="8" name="Text 5"/>
           <p:cNvSpPr txBox="1"/>
           <p:nvPr/>
         </p:nvSpPr>
@@ -3477,7 +3857,7 @@
       </p:sp>
       <p:sp>
         <p:nvSpPr>
-          <p:cNvPr id="7" name="Text 4"/>
+          <p:cNvPr id="9" name="Text 6"/>
           <p:cNvSpPr txBox="1"/>
           <p:nvPr/>
         </p:nvSpPr>
@@ -4689,18 +5069,57 @@
       </p:sp>
       <p:sp>
         <p:nvSpPr>
-          <p:cNvPr id="4" name="Shape 2"/>
+          <p:cNvPr id="4" name="Text 2"/>
+          <p:cNvSpPr txBox="1"/>
+          <p:nvPr/>
+        </p:nvSpPr>
+        <p:spPr>
+          <a:xfrm>
+            <a:off x="640080" y="1691640"/>
+            <a:ext cx="10911535" cy="411480"/>
+          </a:xfrm>
+          <a:prstGeom prst="rect">
+            <a:avLst/>
+          </a:prstGeom>
+          <a:noFill/>
+          <a:ln/>
+        </p:spPr>
+        <p:txBody>
+          <a:bodyPr wrap="square" lIns="0" tIns="0" rIns="0" bIns="0" rtlCol="0" anchor="ctr"/>
+          <a:lstStyle/>
+          <a:p>
+            <a:pPr indent="0" marL="0">
+              <a:buNone/>
+            </a:pPr>
+            <a:r>
+              <a:rPr lang="en-US" sz="1350" i="1" dirty="0">
+                <a:solidFill>
+                  <a:srgbClr val="5D5D72"/>
+                </a:solidFill>
+                <a:latin typeface="Calibri" pitchFamily="34" charset="0"/>
+                <a:ea typeface="Calibri" pitchFamily="34" charset="-122"/>
+                <a:cs typeface="Calibri" pitchFamily="34" charset="-120"/>
+              </a:rPr>
+              <a:t>name="q" is the exact query-parameter name Google's search endpoint expects — submitting this form genuinely searches Google.</a:t>
+            </a:r>
+            <a:endParaRPr lang="en-US" sz="1350" dirty="0"/>
+          </a:p>
+        </p:txBody>
+      </p:sp>
+      <p:sp>
+        <p:nvSpPr>
+          <p:cNvPr id="5" name="Shape 3"/>
           <p:cNvSpPr/>
           <p:nvPr/>
         </p:nvSpPr>
         <p:spPr>
           <a:xfrm>
-            <a:off x="640080" y="1965960"/>
-            <a:ext cx="10911535" cy="2221992"/>
+            <a:off x="640080" y="2240280"/>
+            <a:ext cx="10911535" cy="1739265"/>
           </a:xfrm>
           <a:prstGeom prst="roundRect">
             <a:avLst>
-              <a:gd name="adj" fmla="val 3292"/>
+              <a:gd name="adj" fmla="val 4206"/>
             </a:avLst>
           </a:prstGeom>
           <a:solidFill>
@@ -4711,14 +5130,14 @@
       </p:sp>
       <p:sp>
         <p:nvSpPr>
-          <p:cNvPr id="5" name="Text 3"/>
-          <p:cNvSpPr txBox="1"/>
-          <p:nvPr/>
-        </p:nvSpPr>
-        <p:spPr>
-          <a:xfrm>
-            <a:off x="960120" y="2194560"/>
-            <a:ext cx="10271455" cy="1764792"/>
+          <p:cNvPr id="6" name="Text 4"/>
+          <p:cNvSpPr txBox="1"/>
+          <p:nvPr/>
+        </p:nvSpPr>
+        <p:spPr>
+          <a:xfrm>
+            <a:off x="960120" y="2468880"/>
+            <a:ext cx="10271455" cy="1282065"/>
           </a:xfrm>
           <a:prstGeom prst="rect">
             <a:avLst/>
@@ -4737,7 +5156,7 @@
               <a:buNone/>
             </a:pPr>
             <a:r>
-              <a:rPr lang="en-US" sz="1400" dirty="0">
+              <a:rPr lang="en-US" sz="1250" dirty="0">
                 <a:solidFill>
                   <a:srgbClr val="C9D3F5"/>
                 </a:solidFill>
@@ -4747,7 +5166,7 @@
               </a:rPr>
               <a:t>&lt;form action="https://www.google.com/search" method="GET"&gt;</a:t>
             </a:r>
-            <a:endParaRPr lang="en-US" sz="1400" dirty="0"/>
+            <a:endParaRPr lang="en-US" sz="1250" dirty="0"/>
           </a:p>
           <a:p>
             <a:pPr indent="0" marL="0">
@@ -4757,7 +5176,7 @@
               <a:buNone/>
             </a:pPr>
             <a:r>
-              <a:rPr lang="en-US" sz="1400" dirty="0">
+              <a:rPr lang="en-US" sz="1250" dirty="0">
                 <a:solidFill>
                   <a:srgbClr val="C9D3F5"/>
                 </a:solidFill>
@@ -4765,9 +5184,9 @@
                 <a:ea typeface="Courier New" pitchFamily="34" charset="-122"/>
                 <a:cs typeface="Courier New" pitchFamily="34" charset="-120"/>
               </a:rPr>
-              <a:t>  &lt;input type="text" name="q" placeholder="Type your search..."&gt;</a:t>
-            </a:r>
-            <a:endParaRPr lang="en-US" sz="1400" dirty="0"/>
+              <a:t>    &lt;label for="q"&gt;Search Google:&lt;/label&gt;</a:t>
+            </a:r>
+            <a:endParaRPr lang="en-US" sz="1250" dirty="0"/>
           </a:p>
           <a:p>
             <a:pPr indent="0" marL="0">
@@ -4777,7 +5196,7 @@
               <a:buNone/>
             </a:pPr>
             <a:r>
-              <a:rPr lang="en-US" sz="1400" dirty="0">
+              <a:rPr lang="en-US" sz="1250" dirty="0">
                 <a:solidFill>
                   <a:srgbClr val="C9D3F5"/>
                 </a:solidFill>
@@ -4785,9 +5204,9 @@
                 <a:ea typeface="Courier New" pitchFamily="34" charset="-122"/>
                 <a:cs typeface="Courier New" pitchFamily="34" charset="-120"/>
               </a:rPr>
-              <a:t>  &lt;button type="submit"&gt;Search&lt;/button&gt;</a:t>
-            </a:r>
-            <a:endParaRPr lang="en-US" sz="1400" dirty="0"/>
+              <a:t>    &lt;input type="text" id="q" name="q" placeholder="Type your search..."&gt;</a:t>
+            </a:r>
+            <a:endParaRPr lang="en-US" sz="1250" dirty="0"/>
           </a:p>
           <a:p>
             <a:pPr indent="0" marL="0">
@@ -4797,7 +5216,7 @@
               <a:buNone/>
             </a:pPr>
             <a:r>
-              <a:rPr lang="en-US" sz="1400" dirty="0">
+              <a:rPr lang="en-US" sz="1250" dirty="0">
                 <a:solidFill>
                   <a:srgbClr val="C9D3F5"/>
                 </a:solidFill>
@@ -4805,84 +5224,123 @@
                 <a:ea typeface="Courier New" pitchFamily="34" charset="-122"/>
                 <a:cs typeface="Courier New" pitchFamily="34" charset="-120"/>
               </a:rPr>
+              <a:t>    &lt;button type="submit"&gt;Search&lt;/button&gt;</a:t>
+            </a:r>
+            <a:endParaRPr lang="en-US" sz="1250" dirty="0"/>
+          </a:p>
+          <a:p>
+            <a:pPr indent="0" marL="0">
+              <a:lnSpc>
+                <a:spcPct val="125000"/>
+              </a:lnSpc>
+              <a:buNone/>
+            </a:pPr>
+            <a:r>
+              <a:rPr lang="en-US" sz="1250" dirty="0">
+                <a:solidFill>
+                  <a:srgbClr val="C9D3F5"/>
+                </a:solidFill>
+                <a:latin typeface="Courier New" pitchFamily="34" charset="0"/>
+                <a:ea typeface="Courier New" pitchFamily="34" charset="-122"/>
+                <a:cs typeface="Courier New" pitchFamily="34" charset="-120"/>
+              </a:rPr>
               <a:t>&lt;/form&gt;</a:t>
             </a:r>
-            <a:endParaRPr lang="en-US" sz="1400" dirty="0"/>
-          </a:p>
-        </p:txBody>
-      </p:sp>
-      <p:sp>
-        <p:nvSpPr>
-          <p:cNvPr id="6" name="Text 4"/>
-          <p:cNvSpPr txBox="1"/>
-          <p:nvPr/>
-        </p:nvSpPr>
-        <p:spPr>
-          <a:xfrm>
-            <a:off x="640080" y="4416552"/>
-            <a:ext cx="10911535" cy="1847088"/>
-          </a:xfrm>
-          <a:prstGeom prst="rect">
-            <a:avLst/>
-          </a:prstGeom>
-          <a:noFill/>
-          <a:ln/>
-        </p:spPr>
-        <p:txBody>
-          <a:bodyPr wrap="square" lIns="0" tIns="0" rIns="0" bIns="0" rtlCol="0" anchor="t"/>
-          <a:lstStyle/>
-          <a:p>
-            <a:pPr indent="0" marL="0">
-              <a:buNone/>
-            </a:pPr>
-            <a:r>
-              <a:rPr lang="en-US" sz="1300" dirty="0">
-                <a:solidFill>
-                  <a:srgbClr val="26262F"/>
+            <a:endParaRPr lang="en-US" sz="1250" dirty="0"/>
+          </a:p>
+        </p:txBody>
+      </p:sp>
+      <p:sp>
+        <p:nvSpPr>
+          <p:cNvPr id="7" name="Shape 5"/>
+          <p:cNvSpPr/>
+          <p:nvPr/>
+        </p:nvSpPr>
+        <p:spPr>
+          <a:xfrm>
+            <a:off x="530352" y="4144137"/>
+            <a:ext cx="11130991" cy="2183511"/>
+          </a:xfrm>
+          <a:prstGeom prst="roundRect">
+            <a:avLst>
+              <a:gd name="adj" fmla="val 2513"/>
+            </a:avLst>
+          </a:prstGeom>
+          <a:solidFill>
+            <a:srgbClr val="FFFFFF"/>
+          </a:solidFill>
+          <a:ln w="12700">
+            <a:solidFill>
+              <a:srgbClr val="E2E2EE"/>
+            </a:solidFill>
+            <a:prstDash val="solid"/>
+          </a:ln>
+          <a:effectLst>
+            <a:outerShdw sx="100000" sy="100000" kx="0" ky="0" algn="bl" rotWithShape="0" blurRad="101600" dist="38100" dir="5400000">
+              <a:srgbClr val="000000">
+                <a:alpha val="12000"/>
+              </a:srgbClr>
+            </a:outerShdw>
+          </a:effectLst>
+        </p:spPr>
+      </p:sp>
+      <p:pic>
+        <p:nvPicPr>
+          <p:cNvPr id="8" name="Image 0" descr="D:/GitHub/mern-web-book/docs/assets/img/lecture-04/google-search-form.png">    </p:cNvPr>
+          <p:cNvPicPr>
+            <a:picLocks noChangeAspect="1"/>
+          </p:cNvPicPr>
+          <p:nvPr/>
+        </p:nvPicPr>
+        <p:blipFill>
+          <a:blip r:embed="rId1"/>
+          <a:stretch>
+            <a:fillRect/>
+          </a:stretch>
+        </p:blipFill>
+        <p:spPr>
+          <a:xfrm>
+            <a:off x="640080" y="4589503"/>
+            <a:ext cx="10911535" cy="1292780"/>
+          </a:xfrm>
+          <a:prstGeom prst="rect">
+            <a:avLst/>
+          </a:prstGeom>
+        </p:spPr>
+      </p:pic>
+      <p:sp>
+        <p:nvSpPr>
+          <p:cNvPr id="9" name="Text 6"/>
+          <p:cNvSpPr txBox="1"/>
+          <p:nvPr/>
+        </p:nvSpPr>
+        <p:spPr>
+          <a:xfrm>
+            <a:off x="640080" y="6446520"/>
+            <a:ext cx="8686800" cy="292608"/>
+          </a:xfrm>
+          <a:prstGeom prst="rect">
+            <a:avLst/>
+          </a:prstGeom>
+          <a:noFill/>
+          <a:ln/>
+        </p:spPr>
+        <p:txBody>
+          <a:bodyPr wrap="square" lIns="0" tIns="0" rIns="0" bIns="0" rtlCol="0" anchor="ctr"/>
+          <a:lstStyle/>
+          <a:p>
+            <a:pPr algn="l" indent="0" marL="0">
+              <a:buNone/>
+            </a:pPr>
+            <a:r>
+              <a:rPr lang="en-US" sz="900" dirty="0">
+                <a:solidFill>
+                  <a:srgbClr val="5D5D72"/>
                 </a:solidFill>
                 <a:latin typeface="Calibri" pitchFamily="34" charset="0"/>
                 <a:ea typeface="Calibri" pitchFamily="34" charset="-122"/>
                 <a:cs typeface="Calibri" pitchFamily="34" charset="-120"/>
               </a:rPr>
-              <a:t>name="q" is the exact query-parameter name Google's search endpoint expects — submitting this form genuinely searches Google.</a:t>
-            </a:r>
-            <a:endParaRPr lang="en-US" sz="1300" dirty="0"/>
-          </a:p>
-        </p:txBody>
-      </p:sp>
-      <p:sp>
-        <p:nvSpPr>
-          <p:cNvPr id="7" name="Text 5"/>
-          <p:cNvSpPr txBox="1"/>
-          <p:nvPr/>
-        </p:nvSpPr>
-        <p:spPr>
-          <a:xfrm>
-            <a:off x="640080" y="6446520"/>
-            <a:ext cx="8686800" cy="292608"/>
-          </a:xfrm>
-          <a:prstGeom prst="rect">
-            <a:avLst/>
-          </a:prstGeom>
-          <a:noFill/>
-          <a:ln/>
-        </p:spPr>
-        <p:txBody>
-          <a:bodyPr wrap="square" lIns="0" tIns="0" rIns="0" bIns="0" rtlCol="0" anchor="ctr"/>
-          <a:lstStyle/>
-          <a:p>
-            <a:pPr algn="l" indent="0" marL="0">
-              <a:buNone/>
-            </a:pPr>
-            <a:r>
-              <a:rPr lang="en-US" sz="900" dirty="0">
-                <a:solidFill>
-                  <a:srgbClr val="5D5D72"/>
-                </a:solidFill>
-                <a:latin typeface="Calibri" pitchFamily="34" charset="0"/>
-                <a:ea typeface="Calibri" pitchFamily="34" charset="-122"/>
-                <a:cs typeface="Calibri" pitchFamily="34" charset="-120"/>
-              </a:rPr>
               <a:t>Usman Akram  •  COMSATS University Islamabad</a:t>
             </a:r>
             <a:endParaRPr lang="en-US" sz="900" dirty="0"/>
@@ -4891,7 +5349,7 @@
       </p:sp>
       <p:sp>
         <p:nvSpPr>
-          <p:cNvPr id="8" name="Text 6"/>
+          <p:cNvPr id="10" name="Text 7"/>
           <p:cNvSpPr txBox="1"/>
           <p:nvPr/>
         </p:nvSpPr>
@@ -4993,7 +5451,7 @@
                 <a:ea typeface="Calibri" pitchFamily="34" charset="-122"/>
                 <a:cs typeface="Calibri" pitchFamily="34" charset="-120"/>
               </a:rPr>
-              <a:t>A REAL EXAMPLE</a:t>
+              <a:t>INPUT TYPES</a:t>
             </a:r>
             <a:endParaRPr lang="en-US" sz="1300" dirty="0"/>
           </a:p>
@@ -5032,252 +5490,6 @@
                 <a:ea typeface="Cambria" pitchFamily="34" charset="-122"/>
                 <a:cs typeface="Cambria" pitchFamily="34" charset="-120"/>
               </a:rPr>
-              <a:t>The Google Search Form, Rendered</a:t>
-            </a:r>
-            <a:endParaRPr lang="en-US" sz="3400" dirty="0"/>
-          </a:p>
-        </p:txBody>
-      </p:sp>
-      <p:sp>
-        <p:nvSpPr>
-          <p:cNvPr id="4" name="Shape 2"/>
-          <p:cNvSpPr/>
-          <p:nvPr/>
-        </p:nvSpPr>
-        <p:spPr>
-          <a:xfrm>
-            <a:off x="530352" y="1947672"/>
-            <a:ext cx="11130991" cy="4334256"/>
-          </a:xfrm>
-          <a:prstGeom prst="roundRect">
-            <a:avLst>
-              <a:gd name="adj" fmla="val 1266"/>
-            </a:avLst>
-          </a:prstGeom>
-          <a:solidFill>
-            <a:srgbClr val="FFFFFF"/>
-          </a:solidFill>
-          <a:ln w="12700">
-            <a:solidFill>
-              <a:srgbClr val="E2E2EE"/>
-            </a:solidFill>
-            <a:prstDash val="solid"/>
-          </a:ln>
-          <a:effectLst>
-            <a:outerShdw sx="100000" sy="100000" kx="0" ky="0" algn="bl" rotWithShape="0" blurRad="101600" dist="38100" dir="5400000">
-              <a:srgbClr val="000000">
-                <a:alpha val="12000"/>
-              </a:srgbClr>
-            </a:outerShdw>
-          </a:effectLst>
-        </p:spPr>
-      </p:sp>
-      <p:pic>
-        <p:nvPicPr>
-          <p:cNvPr id="5" name="Image 0" descr="D:/GitHub/mern-web-book/docs/assets/img/lecture-04/google-search-form.png">    </p:cNvPr>
-          <p:cNvPicPr>
-            <a:picLocks noChangeAspect="1"/>
-          </p:cNvPicPr>
-          <p:nvPr/>
-        </p:nvPicPr>
-        <p:blipFill>
-          <a:blip r:embed="rId1"/>
-          <a:stretch>
-            <a:fillRect/>
-          </a:stretch>
-        </p:blipFill>
-        <p:spPr>
-          <a:xfrm>
-            <a:off x="640080" y="3468410"/>
-            <a:ext cx="10911535" cy="1292780"/>
-          </a:xfrm>
-          <a:prstGeom prst="rect">
-            <a:avLst/>
-          </a:prstGeom>
-        </p:spPr>
-      </p:pic>
-      <p:sp>
-        <p:nvSpPr>
-          <p:cNvPr id="6" name="Text 3"/>
-          <p:cNvSpPr txBox="1"/>
-          <p:nvPr/>
-        </p:nvSpPr>
-        <p:spPr>
-          <a:xfrm>
-            <a:off x="640080" y="6446520"/>
-            <a:ext cx="8686800" cy="292608"/>
-          </a:xfrm>
-          <a:prstGeom prst="rect">
-            <a:avLst/>
-          </a:prstGeom>
-          <a:noFill/>
-          <a:ln/>
-        </p:spPr>
-        <p:txBody>
-          <a:bodyPr wrap="square" lIns="0" tIns="0" rIns="0" bIns="0" rtlCol="0" anchor="ctr"/>
-          <a:lstStyle/>
-          <a:p>
-            <a:pPr algn="l" indent="0" marL="0">
-              <a:buNone/>
-            </a:pPr>
-            <a:r>
-              <a:rPr lang="en-US" sz="900" dirty="0">
-                <a:solidFill>
-                  <a:srgbClr val="5D5D72"/>
-                </a:solidFill>
-                <a:latin typeface="Calibri" pitchFamily="34" charset="0"/>
-                <a:ea typeface="Calibri" pitchFamily="34" charset="-122"/>
-                <a:cs typeface="Calibri" pitchFamily="34" charset="-120"/>
-              </a:rPr>
-              <a:t>Usman Akram  •  COMSATS University Islamabad</a:t>
-            </a:r>
-            <a:endParaRPr lang="en-US" sz="900" dirty="0"/>
-          </a:p>
-        </p:txBody>
-      </p:sp>
-      <p:sp>
-        <p:nvSpPr>
-          <p:cNvPr id="7" name="Text 4"/>
-          <p:cNvSpPr txBox="1"/>
-          <p:nvPr/>
-        </p:nvSpPr>
-        <p:spPr>
-          <a:xfrm>
-            <a:off x="11155680" y="6446520"/>
-            <a:ext cx="457200" cy="292608"/>
-          </a:xfrm>
-          <a:prstGeom prst="rect">
-            <a:avLst/>
-          </a:prstGeom>
-          <a:noFill/>
-          <a:ln/>
-        </p:spPr>
-        <p:txBody>
-          <a:bodyPr wrap="square" lIns="0" tIns="0" rIns="0" bIns="0" rtlCol="0" anchor="ctr"/>
-          <a:lstStyle/>
-          <a:p>
-            <a:pPr algn="r" indent="0" marL="0">
-              <a:buNone/>
-            </a:pPr>
-            <a:r>
-              <a:rPr lang="en-US" sz="900" dirty="0">
-                <a:solidFill>
-                  <a:srgbClr val="5D5D72"/>
-                </a:solidFill>
-                <a:latin typeface="Calibri" pitchFamily="34" charset="0"/>
-                <a:ea typeface="Calibri" pitchFamily="34" charset="-122"/>
-                <a:cs typeface="Calibri" pitchFamily="34" charset="-120"/>
-              </a:rPr>
-              <a:t>14</a:t>
-            </a:r>
-            <a:endParaRPr lang="en-US" sz="900" dirty="0"/>
-          </a:p>
-        </p:txBody>
-      </p:sp>
-    </p:spTree>
-  </p:cSld>
-  <p:clrMapOvr>
-    <a:masterClrMapping/>
-  </p:clrMapOvr>
-</p:sld>
-</file>
-
-<file path=ppt/slides/slide15.xml><?xml version="1.0" encoding="utf-8"?>
-<p:sld xmlns:a="http://schemas.openxmlformats.org/drawingml/2006/main" xmlns:r="http://schemas.openxmlformats.org/officeDocument/2006/relationships" xmlns:p="http://schemas.openxmlformats.org/presentationml/2006/main">
-  <p:cSld name="Slide 15">
-    <p:bg>
-      <p:bgPr>
-        <a:solidFill>
-          <a:srgbClr val="FFFFFF"/>
-        </a:solidFill>
-      </p:bgPr>
-    </p:bg>
-    <p:spTree>
-      <p:nvGrpSpPr>
-        <p:cNvPr id="1" name=""/>
-        <p:cNvGrpSpPr/>
-        <p:nvPr/>
-      </p:nvGrpSpPr>
-      <p:grpSpPr>
-        <a:xfrm>
-          <a:off x="0" y="0"/>
-          <a:ext cx="0" cy="0"/>
-          <a:chOff x="0" y="0"/>
-          <a:chExt cx="0" cy="0"/>
-        </a:xfrm>
-      </p:grpSpPr>
-      <p:sp>
-        <p:nvSpPr>
-          <p:cNvPr id="2" name="Text 0"/>
-          <p:cNvSpPr txBox="1"/>
-          <p:nvPr/>
-        </p:nvSpPr>
-        <p:spPr>
-          <a:xfrm>
-            <a:off x="640080" y="457200"/>
-            <a:ext cx="10058400" cy="365760"/>
-          </a:xfrm>
-          <a:prstGeom prst="rect">
-            <a:avLst/>
-          </a:prstGeom>
-          <a:noFill/>
-          <a:ln/>
-        </p:spPr>
-        <p:txBody>
-          <a:bodyPr wrap="square" lIns="0" tIns="0" rIns="0" bIns="0" rtlCol="0" anchor="ctr"/>
-          <a:lstStyle/>
-          <a:p>
-            <a:pPr algn="l" indent="0" marL="0">
-              <a:buNone/>
-            </a:pPr>
-            <a:r>
-              <a:rPr lang="en-US" sz="1300" b="1" spc="300" kern="0" dirty="0">
-                <a:solidFill>
-                  <a:srgbClr val="FF8A3D"/>
-                </a:solidFill>
-                <a:latin typeface="Calibri" pitchFamily="34" charset="0"/>
-                <a:ea typeface="Calibri" pitchFamily="34" charset="-122"/>
-                <a:cs typeface="Calibri" pitchFamily="34" charset="-120"/>
-              </a:rPr>
-              <a:t>INPUT TYPES</a:t>
-            </a:r>
-            <a:endParaRPr lang="en-US" sz="1300" dirty="0"/>
-          </a:p>
-        </p:txBody>
-      </p:sp>
-      <p:sp>
-        <p:nvSpPr>
-          <p:cNvPr id="3" name="Text 1"/>
-          <p:cNvSpPr txBox="1"/>
-          <p:nvPr/>
-        </p:nvSpPr>
-        <p:spPr>
-          <a:xfrm>
-            <a:off x="640080" y="841248"/>
-            <a:ext cx="10881360" cy="914400"/>
-          </a:xfrm>
-          <a:prstGeom prst="rect">
-            <a:avLst/>
-          </a:prstGeom>
-          <a:noFill/>
-          <a:ln/>
-        </p:spPr>
-        <p:txBody>
-          <a:bodyPr wrap="square" lIns="0" tIns="0" rIns="0" bIns="0" rtlCol="0" anchor="ctr"/>
-          <a:lstStyle/>
-          <a:p>
-            <a:pPr algn="l" indent="0" marL="0">
-              <a:buNone/>
-            </a:pPr>
-            <a:r>
-              <a:rPr lang="en-US" sz="3400" b="1" dirty="0">
-                <a:solidFill>
-                  <a:srgbClr val="2B2B7A"/>
-                </a:solidFill>
-                <a:latin typeface="Cambria" pitchFamily="34" charset="0"/>
-                <a:ea typeface="Cambria" pitchFamily="34" charset="-122"/>
-                <a:cs typeface="Cambria" pitchFamily="34" charset="-120"/>
-              </a:rPr>
               <a:t>Common &lt;input&gt; Types</a:t>
             </a:r>
             <a:endParaRPr lang="en-US" sz="3400" dirty="0"/>
@@ -5286,7 +5498,7 @@
       </p:sp>
       <p:graphicFrame>
         <p:nvGraphicFramePr>
-          <p:cNvPr id="16" name="Table 0"/>
+          <p:cNvPr id="15" name="Table 0"/>
           <p:cNvGraphicFramePr>
             <a:graphicFrameLocks noGrp="1"/>
           </p:cNvGraphicFramePr>
@@ -6352,6 +6564,478 @@
                 <a:ea typeface="Calibri" pitchFamily="34" charset="-122"/>
                 <a:cs typeface="Calibri" pitchFamily="34" charset="-120"/>
               </a:rPr>
+              <a:t>14</a:t>
+            </a:r>
+            <a:endParaRPr lang="en-US" sz="900" dirty="0"/>
+          </a:p>
+        </p:txBody>
+      </p:sp>
+    </p:spTree>
+  </p:cSld>
+  <p:clrMapOvr>
+    <a:masterClrMapping/>
+  </p:clrMapOvr>
+</p:sld>
+</file>
+
+<file path=ppt/slides/slide15.xml><?xml version="1.0" encoding="utf-8"?>
+<p:sld xmlns:a="http://schemas.openxmlformats.org/drawingml/2006/main" xmlns:r="http://schemas.openxmlformats.org/officeDocument/2006/relationships" xmlns:p="http://schemas.openxmlformats.org/presentationml/2006/main">
+  <p:cSld name="Slide 15">
+    <p:bg>
+      <p:bgPr>
+        <a:solidFill>
+          <a:srgbClr val="FFFFFF"/>
+        </a:solidFill>
+      </p:bgPr>
+    </p:bg>
+    <p:spTree>
+      <p:nvGrpSpPr>
+        <p:cNvPr id="1" name=""/>
+        <p:cNvGrpSpPr/>
+        <p:nvPr/>
+      </p:nvGrpSpPr>
+      <p:grpSpPr>
+        <a:xfrm>
+          <a:off x="0" y="0"/>
+          <a:ext cx="0" cy="0"/>
+          <a:chOff x="0" y="0"/>
+          <a:chExt cx="0" cy="0"/>
+        </a:xfrm>
+      </p:grpSpPr>
+      <p:sp>
+        <p:nvSpPr>
+          <p:cNvPr id="2" name="Text 0"/>
+          <p:cNvSpPr txBox="1"/>
+          <p:nvPr/>
+        </p:nvSpPr>
+        <p:spPr>
+          <a:xfrm>
+            <a:off x="640080" y="457200"/>
+            <a:ext cx="10058400" cy="365760"/>
+          </a:xfrm>
+          <a:prstGeom prst="rect">
+            <a:avLst/>
+          </a:prstGeom>
+          <a:noFill/>
+          <a:ln/>
+        </p:spPr>
+        <p:txBody>
+          <a:bodyPr wrap="square" lIns="0" tIns="0" rIns="0" bIns="0" rtlCol="0" anchor="ctr"/>
+          <a:lstStyle/>
+          <a:p>
+            <a:pPr algn="l" indent="0" marL="0">
+              <a:buNone/>
+            </a:pPr>
+            <a:r>
+              <a:rPr lang="en-US" sz="1300" b="1" spc="300" kern="0" dirty="0">
+                <a:solidFill>
+                  <a:srgbClr val="FF8A3D"/>
+                </a:solidFill>
+                <a:latin typeface="Calibri" pitchFamily="34" charset="0"/>
+                <a:ea typeface="Calibri" pitchFamily="34" charset="-122"/>
+                <a:cs typeface="Calibri" pitchFamily="34" charset="-120"/>
+              </a:rPr>
+              <a:t>INPUT TYPES</a:t>
+            </a:r>
+            <a:endParaRPr lang="en-US" sz="1300" dirty="0"/>
+          </a:p>
+        </p:txBody>
+      </p:sp>
+      <p:sp>
+        <p:nvSpPr>
+          <p:cNvPr id="3" name="Text 1"/>
+          <p:cNvSpPr txBox="1"/>
+          <p:nvPr/>
+        </p:nvSpPr>
+        <p:spPr>
+          <a:xfrm>
+            <a:off x="640080" y="841248"/>
+            <a:ext cx="10881360" cy="914400"/>
+          </a:xfrm>
+          <a:prstGeom prst="rect">
+            <a:avLst/>
+          </a:prstGeom>
+          <a:noFill/>
+          <a:ln/>
+        </p:spPr>
+        <p:txBody>
+          <a:bodyPr wrap="square" lIns="0" tIns="0" rIns="0" bIns="0" rtlCol="0" anchor="ctr"/>
+          <a:lstStyle/>
+          <a:p>
+            <a:pPr algn="l" indent="0" marL="0">
+              <a:buNone/>
+            </a:pPr>
+            <a:r>
+              <a:rPr lang="en-US" sz="3400" b="1" dirty="0">
+                <a:solidFill>
+                  <a:srgbClr val="2B2B7A"/>
+                </a:solidFill>
+                <a:latin typeface="Cambria" pitchFamily="34" charset="0"/>
+                <a:ea typeface="Cambria" pitchFamily="34" charset="-122"/>
+                <a:cs typeface="Cambria" pitchFamily="34" charset="-120"/>
+              </a:rPr>
+              <a:t>Every &lt;input&gt; Type</a:t>
+            </a:r>
+            <a:endParaRPr lang="en-US" sz="3400" dirty="0"/>
+          </a:p>
+        </p:txBody>
+      </p:sp>
+      <p:sp>
+        <p:nvSpPr>
+          <p:cNvPr id="4" name="Shape 2"/>
+          <p:cNvSpPr/>
+          <p:nvPr/>
+        </p:nvSpPr>
+        <p:spPr>
+          <a:xfrm>
+            <a:off x="640080" y="1965960"/>
+            <a:ext cx="10911535" cy="3749040"/>
+          </a:xfrm>
+          <a:prstGeom prst="roundRect">
+            <a:avLst>
+              <a:gd name="adj" fmla="val 1951"/>
+            </a:avLst>
+          </a:prstGeom>
+          <a:solidFill>
+            <a:srgbClr val="1E1E4C"/>
+          </a:solidFill>
+          <a:ln/>
+        </p:spPr>
+      </p:sp>
+      <p:sp>
+        <p:nvSpPr>
+          <p:cNvPr id="5" name="Text 3"/>
+          <p:cNvSpPr txBox="1"/>
+          <p:nvPr/>
+        </p:nvSpPr>
+        <p:spPr>
+          <a:xfrm>
+            <a:off x="960120" y="2194560"/>
+            <a:ext cx="10271455" cy="3291840"/>
+          </a:xfrm>
+          <a:prstGeom prst="rect">
+            <a:avLst/>
+          </a:prstGeom>
+          <a:noFill/>
+          <a:ln/>
+        </p:spPr>
+        <p:txBody>
+          <a:bodyPr wrap="square" lIns="0" tIns="0" rIns="0" bIns="0" rtlCol="0" anchor="t"/>
+          <a:lstStyle/>
+          <a:p>
+            <a:pPr indent="0" marL="0">
+              <a:lnSpc>
+                <a:spcPct val="125000"/>
+              </a:lnSpc>
+              <a:buNone/>
+            </a:pPr>
+            <a:r>
+              <a:rPr lang="en-US" sz="1400" dirty="0">
+                <a:solidFill>
+                  <a:srgbClr val="C9D3F5"/>
+                </a:solidFill>
+                <a:latin typeface="Courier New" pitchFamily="34" charset="0"/>
+                <a:ea typeface="Courier New" pitchFamily="34" charset="-122"/>
+                <a:cs typeface="Courier New" pitchFamily="34" charset="-120"/>
+              </a:rPr>
+              <a:t>&lt;input type="text" name="fullname" placeholder="Full name"&gt;</a:t>
+            </a:r>
+            <a:endParaRPr lang="en-US" sz="1400" dirty="0"/>
+          </a:p>
+          <a:p>
+            <a:pPr indent="0" marL="0">
+              <a:lnSpc>
+                <a:spcPct val="125000"/>
+              </a:lnSpc>
+              <a:buNone/>
+            </a:pPr>
+            <a:r>
+              <a:rPr lang="en-US" sz="1400" dirty="0">
+                <a:solidFill>
+                  <a:srgbClr val="C9D3F5"/>
+                </a:solidFill>
+                <a:latin typeface="Courier New" pitchFamily="34" charset="0"/>
+                <a:ea typeface="Courier New" pitchFamily="34" charset="-122"/>
+                <a:cs typeface="Courier New" pitchFamily="34" charset="-120"/>
+              </a:rPr>
+              <a:t>&lt;input type="email" name="email" placeholder="you@example.com"&gt;</a:t>
+            </a:r>
+            <a:endParaRPr lang="en-US" sz="1400" dirty="0"/>
+          </a:p>
+          <a:p>
+            <a:pPr indent="0" marL="0">
+              <a:lnSpc>
+                <a:spcPct val="125000"/>
+              </a:lnSpc>
+              <a:buNone/>
+            </a:pPr>
+            <a:r>
+              <a:rPr lang="en-US" sz="1400" dirty="0">
+                <a:solidFill>
+                  <a:srgbClr val="C9D3F5"/>
+                </a:solidFill>
+                <a:latin typeface="Courier New" pitchFamily="34" charset="0"/>
+                <a:ea typeface="Courier New" pitchFamily="34" charset="-122"/>
+                <a:cs typeface="Courier New" pitchFamily="34" charset="-120"/>
+              </a:rPr>
+              <a:t>&lt;input type="password" name="password"&gt;</a:t>
+            </a:r>
+            <a:endParaRPr lang="en-US" sz="1400" dirty="0"/>
+          </a:p>
+          <a:p>
+            <a:pPr indent="0" marL="0">
+              <a:lnSpc>
+                <a:spcPct val="125000"/>
+              </a:lnSpc>
+              <a:buNone/>
+            </a:pPr>
+            <a:r>
+              <a:rPr lang="en-US" sz="1400" dirty="0">
+                <a:solidFill>
+                  <a:srgbClr val="C9D3F5"/>
+                </a:solidFill>
+                <a:latin typeface="Courier New" pitchFamily="34" charset="0"/>
+                <a:ea typeface="Courier New" pitchFamily="34" charset="-122"/>
+                <a:cs typeface="Courier New" pitchFamily="34" charset="-120"/>
+              </a:rPr>
+              <a:t>&lt;input type="number" name="age" min="1" max="120"&gt;</a:t>
+            </a:r>
+            <a:endParaRPr lang="en-US" sz="1400" dirty="0"/>
+          </a:p>
+          <a:p>
+            <a:pPr indent="0" marL="0">
+              <a:lnSpc>
+                <a:spcPct val="125000"/>
+              </a:lnSpc>
+              <a:buNone/>
+            </a:pPr>
+            <a:r>
+              <a:rPr lang="en-US" sz="1400" dirty="0">
+                <a:solidFill>
+                  <a:srgbClr val="C9D3F5"/>
+                </a:solidFill>
+                <a:latin typeface="Courier New" pitchFamily="34" charset="0"/>
+                <a:ea typeface="Courier New" pitchFamily="34" charset="-122"/>
+                <a:cs typeface="Courier New" pitchFamily="34" charset="-120"/>
+              </a:rPr>
+              <a:t>&lt;input type="date" name="birthday"&gt;</a:t>
+            </a:r>
+            <a:endParaRPr lang="en-US" sz="1400" dirty="0"/>
+          </a:p>
+          <a:p>
+            <a:pPr indent="0" marL="0">
+              <a:lnSpc>
+                <a:spcPct val="125000"/>
+              </a:lnSpc>
+              <a:buNone/>
+            </a:pPr>
+            <a:r>
+              <a:rPr lang="en-US" sz="1400" dirty="0">
+                <a:solidFill>
+                  <a:srgbClr val="C9D3F5"/>
+                </a:solidFill>
+                <a:latin typeface="Courier New" pitchFamily="34" charset="0"/>
+                <a:ea typeface="Courier New" pitchFamily="34" charset="-122"/>
+                <a:cs typeface="Courier New" pitchFamily="34" charset="-120"/>
+              </a:rPr>
+              <a:t>&lt;input type="checkbox" name="subscribe" checked&gt;</a:t>
+            </a:r>
+            <a:endParaRPr lang="en-US" sz="1400" dirty="0"/>
+          </a:p>
+          <a:p>
+            <a:pPr indent="0" marL="0">
+              <a:lnSpc>
+                <a:spcPct val="125000"/>
+              </a:lnSpc>
+              <a:buNone/>
+            </a:pPr>
+            <a:r>
+              <a:rPr lang="en-US" sz="1400" dirty="0">
+                <a:solidFill>
+                  <a:srgbClr val="C9D3F5"/>
+                </a:solidFill>
+                <a:latin typeface="Courier New" pitchFamily="34" charset="0"/>
+                <a:ea typeface="Courier New" pitchFamily="34" charset="-122"/>
+                <a:cs typeface="Courier New" pitchFamily="34" charset="-120"/>
+              </a:rPr>
+              <a:t>&lt;input type="radio" name="gender" value="male"&gt; Male</a:t>
+            </a:r>
+            <a:endParaRPr lang="en-US" sz="1400" dirty="0"/>
+          </a:p>
+          <a:p>
+            <a:pPr indent="0" marL="0">
+              <a:lnSpc>
+                <a:spcPct val="125000"/>
+              </a:lnSpc>
+              <a:buNone/>
+            </a:pPr>
+            <a:r>
+              <a:rPr lang="en-US" sz="1400" dirty="0">
+                <a:solidFill>
+                  <a:srgbClr val="C9D3F5"/>
+                </a:solidFill>
+                <a:latin typeface="Courier New" pitchFamily="34" charset="0"/>
+                <a:ea typeface="Courier New" pitchFamily="34" charset="-122"/>
+                <a:cs typeface="Courier New" pitchFamily="34" charset="-120"/>
+              </a:rPr>
+              <a:t>&lt;input type="radio" name="gender" value="female"&gt; Female</a:t>
+            </a:r>
+            <a:endParaRPr lang="en-US" sz="1400" dirty="0"/>
+          </a:p>
+          <a:p>
+            <a:pPr indent="0" marL="0">
+              <a:lnSpc>
+                <a:spcPct val="125000"/>
+              </a:lnSpc>
+              <a:buNone/>
+            </a:pPr>
+            <a:r>
+              <a:rPr lang="en-US" sz="1400" dirty="0">
+                <a:solidFill>
+                  <a:srgbClr val="C9D3F5"/>
+                </a:solidFill>
+                <a:latin typeface="Courier New" pitchFamily="34" charset="0"/>
+                <a:ea typeface="Courier New" pitchFamily="34" charset="-122"/>
+                <a:cs typeface="Courier New" pitchFamily="34" charset="-120"/>
+              </a:rPr>
+              <a:t>&lt;input type="file" name="resume"&gt;</a:t>
+            </a:r>
+            <a:endParaRPr lang="en-US" sz="1400" dirty="0"/>
+          </a:p>
+          <a:p>
+            <a:pPr indent="0" marL="0">
+              <a:lnSpc>
+                <a:spcPct val="125000"/>
+              </a:lnSpc>
+              <a:buNone/>
+            </a:pPr>
+            <a:r>
+              <a:rPr lang="en-US" sz="1400" dirty="0">
+                <a:solidFill>
+                  <a:srgbClr val="C9D3F5"/>
+                </a:solidFill>
+                <a:latin typeface="Courier New" pitchFamily="34" charset="0"/>
+                <a:ea typeface="Courier New" pitchFamily="34" charset="-122"/>
+                <a:cs typeface="Courier New" pitchFamily="34" charset="-120"/>
+              </a:rPr>
+              <a:t>&lt;input type="range" name="volume" min="0" max="100"&gt;</a:t>
+            </a:r>
+            <a:endParaRPr lang="en-US" sz="1400" dirty="0"/>
+          </a:p>
+          <a:p>
+            <a:pPr indent="0" marL="0">
+              <a:lnSpc>
+                <a:spcPct val="125000"/>
+              </a:lnSpc>
+              <a:buNone/>
+            </a:pPr>
+            <a:r>
+              <a:rPr lang="en-US" sz="1400" dirty="0">
+                <a:solidFill>
+                  <a:srgbClr val="C9D3F5"/>
+                </a:solidFill>
+                <a:latin typeface="Courier New" pitchFamily="34" charset="0"/>
+                <a:ea typeface="Courier New" pitchFamily="34" charset="-122"/>
+                <a:cs typeface="Courier New" pitchFamily="34" charset="-120"/>
+              </a:rPr>
+              <a:t>&lt;input type="color" name="favcolor"&gt;</a:t>
+            </a:r>
+            <a:endParaRPr lang="en-US" sz="1400" dirty="0"/>
+          </a:p>
+          <a:p>
+            <a:pPr indent="0" marL="0">
+              <a:lnSpc>
+                <a:spcPct val="125000"/>
+              </a:lnSpc>
+              <a:buNone/>
+            </a:pPr>
+            <a:r>
+              <a:rPr lang="en-US" sz="1400" dirty="0">
+                <a:solidFill>
+                  <a:srgbClr val="C9D3F5"/>
+                </a:solidFill>
+                <a:latin typeface="Courier New" pitchFamily="34" charset="0"/>
+                <a:ea typeface="Courier New" pitchFamily="34" charset="-122"/>
+                <a:cs typeface="Courier New" pitchFamily="34" charset="-120"/>
+              </a:rPr>
+              <a:t>&lt;input type="submit" value="Send"&gt;</a:t>
+            </a:r>
+            <a:endParaRPr lang="en-US" sz="1400" dirty="0"/>
+          </a:p>
+        </p:txBody>
+      </p:sp>
+      <p:sp>
+        <p:nvSpPr>
+          <p:cNvPr id="6" name="Text 4"/>
+          <p:cNvSpPr txBox="1"/>
+          <p:nvPr/>
+        </p:nvSpPr>
+        <p:spPr>
+          <a:xfrm>
+            <a:off x="640080" y="6446520"/>
+            <a:ext cx="8686800" cy="292608"/>
+          </a:xfrm>
+          <a:prstGeom prst="rect">
+            <a:avLst/>
+          </a:prstGeom>
+          <a:noFill/>
+          <a:ln/>
+        </p:spPr>
+        <p:txBody>
+          <a:bodyPr wrap="square" lIns="0" tIns="0" rIns="0" bIns="0" rtlCol="0" anchor="ctr"/>
+          <a:lstStyle/>
+          <a:p>
+            <a:pPr algn="l" indent="0" marL="0">
+              <a:buNone/>
+            </a:pPr>
+            <a:r>
+              <a:rPr lang="en-US" sz="900" dirty="0">
+                <a:solidFill>
+                  <a:srgbClr val="5D5D72"/>
+                </a:solidFill>
+                <a:latin typeface="Calibri" pitchFamily="34" charset="0"/>
+                <a:ea typeface="Calibri" pitchFamily="34" charset="-122"/>
+                <a:cs typeface="Calibri" pitchFamily="34" charset="-120"/>
+              </a:rPr>
+              <a:t>Usman Akram  •  COMSATS University Islamabad</a:t>
+            </a:r>
+            <a:endParaRPr lang="en-US" sz="900" dirty="0"/>
+          </a:p>
+        </p:txBody>
+      </p:sp>
+      <p:sp>
+        <p:nvSpPr>
+          <p:cNvPr id="7" name="Text 5"/>
+          <p:cNvSpPr txBox="1"/>
+          <p:nvPr/>
+        </p:nvSpPr>
+        <p:spPr>
+          <a:xfrm>
+            <a:off x="11155680" y="6446520"/>
+            <a:ext cx="457200" cy="292608"/>
+          </a:xfrm>
+          <a:prstGeom prst="rect">
+            <a:avLst/>
+          </a:prstGeom>
+          <a:noFill/>
+          <a:ln/>
+        </p:spPr>
+        <p:txBody>
+          <a:bodyPr wrap="square" lIns="0" tIns="0" rIns="0" bIns="0" rtlCol="0" anchor="ctr"/>
+          <a:lstStyle/>
+          <a:p>
+            <a:pPr algn="r" indent="0" marL="0">
+              <a:buNone/>
+            </a:pPr>
+            <a:r>
+              <a:rPr lang="en-US" sz="900" dirty="0">
+                <a:solidFill>
+                  <a:srgbClr val="5D5D72"/>
+                </a:solidFill>
+                <a:latin typeface="Calibri" pitchFamily="34" charset="0"/>
+                <a:ea typeface="Calibri" pitchFamily="34" charset="-122"/>
+                <a:cs typeface="Calibri" pitchFamily="34" charset="-120"/>
+              </a:rPr>
               <a:t>15</a:t>
             </a:r>
             <a:endParaRPr lang="en-US" sz="900" dirty="0"/>
@@ -7127,11 +7811,11 @@
         <p:spPr>
           <a:xfrm>
             <a:off x="640080" y="1965960"/>
-            <a:ext cx="10911535" cy="3291840"/>
+            <a:ext cx="10911535" cy="2682240"/>
           </a:xfrm>
           <a:prstGeom prst="roundRect">
             <a:avLst>
-              <a:gd name="adj" fmla="val 2222"/>
+              <a:gd name="adj" fmla="val 2727"/>
             </a:avLst>
           </a:prstGeom>
           <a:solidFill>
@@ -7149,7 +7833,7 @@
         <p:spPr>
           <a:xfrm>
             <a:off x="960120" y="2194560"/>
-            <a:ext cx="10271455" cy="2834640"/>
+            <a:ext cx="10271455" cy="2225040"/>
           </a:xfrm>
           <a:prstGeom prst="rect">
             <a:avLst/>
@@ -7308,8 +7992,8 @@
         </p:nvSpPr>
         <p:spPr>
           <a:xfrm>
-            <a:off x="640080" y="5486400"/>
-            <a:ext cx="10911535" cy="777240"/>
+            <a:off x="640080" y="4876800"/>
+            <a:ext cx="10911535" cy="1386840"/>
           </a:xfrm>
           <a:prstGeom prst="rect">
             <a:avLst/>
@@ -8779,7 +9463,7 @@
                 <a:ea typeface="Cambria" pitchFamily="34" charset="-122"/>
                 <a:cs typeface="Cambria" pitchFamily="34" charset="-120"/>
               </a:rPr>
-              <a:t>Dropdown and Textarea, Rendered</a:t>
+              <a:t>&lt;select&gt; and &lt;textarea&gt; Markup</a:t>
             </a:r>
             <a:endParaRPr lang="en-US" sz="3400" dirty="0"/>
           </a:p>
@@ -8787,14 +9471,167 @@
       </p:sp>
       <p:sp>
         <p:nvSpPr>
-          <p:cNvPr id="4" name="Text 2"/>
-          <p:cNvSpPr txBox="1"/>
+          <p:cNvPr id="4" name="Shape 2"/>
+          <p:cNvSpPr/>
           <p:nvPr/>
         </p:nvSpPr>
         <p:spPr>
           <a:xfrm>
             <a:off x="640080" y="1965960"/>
-            <a:ext cx="5272888" cy="365760"/>
+            <a:ext cx="10911535" cy="2148840"/>
+          </a:xfrm>
+          <a:prstGeom prst="roundRect">
+            <a:avLst>
+              <a:gd name="adj" fmla="val 3404"/>
+            </a:avLst>
+          </a:prstGeom>
+          <a:solidFill>
+            <a:srgbClr val="1E1E4C"/>
+          </a:solidFill>
+          <a:ln/>
+        </p:spPr>
+      </p:sp>
+      <p:sp>
+        <p:nvSpPr>
+          <p:cNvPr id="5" name="Text 3"/>
+          <p:cNvSpPr txBox="1"/>
+          <p:nvPr/>
+        </p:nvSpPr>
+        <p:spPr>
+          <a:xfrm>
+            <a:off x="960120" y="2194560"/>
+            <a:ext cx="10271455" cy="1691640"/>
+          </a:xfrm>
+          <a:prstGeom prst="rect">
+            <a:avLst/>
+          </a:prstGeom>
+          <a:noFill/>
+          <a:ln/>
+        </p:spPr>
+        <p:txBody>
+          <a:bodyPr wrap="square" lIns="0" tIns="0" rIns="0" bIns="0" rtlCol="0" anchor="t"/>
+          <a:lstStyle/>
+          <a:p>
+            <a:pPr indent="0" marL="0">
+              <a:lnSpc>
+                <a:spcPct val="125000"/>
+              </a:lnSpc>
+              <a:buNone/>
+            </a:pPr>
+            <a:r>
+              <a:rPr lang="en-US" sz="1400" dirty="0">
+                <a:solidFill>
+                  <a:srgbClr val="C9D3F5"/>
+                </a:solidFill>
+                <a:latin typeface="Courier New" pitchFamily="34" charset="0"/>
+                <a:ea typeface="Courier New" pitchFamily="34" charset="-122"/>
+                <a:cs typeface="Courier New" pitchFamily="34" charset="-120"/>
+              </a:rPr>
+              <a:t>&lt;select id="course" name="course"&gt;</a:t>
+            </a:r>
+            <a:endParaRPr lang="en-US" sz="1400" dirty="0"/>
+          </a:p>
+          <a:p>
+            <a:pPr indent="0" marL="0">
+              <a:lnSpc>
+                <a:spcPct val="125000"/>
+              </a:lnSpc>
+              <a:buNone/>
+            </a:pPr>
+            <a:r>
+              <a:rPr lang="en-US" sz="1400" dirty="0">
+                <a:solidFill>
+                  <a:srgbClr val="C9D3F5"/>
+                </a:solidFill>
+                <a:latin typeface="Courier New" pitchFamily="34" charset="0"/>
+                <a:ea typeface="Courier New" pitchFamily="34" charset="-122"/>
+                <a:cs typeface="Courier New" pitchFamily="34" charset="-120"/>
+              </a:rPr>
+              <a:t>    &lt;option value="csc336"&gt;Web Technologies&lt;/option&gt;</a:t>
+            </a:r>
+            <a:endParaRPr lang="en-US" sz="1400" dirty="0"/>
+          </a:p>
+          <a:p>
+            <a:pPr indent="0" marL="0">
+              <a:lnSpc>
+                <a:spcPct val="125000"/>
+              </a:lnSpc>
+              <a:buNone/>
+            </a:pPr>
+            <a:r>
+              <a:rPr lang="en-US" sz="1400" dirty="0">
+                <a:solidFill>
+                  <a:srgbClr val="C9D3F5"/>
+                </a:solidFill>
+                <a:latin typeface="Courier New" pitchFamily="34" charset="0"/>
+                <a:ea typeface="Courier New" pitchFamily="34" charset="-122"/>
+                <a:cs typeface="Courier New" pitchFamily="34" charset="-120"/>
+              </a:rPr>
+              <a:t>    &lt;option value="csc337" selected&gt;Advanced Web Technologies&lt;/option&gt;</a:t>
+            </a:r>
+            <a:endParaRPr lang="en-US" sz="1400" dirty="0"/>
+          </a:p>
+          <a:p>
+            <a:pPr indent="0" marL="0">
+              <a:lnSpc>
+                <a:spcPct val="125000"/>
+              </a:lnSpc>
+              <a:buNone/>
+            </a:pPr>
+            <a:r>
+              <a:rPr lang="en-US" sz="1400" dirty="0">
+                <a:solidFill>
+                  <a:srgbClr val="C9D3F5"/>
+                </a:solidFill>
+                <a:latin typeface="Courier New" pitchFamily="34" charset="0"/>
+                <a:ea typeface="Courier New" pitchFamily="34" charset="-122"/>
+                <a:cs typeface="Courier New" pitchFamily="34" charset="-120"/>
+              </a:rPr>
+              <a:t>&lt;/select&gt;</a:t>
+            </a:r>
+            <a:endParaRPr lang="en-US" sz="1400" dirty="0"/>
+          </a:p>
+          <a:p>
+            <a:pPr indent="0" marL="0">
+              <a:lnSpc>
+                <a:spcPct val="125000"/>
+              </a:lnSpc>
+              <a:buNone/>
+            </a:pPr>
+            <a:endParaRPr lang="en-US" sz="1400" dirty="0"/>
+          </a:p>
+          <a:p>
+            <a:pPr indent="0" marL="0">
+              <a:lnSpc>
+                <a:spcPct val="125000"/>
+              </a:lnSpc>
+              <a:buNone/>
+            </a:pPr>
+            <a:r>
+              <a:rPr lang="en-US" sz="1400" dirty="0">
+                <a:solidFill>
+                  <a:srgbClr val="C9D3F5"/>
+                </a:solidFill>
+                <a:latin typeface="Courier New" pitchFamily="34" charset="0"/>
+                <a:ea typeface="Courier New" pitchFamily="34" charset="-122"/>
+                <a:cs typeface="Courier New" pitchFamily="34" charset="-120"/>
+              </a:rPr>
+              <a:t>&lt;textarea id="message" name="message" rows="5" cols="40"&gt;Type here...&lt;/textarea&gt;</a:t>
+            </a:r>
+            <a:endParaRPr lang="en-US" sz="1400" dirty="0"/>
+          </a:p>
+        </p:txBody>
+      </p:sp>
+      <p:sp>
+        <p:nvSpPr>
+          <p:cNvPr id="6" name="Text 4"/>
+          <p:cNvSpPr txBox="1"/>
+          <p:nvPr/>
+        </p:nvSpPr>
+        <p:spPr>
+          <a:xfrm>
+            <a:off x="640080" y="6446520"/>
+            <a:ext cx="8686800" cy="292608"/>
           </a:xfrm>
           <a:prstGeom prst="rect">
             <a:avLst/>
@@ -8806,212 +9643,18 @@
           <a:bodyPr wrap="square" lIns="0" tIns="0" rIns="0" bIns="0" rtlCol="0" anchor="ctr"/>
           <a:lstStyle/>
           <a:p>
-            <a:pPr algn="ctr" indent="0" marL="0">
-              <a:buNone/>
-            </a:pPr>
-            <a:r>
-              <a:rPr lang="en-US" sz="1100" b="1" spc="150" kern="0" dirty="0">
-                <a:solidFill>
-                  <a:srgbClr val="E67528"/>
+            <a:pPr algn="l" indent="0" marL="0">
+              <a:buNone/>
+            </a:pPr>
+            <a:r>
+              <a:rPr lang="en-US" sz="900" dirty="0">
+                <a:solidFill>
+                  <a:srgbClr val="5D5D72"/>
                 </a:solidFill>
                 <a:latin typeface="Calibri" pitchFamily="34" charset="0"/>
                 <a:ea typeface="Calibri" pitchFamily="34" charset="-122"/>
                 <a:cs typeface="Calibri" pitchFamily="34" charset="-120"/>
               </a:rPr>
-              <a:t>SELECT</a:t>
-            </a:r>
-            <a:endParaRPr lang="en-US" sz="1100" dirty="0"/>
-          </a:p>
-        </p:txBody>
-      </p:sp>
-      <p:sp>
-        <p:nvSpPr>
-          <p:cNvPr id="5" name="Shape 3"/>
-          <p:cNvSpPr/>
-          <p:nvPr/>
-        </p:nvSpPr>
-        <p:spPr>
-          <a:xfrm>
-            <a:off x="530352" y="2313432"/>
-            <a:ext cx="5492344" cy="3831336"/>
-          </a:xfrm>
-          <a:prstGeom prst="roundRect">
-            <a:avLst>
-              <a:gd name="adj" fmla="val 1432"/>
-            </a:avLst>
-          </a:prstGeom>
-          <a:solidFill>
-            <a:srgbClr val="FFFFFF"/>
-          </a:solidFill>
-          <a:ln w="12700">
-            <a:solidFill>
-              <a:srgbClr val="E2E2EE"/>
-            </a:solidFill>
-            <a:prstDash val="solid"/>
-          </a:ln>
-          <a:effectLst>
-            <a:outerShdw sx="100000" sy="100000" kx="0" ky="0" algn="bl" rotWithShape="0" blurRad="101600" dist="38100" dir="5400000">
-              <a:srgbClr val="000000">
-                <a:alpha val="12000"/>
-              </a:srgbClr>
-            </a:outerShdw>
-          </a:effectLst>
-        </p:spPr>
-      </p:sp>
-      <p:pic>
-        <p:nvPicPr>
-          <p:cNvPr id="6" name="Image 0" descr="D:/GitHub/mern-web-book/docs/assets/img/lecture-04/select-dropdown.png">    </p:cNvPr>
-          <p:cNvPicPr>
-            <a:picLocks noChangeAspect="1"/>
-          </p:cNvPicPr>
-          <p:nvPr/>
-        </p:nvPicPr>
-        <p:blipFill>
-          <a:blip r:embed="rId1"/>
-          <a:stretch>
-            <a:fillRect/>
-          </a:stretch>
-        </p:blipFill>
-        <p:spPr>
-          <a:xfrm>
-            <a:off x="640080" y="3907947"/>
-            <a:ext cx="5272888" cy="642306"/>
-          </a:xfrm>
-          <a:prstGeom prst="rect">
-            <a:avLst/>
-          </a:prstGeom>
-        </p:spPr>
-      </p:pic>
-      <p:sp>
-        <p:nvSpPr>
-          <p:cNvPr id="7" name="Text 4"/>
-          <p:cNvSpPr txBox="1"/>
-          <p:nvPr/>
-        </p:nvSpPr>
-        <p:spPr>
-          <a:xfrm>
-            <a:off x="6278728" y="1965960"/>
-            <a:ext cx="5272888" cy="365760"/>
-          </a:xfrm>
-          <a:prstGeom prst="rect">
-            <a:avLst/>
-          </a:prstGeom>
-          <a:noFill/>
-          <a:ln/>
-        </p:spPr>
-        <p:txBody>
-          <a:bodyPr wrap="square" lIns="0" tIns="0" rIns="0" bIns="0" rtlCol="0" anchor="ctr"/>
-          <a:lstStyle/>
-          <a:p>
-            <a:pPr algn="ctr" indent="0" marL="0">
-              <a:buNone/>
-            </a:pPr>
-            <a:r>
-              <a:rPr lang="en-US" sz="1100" b="1" spc="150" kern="0" dirty="0">
-                <a:solidFill>
-                  <a:srgbClr val="E67528"/>
-                </a:solidFill>
-                <a:latin typeface="Calibri" pitchFamily="34" charset="0"/>
-                <a:ea typeface="Calibri" pitchFamily="34" charset="-122"/>
-                <a:cs typeface="Calibri" pitchFamily="34" charset="-120"/>
-              </a:rPr>
-              <a:t>TEXTAREA</a:t>
-            </a:r>
-            <a:endParaRPr lang="en-US" sz="1100" dirty="0"/>
-          </a:p>
-        </p:txBody>
-      </p:sp>
-      <p:sp>
-        <p:nvSpPr>
-          <p:cNvPr id="8" name="Shape 5"/>
-          <p:cNvSpPr/>
-          <p:nvPr/>
-        </p:nvSpPr>
-        <p:spPr>
-          <a:xfrm>
-            <a:off x="6169000" y="2313432"/>
-            <a:ext cx="5492344" cy="3831336"/>
-          </a:xfrm>
-          <a:prstGeom prst="roundRect">
-            <a:avLst>
-              <a:gd name="adj" fmla="val 1432"/>
-            </a:avLst>
-          </a:prstGeom>
-          <a:solidFill>
-            <a:srgbClr val="FFFFFF"/>
-          </a:solidFill>
-          <a:ln w="12700">
-            <a:solidFill>
-              <a:srgbClr val="E2E2EE"/>
-            </a:solidFill>
-            <a:prstDash val="solid"/>
-          </a:ln>
-          <a:effectLst>
-            <a:outerShdw sx="100000" sy="100000" kx="0" ky="0" algn="bl" rotWithShape="0" blurRad="101600" dist="38100" dir="5400000">
-              <a:srgbClr val="000000">
-                <a:alpha val="12000"/>
-              </a:srgbClr>
-            </a:outerShdw>
-          </a:effectLst>
-        </p:spPr>
-      </p:sp>
-      <p:pic>
-        <p:nvPicPr>
-          <p:cNvPr id="9" name="Image 1" descr="D:/GitHub/mern-web-book/docs/assets/img/lecture-04/textarea.png">    </p:cNvPr>
-          <p:cNvPicPr>
-            <a:picLocks noChangeAspect="1"/>
-          </p:cNvPicPr>
-          <p:nvPr/>
-        </p:nvPicPr>
-        <p:blipFill>
-          <a:blip r:embed="rId2"/>
-          <a:stretch>
-            <a:fillRect/>
-          </a:stretch>
-        </p:blipFill>
-        <p:spPr>
-          <a:xfrm>
-            <a:off x="6278728" y="3516377"/>
-            <a:ext cx="5272888" cy="1425446"/>
-          </a:xfrm>
-          <a:prstGeom prst="rect">
-            <a:avLst/>
-          </a:prstGeom>
-        </p:spPr>
-      </p:pic>
-      <p:sp>
-        <p:nvSpPr>
-          <p:cNvPr id="10" name="Text 6"/>
-          <p:cNvSpPr txBox="1"/>
-          <p:nvPr/>
-        </p:nvSpPr>
-        <p:spPr>
-          <a:xfrm>
-            <a:off x="640080" y="6446520"/>
-            <a:ext cx="8686800" cy="292608"/>
-          </a:xfrm>
-          <a:prstGeom prst="rect">
-            <a:avLst/>
-          </a:prstGeom>
-          <a:noFill/>
-          <a:ln/>
-        </p:spPr>
-        <p:txBody>
-          <a:bodyPr wrap="square" lIns="0" tIns="0" rIns="0" bIns="0" rtlCol="0" anchor="ctr"/>
-          <a:lstStyle/>
-          <a:p>
-            <a:pPr algn="l" indent="0" marL="0">
-              <a:buNone/>
-            </a:pPr>
-            <a:r>
-              <a:rPr lang="en-US" sz="900" dirty="0">
-                <a:solidFill>
-                  <a:srgbClr val="5D5D72"/>
-                </a:solidFill>
-                <a:latin typeface="Calibri" pitchFamily="34" charset="0"/>
-                <a:ea typeface="Calibri" pitchFamily="34" charset="-122"/>
-                <a:cs typeface="Calibri" pitchFamily="34" charset="-120"/>
-              </a:rPr>
               <a:t>Usman Akram  •  COMSATS University Islamabad</a:t>
             </a:r>
             <a:endParaRPr lang="en-US" sz="900" dirty="0"/>
@@ -9020,7 +9663,7 @@
       </p:sp>
       <p:sp>
         <p:nvSpPr>
-          <p:cNvPr id="11" name="Text 7"/>
+          <p:cNvPr id="7" name="Text 5"/>
           <p:cNvSpPr txBox="1"/>
           <p:nvPr/>
         </p:nvSpPr>
@@ -9161,7 +9804,7 @@
                 <a:ea typeface="Cambria" pitchFamily="34" charset="-122"/>
                 <a:cs typeface="Cambria" pitchFamily="34" charset="-120"/>
               </a:rPr>
-              <a:t>Three Button Types, Rendered</a:t>
+              <a:t>Dropdown and Textarea, Rendered</a:t>
             </a:r>
             <a:endParaRPr lang="en-US" sz="3400" dirty="0"/>
           </a:p>
@@ -9175,8 +9818,8 @@
         </p:nvSpPr>
         <p:spPr>
           <a:xfrm>
-            <a:off x="640080" y="1691640"/>
-            <a:ext cx="10911535" cy="411480"/>
+            <a:off x="640080" y="1965960"/>
+            <a:ext cx="5272888" cy="365760"/>
           </a:xfrm>
           <a:prstGeom prst="rect">
             <a:avLst/>
@@ -9188,21 +9831,21 @@
           <a:bodyPr wrap="square" lIns="0" tIns="0" rIns="0" bIns="0" rtlCol="0" anchor="ctr"/>
           <a:lstStyle/>
           <a:p>
-            <a:pPr indent="0" marL="0">
-              <a:buNone/>
-            </a:pPr>
-            <a:r>
-              <a:rPr lang="en-US" sz="1350" i="1" dirty="0">
-                <a:solidFill>
-                  <a:srgbClr val="5D5D72"/>
+            <a:pPr algn="ctr" indent="0" marL="0">
+              <a:buNone/>
+            </a:pPr>
+            <a:r>
+              <a:rPr lang="en-US" sz="1100" b="1" spc="150" kern="0" dirty="0">
+                <a:solidFill>
+                  <a:srgbClr val="E67528"/>
                 </a:solidFill>
                 <a:latin typeface="Calibri" pitchFamily="34" charset="0"/>
                 <a:ea typeface="Calibri" pitchFamily="34" charset="-122"/>
                 <a:cs typeface="Calibri" pitchFamily="34" charset="-120"/>
               </a:rPr>
-              <a:t>submit submits the form, reset clears it, button does nothing on its own (wired up with JavaScript later).</a:t>
-            </a:r>
-            <a:endParaRPr lang="en-US" sz="1350" dirty="0"/>
+              <a:t>SELECT</a:t>
+            </a:r>
+            <a:endParaRPr lang="en-US" sz="1100" dirty="0"/>
           </a:p>
         </p:txBody>
       </p:sp>
@@ -9214,12 +9857,12 @@
         </p:nvSpPr>
         <p:spPr>
           <a:xfrm>
-            <a:off x="530352" y="2221992"/>
-            <a:ext cx="11130991" cy="4059936"/>
+            <a:off x="530352" y="2313432"/>
+            <a:ext cx="5492344" cy="3831336"/>
           </a:xfrm>
           <a:prstGeom prst="roundRect">
             <a:avLst>
-              <a:gd name="adj" fmla="val 1351"/>
+              <a:gd name="adj" fmla="val 1432"/>
             </a:avLst>
           </a:prstGeom>
           <a:solidFill>
@@ -9242,7 +9885,7 @@
       </p:sp>
       <p:pic>
         <p:nvPicPr>
-          <p:cNvPr id="6" name="Image 0" descr="D:/GitHub/mern-web-book/docs/assets/img/lecture-04/buttons.png">    </p:cNvPr>
+          <p:cNvPr id="6" name="Image 0" descr="D:/GitHub/mern-web-book/docs/assets/img/lecture-04/select-dropdown.png">    </p:cNvPr>
           <p:cNvPicPr>
             <a:picLocks noChangeAspect="1"/>
           </p:cNvPicPr>
@@ -9256,8 +9899,8 @@
         </p:blipFill>
         <p:spPr>
           <a:xfrm>
-            <a:off x="640080" y="3638270"/>
-            <a:ext cx="10911535" cy="1227379"/>
+            <a:off x="640080" y="3907947"/>
+            <a:ext cx="5272888" cy="642306"/>
           </a:xfrm>
           <a:prstGeom prst="rect">
             <a:avLst/>
@@ -9272,8 +9915,8 @@
         </p:nvSpPr>
         <p:spPr>
           <a:xfrm>
-            <a:off x="640080" y="6446520"/>
-            <a:ext cx="8686800" cy="292608"/>
+            <a:off x="6278728" y="1965960"/>
+            <a:ext cx="5272888" cy="365760"/>
           </a:xfrm>
           <a:prstGeom prst="rect">
             <a:avLst/>
@@ -9285,18 +9928,115 @@
           <a:bodyPr wrap="square" lIns="0" tIns="0" rIns="0" bIns="0" rtlCol="0" anchor="ctr"/>
           <a:lstStyle/>
           <a:p>
-            <a:pPr algn="l" indent="0" marL="0">
-              <a:buNone/>
-            </a:pPr>
-            <a:r>
-              <a:rPr lang="en-US" sz="900" dirty="0">
-                <a:solidFill>
-                  <a:srgbClr val="5D5D72"/>
+            <a:pPr algn="ctr" indent="0" marL="0">
+              <a:buNone/>
+            </a:pPr>
+            <a:r>
+              <a:rPr lang="en-US" sz="1100" b="1" spc="150" kern="0" dirty="0">
+                <a:solidFill>
+                  <a:srgbClr val="E67528"/>
                 </a:solidFill>
                 <a:latin typeface="Calibri" pitchFamily="34" charset="0"/>
                 <a:ea typeface="Calibri" pitchFamily="34" charset="-122"/>
                 <a:cs typeface="Calibri" pitchFamily="34" charset="-120"/>
               </a:rPr>
+              <a:t>TEXTAREA</a:t>
+            </a:r>
+            <a:endParaRPr lang="en-US" sz="1100" dirty="0"/>
+          </a:p>
+        </p:txBody>
+      </p:sp>
+      <p:sp>
+        <p:nvSpPr>
+          <p:cNvPr id="8" name="Shape 5"/>
+          <p:cNvSpPr/>
+          <p:nvPr/>
+        </p:nvSpPr>
+        <p:spPr>
+          <a:xfrm>
+            <a:off x="6169000" y="2313432"/>
+            <a:ext cx="5492344" cy="3831336"/>
+          </a:xfrm>
+          <a:prstGeom prst="roundRect">
+            <a:avLst>
+              <a:gd name="adj" fmla="val 1432"/>
+            </a:avLst>
+          </a:prstGeom>
+          <a:solidFill>
+            <a:srgbClr val="FFFFFF"/>
+          </a:solidFill>
+          <a:ln w="12700">
+            <a:solidFill>
+              <a:srgbClr val="E2E2EE"/>
+            </a:solidFill>
+            <a:prstDash val="solid"/>
+          </a:ln>
+          <a:effectLst>
+            <a:outerShdw sx="100000" sy="100000" kx="0" ky="0" algn="bl" rotWithShape="0" blurRad="101600" dist="38100" dir="5400000">
+              <a:srgbClr val="000000">
+                <a:alpha val="12000"/>
+              </a:srgbClr>
+            </a:outerShdw>
+          </a:effectLst>
+        </p:spPr>
+      </p:sp>
+      <p:pic>
+        <p:nvPicPr>
+          <p:cNvPr id="9" name="Image 1" descr="D:/GitHub/mern-web-book/docs/assets/img/lecture-04/textarea.png">    </p:cNvPr>
+          <p:cNvPicPr>
+            <a:picLocks noChangeAspect="1"/>
+          </p:cNvPicPr>
+          <p:nvPr/>
+        </p:nvPicPr>
+        <p:blipFill>
+          <a:blip r:embed="rId2"/>
+          <a:stretch>
+            <a:fillRect/>
+          </a:stretch>
+        </p:blipFill>
+        <p:spPr>
+          <a:xfrm>
+            <a:off x="6278728" y="3516377"/>
+            <a:ext cx="5272888" cy="1425446"/>
+          </a:xfrm>
+          <a:prstGeom prst="rect">
+            <a:avLst/>
+          </a:prstGeom>
+        </p:spPr>
+      </p:pic>
+      <p:sp>
+        <p:nvSpPr>
+          <p:cNvPr id="10" name="Text 6"/>
+          <p:cNvSpPr txBox="1"/>
+          <p:nvPr/>
+        </p:nvSpPr>
+        <p:spPr>
+          <a:xfrm>
+            <a:off x="640080" y="6446520"/>
+            <a:ext cx="8686800" cy="292608"/>
+          </a:xfrm>
+          <a:prstGeom prst="rect">
+            <a:avLst/>
+          </a:prstGeom>
+          <a:noFill/>
+          <a:ln/>
+        </p:spPr>
+        <p:txBody>
+          <a:bodyPr wrap="square" lIns="0" tIns="0" rIns="0" bIns="0" rtlCol="0" anchor="ctr"/>
+          <a:lstStyle/>
+          <a:p>
+            <a:pPr algn="l" indent="0" marL="0">
+              <a:buNone/>
+            </a:pPr>
+            <a:r>
+              <a:rPr lang="en-US" sz="900" dirty="0">
+                <a:solidFill>
+                  <a:srgbClr val="5D5D72"/>
+                </a:solidFill>
+                <a:latin typeface="Calibri" pitchFamily="34" charset="0"/>
+                <a:ea typeface="Calibri" pitchFamily="34" charset="-122"/>
+                <a:cs typeface="Calibri" pitchFamily="34" charset="-120"/>
+              </a:rPr>
               <a:t>Usman Akram  •  COMSATS University Islamabad</a:t>
             </a:r>
             <a:endParaRPr lang="en-US" sz="900" dirty="0"/>
@@ -9305,7 +10045,7 @@
       </p:sp>
       <p:sp>
         <p:nvSpPr>
-          <p:cNvPr id="8" name="Text 5"/>
+          <p:cNvPr id="11" name="Text 7"/>
           <p:cNvSpPr txBox="1"/>
           <p:nvPr/>
         </p:nvSpPr>
@@ -9407,7 +10147,7 @@
                 <a:ea typeface="Calibri" pitchFamily="34" charset="-122"/>
                 <a:cs typeface="Calibri" pitchFamily="34" charset="-120"/>
               </a:rPr>
-              <a:t>VALIDATION</a:t>
+              <a:t>MORE CONTROLS</a:t>
             </a:r>
             <a:endParaRPr lang="en-US" sz="1300" dirty="0"/>
           </a:p>
@@ -9446,6 +10186,395 @@
                 <a:ea typeface="Cambria" pitchFamily="34" charset="-122"/>
                 <a:cs typeface="Cambria" pitchFamily="34" charset="-120"/>
               </a:rPr>
+              <a:t>Three Button Types</a:t>
+            </a:r>
+            <a:endParaRPr lang="en-US" sz="3400" dirty="0"/>
+          </a:p>
+        </p:txBody>
+      </p:sp>
+      <p:sp>
+        <p:nvSpPr>
+          <p:cNvPr id="4" name="Text 2"/>
+          <p:cNvSpPr txBox="1"/>
+          <p:nvPr/>
+        </p:nvSpPr>
+        <p:spPr>
+          <a:xfrm>
+            <a:off x="640080" y="1691640"/>
+            <a:ext cx="10911535" cy="411480"/>
+          </a:xfrm>
+          <a:prstGeom prst="rect">
+            <a:avLst/>
+          </a:prstGeom>
+          <a:noFill/>
+          <a:ln/>
+        </p:spPr>
+        <p:txBody>
+          <a:bodyPr wrap="square" lIns="0" tIns="0" rIns="0" bIns="0" rtlCol="0" anchor="ctr"/>
+          <a:lstStyle/>
+          <a:p>
+            <a:pPr indent="0" marL="0">
+              <a:buNone/>
+            </a:pPr>
+            <a:r>
+              <a:rPr lang="en-US" sz="1350" i="1" dirty="0">
+                <a:solidFill>
+                  <a:srgbClr val="5D5D72"/>
+                </a:solidFill>
+                <a:latin typeface="Calibri" pitchFamily="34" charset="0"/>
+                <a:ea typeface="Calibri" pitchFamily="34" charset="-122"/>
+                <a:cs typeface="Calibri" pitchFamily="34" charset="-120"/>
+              </a:rPr>
+              <a:t>submit submits the form, reset clears it, button does nothing on its own (wired up with JavaScript later).</a:t>
+            </a:r>
+            <a:endParaRPr lang="en-US" sz="1350" dirty="0"/>
+          </a:p>
+        </p:txBody>
+      </p:sp>
+      <p:sp>
+        <p:nvSpPr>
+          <p:cNvPr id="5" name="Shape 3"/>
+          <p:cNvSpPr/>
+          <p:nvPr/>
+        </p:nvSpPr>
+        <p:spPr>
+          <a:xfrm>
+            <a:off x="640080" y="2240280"/>
+            <a:ext cx="10911535" cy="1263015"/>
+          </a:xfrm>
+          <a:prstGeom prst="roundRect">
+            <a:avLst>
+              <a:gd name="adj" fmla="val 5792"/>
+            </a:avLst>
+          </a:prstGeom>
+          <a:solidFill>
+            <a:srgbClr val="1E1E4C"/>
+          </a:solidFill>
+          <a:ln/>
+        </p:spPr>
+      </p:sp>
+      <p:sp>
+        <p:nvSpPr>
+          <p:cNvPr id="6" name="Text 4"/>
+          <p:cNvSpPr txBox="1"/>
+          <p:nvPr/>
+        </p:nvSpPr>
+        <p:spPr>
+          <a:xfrm>
+            <a:off x="960120" y="2468880"/>
+            <a:ext cx="10271455" cy="805815"/>
+          </a:xfrm>
+          <a:prstGeom prst="rect">
+            <a:avLst/>
+          </a:prstGeom>
+          <a:noFill/>
+          <a:ln/>
+        </p:spPr>
+        <p:txBody>
+          <a:bodyPr wrap="square" lIns="0" tIns="0" rIns="0" bIns="0" rtlCol="0" anchor="t"/>
+          <a:lstStyle/>
+          <a:p>
+            <a:pPr indent="0" marL="0">
+              <a:lnSpc>
+                <a:spcPct val="125000"/>
+              </a:lnSpc>
+              <a:buNone/>
+            </a:pPr>
+            <a:r>
+              <a:rPr lang="en-US" sz="1250" dirty="0">
+                <a:solidFill>
+                  <a:srgbClr val="C9D3F5"/>
+                </a:solidFill>
+                <a:latin typeface="Courier New" pitchFamily="34" charset="0"/>
+                <a:ea typeface="Courier New" pitchFamily="34" charset="-122"/>
+                <a:cs typeface="Courier New" pitchFamily="34" charset="-120"/>
+              </a:rPr>
+              <a:t>&lt;button type="submit"&gt;Submit&lt;/button&gt;</a:t>
+            </a:r>
+            <a:endParaRPr lang="en-US" sz="1250" dirty="0"/>
+          </a:p>
+          <a:p>
+            <a:pPr indent="0" marL="0">
+              <a:lnSpc>
+                <a:spcPct val="125000"/>
+              </a:lnSpc>
+              <a:buNone/>
+            </a:pPr>
+            <a:r>
+              <a:rPr lang="en-US" sz="1250" dirty="0">
+                <a:solidFill>
+                  <a:srgbClr val="C9D3F5"/>
+                </a:solidFill>
+                <a:latin typeface="Courier New" pitchFamily="34" charset="0"/>
+                <a:ea typeface="Courier New" pitchFamily="34" charset="-122"/>
+                <a:cs typeface="Courier New" pitchFamily="34" charset="-120"/>
+              </a:rPr>
+              <a:t>&lt;button type="reset"&gt;Clear Form&lt;/button&gt;</a:t>
+            </a:r>
+            <a:endParaRPr lang="en-US" sz="1250" dirty="0"/>
+          </a:p>
+          <a:p>
+            <a:pPr indent="0" marL="0">
+              <a:lnSpc>
+                <a:spcPct val="125000"/>
+              </a:lnSpc>
+              <a:buNone/>
+            </a:pPr>
+            <a:r>
+              <a:rPr lang="en-US" sz="1250" dirty="0">
+                <a:solidFill>
+                  <a:srgbClr val="C9D3F5"/>
+                </a:solidFill>
+                <a:latin typeface="Courier New" pitchFamily="34" charset="0"/>
+                <a:ea typeface="Courier New" pitchFamily="34" charset="-122"/>
+                <a:cs typeface="Courier New" pitchFamily="34" charset="-120"/>
+              </a:rPr>
+              <a:t>&lt;button type="button"&gt;Just a Button (does nothing by itself)&lt;/button&gt;</a:t>
+            </a:r>
+            <a:endParaRPr lang="en-US" sz="1250" dirty="0"/>
+          </a:p>
+        </p:txBody>
+      </p:sp>
+      <p:sp>
+        <p:nvSpPr>
+          <p:cNvPr id="7" name="Shape 5"/>
+          <p:cNvSpPr/>
+          <p:nvPr/>
+        </p:nvSpPr>
+        <p:spPr>
+          <a:xfrm>
+            <a:off x="530352" y="3667887"/>
+            <a:ext cx="11130991" cy="2659761"/>
+          </a:xfrm>
+          <a:prstGeom prst="roundRect">
+            <a:avLst>
+              <a:gd name="adj" fmla="val 2063"/>
+            </a:avLst>
+          </a:prstGeom>
+          <a:solidFill>
+            <a:srgbClr val="FFFFFF"/>
+          </a:solidFill>
+          <a:ln w="12700">
+            <a:solidFill>
+              <a:srgbClr val="E2E2EE"/>
+            </a:solidFill>
+            <a:prstDash val="solid"/>
+          </a:ln>
+          <a:effectLst>
+            <a:outerShdw sx="100000" sy="100000" kx="0" ky="0" algn="bl" rotWithShape="0" blurRad="101600" dist="38100" dir="5400000">
+              <a:srgbClr val="000000">
+                <a:alpha val="12000"/>
+              </a:srgbClr>
+            </a:outerShdw>
+          </a:effectLst>
+        </p:spPr>
+      </p:sp>
+      <p:pic>
+        <p:nvPicPr>
+          <p:cNvPr id="8" name="Image 0" descr="D:/GitHub/mern-web-book/docs/assets/img/lecture-04/buttons.png">    </p:cNvPr>
+          <p:cNvPicPr>
+            <a:picLocks noChangeAspect="1"/>
+          </p:cNvPicPr>
+          <p:nvPr/>
+        </p:nvPicPr>
+        <p:blipFill>
+          <a:blip r:embed="rId1"/>
+          <a:stretch>
+            <a:fillRect/>
+          </a:stretch>
+        </p:blipFill>
+        <p:spPr>
+          <a:xfrm>
+            <a:off x="640080" y="4384078"/>
+            <a:ext cx="10911535" cy="1227379"/>
+          </a:xfrm>
+          <a:prstGeom prst="rect">
+            <a:avLst/>
+          </a:prstGeom>
+        </p:spPr>
+      </p:pic>
+      <p:sp>
+        <p:nvSpPr>
+          <p:cNvPr id="9" name="Text 6"/>
+          <p:cNvSpPr txBox="1"/>
+          <p:nvPr/>
+        </p:nvSpPr>
+        <p:spPr>
+          <a:xfrm>
+            <a:off x="640080" y="6446520"/>
+            <a:ext cx="8686800" cy="292608"/>
+          </a:xfrm>
+          <a:prstGeom prst="rect">
+            <a:avLst/>
+          </a:prstGeom>
+          <a:noFill/>
+          <a:ln/>
+        </p:spPr>
+        <p:txBody>
+          <a:bodyPr wrap="square" lIns="0" tIns="0" rIns="0" bIns="0" rtlCol="0" anchor="ctr"/>
+          <a:lstStyle/>
+          <a:p>
+            <a:pPr algn="l" indent="0" marL="0">
+              <a:buNone/>
+            </a:pPr>
+            <a:r>
+              <a:rPr lang="en-US" sz="900" dirty="0">
+                <a:solidFill>
+                  <a:srgbClr val="5D5D72"/>
+                </a:solidFill>
+                <a:latin typeface="Calibri" pitchFamily="34" charset="0"/>
+                <a:ea typeface="Calibri" pitchFamily="34" charset="-122"/>
+                <a:cs typeface="Calibri" pitchFamily="34" charset="-120"/>
+              </a:rPr>
+              <a:t>Usman Akram  •  COMSATS University Islamabad</a:t>
+            </a:r>
+            <a:endParaRPr lang="en-US" sz="900" dirty="0"/>
+          </a:p>
+        </p:txBody>
+      </p:sp>
+      <p:sp>
+        <p:nvSpPr>
+          <p:cNvPr id="10" name="Text 7"/>
+          <p:cNvSpPr txBox="1"/>
+          <p:nvPr/>
+        </p:nvSpPr>
+        <p:spPr>
+          <a:xfrm>
+            <a:off x="11155680" y="6446520"/>
+            <a:ext cx="457200" cy="292608"/>
+          </a:xfrm>
+          <a:prstGeom prst="rect">
+            <a:avLst/>
+          </a:prstGeom>
+          <a:noFill/>
+          <a:ln/>
+        </p:spPr>
+        <p:txBody>
+          <a:bodyPr wrap="square" lIns="0" tIns="0" rIns="0" bIns="0" rtlCol="0" anchor="ctr"/>
+          <a:lstStyle/>
+          <a:p>
+            <a:pPr algn="r" indent="0" marL="0">
+              <a:buNone/>
+            </a:pPr>
+            <a:r>
+              <a:rPr lang="en-US" sz="900" dirty="0">
+                <a:solidFill>
+                  <a:srgbClr val="5D5D72"/>
+                </a:solidFill>
+                <a:latin typeface="Calibri" pitchFamily="34" charset="0"/>
+                <a:ea typeface="Calibri" pitchFamily="34" charset="-122"/>
+                <a:cs typeface="Calibri" pitchFamily="34" charset="-120"/>
+              </a:rPr>
+              <a:t>22</a:t>
+            </a:r>
+            <a:endParaRPr lang="en-US" sz="900" dirty="0"/>
+          </a:p>
+        </p:txBody>
+      </p:sp>
+    </p:spTree>
+  </p:cSld>
+  <p:clrMapOvr>
+    <a:masterClrMapping/>
+  </p:clrMapOvr>
+</p:sld>
+</file>
+
+<file path=ppt/slides/slide23.xml><?xml version="1.0" encoding="utf-8"?>
+<p:sld xmlns:a="http://schemas.openxmlformats.org/drawingml/2006/main" xmlns:r="http://schemas.openxmlformats.org/officeDocument/2006/relationships" xmlns:p="http://schemas.openxmlformats.org/presentationml/2006/main">
+  <p:cSld name="Slide 23">
+    <p:bg>
+      <p:bgPr>
+        <a:solidFill>
+          <a:srgbClr val="FFFFFF"/>
+        </a:solidFill>
+      </p:bgPr>
+    </p:bg>
+    <p:spTree>
+      <p:nvGrpSpPr>
+        <p:cNvPr id="1" name=""/>
+        <p:cNvGrpSpPr/>
+        <p:nvPr/>
+      </p:nvGrpSpPr>
+      <p:grpSpPr>
+        <a:xfrm>
+          <a:off x="0" y="0"/>
+          <a:ext cx="0" cy="0"/>
+          <a:chOff x="0" y="0"/>
+          <a:chExt cx="0" cy="0"/>
+        </a:xfrm>
+      </p:grpSpPr>
+      <p:sp>
+        <p:nvSpPr>
+          <p:cNvPr id="2" name="Text 0"/>
+          <p:cNvSpPr txBox="1"/>
+          <p:nvPr/>
+        </p:nvSpPr>
+        <p:spPr>
+          <a:xfrm>
+            <a:off x="640080" y="457200"/>
+            <a:ext cx="10058400" cy="365760"/>
+          </a:xfrm>
+          <a:prstGeom prst="rect">
+            <a:avLst/>
+          </a:prstGeom>
+          <a:noFill/>
+          <a:ln/>
+        </p:spPr>
+        <p:txBody>
+          <a:bodyPr wrap="square" lIns="0" tIns="0" rIns="0" bIns="0" rtlCol="0" anchor="ctr"/>
+          <a:lstStyle/>
+          <a:p>
+            <a:pPr algn="l" indent="0" marL="0">
+              <a:buNone/>
+            </a:pPr>
+            <a:r>
+              <a:rPr lang="en-US" sz="1300" b="1" spc="300" kern="0" dirty="0">
+                <a:solidFill>
+                  <a:srgbClr val="FF8A3D"/>
+                </a:solidFill>
+                <a:latin typeface="Calibri" pitchFamily="34" charset="0"/>
+                <a:ea typeface="Calibri" pitchFamily="34" charset="-122"/>
+                <a:cs typeface="Calibri" pitchFamily="34" charset="-120"/>
+              </a:rPr>
+              <a:t>VALIDATION</a:t>
+            </a:r>
+            <a:endParaRPr lang="en-US" sz="1300" dirty="0"/>
+          </a:p>
+        </p:txBody>
+      </p:sp>
+      <p:sp>
+        <p:nvSpPr>
+          <p:cNvPr id="3" name="Text 1"/>
+          <p:cNvSpPr txBox="1"/>
+          <p:nvPr/>
+        </p:nvSpPr>
+        <p:spPr>
+          <a:xfrm>
+            <a:off x="640080" y="841248"/>
+            <a:ext cx="10881360" cy="914400"/>
+          </a:xfrm>
+          <a:prstGeom prst="rect">
+            <a:avLst/>
+          </a:prstGeom>
+          <a:noFill/>
+          <a:ln/>
+        </p:spPr>
+        <p:txBody>
+          <a:bodyPr wrap="square" lIns="0" tIns="0" rIns="0" bIns="0" rtlCol="0" anchor="ctr"/>
+          <a:lstStyle/>
+          <a:p>
+            <a:pPr algn="l" indent="0" marL="0">
+              <a:buNone/>
+            </a:pPr>
+            <a:r>
+              <a:rPr lang="en-US" sz="3400" b="1" dirty="0">
+                <a:solidFill>
+                  <a:srgbClr val="2B2B7A"/>
+                </a:solidFill>
+                <a:latin typeface="Cambria" pitchFamily="34" charset="0"/>
+                <a:ea typeface="Cambria" pitchFamily="34" charset="-122"/>
+                <a:cs typeface="Cambria" pitchFamily="34" charset="-120"/>
+              </a:rPr>
               <a:t>HTML5 Client-Side Validation</a:t>
             </a:r>
             <a:endParaRPr lang="en-US" sz="3400" dirty="0"/>
@@ -9454,7 +10583,7 @@
       </p:sp>
       <p:graphicFrame>
         <p:nvGraphicFramePr>
-          <p:cNvPr id="23" name="Table 0"/>
+          <p:cNvPr id="24" name="Table 0"/>
           <p:cNvGraphicFramePr>
             <a:graphicFrameLocks noGrp="1"/>
           </p:cNvGraphicFramePr>
@@ -10244,291 +11373,6 @@
                 <a:ea typeface="Calibri" pitchFamily="34" charset="-122"/>
                 <a:cs typeface="Calibri" pitchFamily="34" charset="-120"/>
               </a:rPr>
-              <a:t>22</a:t>
-            </a:r>
-            <a:endParaRPr lang="en-US" sz="900" dirty="0"/>
-          </a:p>
-        </p:txBody>
-      </p:sp>
-    </p:spTree>
-  </p:cSld>
-  <p:clrMapOvr>
-    <a:masterClrMapping/>
-  </p:clrMapOvr>
-</p:sld>
-</file>
-
-<file path=ppt/slides/slide23.xml><?xml version="1.0" encoding="utf-8"?>
-<p:sld xmlns:a="http://schemas.openxmlformats.org/drawingml/2006/main" xmlns:r="http://schemas.openxmlformats.org/officeDocument/2006/relationships" xmlns:p="http://schemas.openxmlformats.org/presentationml/2006/main">
-  <p:cSld name="Slide 23">
-    <p:bg>
-      <p:bgPr>
-        <a:solidFill>
-          <a:srgbClr val="FFFFFF"/>
-        </a:solidFill>
-      </p:bgPr>
-    </p:bg>
-    <p:spTree>
-      <p:nvGrpSpPr>
-        <p:cNvPr id="1" name=""/>
-        <p:cNvGrpSpPr/>
-        <p:nvPr/>
-      </p:nvGrpSpPr>
-      <p:grpSpPr>
-        <a:xfrm>
-          <a:off x="0" y="0"/>
-          <a:ext cx="0" cy="0"/>
-          <a:chOff x="0" y="0"/>
-          <a:chExt cx="0" cy="0"/>
-        </a:xfrm>
-      </p:grpSpPr>
-      <p:sp>
-        <p:nvSpPr>
-          <p:cNvPr id="2" name="Text 0"/>
-          <p:cNvSpPr txBox="1"/>
-          <p:nvPr/>
-        </p:nvSpPr>
-        <p:spPr>
-          <a:xfrm>
-            <a:off x="640080" y="457200"/>
-            <a:ext cx="10058400" cy="365760"/>
-          </a:xfrm>
-          <a:prstGeom prst="rect">
-            <a:avLst/>
-          </a:prstGeom>
-          <a:noFill/>
-          <a:ln/>
-        </p:spPr>
-        <p:txBody>
-          <a:bodyPr wrap="square" lIns="0" tIns="0" rIns="0" bIns="0" rtlCol="0" anchor="ctr"/>
-          <a:lstStyle/>
-          <a:p>
-            <a:pPr algn="l" indent="0" marL="0">
-              <a:buNone/>
-            </a:pPr>
-            <a:r>
-              <a:rPr lang="en-US" sz="1300" b="1" spc="300" kern="0" dirty="0">
-                <a:solidFill>
-                  <a:srgbClr val="FF8A3D"/>
-                </a:solidFill>
-                <a:latin typeface="Calibri" pitchFamily="34" charset="0"/>
-                <a:ea typeface="Calibri" pitchFamily="34" charset="-122"/>
-                <a:cs typeface="Calibri" pitchFamily="34" charset="-120"/>
-              </a:rPr>
-              <a:t>VALIDATION</a:t>
-            </a:r>
-            <a:endParaRPr lang="en-US" sz="1300" dirty="0"/>
-          </a:p>
-        </p:txBody>
-      </p:sp>
-      <p:sp>
-        <p:nvSpPr>
-          <p:cNvPr id="3" name="Text 1"/>
-          <p:cNvSpPr txBox="1"/>
-          <p:nvPr/>
-        </p:nvSpPr>
-        <p:spPr>
-          <a:xfrm>
-            <a:off x="640080" y="841248"/>
-            <a:ext cx="10881360" cy="914400"/>
-          </a:xfrm>
-          <a:prstGeom prst="rect">
-            <a:avLst/>
-          </a:prstGeom>
-          <a:noFill/>
-          <a:ln/>
-        </p:spPr>
-        <p:txBody>
-          <a:bodyPr wrap="square" lIns="0" tIns="0" rIns="0" bIns="0" rtlCol="0" anchor="ctr"/>
-          <a:lstStyle/>
-          <a:p>
-            <a:pPr algn="l" indent="0" marL="0">
-              <a:buNone/>
-            </a:pPr>
-            <a:r>
-              <a:rPr lang="en-US" sz="3400" b="1" dirty="0">
-                <a:solidFill>
-                  <a:srgbClr val="2B2B7A"/>
-                </a:solidFill>
-                <a:latin typeface="Cambria" pitchFamily="34" charset="0"/>
-                <a:ea typeface="Cambria" pitchFamily="34" charset="-122"/>
-                <a:cs typeface="Cambria" pitchFamily="34" charset="-120"/>
-              </a:rPr>
-              <a:t>A Validated Form, Rendered</a:t>
-            </a:r>
-            <a:endParaRPr lang="en-US" sz="3400" dirty="0"/>
-          </a:p>
-        </p:txBody>
-      </p:sp>
-      <p:sp>
-        <p:nvSpPr>
-          <p:cNvPr id="4" name="Text 2"/>
-          <p:cNvSpPr txBox="1"/>
-          <p:nvPr/>
-        </p:nvSpPr>
-        <p:spPr>
-          <a:xfrm>
-            <a:off x="640080" y="1691640"/>
-            <a:ext cx="10911535" cy="411480"/>
-          </a:xfrm>
-          <a:prstGeom prst="rect">
-            <a:avLst/>
-          </a:prstGeom>
-          <a:noFill/>
-          <a:ln/>
-        </p:spPr>
-        <p:txBody>
-          <a:bodyPr wrap="square" lIns="0" tIns="0" rIns="0" bIns="0" rtlCol="0" anchor="ctr"/>
-          <a:lstStyle/>
-          <a:p>
-            <a:pPr indent="0" marL="0">
-              <a:buNone/>
-            </a:pPr>
-            <a:r>
-              <a:rPr lang="en-US" sz="1350" i="1" dirty="0">
-                <a:solidFill>
-                  <a:srgbClr val="5D5D72"/>
-                </a:solidFill>
-                <a:latin typeface="Calibri" pitchFamily="34" charset="0"/>
-                <a:ea typeface="Calibri" pitchFamily="34" charset="-122"/>
-                <a:cs typeface="Calibri" pitchFamily="34" charset="-120"/>
-              </a:rPr>
-              <a:t>The warning bubbles only appear live in a browser when you try to submit invalid or missing data.</a:t>
-            </a:r>
-            <a:endParaRPr lang="en-US" sz="1350" dirty="0"/>
-          </a:p>
-        </p:txBody>
-      </p:sp>
-      <p:sp>
-        <p:nvSpPr>
-          <p:cNvPr id="5" name="Shape 3"/>
-          <p:cNvSpPr/>
-          <p:nvPr/>
-        </p:nvSpPr>
-        <p:spPr>
-          <a:xfrm>
-            <a:off x="530352" y="2221992"/>
-            <a:ext cx="11130991" cy="4059936"/>
-          </a:xfrm>
-          <a:prstGeom prst="roundRect">
-            <a:avLst>
-              <a:gd name="adj" fmla="val 1351"/>
-            </a:avLst>
-          </a:prstGeom>
-          <a:solidFill>
-            <a:srgbClr val="FFFFFF"/>
-          </a:solidFill>
-          <a:ln w="12700">
-            <a:solidFill>
-              <a:srgbClr val="E2E2EE"/>
-            </a:solidFill>
-            <a:prstDash val="solid"/>
-          </a:ln>
-          <a:effectLst>
-            <a:outerShdw sx="100000" sy="100000" kx="0" ky="0" algn="bl" rotWithShape="0" blurRad="101600" dist="38100" dir="5400000">
-              <a:srgbClr val="000000">
-                <a:alpha val="12000"/>
-              </a:srgbClr>
-            </a:outerShdw>
-          </a:effectLst>
-        </p:spPr>
-      </p:sp>
-      <p:pic>
-        <p:nvPicPr>
-          <p:cNvPr id="6" name="Image 0" descr="D:/GitHub/mern-web-book/docs/assets/img/lecture-04/validation-form.png">    </p:cNvPr>
-          <p:cNvPicPr>
-            <a:picLocks noChangeAspect="1"/>
-          </p:cNvPicPr>
-          <p:nvPr/>
-        </p:nvPicPr>
-        <p:blipFill>
-          <a:blip r:embed="rId1"/>
-          <a:stretch>
-            <a:fillRect/>
-          </a:stretch>
-        </p:blipFill>
-        <p:spPr>
-          <a:xfrm>
-            <a:off x="640080" y="3631355"/>
-            <a:ext cx="10911535" cy="1241210"/>
-          </a:xfrm>
-          <a:prstGeom prst="rect">
-            <a:avLst/>
-          </a:prstGeom>
-        </p:spPr>
-      </p:pic>
-      <p:sp>
-        <p:nvSpPr>
-          <p:cNvPr id="7" name="Text 4"/>
-          <p:cNvSpPr txBox="1"/>
-          <p:nvPr/>
-        </p:nvSpPr>
-        <p:spPr>
-          <a:xfrm>
-            <a:off x="640080" y="6446520"/>
-            <a:ext cx="8686800" cy="292608"/>
-          </a:xfrm>
-          <a:prstGeom prst="rect">
-            <a:avLst/>
-          </a:prstGeom>
-          <a:noFill/>
-          <a:ln/>
-        </p:spPr>
-        <p:txBody>
-          <a:bodyPr wrap="square" lIns="0" tIns="0" rIns="0" bIns="0" rtlCol="0" anchor="ctr"/>
-          <a:lstStyle/>
-          <a:p>
-            <a:pPr algn="l" indent="0" marL="0">
-              <a:buNone/>
-            </a:pPr>
-            <a:r>
-              <a:rPr lang="en-US" sz="900" dirty="0">
-                <a:solidFill>
-                  <a:srgbClr val="5D5D72"/>
-                </a:solidFill>
-                <a:latin typeface="Calibri" pitchFamily="34" charset="0"/>
-                <a:ea typeface="Calibri" pitchFamily="34" charset="-122"/>
-                <a:cs typeface="Calibri" pitchFamily="34" charset="-120"/>
-              </a:rPr>
-              <a:t>Usman Akram  •  COMSATS University Islamabad</a:t>
-            </a:r>
-            <a:endParaRPr lang="en-US" sz="900" dirty="0"/>
-          </a:p>
-        </p:txBody>
-      </p:sp>
-      <p:sp>
-        <p:nvSpPr>
-          <p:cNvPr id="8" name="Text 5"/>
-          <p:cNvSpPr txBox="1"/>
-          <p:nvPr/>
-        </p:nvSpPr>
-        <p:spPr>
-          <a:xfrm>
-            <a:off x="11155680" y="6446520"/>
-            <a:ext cx="457200" cy="292608"/>
-          </a:xfrm>
-          <a:prstGeom prst="rect">
-            <a:avLst/>
-          </a:prstGeom>
-          <a:noFill/>
-          <a:ln/>
-        </p:spPr>
-        <p:txBody>
-          <a:bodyPr wrap="square" lIns="0" tIns="0" rIns="0" bIns="0" rtlCol="0" anchor="ctr"/>
-          <a:lstStyle/>
-          <a:p>
-            <a:pPr algn="r" indent="0" marL="0">
-              <a:buNone/>
-            </a:pPr>
-            <a:r>
-              <a:rPr lang="en-US" sz="900" dirty="0">
-                <a:solidFill>
-                  <a:srgbClr val="5D5D72"/>
-                </a:solidFill>
-                <a:latin typeface="Calibri" pitchFamily="34" charset="0"/>
-                <a:ea typeface="Calibri" pitchFamily="34" charset="-122"/>
-                <a:cs typeface="Calibri" pitchFamily="34" charset="-120"/>
-              </a:rPr>
               <a:t>23</a:t>
             </a:r>
             <a:endParaRPr lang="en-US" sz="900" dirty="0"/>
@@ -10639,7 +11483,7 @@
                 <a:ea typeface="Cambria" pitchFamily="34" charset="-122"/>
                 <a:cs typeface="Cambria" pitchFamily="34" charset="-120"/>
               </a:rPr>
-              <a:t>Client-Side Validation Is Not Enough</a:t>
+              <a:t>A Validated Registration Form</a:t>
             </a:r>
             <a:endParaRPr lang="en-US" sz="3400" dirty="0"/>
           </a:p>
@@ -10654,22 +11498,17 @@
         <p:spPr>
           <a:xfrm>
             <a:off x="640080" y="1965960"/>
-            <a:ext cx="10911535" cy="1737360"/>
+            <a:ext cx="10911535" cy="3931920"/>
           </a:xfrm>
           <a:prstGeom prst="roundRect">
             <a:avLst>
-              <a:gd name="adj" fmla="val 3158"/>
+              <a:gd name="adj" fmla="val 1860"/>
             </a:avLst>
           </a:prstGeom>
           <a:solidFill>
-            <a:srgbClr val="FDECE0"/>
+            <a:srgbClr val="1E1E4C"/>
           </a:solidFill>
-          <a:ln w="12700">
-            <a:solidFill>
-              <a:srgbClr val="FF8A3D"/>
-            </a:solidFill>
-            <a:prstDash val="solid"/>
-          </a:ln>
+          <a:ln/>
         </p:spPr>
       </p:sp>
       <p:sp>
@@ -10680,8 +11519,257 @@
         </p:nvSpPr>
         <p:spPr>
           <a:xfrm>
-            <a:off x="868680" y="2103120"/>
-            <a:ext cx="10454335" cy="274320"/>
+            <a:off x="960120" y="2194560"/>
+            <a:ext cx="10271455" cy="3474720"/>
+          </a:xfrm>
+          <a:prstGeom prst="rect">
+            <a:avLst/>
+          </a:prstGeom>
+          <a:noFill/>
+          <a:ln/>
+        </p:spPr>
+        <p:txBody>
+          <a:bodyPr wrap="square" lIns="0" tIns="0" rIns="0" bIns="0" rtlCol="0" anchor="t"/>
+          <a:lstStyle/>
+          <a:p>
+            <a:pPr indent="0" marL="0">
+              <a:lnSpc>
+                <a:spcPct val="125000"/>
+              </a:lnSpc>
+              <a:buNone/>
+            </a:pPr>
+            <a:r>
+              <a:rPr lang="en-US" sz="1366" dirty="0">
+                <a:solidFill>
+                  <a:srgbClr val="C9D3F5"/>
+                </a:solidFill>
+                <a:latin typeface="Courier New" pitchFamily="34" charset="0"/>
+                <a:ea typeface="Courier New" pitchFamily="34" charset="-122"/>
+                <a:cs typeface="Courier New" pitchFamily="34" charset="-120"/>
+              </a:rPr>
+              <a:t>&lt;form action="/register" method="POST"&gt;</a:t>
+            </a:r>
+            <a:endParaRPr lang="en-US" sz="1366" dirty="0"/>
+          </a:p>
+          <a:p>
+            <a:pPr indent="0" marL="0">
+              <a:lnSpc>
+                <a:spcPct val="125000"/>
+              </a:lnSpc>
+              <a:buNone/>
+            </a:pPr>
+            <a:r>
+              <a:rPr lang="en-US" sz="1366" dirty="0">
+                <a:solidFill>
+                  <a:srgbClr val="C9D3F5"/>
+                </a:solidFill>
+                <a:latin typeface="Courier New" pitchFamily="34" charset="0"/>
+                <a:ea typeface="Courier New" pitchFamily="34" charset="-122"/>
+                <a:cs typeface="Courier New" pitchFamily="34" charset="-120"/>
+              </a:rPr>
+              <a:t>    &lt;label for="uname"&gt;Username (required):&lt;/label&gt;</a:t>
+            </a:r>
+            <a:endParaRPr lang="en-US" sz="1366" dirty="0"/>
+          </a:p>
+          <a:p>
+            <a:pPr indent="0" marL="0">
+              <a:lnSpc>
+                <a:spcPct val="125000"/>
+              </a:lnSpc>
+              <a:buNone/>
+            </a:pPr>
+            <a:r>
+              <a:rPr lang="en-US" sz="1366" dirty="0">
+                <a:solidFill>
+                  <a:srgbClr val="C9D3F5"/>
+                </a:solidFill>
+                <a:latin typeface="Courier New" pitchFamily="34" charset="0"/>
+                <a:ea typeface="Courier New" pitchFamily="34" charset="-122"/>
+                <a:cs typeface="Courier New" pitchFamily="34" charset="-120"/>
+              </a:rPr>
+              <a:t>    &lt;input type="text" id="uname" name="uname" required&gt;</a:t>
+            </a:r>
+            <a:endParaRPr lang="en-US" sz="1366" dirty="0"/>
+          </a:p>
+          <a:p>
+            <a:pPr indent="0" marL="0">
+              <a:lnSpc>
+                <a:spcPct val="125000"/>
+              </a:lnSpc>
+              <a:buNone/>
+            </a:pPr>
+            <a:endParaRPr lang="en-US" sz="1366" dirty="0"/>
+          </a:p>
+          <a:p>
+            <a:pPr indent="0" marL="0">
+              <a:lnSpc>
+                <a:spcPct val="125000"/>
+              </a:lnSpc>
+              <a:buNone/>
+            </a:pPr>
+            <a:r>
+              <a:rPr lang="en-US" sz="1366" dirty="0">
+                <a:solidFill>
+                  <a:srgbClr val="C9D3F5"/>
+                </a:solidFill>
+                <a:latin typeface="Courier New" pitchFamily="34" charset="0"/>
+                <a:ea typeface="Courier New" pitchFamily="34" charset="-122"/>
+                <a:cs typeface="Courier New" pitchFamily="34" charset="-120"/>
+              </a:rPr>
+              <a:t>    &lt;label for="cnic"&gt;CNIC (format 00000-0000000-0):&lt;/label&gt;</a:t>
+            </a:r>
+            <a:endParaRPr lang="en-US" sz="1366" dirty="0"/>
+          </a:p>
+          <a:p>
+            <a:pPr indent="0" marL="0">
+              <a:lnSpc>
+                <a:spcPct val="125000"/>
+              </a:lnSpc>
+              <a:buNone/>
+            </a:pPr>
+            <a:r>
+              <a:rPr lang="en-US" sz="1366" dirty="0">
+                <a:solidFill>
+                  <a:srgbClr val="C9D3F5"/>
+                </a:solidFill>
+                <a:latin typeface="Courier New" pitchFamily="34" charset="0"/>
+                <a:ea typeface="Courier New" pitchFamily="34" charset="-122"/>
+                <a:cs typeface="Courier New" pitchFamily="34" charset="-120"/>
+              </a:rPr>
+              <a:t>    &lt;input type="text" id="cnic" name="cnic"</a:t>
+            </a:r>
+            <a:endParaRPr lang="en-US" sz="1366" dirty="0"/>
+          </a:p>
+          <a:p>
+            <a:pPr indent="0" marL="0">
+              <a:lnSpc>
+                <a:spcPct val="125000"/>
+              </a:lnSpc>
+              <a:buNone/>
+            </a:pPr>
+            <a:r>
+              <a:rPr lang="en-US" sz="1366" dirty="0">
+                <a:solidFill>
+                  <a:srgbClr val="C9D3F5"/>
+                </a:solidFill>
+                <a:latin typeface="Courier New" pitchFamily="34" charset="0"/>
+                <a:ea typeface="Courier New" pitchFamily="34" charset="-122"/>
+                <a:cs typeface="Courier New" pitchFamily="34" charset="-120"/>
+              </a:rPr>
+              <a:t>           pattern="\d{5}-\d{7}-\d" title="Format: 00000-0000000-0"&gt;</a:t>
+            </a:r>
+            <a:endParaRPr lang="en-US" sz="1366" dirty="0"/>
+          </a:p>
+          <a:p>
+            <a:pPr indent="0" marL="0">
+              <a:lnSpc>
+                <a:spcPct val="125000"/>
+              </a:lnSpc>
+              <a:buNone/>
+            </a:pPr>
+            <a:endParaRPr lang="en-US" sz="1366" dirty="0"/>
+          </a:p>
+          <a:p>
+            <a:pPr indent="0" marL="0">
+              <a:lnSpc>
+                <a:spcPct val="125000"/>
+              </a:lnSpc>
+              <a:buNone/>
+            </a:pPr>
+            <a:r>
+              <a:rPr lang="en-US" sz="1366" dirty="0">
+                <a:solidFill>
+                  <a:srgbClr val="C9D3F5"/>
+                </a:solidFill>
+                <a:latin typeface="Courier New" pitchFamily="34" charset="0"/>
+                <a:ea typeface="Courier New" pitchFamily="34" charset="-122"/>
+                <a:cs typeface="Courier New" pitchFamily="34" charset="-120"/>
+              </a:rPr>
+              <a:t>    &lt;label for="age"&gt;Age (18–60):&lt;/label&gt;</a:t>
+            </a:r>
+            <a:endParaRPr lang="en-US" sz="1366" dirty="0"/>
+          </a:p>
+          <a:p>
+            <a:pPr indent="0" marL="0">
+              <a:lnSpc>
+                <a:spcPct val="125000"/>
+              </a:lnSpc>
+              <a:buNone/>
+            </a:pPr>
+            <a:r>
+              <a:rPr lang="en-US" sz="1366" dirty="0">
+                <a:solidFill>
+                  <a:srgbClr val="C9D3F5"/>
+                </a:solidFill>
+                <a:latin typeface="Courier New" pitchFamily="34" charset="0"/>
+                <a:ea typeface="Courier New" pitchFamily="34" charset="-122"/>
+                <a:cs typeface="Courier New" pitchFamily="34" charset="-120"/>
+              </a:rPr>
+              <a:t>    &lt;input type="number" id="age" name="age" min="18" max="60"&gt;</a:t>
+            </a:r>
+            <a:endParaRPr lang="en-US" sz="1366" dirty="0"/>
+          </a:p>
+          <a:p>
+            <a:pPr indent="0" marL="0">
+              <a:lnSpc>
+                <a:spcPct val="125000"/>
+              </a:lnSpc>
+              <a:buNone/>
+            </a:pPr>
+            <a:endParaRPr lang="en-US" sz="1366" dirty="0"/>
+          </a:p>
+          <a:p>
+            <a:pPr indent="0" marL="0">
+              <a:lnSpc>
+                <a:spcPct val="125000"/>
+              </a:lnSpc>
+              <a:buNone/>
+            </a:pPr>
+            <a:r>
+              <a:rPr lang="en-US" sz="1366" dirty="0">
+                <a:solidFill>
+                  <a:srgbClr val="C9D3F5"/>
+                </a:solidFill>
+                <a:latin typeface="Courier New" pitchFamily="34" charset="0"/>
+                <a:ea typeface="Courier New" pitchFamily="34" charset="-122"/>
+                <a:cs typeface="Courier New" pitchFamily="34" charset="-120"/>
+              </a:rPr>
+              <a:t>    &lt;button type="submit"&gt;Register&lt;/button&gt;</a:t>
+            </a:r>
+            <a:endParaRPr lang="en-US" sz="1366" dirty="0"/>
+          </a:p>
+          <a:p>
+            <a:pPr indent="0" marL="0">
+              <a:lnSpc>
+                <a:spcPct val="125000"/>
+              </a:lnSpc>
+              <a:buNone/>
+            </a:pPr>
+            <a:r>
+              <a:rPr lang="en-US" sz="1366" dirty="0">
+                <a:solidFill>
+                  <a:srgbClr val="C9D3F5"/>
+                </a:solidFill>
+                <a:latin typeface="Courier New" pitchFamily="34" charset="0"/>
+                <a:ea typeface="Courier New" pitchFamily="34" charset="-122"/>
+                <a:cs typeface="Courier New" pitchFamily="34" charset="-120"/>
+              </a:rPr>
+              <a:t>&lt;/form&gt;</a:t>
+            </a:r>
+            <a:endParaRPr lang="en-US" sz="1366" dirty="0"/>
+          </a:p>
+        </p:txBody>
+      </p:sp>
+      <p:sp>
+        <p:nvSpPr>
+          <p:cNvPr id="6" name="Text 4"/>
+          <p:cNvSpPr txBox="1"/>
+          <p:nvPr/>
+        </p:nvSpPr>
+        <p:spPr>
+          <a:xfrm>
+            <a:off x="640080" y="6446520"/>
+            <a:ext cx="8686800" cy="292608"/>
           </a:xfrm>
           <a:prstGeom prst="rect">
             <a:avLst/>
@@ -10693,105 +11781,27 @@
           <a:bodyPr wrap="square" lIns="0" tIns="0" rIns="0" bIns="0" rtlCol="0" anchor="ctr"/>
           <a:lstStyle/>
           <a:p>
-            <a:pPr indent="0" marL="0">
-              <a:buNone/>
-            </a:pPr>
-            <a:r>
-              <a:rPr lang="en-US" sz="1000" b="1" spc="200" kern="0" dirty="0">
-                <a:solidFill>
-                  <a:srgbClr val="8A3A12"/>
+            <a:pPr algn="l" indent="0" marL="0">
+              <a:buNone/>
+            </a:pPr>
+            <a:r>
+              <a:rPr lang="en-US" sz="900" dirty="0">
+                <a:solidFill>
+                  <a:srgbClr val="5D5D72"/>
                 </a:solidFill>
                 <a:latin typeface="Calibri" pitchFamily="34" charset="0"/>
                 <a:ea typeface="Calibri" pitchFamily="34" charset="-122"/>
                 <a:cs typeface="Calibri" pitchFamily="34" charset="-120"/>
               </a:rPr>
-              <a:t>WARNING</a:t>
-            </a:r>
-            <a:endParaRPr lang="en-US" sz="1000" dirty="0"/>
-          </a:p>
-        </p:txBody>
-      </p:sp>
-      <p:sp>
-        <p:nvSpPr>
-          <p:cNvPr id="6" name="Text 4"/>
-          <p:cNvSpPr txBox="1"/>
-          <p:nvPr/>
-        </p:nvSpPr>
-        <p:spPr>
-          <a:xfrm>
-            <a:off x="868680" y="2404872"/>
-            <a:ext cx="10454335" cy="1143000"/>
-          </a:xfrm>
-          <a:prstGeom prst="rect">
-            <a:avLst/>
-          </a:prstGeom>
-          <a:noFill/>
-          <a:ln/>
-        </p:spPr>
-        <p:txBody>
-          <a:bodyPr wrap="square" lIns="0" tIns="0" rIns="0" bIns="0" rtlCol="0" anchor="t"/>
-          <a:lstStyle/>
-          <a:p>
-            <a:pPr indent="0" marL="0">
-              <a:buNone/>
-            </a:pPr>
-            <a:r>
-              <a:rPr lang="en-US" sz="1250" dirty="0">
-                <a:solidFill>
-                  <a:srgbClr val="26262F"/>
-                </a:solidFill>
-                <a:latin typeface="Calibri" pitchFamily="34" charset="0"/>
-                <a:ea typeface="Calibri" pitchFamily="34" charset="-122"/>
-                <a:cs typeface="Calibri" pitchFamily="34" charset="-120"/>
-              </a:rPr>
-              <a:t>A user can disable JavaScript or edit HTML in dev tools. Client-side validation is a convenience for instant feedback — it is not security. Every submission must also be validated again on the server.</a:t>
-            </a:r>
-            <a:endParaRPr lang="en-US" sz="1250" dirty="0"/>
+              <a:t>Usman Akram  •  COMSATS University Islamabad</a:t>
+            </a:r>
+            <a:endParaRPr lang="en-US" sz="900" dirty="0"/>
           </a:p>
         </p:txBody>
       </p:sp>
       <p:sp>
         <p:nvSpPr>
           <p:cNvPr id="7" name="Text 5"/>
-          <p:cNvSpPr txBox="1"/>
-          <p:nvPr/>
-        </p:nvSpPr>
-        <p:spPr>
-          <a:xfrm>
-            <a:off x="640080" y="6446520"/>
-            <a:ext cx="8686800" cy="292608"/>
-          </a:xfrm>
-          <a:prstGeom prst="rect">
-            <a:avLst/>
-          </a:prstGeom>
-          <a:noFill/>
-          <a:ln/>
-        </p:spPr>
-        <p:txBody>
-          <a:bodyPr wrap="square" lIns="0" tIns="0" rIns="0" bIns="0" rtlCol="0" anchor="ctr"/>
-          <a:lstStyle/>
-          <a:p>
-            <a:pPr algn="l" indent="0" marL="0">
-              <a:buNone/>
-            </a:pPr>
-            <a:r>
-              <a:rPr lang="en-US" sz="900" dirty="0">
-                <a:solidFill>
-                  <a:srgbClr val="5D5D72"/>
-                </a:solidFill>
-                <a:latin typeface="Calibri" pitchFamily="34" charset="0"/>
-                <a:ea typeface="Calibri" pitchFamily="34" charset="-122"/>
-                <a:cs typeface="Calibri" pitchFamily="34" charset="-120"/>
-              </a:rPr>
-              <a:t>Usman Akram  •  COMSATS University Islamabad</a:t>
-            </a:r>
-            <a:endParaRPr lang="en-US" sz="900" dirty="0"/>
-          </a:p>
-        </p:txBody>
-      </p:sp>
-      <p:sp>
-        <p:nvSpPr>
-          <p:cNvPr id="8" name="Text 6"/>
           <p:cNvSpPr txBox="1"/>
           <p:nvPr/>
         </p:nvSpPr>
@@ -10839,6 +11849,584 @@
 <file path=ppt/slides/slide25.xml><?xml version="1.0" encoding="utf-8"?>
 <p:sld xmlns:a="http://schemas.openxmlformats.org/drawingml/2006/main" xmlns:r="http://schemas.openxmlformats.org/officeDocument/2006/relationships" xmlns:p="http://schemas.openxmlformats.org/presentationml/2006/main">
   <p:cSld name="Slide 25">
+    <p:bg>
+      <p:bgPr>
+        <a:solidFill>
+          <a:srgbClr val="FFFFFF"/>
+        </a:solidFill>
+      </p:bgPr>
+    </p:bg>
+    <p:spTree>
+      <p:nvGrpSpPr>
+        <p:cNvPr id="1" name=""/>
+        <p:cNvGrpSpPr/>
+        <p:nvPr/>
+      </p:nvGrpSpPr>
+      <p:grpSpPr>
+        <a:xfrm>
+          <a:off x="0" y="0"/>
+          <a:ext cx="0" cy="0"/>
+          <a:chOff x="0" y="0"/>
+          <a:chExt cx="0" cy="0"/>
+        </a:xfrm>
+      </p:grpSpPr>
+      <p:sp>
+        <p:nvSpPr>
+          <p:cNvPr id="2" name="Text 0"/>
+          <p:cNvSpPr txBox="1"/>
+          <p:nvPr/>
+        </p:nvSpPr>
+        <p:spPr>
+          <a:xfrm>
+            <a:off x="640080" y="457200"/>
+            <a:ext cx="10058400" cy="365760"/>
+          </a:xfrm>
+          <a:prstGeom prst="rect">
+            <a:avLst/>
+          </a:prstGeom>
+          <a:noFill/>
+          <a:ln/>
+        </p:spPr>
+        <p:txBody>
+          <a:bodyPr wrap="square" lIns="0" tIns="0" rIns="0" bIns="0" rtlCol="0" anchor="ctr"/>
+          <a:lstStyle/>
+          <a:p>
+            <a:pPr algn="l" indent="0" marL="0">
+              <a:buNone/>
+            </a:pPr>
+            <a:r>
+              <a:rPr lang="en-US" sz="1300" b="1" spc="300" kern="0" dirty="0">
+                <a:solidFill>
+                  <a:srgbClr val="FF8A3D"/>
+                </a:solidFill>
+                <a:latin typeface="Calibri" pitchFamily="34" charset="0"/>
+                <a:ea typeface="Calibri" pitchFamily="34" charset="-122"/>
+                <a:cs typeface="Calibri" pitchFamily="34" charset="-120"/>
+              </a:rPr>
+              <a:t>VALIDATION</a:t>
+            </a:r>
+            <a:endParaRPr lang="en-US" sz="1300" dirty="0"/>
+          </a:p>
+        </p:txBody>
+      </p:sp>
+      <p:sp>
+        <p:nvSpPr>
+          <p:cNvPr id="3" name="Text 1"/>
+          <p:cNvSpPr txBox="1"/>
+          <p:nvPr/>
+        </p:nvSpPr>
+        <p:spPr>
+          <a:xfrm>
+            <a:off x="640080" y="841248"/>
+            <a:ext cx="10881360" cy="914400"/>
+          </a:xfrm>
+          <a:prstGeom prst="rect">
+            <a:avLst/>
+          </a:prstGeom>
+          <a:noFill/>
+          <a:ln/>
+        </p:spPr>
+        <p:txBody>
+          <a:bodyPr wrap="square" lIns="0" tIns="0" rIns="0" bIns="0" rtlCol="0" anchor="ctr"/>
+          <a:lstStyle/>
+          <a:p>
+            <a:pPr algn="l" indent="0" marL="0">
+              <a:buNone/>
+            </a:pPr>
+            <a:r>
+              <a:rPr lang="en-US" sz="3400" b="1" dirty="0">
+                <a:solidFill>
+                  <a:srgbClr val="2B2B7A"/>
+                </a:solidFill>
+                <a:latin typeface="Cambria" pitchFamily="34" charset="0"/>
+                <a:ea typeface="Cambria" pitchFamily="34" charset="-122"/>
+                <a:cs typeface="Cambria" pitchFamily="34" charset="-120"/>
+              </a:rPr>
+              <a:t>A Validated Form, Rendered</a:t>
+            </a:r>
+            <a:endParaRPr lang="en-US" sz="3400" dirty="0"/>
+          </a:p>
+        </p:txBody>
+      </p:sp>
+      <p:sp>
+        <p:nvSpPr>
+          <p:cNvPr id="4" name="Text 2"/>
+          <p:cNvSpPr txBox="1"/>
+          <p:nvPr/>
+        </p:nvSpPr>
+        <p:spPr>
+          <a:xfrm>
+            <a:off x="640080" y="1691640"/>
+            <a:ext cx="10911535" cy="411480"/>
+          </a:xfrm>
+          <a:prstGeom prst="rect">
+            <a:avLst/>
+          </a:prstGeom>
+          <a:noFill/>
+          <a:ln/>
+        </p:spPr>
+        <p:txBody>
+          <a:bodyPr wrap="square" lIns="0" tIns="0" rIns="0" bIns="0" rtlCol="0" anchor="ctr"/>
+          <a:lstStyle/>
+          <a:p>
+            <a:pPr indent="0" marL="0">
+              <a:buNone/>
+            </a:pPr>
+            <a:r>
+              <a:rPr lang="en-US" sz="1350" i="1" dirty="0">
+                <a:solidFill>
+                  <a:srgbClr val="5D5D72"/>
+                </a:solidFill>
+                <a:latin typeface="Calibri" pitchFamily="34" charset="0"/>
+                <a:ea typeface="Calibri" pitchFamily="34" charset="-122"/>
+                <a:cs typeface="Calibri" pitchFamily="34" charset="-120"/>
+              </a:rPr>
+              <a:t>The warning bubbles only appear live in a browser when you try to submit invalid or missing data.</a:t>
+            </a:r>
+            <a:endParaRPr lang="en-US" sz="1350" dirty="0"/>
+          </a:p>
+        </p:txBody>
+      </p:sp>
+      <p:sp>
+        <p:nvSpPr>
+          <p:cNvPr id="5" name="Shape 3"/>
+          <p:cNvSpPr/>
+          <p:nvPr/>
+        </p:nvSpPr>
+        <p:spPr>
+          <a:xfrm>
+            <a:off x="530352" y="2221992"/>
+            <a:ext cx="11130991" cy="4059936"/>
+          </a:xfrm>
+          <a:prstGeom prst="roundRect">
+            <a:avLst>
+              <a:gd name="adj" fmla="val 1351"/>
+            </a:avLst>
+          </a:prstGeom>
+          <a:solidFill>
+            <a:srgbClr val="FFFFFF"/>
+          </a:solidFill>
+          <a:ln w="12700">
+            <a:solidFill>
+              <a:srgbClr val="E2E2EE"/>
+            </a:solidFill>
+            <a:prstDash val="solid"/>
+          </a:ln>
+          <a:effectLst>
+            <a:outerShdw sx="100000" sy="100000" kx="0" ky="0" algn="bl" rotWithShape="0" blurRad="101600" dist="38100" dir="5400000">
+              <a:srgbClr val="000000">
+                <a:alpha val="12000"/>
+              </a:srgbClr>
+            </a:outerShdw>
+          </a:effectLst>
+        </p:spPr>
+      </p:sp>
+      <p:pic>
+        <p:nvPicPr>
+          <p:cNvPr id="6" name="Image 0" descr="D:/GitHub/mern-web-book/docs/assets/img/lecture-04/validation-form.png">    </p:cNvPr>
+          <p:cNvPicPr>
+            <a:picLocks noChangeAspect="1"/>
+          </p:cNvPicPr>
+          <p:nvPr/>
+        </p:nvPicPr>
+        <p:blipFill>
+          <a:blip r:embed="rId1"/>
+          <a:stretch>
+            <a:fillRect/>
+          </a:stretch>
+        </p:blipFill>
+        <p:spPr>
+          <a:xfrm>
+            <a:off x="640080" y="3631355"/>
+            <a:ext cx="10911535" cy="1241210"/>
+          </a:xfrm>
+          <a:prstGeom prst="rect">
+            <a:avLst/>
+          </a:prstGeom>
+        </p:spPr>
+      </p:pic>
+      <p:sp>
+        <p:nvSpPr>
+          <p:cNvPr id="7" name="Text 4"/>
+          <p:cNvSpPr txBox="1"/>
+          <p:nvPr/>
+        </p:nvSpPr>
+        <p:spPr>
+          <a:xfrm>
+            <a:off x="640080" y="6446520"/>
+            <a:ext cx="8686800" cy="292608"/>
+          </a:xfrm>
+          <a:prstGeom prst="rect">
+            <a:avLst/>
+          </a:prstGeom>
+          <a:noFill/>
+          <a:ln/>
+        </p:spPr>
+        <p:txBody>
+          <a:bodyPr wrap="square" lIns="0" tIns="0" rIns="0" bIns="0" rtlCol="0" anchor="ctr"/>
+          <a:lstStyle/>
+          <a:p>
+            <a:pPr algn="l" indent="0" marL="0">
+              <a:buNone/>
+            </a:pPr>
+            <a:r>
+              <a:rPr lang="en-US" sz="900" dirty="0">
+                <a:solidFill>
+                  <a:srgbClr val="5D5D72"/>
+                </a:solidFill>
+                <a:latin typeface="Calibri" pitchFamily="34" charset="0"/>
+                <a:ea typeface="Calibri" pitchFamily="34" charset="-122"/>
+                <a:cs typeface="Calibri" pitchFamily="34" charset="-120"/>
+              </a:rPr>
+              <a:t>Usman Akram  •  COMSATS University Islamabad</a:t>
+            </a:r>
+            <a:endParaRPr lang="en-US" sz="900" dirty="0"/>
+          </a:p>
+        </p:txBody>
+      </p:sp>
+      <p:sp>
+        <p:nvSpPr>
+          <p:cNvPr id="8" name="Text 5"/>
+          <p:cNvSpPr txBox="1"/>
+          <p:nvPr/>
+        </p:nvSpPr>
+        <p:spPr>
+          <a:xfrm>
+            <a:off x="11155680" y="6446520"/>
+            <a:ext cx="457200" cy="292608"/>
+          </a:xfrm>
+          <a:prstGeom prst="rect">
+            <a:avLst/>
+          </a:prstGeom>
+          <a:noFill/>
+          <a:ln/>
+        </p:spPr>
+        <p:txBody>
+          <a:bodyPr wrap="square" lIns="0" tIns="0" rIns="0" bIns="0" rtlCol="0" anchor="ctr"/>
+          <a:lstStyle/>
+          <a:p>
+            <a:pPr algn="r" indent="0" marL="0">
+              <a:buNone/>
+            </a:pPr>
+            <a:r>
+              <a:rPr lang="en-US" sz="900" dirty="0">
+                <a:solidFill>
+                  <a:srgbClr val="5D5D72"/>
+                </a:solidFill>
+                <a:latin typeface="Calibri" pitchFamily="34" charset="0"/>
+                <a:ea typeface="Calibri" pitchFamily="34" charset="-122"/>
+                <a:cs typeface="Calibri" pitchFamily="34" charset="-120"/>
+              </a:rPr>
+              <a:t>25</a:t>
+            </a:r>
+            <a:endParaRPr lang="en-US" sz="900" dirty="0"/>
+          </a:p>
+        </p:txBody>
+      </p:sp>
+    </p:spTree>
+  </p:cSld>
+  <p:clrMapOvr>
+    <a:masterClrMapping/>
+  </p:clrMapOvr>
+</p:sld>
+</file>
+
+<file path=ppt/slides/slide26.xml><?xml version="1.0" encoding="utf-8"?>
+<p:sld xmlns:a="http://schemas.openxmlformats.org/drawingml/2006/main" xmlns:r="http://schemas.openxmlformats.org/officeDocument/2006/relationships" xmlns:p="http://schemas.openxmlformats.org/presentationml/2006/main">
+  <p:cSld name="Slide 26">
+    <p:bg>
+      <p:bgPr>
+        <a:solidFill>
+          <a:srgbClr val="FFFFFF"/>
+        </a:solidFill>
+      </p:bgPr>
+    </p:bg>
+    <p:spTree>
+      <p:nvGrpSpPr>
+        <p:cNvPr id="1" name=""/>
+        <p:cNvGrpSpPr/>
+        <p:nvPr/>
+      </p:nvGrpSpPr>
+      <p:grpSpPr>
+        <a:xfrm>
+          <a:off x="0" y="0"/>
+          <a:ext cx="0" cy="0"/>
+          <a:chOff x="0" y="0"/>
+          <a:chExt cx="0" cy="0"/>
+        </a:xfrm>
+      </p:grpSpPr>
+      <p:sp>
+        <p:nvSpPr>
+          <p:cNvPr id="2" name="Text 0"/>
+          <p:cNvSpPr txBox="1"/>
+          <p:nvPr/>
+        </p:nvSpPr>
+        <p:spPr>
+          <a:xfrm>
+            <a:off x="640080" y="457200"/>
+            <a:ext cx="10058400" cy="365760"/>
+          </a:xfrm>
+          <a:prstGeom prst="rect">
+            <a:avLst/>
+          </a:prstGeom>
+          <a:noFill/>
+          <a:ln/>
+        </p:spPr>
+        <p:txBody>
+          <a:bodyPr wrap="square" lIns="0" tIns="0" rIns="0" bIns="0" rtlCol="0" anchor="ctr"/>
+          <a:lstStyle/>
+          <a:p>
+            <a:pPr algn="l" indent="0" marL="0">
+              <a:buNone/>
+            </a:pPr>
+            <a:r>
+              <a:rPr lang="en-US" sz="1300" b="1" spc="300" kern="0" dirty="0">
+                <a:solidFill>
+                  <a:srgbClr val="FF8A3D"/>
+                </a:solidFill>
+                <a:latin typeface="Calibri" pitchFamily="34" charset="0"/>
+                <a:ea typeface="Calibri" pitchFamily="34" charset="-122"/>
+                <a:cs typeface="Calibri" pitchFamily="34" charset="-120"/>
+              </a:rPr>
+              <a:t>VALIDATION</a:t>
+            </a:r>
+            <a:endParaRPr lang="en-US" sz="1300" dirty="0"/>
+          </a:p>
+        </p:txBody>
+      </p:sp>
+      <p:sp>
+        <p:nvSpPr>
+          <p:cNvPr id="3" name="Text 1"/>
+          <p:cNvSpPr txBox="1"/>
+          <p:nvPr/>
+        </p:nvSpPr>
+        <p:spPr>
+          <a:xfrm>
+            <a:off x="640080" y="841248"/>
+            <a:ext cx="10881360" cy="914400"/>
+          </a:xfrm>
+          <a:prstGeom prst="rect">
+            <a:avLst/>
+          </a:prstGeom>
+          <a:noFill/>
+          <a:ln/>
+        </p:spPr>
+        <p:txBody>
+          <a:bodyPr wrap="square" lIns="0" tIns="0" rIns="0" bIns="0" rtlCol="0" anchor="ctr"/>
+          <a:lstStyle/>
+          <a:p>
+            <a:pPr algn="l" indent="0" marL="0">
+              <a:buNone/>
+            </a:pPr>
+            <a:r>
+              <a:rPr lang="en-US" sz="3400" b="1" dirty="0">
+                <a:solidFill>
+                  <a:srgbClr val="2B2B7A"/>
+                </a:solidFill>
+                <a:latin typeface="Cambria" pitchFamily="34" charset="0"/>
+                <a:ea typeface="Cambria" pitchFamily="34" charset="-122"/>
+                <a:cs typeface="Cambria" pitchFamily="34" charset="-120"/>
+              </a:rPr>
+              <a:t>Client-Side Validation Is Not Enough</a:t>
+            </a:r>
+            <a:endParaRPr lang="en-US" sz="3400" dirty="0"/>
+          </a:p>
+        </p:txBody>
+      </p:sp>
+      <p:sp>
+        <p:nvSpPr>
+          <p:cNvPr id="4" name="Shape 2"/>
+          <p:cNvSpPr/>
+          <p:nvPr/>
+        </p:nvSpPr>
+        <p:spPr>
+          <a:xfrm>
+            <a:off x="640080" y="1965960"/>
+            <a:ext cx="10911535" cy="1737360"/>
+          </a:xfrm>
+          <a:prstGeom prst="roundRect">
+            <a:avLst>
+              <a:gd name="adj" fmla="val 3158"/>
+            </a:avLst>
+          </a:prstGeom>
+          <a:solidFill>
+            <a:srgbClr val="FDECE0"/>
+          </a:solidFill>
+          <a:ln w="12700">
+            <a:solidFill>
+              <a:srgbClr val="FF8A3D"/>
+            </a:solidFill>
+            <a:prstDash val="solid"/>
+          </a:ln>
+        </p:spPr>
+      </p:sp>
+      <p:sp>
+        <p:nvSpPr>
+          <p:cNvPr id="5" name="Text 3"/>
+          <p:cNvSpPr txBox="1"/>
+          <p:nvPr/>
+        </p:nvSpPr>
+        <p:spPr>
+          <a:xfrm>
+            <a:off x="868680" y="2103120"/>
+            <a:ext cx="10454335" cy="274320"/>
+          </a:xfrm>
+          <a:prstGeom prst="rect">
+            <a:avLst/>
+          </a:prstGeom>
+          <a:noFill/>
+          <a:ln/>
+        </p:spPr>
+        <p:txBody>
+          <a:bodyPr wrap="square" lIns="0" tIns="0" rIns="0" bIns="0" rtlCol="0" anchor="ctr"/>
+          <a:lstStyle/>
+          <a:p>
+            <a:pPr indent="0" marL="0">
+              <a:buNone/>
+            </a:pPr>
+            <a:r>
+              <a:rPr lang="en-US" sz="1000" b="1" spc="200" kern="0" dirty="0">
+                <a:solidFill>
+                  <a:srgbClr val="8A3A12"/>
+                </a:solidFill>
+                <a:latin typeface="Calibri" pitchFamily="34" charset="0"/>
+                <a:ea typeface="Calibri" pitchFamily="34" charset="-122"/>
+                <a:cs typeface="Calibri" pitchFamily="34" charset="-120"/>
+              </a:rPr>
+              <a:t>WARNING</a:t>
+            </a:r>
+            <a:endParaRPr lang="en-US" sz="1000" dirty="0"/>
+          </a:p>
+        </p:txBody>
+      </p:sp>
+      <p:sp>
+        <p:nvSpPr>
+          <p:cNvPr id="6" name="Text 4"/>
+          <p:cNvSpPr txBox="1"/>
+          <p:nvPr/>
+        </p:nvSpPr>
+        <p:spPr>
+          <a:xfrm>
+            <a:off x="868680" y="2404872"/>
+            <a:ext cx="10454335" cy="1143000"/>
+          </a:xfrm>
+          <a:prstGeom prst="rect">
+            <a:avLst/>
+          </a:prstGeom>
+          <a:noFill/>
+          <a:ln/>
+        </p:spPr>
+        <p:txBody>
+          <a:bodyPr wrap="square" lIns="0" tIns="0" rIns="0" bIns="0" rtlCol="0" anchor="t"/>
+          <a:lstStyle/>
+          <a:p>
+            <a:pPr indent="0" marL="0">
+              <a:buNone/>
+            </a:pPr>
+            <a:r>
+              <a:rPr lang="en-US" sz="1250" dirty="0">
+                <a:solidFill>
+                  <a:srgbClr val="26262F"/>
+                </a:solidFill>
+                <a:latin typeface="Calibri" pitchFamily="34" charset="0"/>
+                <a:ea typeface="Calibri" pitchFamily="34" charset="-122"/>
+                <a:cs typeface="Calibri" pitchFamily="34" charset="-120"/>
+              </a:rPr>
+              <a:t>A user can disable JavaScript or edit HTML in dev tools. Client-side validation is a convenience for instant feedback — it is not security. Every submission must also be validated again on the server.</a:t>
+            </a:r>
+            <a:endParaRPr lang="en-US" sz="1250" dirty="0"/>
+          </a:p>
+        </p:txBody>
+      </p:sp>
+      <p:sp>
+        <p:nvSpPr>
+          <p:cNvPr id="7" name="Text 5"/>
+          <p:cNvSpPr txBox="1"/>
+          <p:nvPr/>
+        </p:nvSpPr>
+        <p:spPr>
+          <a:xfrm>
+            <a:off x="640080" y="6446520"/>
+            <a:ext cx="8686800" cy="292608"/>
+          </a:xfrm>
+          <a:prstGeom prst="rect">
+            <a:avLst/>
+          </a:prstGeom>
+          <a:noFill/>
+          <a:ln/>
+        </p:spPr>
+        <p:txBody>
+          <a:bodyPr wrap="square" lIns="0" tIns="0" rIns="0" bIns="0" rtlCol="0" anchor="ctr"/>
+          <a:lstStyle/>
+          <a:p>
+            <a:pPr algn="l" indent="0" marL="0">
+              <a:buNone/>
+            </a:pPr>
+            <a:r>
+              <a:rPr lang="en-US" sz="900" dirty="0">
+                <a:solidFill>
+                  <a:srgbClr val="5D5D72"/>
+                </a:solidFill>
+                <a:latin typeface="Calibri" pitchFamily="34" charset="0"/>
+                <a:ea typeface="Calibri" pitchFamily="34" charset="-122"/>
+                <a:cs typeface="Calibri" pitchFamily="34" charset="-120"/>
+              </a:rPr>
+              <a:t>Usman Akram  •  COMSATS University Islamabad</a:t>
+            </a:r>
+            <a:endParaRPr lang="en-US" sz="900" dirty="0"/>
+          </a:p>
+        </p:txBody>
+      </p:sp>
+      <p:sp>
+        <p:nvSpPr>
+          <p:cNvPr id="8" name="Text 6"/>
+          <p:cNvSpPr txBox="1"/>
+          <p:nvPr/>
+        </p:nvSpPr>
+        <p:spPr>
+          <a:xfrm>
+            <a:off x="11155680" y="6446520"/>
+            <a:ext cx="457200" cy="292608"/>
+          </a:xfrm>
+          <a:prstGeom prst="rect">
+            <a:avLst/>
+          </a:prstGeom>
+          <a:noFill/>
+          <a:ln/>
+        </p:spPr>
+        <p:txBody>
+          <a:bodyPr wrap="square" lIns="0" tIns="0" rIns="0" bIns="0" rtlCol="0" anchor="ctr"/>
+          <a:lstStyle/>
+          <a:p>
+            <a:pPr algn="r" indent="0" marL="0">
+              <a:buNone/>
+            </a:pPr>
+            <a:r>
+              <a:rPr lang="en-US" sz="900" dirty="0">
+                <a:solidFill>
+                  <a:srgbClr val="5D5D72"/>
+                </a:solidFill>
+                <a:latin typeface="Calibri" pitchFamily="34" charset="0"/>
+                <a:ea typeface="Calibri" pitchFamily="34" charset="-122"/>
+                <a:cs typeface="Calibri" pitchFamily="34" charset="-120"/>
+              </a:rPr>
+              <a:t>26</a:t>
+            </a:r>
+            <a:endParaRPr lang="en-US" sz="900" dirty="0"/>
+          </a:p>
+        </p:txBody>
+      </p:sp>
+    </p:spTree>
+  </p:cSld>
+  <p:clrMapOvr>
+    <a:masterClrMapping/>
+  </p:clrMapOvr>
+</p:sld>
+</file>
+
+<file path=ppt/slides/slide27.xml><?xml version="1.0" encoding="utf-8"?>
+<p:sld xmlns:a="http://schemas.openxmlformats.org/drawingml/2006/main" xmlns:r="http://schemas.openxmlformats.org/officeDocument/2006/relationships" xmlns:p="http://schemas.openxmlformats.org/presentationml/2006/main">
+  <p:cSld name="Slide 27">
     <p:bg>
       <p:bgPr>
         <a:solidFill>
@@ -11598,7 +13186,7 @@
                 <a:ea typeface="Calibri" pitchFamily="34" charset="-122"/>
                 <a:cs typeface="Calibri" pitchFamily="34" charset="-120"/>
               </a:rPr>
-              <a:t>25</a:t>
+              <a:t>27</a:t>
             </a:r>
             <a:endParaRPr lang="en-US" sz="900" dirty="0"/>
           </a:p>
@@ -11761,12 +13349,145 @@
         </p:nvSpPr>
         <p:spPr>
           <a:xfrm>
-            <a:off x="530352" y="2221992"/>
-            <a:ext cx="11130991" cy="4059936"/>
+            <a:off x="640080" y="2240280"/>
+            <a:ext cx="10911535" cy="1739265"/>
           </a:xfrm>
           <a:prstGeom prst="roundRect">
             <a:avLst>
-              <a:gd name="adj" fmla="val 1351"/>
+              <a:gd name="adj" fmla="val 4206"/>
+            </a:avLst>
+          </a:prstGeom>
+          <a:solidFill>
+            <a:srgbClr val="1E1E4C"/>
+          </a:solidFill>
+          <a:ln/>
+        </p:spPr>
+      </p:sp>
+      <p:sp>
+        <p:nvSpPr>
+          <p:cNvPr id="6" name="Text 4"/>
+          <p:cNvSpPr txBox="1"/>
+          <p:nvPr/>
+        </p:nvSpPr>
+        <p:spPr>
+          <a:xfrm>
+            <a:off x="960120" y="2468880"/>
+            <a:ext cx="10271455" cy="1282065"/>
+          </a:xfrm>
+          <a:prstGeom prst="rect">
+            <a:avLst/>
+          </a:prstGeom>
+          <a:noFill/>
+          <a:ln/>
+        </p:spPr>
+        <p:txBody>
+          <a:bodyPr wrap="square" lIns="0" tIns="0" rIns="0" bIns="0" rtlCol="0" anchor="t"/>
+          <a:lstStyle/>
+          <a:p>
+            <a:pPr indent="0" marL="0">
+              <a:lnSpc>
+                <a:spcPct val="125000"/>
+              </a:lnSpc>
+              <a:buNone/>
+            </a:pPr>
+            <a:r>
+              <a:rPr lang="en-US" sz="1250" dirty="0">
+                <a:solidFill>
+                  <a:srgbClr val="C9D3F5"/>
+                </a:solidFill>
+                <a:latin typeface="Courier New" pitchFamily="34" charset="0"/>
+                <a:ea typeface="Courier New" pitchFamily="34" charset="-122"/>
+                <a:cs typeface="Courier New" pitchFamily="34" charset="-120"/>
+              </a:rPr>
+              <a:t>&lt;p&gt;This is a block-level paragraph.&lt;/p&gt;</a:t>
+            </a:r>
+            <a:endParaRPr lang="en-US" sz="1250" dirty="0"/>
+          </a:p>
+          <a:p>
+            <a:pPr indent="0" marL="0">
+              <a:lnSpc>
+                <a:spcPct val="125000"/>
+              </a:lnSpc>
+              <a:buNone/>
+            </a:pPr>
+            <a:r>
+              <a:rPr lang="en-US" sz="1250" dirty="0">
+                <a:solidFill>
+                  <a:srgbClr val="C9D3F5"/>
+                </a:solidFill>
+                <a:latin typeface="Courier New" pitchFamily="34" charset="0"/>
+                <a:ea typeface="Courier New" pitchFamily="34" charset="-122"/>
+                <a:cs typeface="Courier New" pitchFamily="34" charset="-120"/>
+              </a:rPr>
+              <a:t>&lt;p&gt;This is another block — starts on its own line.&lt;/p&gt;</a:t>
+            </a:r>
+            <a:endParaRPr lang="en-US" sz="1250" dirty="0"/>
+          </a:p>
+          <a:p>
+            <a:pPr indent="0" marL="0">
+              <a:lnSpc>
+                <a:spcPct val="125000"/>
+              </a:lnSpc>
+              <a:buNone/>
+            </a:pPr>
+            <a:endParaRPr lang="en-US" sz="1250" dirty="0"/>
+          </a:p>
+          <a:p>
+            <a:pPr indent="0" marL="0">
+              <a:lnSpc>
+                <a:spcPct val="125000"/>
+              </a:lnSpc>
+              <a:buNone/>
+            </a:pPr>
+            <a:r>
+              <a:rPr lang="en-US" sz="1250" dirty="0">
+                <a:solidFill>
+                  <a:srgbClr val="C9D3F5"/>
+                </a:solidFill>
+                <a:latin typeface="Courier New" pitchFamily="34" charset="0"/>
+                <a:ea typeface="Courier New" pitchFamily="34" charset="-122"/>
+                <a:cs typeface="Courier New" pitchFamily="34" charset="-120"/>
+              </a:rPr>
+              <a:t>&lt;p&gt;This sentence has an &lt;strong&gt;inline bold word&lt;/strong&gt; and an</a:t>
+            </a:r>
+            <a:endParaRPr lang="en-US" sz="1250" dirty="0"/>
+          </a:p>
+          <a:p>
+            <a:pPr indent="0" marL="0">
+              <a:lnSpc>
+                <a:spcPct val="125000"/>
+              </a:lnSpc>
+              <a:buNone/>
+            </a:pPr>
+            <a:r>
+              <a:rPr lang="en-US" sz="1250" dirty="0">
+                <a:solidFill>
+                  <a:srgbClr val="C9D3F5"/>
+                </a:solidFill>
+                <a:latin typeface="Courier New" pitchFamily="34" charset="0"/>
+                <a:ea typeface="Courier New" pitchFamily="34" charset="-122"/>
+                <a:cs typeface="Courier New" pitchFamily="34" charset="-120"/>
+              </a:rPr>
+              <a:t>&lt;a href="#"&gt;inline link&lt;/a&gt; in the flow of the text.&lt;/p&gt;</a:t>
+            </a:r>
+            <a:endParaRPr lang="en-US" sz="1250" dirty="0"/>
+          </a:p>
+        </p:txBody>
+      </p:sp>
+      <p:sp>
+        <p:nvSpPr>
+          <p:cNvPr id="7" name="Shape 5"/>
+          <p:cNvSpPr/>
+          <p:nvPr/>
+        </p:nvSpPr>
+        <p:spPr>
+          <a:xfrm>
+            <a:off x="530352" y="4144137"/>
+            <a:ext cx="11130991" cy="2183511"/>
+          </a:xfrm>
+          <a:prstGeom prst="roundRect">
+            <a:avLst>
+              <a:gd name="adj" fmla="val 2513"/>
             </a:avLst>
           </a:prstGeom>
           <a:solidFill>
@@ -11789,7 +13510,7 @@
       </p:sp>
       <p:pic>
         <p:nvPicPr>
-          <p:cNvPr id="6" name="Image 0" descr="D:/GitHub/mern-web-book/docs/assets/img/lecture-04/block-inline.png">    </p:cNvPr>
+          <p:cNvPr id="8" name="Image 0" descr="D:/GitHub/mern-web-book/docs/assets/img/lecture-04/block-inline.png">    </p:cNvPr>
           <p:cNvPicPr>
             <a:picLocks noChangeAspect="1"/>
           </p:cNvPicPr>
@@ -11803,7 +13524,7 @@
         </p:blipFill>
         <p:spPr>
           <a:xfrm>
-            <a:off x="640080" y="3368019"/>
+            <a:off x="640080" y="4351951"/>
             <a:ext cx="10911535" cy="1767882"/>
           </a:xfrm>
           <a:prstGeom prst="rect">
@@ -11813,7 +13534,7 @@
       </p:pic>
       <p:sp>
         <p:nvSpPr>
-          <p:cNvPr id="7" name="Text 4"/>
+          <p:cNvPr id="9" name="Text 6"/>
           <p:cNvSpPr txBox="1"/>
           <p:nvPr/>
         </p:nvSpPr>
@@ -11852,7 +13573,7 @@
       </p:sp>
       <p:sp>
         <p:nvSpPr>
-          <p:cNvPr id="8" name="Text 5"/>
+          <p:cNvPr id="10" name="Text 7"/>
           <p:cNvSpPr txBox="1"/>
           <p:nvPr/>
         </p:nvSpPr>
@@ -12046,12 +13767,145 @@
         </p:nvSpPr>
         <p:spPr>
           <a:xfrm>
-            <a:off x="530352" y="2221992"/>
-            <a:ext cx="11130991" cy="4059936"/>
+            <a:off x="640080" y="2240280"/>
+            <a:ext cx="10911535" cy="1739265"/>
           </a:xfrm>
           <a:prstGeom prst="roundRect">
             <a:avLst>
-              <a:gd name="adj" fmla="val 1351"/>
+              <a:gd name="adj" fmla="val 4206"/>
+            </a:avLst>
+          </a:prstGeom>
+          <a:solidFill>
+            <a:srgbClr val="1E1E4C"/>
+          </a:solidFill>
+          <a:ln/>
+        </p:spPr>
+      </p:sp>
+      <p:sp>
+        <p:nvSpPr>
+          <p:cNvPr id="6" name="Text 4"/>
+          <p:cNvSpPr txBox="1"/>
+          <p:nvPr/>
+        </p:nvSpPr>
+        <p:spPr>
+          <a:xfrm>
+            <a:off x="960120" y="2468880"/>
+            <a:ext cx="10271455" cy="1282065"/>
+          </a:xfrm>
+          <a:prstGeom prst="rect">
+            <a:avLst/>
+          </a:prstGeom>
+          <a:noFill/>
+          <a:ln/>
+        </p:spPr>
+        <p:txBody>
+          <a:bodyPr wrap="square" lIns="0" tIns="0" rIns="0" bIns="0" rtlCol="0" anchor="t"/>
+          <a:lstStyle/>
+          <a:p>
+            <a:pPr indent="0" marL="0">
+              <a:lnSpc>
+                <a:spcPct val="125000"/>
+              </a:lnSpc>
+              <a:buNone/>
+            </a:pPr>
+            <a:r>
+              <a:rPr lang="en-US" sz="1250" dirty="0">
+                <a:solidFill>
+                  <a:srgbClr val="C9D3F5"/>
+                </a:solidFill>
+                <a:latin typeface="Courier New" pitchFamily="34" charset="0"/>
+                <a:ea typeface="Courier New" pitchFamily="34" charset="-122"/>
+                <a:cs typeface="Courier New" pitchFamily="34" charset="-120"/>
+              </a:rPr>
+              <a:t>&lt;div class="card"&gt;</a:t>
+            </a:r>
+            <a:endParaRPr lang="en-US" sz="1250" dirty="0"/>
+          </a:p>
+          <a:p>
+            <a:pPr indent="0" marL="0">
+              <a:lnSpc>
+                <a:spcPct val="125000"/>
+              </a:lnSpc>
+              <a:buNone/>
+            </a:pPr>
+            <a:r>
+              <a:rPr lang="en-US" sz="1250" dirty="0">
+                <a:solidFill>
+                  <a:srgbClr val="C9D3F5"/>
+                </a:solidFill>
+                <a:latin typeface="Courier New" pitchFamily="34" charset="0"/>
+                <a:ea typeface="Courier New" pitchFamily="34" charset="-122"/>
+                <a:cs typeface="Courier New" pitchFamily="34" charset="-120"/>
+              </a:rPr>
+              <a:t>    &lt;p&gt;Some content wrapped in a div so it can be styled as a "card".&lt;/p&gt;</a:t>
+            </a:r>
+            <a:endParaRPr lang="en-US" sz="1250" dirty="0"/>
+          </a:p>
+          <a:p>
+            <a:pPr indent="0" marL="0">
+              <a:lnSpc>
+                <a:spcPct val="125000"/>
+              </a:lnSpc>
+              <a:buNone/>
+            </a:pPr>
+            <a:r>
+              <a:rPr lang="en-US" sz="1250" dirty="0">
+                <a:solidFill>
+                  <a:srgbClr val="C9D3F5"/>
+                </a:solidFill>
+                <a:latin typeface="Courier New" pitchFamily="34" charset="0"/>
+                <a:ea typeface="Courier New" pitchFamily="34" charset="-122"/>
+                <a:cs typeface="Courier New" pitchFamily="34" charset="-120"/>
+              </a:rPr>
+              <a:t>&lt;/div&gt;</a:t>
+            </a:r>
+            <a:endParaRPr lang="en-US" sz="1250" dirty="0"/>
+          </a:p>
+          <a:p>
+            <a:pPr indent="0" marL="0">
+              <a:lnSpc>
+                <a:spcPct val="125000"/>
+              </a:lnSpc>
+              <a:buNone/>
+            </a:pPr>
+            <a:endParaRPr lang="en-US" sz="1250" dirty="0"/>
+          </a:p>
+          <a:p>
+            <a:pPr indent="0" marL="0">
+              <a:lnSpc>
+                <a:spcPct val="125000"/>
+              </a:lnSpc>
+              <a:buNone/>
+            </a:pPr>
+            <a:r>
+              <a:rPr lang="en-US" sz="1250" dirty="0">
+                <a:solidFill>
+                  <a:srgbClr val="C9D3F5"/>
+                </a:solidFill>
+                <a:latin typeface="Courier New" pitchFamily="34" charset="0"/>
+                <a:ea typeface="Courier New" pitchFamily="34" charset="-122"/>
+                <a:cs typeface="Courier New" pitchFamily="34" charset="-120"/>
+              </a:rPr>
+              <a:t>&lt;p&gt;The price is &lt;span class="highlight-price"&gt;$25&lt;/span&gt; today only.&lt;/p&gt;</a:t>
+            </a:r>
+            <a:endParaRPr lang="en-US" sz="1250" dirty="0"/>
+          </a:p>
+        </p:txBody>
+      </p:sp>
+      <p:sp>
+        <p:nvSpPr>
+          <p:cNvPr id="7" name="Shape 5"/>
+          <p:cNvSpPr/>
+          <p:nvPr/>
+        </p:nvSpPr>
+        <p:spPr>
+          <a:xfrm>
+            <a:off x="530352" y="4144137"/>
+            <a:ext cx="11130991" cy="2183511"/>
+          </a:xfrm>
+          <a:prstGeom prst="roundRect">
+            <a:avLst>
+              <a:gd name="adj" fmla="val 2513"/>
             </a:avLst>
           </a:prstGeom>
           <a:solidFill>
@@ -12074,7 +13928,7 @@
       </p:sp>
       <p:pic>
         <p:nvPicPr>
-          <p:cNvPr id="6" name="Image 0" descr="D:/GitHub/mern-web-book/docs/assets/img/lecture-04/div-span.png">    </p:cNvPr>
+          <p:cNvPr id="8" name="Image 0" descr="D:/GitHub/mern-web-book/docs/assets/img/lecture-04/div-span.png">    </p:cNvPr>
           <p:cNvPicPr>
             <a:picLocks noChangeAspect="1"/>
           </p:cNvPicPr>
@@ -12088,7 +13942,7 @@
         </p:blipFill>
         <p:spPr>
           <a:xfrm>
-            <a:off x="640080" y="3502626"/>
+            <a:off x="640080" y="4486558"/>
             <a:ext cx="10911535" cy="1498668"/>
           </a:xfrm>
           <a:prstGeom prst="rect">
@@ -12098,7 +13952,7 @@
       </p:pic>
       <p:sp>
         <p:nvSpPr>
-          <p:cNvPr id="7" name="Text 4"/>
+          <p:cNvPr id="9" name="Text 6"/>
           <p:cNvSpPr txBox="1"/>
           <p:nvPr/>
         </p:nvSpPr>
@@ -12137,7 +13991,7 @@
       </p:sp>
       <p:sp>
         <p:nvSpPr>
-          <p:cNvPr id="8" name="Text 5"/>
+          <p:cNvPr id="10" name="Text 7"/>
           <p:cNvSpPr txBox="1"/>
           <p:nvPr/>
         </p:nvSpPr>
@@ -13994,7 +15848,7 @@
                 <a:ea typeface="Cambria" pitchFamily="34" charset="-122"/>
                 <a:cs typeface="Cambria" pitchFamily="34" charset="-120"/>
               </a:rPr>
-              <a:t>A Full Page Skeleton, Rendered</a:t>
+              <a:t>A Full Page Skeleton</a:t>
             </a:r>
             <a:endParaRPr lang="en-US" sz="3400" dirty="0"/>
           </a:p>
@@ -14002,14 +15856,238 @@
       </p:sp>
       <p:sp>
         <p:nvSpPr>
-          <p:cNvPr id="4" name="Text 2"/>
-          <p:cNvSpPr txBox="1"/>
-          <p:nvPr/>
-        </p:nvSpPr>
-        <p:spPr>
-          <a:xfrm>
-            <a:off x="640080" y="1691640"/>
-            <a:ext cx="10911535" cy="411480"/>
+          <p:cNvPr id="4" name="Shape 2"/>
+          <p:cNvSpPr/>
+          <p:nvPr/>
+        </p:nvSpPr>
+        <p:spPr>
+          <a:xfrm>
+            <a:off x="640080" y="1965960"/>
+            <a:ext cx="10911535" cy="2948940"/>
+          </a:xfrm>
+          <a:prstGeom prst="roundRect">
+            <a:avLst>
+              <a:gd name="adj" fmla="val 2481"/>
+            </a:avLst>
+          </a:prstGeom>
+          <a:solidFill>
+            <a:srgbClr val="1E1E4C"/>
+          </a:solidFill>
+          <a:ln/>
+        </p:spPr>
+      </p:sp>
+      <p:sp>
+        <p:nvSpPr>
+          <p:cNvPr id="5" name="Text 3"/>
+          <p:cNvSpPr txBox="1"/>
+          <p:nvPr/>
+        </p:nvSpPr>
+        <p:spPr>
+          <a:xfrm>
+            <a:off x="960120" y="2194560"/>
+            <a:ext cx="10271455" cy="2491740"/>
+          </a:xfrm>
+          <a:prstGeom prst="rect">
+            <a:avLst/>
+          </a:prstGeom>
+          <a:noFill/>
+          <a:ln/>
+        </p:spPr>
+        <p:txBody>
+          <a:bodyPr wrap="square" lIns="0" tIns="0" rIns="0" bIns="0" rtlCol="0" anchor="t"/>
+          <a:lstStyle/>
+          <a:p>
+            <a:pPr indent="0" marL="0">
+              <a:lnSpc>
+                <a:spcPct val="125000"/>
+              </a:lnSpc>
+              <a:buNone/>
+            </a:pPr>
+            <a:r>
+              <a:rPr lang="en-US" sz="1400" dirty="0">
+                <a:solidFill>
+                  <a:srgbClr val="C9D3F5"/>
+                </a:solidFill>
+                <a:latin typeface="Courier New" pitchFamily="34" charset="0"/>
+                <a:ea typeface="Courier New" pitchFamily="34" charset="-122"/>
+                <a:cs typeface="Courier New" pitchFamily="34" charset="-120"/>
+              </a:rPr>
+              <a:t>&lt;header&gt;</a:t>
+            </a:r>
+            <a:endParaRPr lang="en-US" sz="1400" dirty="0"/>
+          </a:p>
+          <a:p>
+            <a:pPr indent="0" marL="0">
+              <a:lnSpc>
+                <a:spcPct val="125000"/>
+              </a:lnSpc>
+              <a:buNone/>
+            </a:pPr>
+            <a:r>
+              <a:rPr lang="en-US" sz="1400" dirty="0">
+                <a:solidFill>
+                  <a:srgbClr val="C9D3F5"/>
+                </a:solidFill>
+                <a:latin typeface="Courier New" pitchFamily="34" charset="0"/>
+                <a:ea typeface="Courier New" pitchFamily="34" charset="-122"/>
+                <a:cs typeface="Courier New" pitchFamily="34" charset="-120"/>
+              </a:rPr>
+              <a:t>    &lt;h1&gt;My Tech Blog&lt;/h1&gt;</a:t>
+            </a:r>
+            <a:endParaRPr lang="en-US" sz="1400" dirty="0"/>
+          </a:p>
+          <a:p>
+            <a:pPr indent="0" marL="0">
+              <a:lnSpc>
+                <a:spcPct val="125000"/>
+              </a:lnSpc>
+              <a:buNone/>
+            </a:pPr>
+            <a:r>
+              <a:rPr lang="en-US" sz="1400" dirty="0">
+                <a:solidFill>
+                  <a:srgbClr val="C9D3F5"/>
+                </a:solidFill>
+                <a:latin typeface="Courier New" pitchFamily="34" charset="0"/>
+                <a:ea typeface="Courier New" pitchFamily="34" charset="-122"/>
+                <a:cs typeface="Courier New" pitchFamily="34" charset="-120"/>
+              </a:rPr>
+              <a:t>    &lt;nav&gt;&lt;a href="/"&gt;Home&lt;/a&gt; &lt;a href="/about.html"&gt;About&lt;/a&gt;&lt;/nav&gt;</a:t>
+            </a:r>
+            <a:endParaRPr lang="en-US" sz="1400" dirty="0"/>
+          </a:p>
+          <a:p>
+            <a:pPr indent="0" marL="0">
+              <a:lnSpc>
+                <a:spcPct val="125000"/>
+              </a:lnSpc>
+              <a:buNone/>
+            </a:pPr>
+            <a:r>
+              <a:rPr lang="en-US" sz="1400" dirty="0">
+                <a:solidFill>
+                  <a:srgbClr val="C9D3F5"/>
+                </a:solidFill>
+                <a:latin typeface="Courier New" pitchFamily="34" charset="0"/>
+                <a:ea typeface="Courier New" pitchFamily="34" charset="-122"/>
+                <a:cs typeface="Courier New" pitchFamily="34" charset="-120"/>
+              </a:rPr>
+              <a:t>&lt;/header&gt;</a:t>
+            </a:r>
+            <a:endParaRPr lang="en-US" sz="1400" dirty="0"/>
+          </a:p>
+          <a:p>
+            <a:pPr indent="0" marL="0">
+              <a:lnSpc>
+                <a:spcPct val="125000"/>
+              </a:lnSpc>
+              <a:buNone/>
+            </a:pPr>
+            <a:r>
+              <a:rPr lang="en-US" sz="1400" dirty="0">
+                <a:solidFill>
+                  <a:srgbClr val="C9D3F5"/>
+                </a:solidFill>
+                <a:latin typeface="Courier New" pitchFamily="34" charset="0"/>
+                <a:ea typeface="Courier New" pitchFamily="34" charset="-122"/>
+                <a:cs typeface="Courier New" pitchFamily="34" charset="-120"/>
+              </a:rPr>
+              <a:t>&lt;main&gt;</a:t>
+            </a:r>
+            <a:endParaRPr lang="en-US" sz="1400" dirty="0"/>
+          </a:p>
+          <a:p>
+            <a:pPr indent="0" marL="0">
+              <a:lnSpc>
+                <a:spcPct val="125000"/>
+              </a:lnSpc>
+              <a:buNone/>
+            </a:pPr>
+            <a:r>
+              <a:rPr lang="en-US" sz="1400" dirty="0">
+                <a:solidFill>
+                  <a:srgbClr val="C9D3F5"/>
+                </a:solidFill>
+                <a:latin typeface="Courier New" pitchFamily="34" charset="0"/>
+                <a:ea typeface="Courier New" pitchFamily="34" charset="-122"/>
+                <a:cs typeface="Courier New" pitchFamily="34" charset="-120"/>
+              </a:rPr>
+              <a:t>    &lt;article&gt;&lt;h2&gt;Why Semantic HTML Matters&lt;/h2&gt;&lt;p&gt;Semantic tags help everyone.&lt;/p&gt;&lt;/article&gt;</a:t>
+            </a:r>
+            <a:endParaRPr lang="en-US" sz="1400" dirty="0"/>
+          </a:p>
+          <a:p>
+            <a:pPr indent="0" marL="0">
+              <a:lnSpc>
+                <a:spcPct val="125000"/>
+              </a:lnSpc>
+              <a:buNone/>
+            </a:pPr>
+            <a:r>
+              <a:rPr lang="en-US" sz="1400" dirty="0">
+                <a:solidFill>
+                  <a:srgbClr val="C9D3F5"/>
+                </a:solidFill>
+                <a:latin typeface="Courier New" pitchFamily="34" charset="0"/>
+                <a:ea typeface="Courier New" pitchFamily="34" charset="-122"/>
+                <a:cs typeface="Courier New" pitchFamily="34" charset="-120"/>
+              </a:rPr>
+              <a:t>    &lt;aside&gt;&lt;h3&gt;Related Posts&lt;/h3&gt;&lt;/aside&gt;</a:t>
+            </a:r>
+            <a:endParaRPr lang="en-US" sz="1400" dirty="0"/>
+          </a:p>
+          <a:p>
+            <a:pPr indent="0" marL="0">
+              <a:lnSpc>
+                <a:spcPct val="125000"/>
+              </a:lnSpc>
+              <a:buNone/>
+            </a:pPr>
+            <a:r>
+              <a:rPr lang="en-US" sz="1400" dirty="0">
+                <a:solidFill>
+                  <a:srgbClr val="C9D3F5"/>
+                </a:solidFill>
+                <a:latin typeface="Courier New" pitchFamily="34" charset="0"/>
+                <a:ea typeface="Courier New" pitchFamily="34" charset="-122"/>
+                <a:cs typeface="Courier New" pitchFamily="34" charset="-120"/>
+              </a:rPr>
+              <a:t>&lt;/main&gt;</a:t>
+            </a:r>
+            <a:endParaRPr lang="en-US" sz="1400" dirty="0"/>
+          </a:p>
+          <a:p>
+            <a:pPr indent="0" marL="0">
+              <a:lnSpc>
+                <a:spcPct val="125000"/>
+              </a:lnSpc>
+              <a:buNone/>
+            </a:pPr>
+            <a:r>
+              <a:rPr lang="en-US" sz="1400" dirty="0">
+                <a:solidFill>
+                  <a:srgbClr val="C9D3F5"/>
+                </a:solidFill>
+                <a:latin typeface="Courier New" pitchFamily="34" charset="0"/>
+                <a:ea typeface="Courier New" pitchFamily="34" charset="-122"/>
+                <a:cs typeface="Courier New" pitchFamily="34" charset="-120"/>
+              </a:rPr>
+              <a:t>&lt;footer&gt;&lt;p&gt;&amp;copy; 2026 My Tech Blog.&lt;/p&gt;&lt;/footer&gt;</a:t>
+            </a:r>
+            <a:endParaRPr lang="en-US" sz="1400" dirty="0"/>
+          </a:p>
+        </p:txBody>
+      </p:sp>
+      <p:sp>
+        <p:nvSpPr>
+          <p:cNvPr id="6" name="Text 4"/>
+          <p:cNvSpPr txBox="1"/>
+          <p:nvPr/>
+        </p:nvSpPr>
+        <p:spPr>
+          <a:xfrm>
+            <a:off x="640080" y="6446520"/>
+            <a:ext cx="8686800" cy="292608"/>
           </a:xfrm>
           <a:prstGeom prst="rect">
             <a:avLst/>
@@ -14021,11 +16099,11 @@
           <a:bodyPr wrap="square" lIns="0" tIns="0" rIns="0" bIns="0" rtlCol="0" anchor="ctr"/>
           <a:lstStyle/>
           <a:p>
-            <a:pPr indent="0" marL="0">
-              <a:buNone/>
-            </a:pPr>
-            <a:r>
-              <a:rPr lang="en-US" sz="1350" i="1" dirty="0">
+            <a:pPr algn="l" indent="0" marL="0">
+              <a:buNone/>
+            </a:pPr>
+            <a:r>
+              <a:rPr lang="en-US" sz="900" dirty="0">
                 <a:solidFill>
                   <a:srgbClr val="5D5D72"/>
                 </a:solidFill>
@@ -14033,103 +16111,6 @@
                 <a:ea typeface="Calibri" pitchFamily="34" charset="-122"/>
                 <a:cs typeface="Calibri" pitchFamily="34" charset="-120"/>
               </a:rPr>
-              <a:t>Semantic elements have no built-in visual style — but every section genuinely exists in the markup.</a:t>
-            </a:r>
-            <a:endParaRPr lang="en-US" sz="1350" dirty="0"/>
-          </a:p>
-        </p:txBody>
-      </p:sp>
-      <p:sp>
-        <p:nvSpPr>
-          <p:cNvPr id="5" name="Shape 3"/>
-          <p:cNvSpPr/>
-          <p:nvPr/>
-        </p:nvSpPr>
-        <p:spPr>
-          <a:xfrm>
-            <a:off x="530352" y="2221992"/>
-            <a:ext cx="11130991" cy="4059936"/>
-          </a:xfrm>
-          <a:prstGeom prst="roundRect">
-            <a:avLst>
-              <a:gd name="adj" fmla="val 1351"/>
-            </a:avLst>
-          </a:prstGeom>
-          <a:solidFill>
-            <a:srgbClr val="FFFFFF"/>
-          </a:solidFill>
-          <a:ln w="12700">
-            <a:solidFill>
-              <a:srgbClr val="E2E2EE"/>
-            </a:solidFill>
-            <a:prstDash val="solid"/>
-          </a:ln>
-          <a:effectLst>
-            <a:outerShdw sx="100000" sy="100000" kx="0" ky="0" algn="bl" rotWithShape="0" blurRad="101600" dist="38100" dir="5400000">
-              <a:srgbClr val="000000">
-                <a:alpha val="12000"/>
-              </a:srgbClr>
-            </a:outerShdw>
-          </a:effectLst>
-        </p:spPr>
-      </p:sp>
-      <p:pic>
-        <p:nvPicPr>
-          <p:cNvPr id="6" name="Image 0" descr="D:/GitHub/mern-web-book/docs/assets/img/lecture-04/semantic-skeleton.png">    </p:cNvPr>
-          <p:cNvPicPr>
-            <a:picLocks noChangeAspect="1"/>
-          </p:cNvPicPr>
-          <p:nvPr/>
-        </p:nvPicPr>
-        <p:blipFill>
-          <a:blip r:embed="rId1"/>
-          <a:stretch>
-            <a:fillRect/>
-          </a:stretch>
-        </p:blipFill>
-        <p:spPr>
-          <a:xfrm>
-            <a:off x="2221244" y="2331720"/>
-            <a:ext cx="7749208" cy="3840480"/>
-          </a:xfrm>
-          <a:prstGeom prst="rect">
-            <a:avLst/>
-          </a:prstGeom>
-        </p:spPr>
-      </p:pic>
-      <p:sp>
-        <p:nvSpPr>
-          <p:cNvPr id="7" name="Text 4"/>
-          <p:cNvSpPr txBox="1"/>
-          <p:nvPr/>
-        </p:nvSpPr>
-        <p:spPr>
-          <a:xfrm>
-            <a:off x="640080" y="6446520"/>
-            <a:ext cx="8686800" cy="292608"/>
-          </a:xfrm>
-          <a:prstGeom prst="rect">
-            <a:avLst/>
-          </a:prstGeom>
-          <a:noFill/>
-          <a:ln/>
-        </p:spPr>
-        <p:txBody>
-          <a:bodyPr wrap="square" lIns="0" tIns="0" rIns="0" bIns="0" rtlCol="0" anchor="ctr"/>
-          <a:lstStyle/>
-          <a:p>
-            <a:pPr algn="l" indent="0" marL="0">
-              <a:buNone/>
-            </a:pPr>
-            <a:r>
-              <a:rPr lang="en-US" sz="900" dirty="0">
-                <a:solidFill>
-                  <a:srgbClr val="5D5D72"/>
-                </a:solidFill>
-                <a:latin typeface="Calibri" pitchFamily="34" charset="0"/>
-                <a:ea typeface="Calibri" pitchFamily="34" charset="-122"/>
-                <a:cs typeface="Calibri" pitchFamily="34" charset="-120"/>
-              </a:rPr>
               <a:t>Usman Akram  •  COMSATS University Islamabad</a:t>
             </a:r>
             <a:endParaRPr lang="en-US" sz="900" dirty="0"/>
@@ -14138,7 +16119,7 @@
       </p:sp>
       <p:sp>
         <p:nvSpPr>
-          <p:cNvPr id="8" name="Text 5"/>
+          <p:cNvPr id="7" name="Text 5"/>
           <p:cNvSpPr txBox="1"/>
           <p:nvPr/>
         </p:nvSpPr>
@@ -14240,7 +16221,7 @@
                 <a:ea typeface="Calibri" pitchFamily="34" charset="-122"/>
                 <a:cs typeface="Calibri" pitchFamily="34" charset="-120"/>
               </a:rPr>
-              <a:t>WHY IT MATTERS</a:t>
+              <a:t>SEMANTIC HTML</a:t>
             </a:r>
             <a:endParaRPr lang="en-US" sz="1300" dirty="0"/>
           </a:p>
@@ -14279,7 +16260,7 @@
                 <a:ea typeface="Cambria" pitchFamily="34" charset="-122"/>
                 <a:cs typeface="Cambria" pitchFamily="34" charset="-120"/>
               </a:rPr>
-              <a:t>Accessibility and SEO</a:t>
+              <a:t>A Full Page Skeleton, Rendered</a:t>
             </a:r>
             <a:endParaRPr lang="en-US" sz="3400" dirty="0"/>
           </a:p>
@@ -14287,34 +16268,14 @@
       </p:sp>
       <p:sp>
         <p:nvSpPr>
-          <p:cNvPr id="4" name="Shape 2"/>
-          <p:cNvSpPr/>
-          <p:nvPr/>
-        </p:nvSpPr>
-        <p:spPr>
-          <a:xfrm>
-            <a:off x="685800" y="2185416"/>
-            <a:ext cx="82296" cy="82296"/>
-          </a:xfrm>
-          <a:prstGeom prst="ellipse">
-            <a:avLst/>
-          </a:prstGeom>
-          <a:solidFill>
-            <a:srgbClr val="FF8A3D"/>
-          </a:solidFill>
-          <a:ln/>
-        </p:spPr>
-      </p:sp>
-      <p:sp>
-        <p:nvSpPr>
-          <p:cNvPr id="5" name="Text 3"/>
-          <p:cNvSpPr txBox="1"/>
-          <p:nvPr/>
-        </p:nvSpPr>
-        <p:spPr>
-          <a:xfrm>
-            <a:off x="960120" y="1892808"/>
-            <a:ext cx="10591495" cy="640080"/>
+          <p:cNvPr id="4" name="Text 2"/>
+          <p:cNvSpPr txBox="1"/>
+          <p:nvPr/>
+        </p:nvSpPr>
+        <p:spPr>
+          <a:xfrm>
+            <a:off x="640080" y="1691640"/>
+            <a:ext cx="10911535" cy="411480"/>
           </a:xfrm>
           <a:prstGeom prst="rect">
             <a:avLst/>
@@ -14330,50 +16291,88 @@
               <a:buNone/>
             </a:pPr>
             <a:r>
-              <a:rPr lang="en-US" sz="1500" dirty="0">
-                <a:solidFill>
-                  <a:srgbClr val="26262F"/>
+              <a:rPr lang="en-US" sz="1350" i="1" dirty="0">
+                <a:solidFill>
+                  <a:srgbClr val="5D5D72"/>
                 </a:solidFill>
                 <a:latin typeface="Calibri" pitchFamily="34" charset="0"/>
                 <a:ea typeface="Calibri" pitchFamily="34" charset="-122"/>
                 <a:cs typeface="Calibri" pitchFamily="34" charset="-120"/>
               </a:rPr>
-              <a:t>Accessibility: screen readers use semantic tags to jump to navigation or skip to main content — a div-only page gives them nothing to work with</a:t>
-            </a:r>
-            <a:endParaRPr lang="en-US" sz="1500" dirty="0"/>
-          </a:p>
-        </p:txBody>
-      </p:sp>
-      <p:sp>
-        <p:nvSpPr>
-          <p:cNvPr id="6" name="Shape 4"/>
+              <a:t>Semantic elements have no built-in visual style — but every section genuinely exists in the markup.</a:t>
+            </a:r>
+            <a:endParaRPr lang="en-US" sz="1350" dirty="0"/>
+          </a:p>
+        </p:txBody>
+      </p:sp>
+      <p:sp>
+        <p:nvSpPr>
+          <p:cNvPr id="5" name="Shape 3"/>
           <p:cNvSpPr/>
           <p:nvPr/>
         </p:nvSpPr>
         <p:spPr>
           <a:xfrm>
-            <a:off x="685800" y="3008376"/>
-            <a:ext cx="82296" cy="82296"/>
-          </a:xfrm>
-          <a:prstGeom prst="ellipse">
-            <a:avLst/>
+            <a:off x="530352" y="2221992"/>
+            <a:ext cx="11130991" cy="4059936"/>
+          </a:xfrm>
+          <a:prstGeom prst="roundRect">
+            <a:avLst>
+              <a:gd name="adj" fmla="val 1351"/>
+            </a:avLst>
           </a:prstGeom>
           <a:solidFill>
-            <a:srgbClr val="FF8A3D"/>
+            <a:srgbClr val="FFFFFF"/>
           </a:solidFill>
-          <a:ln/>
-        </p:spPr>
-      </p:sp>
-      <p:sp>
-        <p:nvSpPr>
-          <p:cNvPr id="7" name="Text 5"/>
-          <p:cNvSpPr txBox="1"/>
-          <p:nvPr/>
-        </p:nvSpPr>
-        <p:spPr>
-          <a:xfrm>
-            <a:off x="960120" y="2715768"/>
-            <a:ext cx="10591495" cy="640080"/>
+          <a:ln w="12700">
+            <a:solidFill>
+              <a:srgbClr val="E2E2EE"/>
+            </a:solidFill>
+            <a:prstDash val="solid"/>
+          </a:ln>
+          <a:effectLst>
+            <a:outerShdw sx="100000" sy="100000" kx="0" ky="0" algn="bl" rotWithShape="0" blurRad="101600" dist="38100" dir="5400000">
+              <a:srgbClr val="000000">
+                <a:alpha val="12000"/>
+              </a:srgbClr>
+            </a:outerShdw>
+          </a:effectLst>
+        </p:spPr>
+      </p:sp>
+      <p:pic>
+        <p:nvPicPr>
+          <p:cNvPr id="6" name="Image 0" descr="D:/GitHub/mern-web-book/docs/assets/img/lecture-04/semantic-skeleton.png">    </p:cNvPr>
+          <p:cNvPicPr>
+            <a:picLocks noChangeAspect="1"/>
+          </p:cNvPicPr>
+          <p:nvPr/>
+        </p:nvPicPr>
+        <p:blipFill>
+          <a:blip r:embed="rId1"/>
+          <a:stretch>
+            <a:fillRect/>
+          </a:stretch>
+        </p:blipFill>
+        <p:spPr>
+          <a:xfrm>
+            <a:off x="2221244" y="2331720"/>
+            <a:ext cx="7749208" cy="3840480"/>
+          </a:xfrm>
+          <a:prstGeom prst="rect">
+            <a:avLst/>
+          </a:prstGeom>
+        </p:spPr>
+      </p:pic>
+      <p:sp>
+        <p:nvSpPr>
+          <p:cNvPr id="7" name="Text 4"/>
+          <p:cNvSpPr txBox="1"/>
+          <p:nvPr/>
+        </p:nvSpPr>
+        <p:spPr>
+          <a:xfrm>
+            <a:off x="640080" y="6446520"/>
+            <a:ext cx="8686800" cy="292608"/>
           </a:xfrm>
           <a:prstGeom prst="rect">
             <a:avLst/>
@@ -14385,116 +16384,18 @@
           <a:bodyPr wrap="square" lIns="0" tIns="0" rIns="0" bIns="0" rtlCol="0" anchor="ctr"/>
           <a:lstStyle/>
           <a:p>
-            <a:pPr indent="0" marL="0">
-              <a:buNone/>
-            </a:pPr>
-            <a:r>
-              <a:rPr lang="en-US" sz="1500" dirty="0">
-                <a:solidFill>
-                  <a:srgbClr val="26262F"/>
+            <a:pPr algn="l" indent="0" marL="0">
+              <a:buNone/>
+            </a:pPr>
+            <a:r>
+              <a:rPr lang="en-US" sz="900" dirty="0">
+                <a:solidFill>
+                  <a:srgbClr val="5D5D72"/>
                 </a:solidFill>
                 <a:latin typeface="Calibri" pitchFamily="34" charset="0"/>
                 <a:ea typeface="Calibri" pitchFamily="34" charset="-122"/>
                 <a:cs typeface="Calibri" pitchFamily="34" charset="-120"/>
               </a:rPr>
-              <a:t>SEO: search engines weight content inside &lt;article&gt;/&lt;main&gt;/headings more than anonymous &lt;div&gt;s</a:t>
-            </a:r>
-            <a:endParaRPr lang="en-US" sz="1500" dirty="0"/>
-          </a:p>
-        </p:txBody>
-      </p:sp>
-      <p:sp>
-        <p:nvSpPr>
-          <p:cNvPr id="8" name="Shape 6"/>
-          <p:cNvSpPr/>
-          <p:nvPr/>
-        </p:nvSpPr>
-        <p:spPr>
-          <a:xfrm>
-            <a:off x="685800" y="3831336"/>
-            <a:ext cx="82296" cy="82296"/>
-          </a:xfrm>
-          <a:prstGeom prst="ellipse">
-            <a:avLst/>
-          </a:prstGeom>
-          <a:solidFill>
-            <a:srgbClr val="FF8A3D"/>
-          </a:solidFill>
-          <a:ln/>
-        </p:spPr>
-      </p:sp>
-      <p:sp>
-        <p:nvSpPr>
-          <p:cNvPr id="9" name="Text 7"/>
-          <p:cNvSpPr txBox="1"/>
-          <p:nvPr/>
-        </p:nvSpPr>
-        <p:spPr>
-          <a:xfrm>
-            <a:off x="960120" y="3538728"/>
-            <a:ext cx="10591495" cy="640080"/>
-          </a:xfrm>
-          <a:prstGeom prst="rect">
-            <a:avLst/>
-          </a:prstGeom>
-          <a:noFill/>
-          <a:ln/>
-        </p:spPr>
-        <p:txBody>
-          <a:bodyPr wrap="square" lIns="0" tIns="0" rIns="0" bIns="0" rtlCol="0" anchor="ctr"/>
-          <a:lstStyle/>
-          <a:p>
-            <a:pPr indent="0" marL="0">
-              <a:buNone/>
-            </a:pPr>
-            <a:r>
-              <a:rPr lang="en-US" sz="1500" dirty="0">
-                <a:solidFill>
-                  <a:srgbClr val="26262F"/>
-                </a:solidFill>
-                <a:latin typeface="Calibri" pitchFamily="34" charset="0"/>
-                <a:ea typeface="Calibri" pitchFamily="34" charset="-122"/>
-                <a:cs typeface="Calibri" pitchFamily="34" charset="-120"/>
-              </a:rPr>
-              <a:t>Rule of thumb: reach for a semantic element first; fall back to &lt;div&gt;/&lt;span&gt; only when nothing else fits</a:t>
-            </a:r>
-            <a:endParaRPr lang="en-US" sz="1500" dirty="0"/>
-          </a:p>
-        </p:txBody>
-      </p:sp>
-      <p:sp>
-        <p:nvSpPr>
-          <p:cNvPr id="10" name="Text 8"/>
-          <p:cNvSpPr txBox="1"/>
-          <p:nvPr/>
-        </p:nvSpPr>
-        <p:spPr>
-          <a:xfrm>
-            <a:off x="640080" y="6446520"/>
-            <a:ext cx="8686800" cy="292608"/>
-          </a:xfrm>
-          <a:prstGeom prst="rect">
-            <a:avLst/>
-          </a:prstGeom>
-          <a:noFill/>
-          <a:ln/>
-        </p:spPr>
-        <p:txBody>
-          <a:bodyPr wrap="square" lIns="0" tIns="0" rIns="0" bIns="0" rtlCol="0" anchor="ctr"/>
-          <a:lstStyle/>
-          <a:p>
-            <a:pPr algn="l" indent="0" marL="0">
-              <a:buNone/>
-            </a:pPr>
-            <a:r>
-              <a:rPr lang="en-US" sz="900" dirty="0">
-                <a:solidFill>
-                  <a:srgbClr val="5D5D72"/>
-                </a:solidFill>
-                <a:latin typeface="Calibri" pitchFamily="34" charset="0"/>
-                <a:ea typeface="Calibri" pitchFamily="34" charset="-122"/>
-                <a:cs typeface="Calibri" pitchFamily="34" charset="-120"/>
-              </a:rPr>
               <a:t>Usman Akram  •  COMSATS University Islamabad</a:t>
             </a:r>
             <a:endParaRPr lang="en-US" sz="900" dirty="0"/>
@@ -14503,7 +16404,7 @@
       </p:sp>
       <p:sp>
         <p:nvSpPr>
-          <p:cNvPr id="11" name="Text 9"/>
+          <p:cNvPr id="8" name="Text 5"/>
           <p:cNvSpPr txBox="1"/>
           <p:nvPr/>
         </p:nvSpPr>
@@ -14605,7 +16506,7 @@
                 <a:ea typeface="Calibri" pitchFamily="34" charset="-122"/>
                 <a:cs typeface="Calibri" pitchFamily="34" charset="-120"/>
               </a:rPr>
-              <a:t>HTML FORMS</a:t>
+              <a:t>WHY IT MATTERS</a:t>
             </a:r>
             <a:endParaRPr lang="en-US" sz="1300" dirty="0"/>
           </a:p>
@@ -14644,7 +16545,7 @@
                 <a:ea typeface="Cambria" pitchFamily="34" charset="-122"/>
                 <a:cs typeface="Cambria" pitchFamily="34" charset="-120"/>
               </a:rPr>
-              <a:t>A Basic Form</a:t>
+              <a:t>Accessibility and SEO</a:t>
             </a:r>
             <a:endParaRPr lang="en-US" sz="3400" dirty="0"/>
           </a:p>
@@ -14658,16 +16559,14 @@
         </p:nvSpPr>
         <p:spPr>
           <a:xfrm>
-            <a:off x="640080" y="1965960"/>
-            <a:ext cx="10911535" cy="2606040"/>
-          </a:xfrm>
-          <a:prstGeom prst="roundRect">
-            <a:avLst>
-              <a:gd name="adj" fmla="val 2807"/>
-            </a:avLst>
+            <a:off x="685800" y="2185416"/>
+            <a:ext cx="82296" cy="82296"/>
+          </a:xfrm>
+          <a:prstGeom prst="ellipse">
+            <a:avLst/>
           </a:prstGeom>
           <a:solidFill>
-            <a:srgbClr val="1E1E4C"/>
+            <a:srgbClr val="FF8A3D"/>
           </a:solidFill>
           <a:ln/>
         </p:spPr>
@@ -14680,153 +16579,188 @@
         </p:nvSpPr>
         <p:spPr>
           <a:xfrm>
-            <a:off x="960120" y="2194560"/>
-            <a:ext cx="10271455" cy="2148840"/>
-          </a:xfrm>
-          <a:prstGeom prst="rect">
-            <a:avLst/>
-          </a:prstGeom>
-          <a:noFill/>
-          <a:ln/>
-        </p:spPr>
-        <p:txBody>
-          <a:bodyPr wrap="square" lIns="0" tIns="0" rIns="0" bIns="0" rtlCol="0" anchor="t"/>
+            <a:off x="960120" y="1892808"/>
+            <a:ext cx="10591495" cy="640080"/>
+          </a:xfrm>
+          <a:prstGeom prst="rect">
+            <a:avLst/>
+          </a:prstGeom>
+          <a:noFill/>
+          <a:ln/>
+        </p:spPr>
+        <p:txBody>
+          <a:bodyPr wrap="square" lIns="0" tIns="0" rIns="0" bIns="0" rtlCol="0" anchor="ctr"/>
           <a:lstStyle/>
           <a:p>
             <a:pPr indent="0" marL="0">
-              <a:lnSpc>
-                <a:spcPct val="125000"/>
-              </a:lnSpc>
-              <a:buNone/>
-            </a:pPr>
-            <a:r>
-              <a:rPr lang="en-US" sz="1400" dirty="0">
-                <a:solidFill>
-                  <a:srgbClr val="C9D3F5"/>
-                </a:solidFill>
-                <a:latin typeface="Courier New" pitchFamily="34" charset="0"/>
-                <a:ea typeface="Courier New" pitchFamily="34" charset="-122"/>
-                <a:cs typeface="Courier New" pitchFamily="34" charset="-120"/>
-              </a:rPr>
-              <a:t>&lt;form action="/submit-login" method="POST"&gt;</a:t>
-            </a:r>
-            <a:endParaRPr lang="en-US" sz="1400" dirty="0"/>
-          </a:p>
-          <a:p>
-            <a:pPr indent="0" marL="0">
-              <a:lnSpc>
-                <a:spcPct val="125000"/>
-              </a:lnSpc>
-              <a:buNone/>
-            </a:pPr>
-            <a:r>
-              <a:rPr lang="en-US" sz="1400" dirty="0">
-                <a:solidFill>
-                  <a:srgbClr val="C9D3F5"/>
-                </a:solidFill>
-                <a:latin typeface="Courier New" pitchFamily="34" charset="0"/>
-                <a:ea typeface="Courier New" pitchFamily="34" charset="-122"/>
-                <a:cs typeface="Courier New" pitchFamily="34" charset="-120"/>
-              </a:rPr>
-              <a:t>  &lt;label for="username"&gt;Username:&lt;/label&gt;</a:t>
-            </a:r>
-            <a:endParaRPr lang="en-US" sz="1400" dirty="0"/>
-          </a:p>
-          <a:p>
-            <a:pPr indent="0" marL="0">
-              <a:lnSpc>
-                <a:spcPct val="125000"/>
-              </a:lnSpc>
-              <a:buNone/>
-            </a:pPr>
-            <a:r>
-              <a:rPr lang="en-US" sz="1400" dirty="0">
-                <a:solidFill>
-                  <a:srgbClr val="C9D3F5"/>
-                </a:solidFill>
-                <a:latin typeface="Courier New" pitchFamily="34" charset="0"/>
-                <a:ea typeface="Courier New" pitchFamily="34" charset="-122"/>
-                <a:cs typeface="Courier New" pitchFamily="34" charset="-120"/>
-              </a:rPr>
-              <a:t>  &lt;input type="text" id="username" name="username"&gt;</a:t>
-            </a:r>
-            <a:endParaRPr lang="en-US" sz="1400" dirty="0"/>
-          </a:p>
-          <a:p>
-            <a:pPr indent="0" marL="0">
-              <a:lnSpc>
-                <a:spcPct val="125000"/>
-              </a:lnSpc>
-              <a:buNone/>
-            </a:pPr>
-            <a:r>
-              <a:rPr lang="en-US" sz="1400" dirty="0">
-                <a:solidFill>
-                  <a:srgbClr val="C9D3F5"/>
-                </a:solidFill>
-                <a:latin typeface="Courier New" pitchFamily="34" charset="0"/>
-                <a:ea typeface="Courier New" pitchFamily="34" charset="-122"/>
-                <a:cs typeface="Courier New" pitchFamily="34" charset="-120"/>
-              </a:rPr>
-              <a:t>  &lt;button type="submit"&gt;Log In&lt;/button&gt;</a:t>
-            </a:r>
-            <a:endParaRPr lang="en-US" sz="1400" dirty="0"/>
-          </a:p>
-          <a:p>
-            <a:pPr indent="0" marL="0">
-              <a:lnSpc>
-                <a:spcPct val="125000"/>
-              </a:lnSpc>
-              <a:buNone/>
-            </a:pPr>
-            <a:r>
-              <a:rPr lang="en-US" sz="1400" dirty="0">
-                <a:solidFill>
-                  <a:srgbClr val="C9D3F5"/>
-                </a:solidFill>
-                <a:latin typeface="Courier New" pitchFamily="34" charset="0"/>
-                <a:ea typeface="Courier New" pitchFamily="34" charset="-122"/>
-                <a:cs typeface="Courier New" pitchFamily="34" charset="-120"/>
-              </a:rPr>
-              <a:t>&lt;/form&gt;</a:t>
-            </a:r>
-            <a:endParaRPr lang="en-US" sz="1400" dirty="0"/>
-          </a:p>
-        </p:txBody>
-      </p:sp>
-      <p:sp>
-        <p:nvSpPr>
-          <p:cNvPr id="6" name="Text 4"/>
-          <p:cNvSpPr txBox="1"/>
-          <p:nvPr/>
-        </p:nvSpPr>
-        <p:spPr>
-          <a:xfrm>
-            <a:off x="640080" y="6446520"/>
-            <a:ext cx="8686800" cy="292608"/>
-          </a:xfrm>
-          <a:prstGeom prst="rect">
-            <a:avLst/>
-          </a:prstGeom>
-          <a:noFill/>
-          <a:ln/>
-        </p:spPr>
-        <p:txBody>
-          <a:bodyPr wrap="square" lIns="0" tIns="0" rIns="0" bIns="0" rtlCol="0" anchor="ctr"/>
-          <a:lstStyle/>
-          <a:p>
-            <a:pPr algn="l" indent="0" marL="0">
-              <a:buNone/>
-            </a:pPr>
-            <a:r>
-              <a:rPr lang="en-US" sz="900" dirty="0">
-                <a:solidFill>
-                  <a:srgbClr val="5D5D72"/>
+              <a:buNone/>
+            </a:pPr>
+            <a:r>
+              <a:rPr lang="en-US" sz="1500" dirty="0">
+                <a:solidFill>
+                  <a:srgbClr val="26262F"/>
                 </a:solidFill>
                 <a:latin typeface="Calibri" pitchFamily="34" charset="0"/>
                 <a:ea typeface="Calibri" pitchFamily="34" charset="-122"/>
                 <a:cs typeface="Calibri" pitchFamily="34" charset="-120"/>
               </a:rPr>
+              <a:t>Accessibility: screen readers use semantic tags to jump to navigation or skip to main content — a div-only page gives them nothing to work with</a:t>
+            </a:r>
+            <a:endParaRPr lang="en-US" sz="1500" dirty="0"/>
+          </a:p>
+        </p:txBody>
+      </p:sp>
+      <p:sp>
+        <p:nvSpPr>
+          <p:cNvPr id="6" name="Shape 4"/>
+          <p:cNvSpPr/>
+          <p:nvPr/>
+        </p:nvSpPr>
+        <p:spPr>
+          <a:xfrm>
+            <a:off x="685800" y="3008376"/>
+            <a:ext cx="82296" cy="82296"/>
+          </a:xfrm>
+          <a:prstGeom prst="ellipse">
+            <a:avLst/>
+          </a:prstGeom>
+          <a:solidFill>
+            <a:srgbClr val="FF8A3D"/>
+          </a:solidFill>
+          <a:ln/>
+        </p:spPr>
+      </p:sp>
+      <p:sp>
+        <p:nvSpPr>
+          <p:cNvPr id="7" name="Text 5"/>
+          <p:cNvSpPr txBox="1"/>
+          <p:nvPr/>
+        </p:nvSpPr>
+        <p:spPr>
+          <a:xfrm>
+            <a:off x="960120" y="2715768"/>
+            <a:ext cx="10591495" cy="640080"/>
+          </a:xfrm>
+          <a:prstGeom prst="rect">
+            <a:avLst/>
+          </a:prstGeom>
+          <a:noFill/>
+          <a:ln/>
+        </p:spPr>
+        <p:txBody>
+          <a:bodyPr wrap="square" lIns="0" tIns="0" rIns="0" bIns="0" rtlCol="0" anchor="ctr"/>
+          <a:lstStyle/>
+          <a:p>
+            <a:pPr indent="0" marL="0">
+              <a:buNone/>
+            </a:pPr>
+            <a:r>
+              <a:rPr lang="en-US" sz="1500" dirty="0">
+                <a:solidFill>
+                  <a:srgbClr val="26262F"/>
+                </a:solidFill>
+                <a:latin typeface="Calibri" pitchFamily="34" charset="0"/>
+                <a:ea typeface="Calibri" pitchFamily="34" charset="-122"/>
+                <a:cs typeface="Calibri" pitchFamily="34" charset="-120"/>
+              </a:rPr>
+              <a:t>SEO: search engines weight content inside &lt;article&gt;/&lt;main&gt;/headings more than anonymous &lt;div&gt;s</a:t>
+            </a:r>
+            <a:endParaRPr lang="en-US" sz="1500" dirty="0"/>
+          </a:p>
+        </p:txBody>
+      </p:sp>
+      <p:sp>
+        <p:nvSpPr>
+          <p:cNvPr id="8" name="Shape 6"/>
+          <p:cNvSpPr/>
+          <p:nvPr/>
+        </p:nvSpPr>
+        <p:spPr>
+          <a:xfrm>
+            <a:off x="685800" y="3831336"/>
+            <a:ext cx="82296" cy="82296"/>
+          </a:xfrm>
+          <a:prstGeom prst="ellipse">
+            <a:avLst/>
+          </a:prstGeom>
+          <a:solidFill>
+            <a:srgbClr val="FF8A3D"/>
+          </a:solidFill>
+          <a:ln/>
+        </p:spPr>
+      </p:sp>
+      <p:sp>
+        <p:nvSpPr>
+          <p:cNvPr id="9" name="Text 7"/>
+          <p:cNvSpPr txBox="1"/>
+          <p:nvPr/>
+        </p:nvSpPr>
+        <p:spPr>
+          <a:xfrm>
+            <a:off x="960120" y="3538728"/>
+            <a:ext cx="10591495" cy="640080"/>
+          </a:xfrm>
+          <a:prstGeom prst="rect">
+            <a:avLst/>
+          </a:prstGeom>
+          <a:noFill/>
+          <a:ln/>
+        </p:spPr>
+        <p:txBody>
+          <a:bodyPr wrap="square" lIns="0" tIns="0" rIns="0" bIns="0" rtlCol="0" anchor="ctr"/>
+          <a:lstStyle/>
+          <a:p>
+            <a:pPr indent="0" marL="0">
+              <a:buNone/>
+            </a:pPr>
+            <a:r>
+              <a:rPr lang="en-US" sz="1500" dirty="0">
+                <a:solidFill>
+                  <a:srgbClr val="26262F"/>
+                </a:solidFill>
+                <a:latin typeface="Calibri" pitchFamily="34" charset="0"/>
+                <a:ea typeface="Calibri" pitchFamily="34" charset="-122"/>
+                <a:cs typeface="Calibri" pitchFamily="34" charset="-120"/>
+              </a:rPr>
+              <a:t>Rule of thumb: reach for a semantic element first; fall back to &lt;div&gt;/&lt;span&gt; only when nothing else fits</a:t>
+            </a:r>
+            <a:endParaRPr lang="en-US" sz="1500" dirty="0"/>
+          </a:p>
+        </p:txBody>
+      </p:sp>
+      <p:sp>
+        <p:nvSpPr>
+          <p:cNvPr id="10" name="Text 8"/>
+          <p:cNvSpPr txBox="1"/>
+          <p:nvPr/>
+        </p:nvSpPr>
+        <p:spPr>
+          <a:xfrm>
+            <a:off x="640080" y="6446520"/>
+            <a:ext cx="8686800" cy="292608"/>
+          </a:xfrm>
+          <a:prstGeom prst="rect">
+            <a:avLst/>
+          </a:prstGeom>
+          <a:noFill/>
+          <a:ln/>
+        </p:spPr>
+        <p:txBody>
+          <a:bodyPr wrap="square" lIns="0" tIns="0" rIns="0" bIns="0" rtlCol="0" anchor="ctr"/>
+          <a:lstStyle/>
+          <a:p>
+            <a:pPr algn="l" indent="0" marL="0">
+              <a:buNone/>
+            </a:pPr>
+            <a:r>
+              <a:rPr lang="en-US" sz="900" dirty="0">
+                <a:solidFill>
+                  <a:srgbClr val="5D5D72"/>
+                </a:solidFill>
+                <a:latin typeface="Calibri" pitchFamily="34" charset="0"/>
+                <a:ea typeface="Calibri" pitchFamily="34" charset="-122"/>
+                <a:cs typeface="Calibri" pitchFamily="34" charset="-120"/>
+              </a:rPr>
               <a:t>Usman Akram  •  COMSATS University Islamabad</a:t>
             </a:r>
             <a:endParaRPr lang="en-US" sz="900" dirty="0"/>
@@ -14835,7 +16769,7 @@
       </p:sp>
       <p:sp>
         <p:nvSpPr>
-          <p:cNvPr id="7" name="Text 5"/>
+          <p:cNvPr id="11" name="Text 9"/>
           <p:cNvSpPr txBox="1"/>
           <p:nvPr/>
         </p:nvSpPr>

--- a/slides/CSC336-Lecture-04-Semantic-HTML-and-Forms.pptx
+++ b/slides/CSC336-Lecture-04-Semantic-HTML-and-Forms.pptx
@@ -32,9 +32,10 @@
     <p:sldId id="280" r:id="rId26"/>
     <p:sldId id="281" r:id="rId27"/>
     <p:sldId id="282" r:id="rId28"/>
+    <p:sldId id="283" r:id="rId29"/>
   </p:sldIdLst>
   <p:notesMasterIdLst>
-    <p:notesMasterId r:id="rId29"/>
+    <p:notesMasterId r:id="rId30"/>
   </p:notesMasterIdLst>
   <p:sldSz cx="12192000" cy="6858000"/>
   <p:notesSz cx="6858000" cy="12192000"/>
@@ -2224,6 +2225,94 @@
             <a:fld id="{F7021451-1387-4CA6-816F-3879F97B5CBC}" type="slidenum">
               <a:rPr lang="en-US"/>
               <a:t>27</a:t>
+            </a:fld>
+            <a:endParaRPr lang="en-US"/>
+          </a:p>
+        </p:txBody>
+      </p:sp>
+    </p:spTree>
+    <p:extLst>
+      <p:ext uri="{BB962C8B-B14F-4D97-AF65-F5344CB8AC3E}">
+        <p14:creationId xmlns:p14="http://schemas.microsoft.com/office/powerpoint/2010/main" val="1024086991"/>
+      </p:ext>
+    </p:extLst>
+  </p:cSld>
+  <p:clrMapOvr>
+    <a:masterClrMapping/>
+  </p:clrMapOvr>
+</p:notes>
+</file>
+
+<file path=ppt/notesSlides/notesSlide28.xml><?xml version="1.0" encoding="utf-8"?>
+<p:notes xmlns:a="http://schemas.openxmlformats.org/drawingml/2006/main" xmlns:r="http://schemas.openxmlformats.org/officeDocument/2006/relationships" xmlns:p="http://schemas.openxmlformats.org/presentationml/2006/main">
+  <p:cSld>
+    <p:spTree>
+      <p:nvGrpSpPr>
+        <p:cNvPr id="1" name=""/>
+        <p:cNvGrpSpPr/>
+        <p:nvPr/>
+      </p:nvGrpSpPr>
+      <p:grpSpPr>
+        <a:xfrm>
+          <a:off x="0" y="0"/>
+          <a:ext cx="0" cy="0"/>
+          <a:chOff x="0" y="0"/>
+          <a:chExt cx="0" cy="0"/>
+        </a:xfrm>
+      </p:grpSpPr>
+      <p:sp>
+        <p:nvSpPr>
+          <p:cNvPr id="2" name="Slide Image Placeholder 1"/>
+          <p:cNvSpPr>
+            <a:spLocks noGrp="1" noRot="1" noChangeAspect="1"/>
+          </p:cNvSpPr>
+          <p:nvPr>
+            <p:ph type="sldImg"/>
+          </p:nvPr>
+        </p:nvSpPr>
+        <p:spPr/>
+      </p:sp>
+      <p:sp>
+        <p:nvSpPr>
+          <p:cNvPr id="3" name="Notes Placeholder 2"/>
+          <p:cNvSpPr>
+            <a:spLocks noGrp="1"/>
+          </p:cNvSpPr>
+          <p:nvPr>
+            <p:ph type="body" idx="1"/>
+          </p:nvPr>
+        </p:nvSpPr>
+        <p:spPr/>
+        <p:txBody>
+          <a:bodyPr/>
+          <a:lstStyle/>
+          <a:p>
+            <a:r>
+              <a:rPr lang="en-US" dirty="0"/>
+              <a:t/>
+            </a:r>
+            <a:endParaRPr lang="en-US" dirty="0"/>
+          </a:p>
+        </p:txBody>
+      </p:sp>
+      <p:sp>
+        <p:nvSpPr>
+          <p:cNvPr id="4" name="Slide Number Placeholder 3"/>
+          <p:cNvSpPr>
+            <a:spLocks noGrp="1"/>
+          </p:cNvSpPr>
+          <p:nvPr>
+            <p:ph type="sldNum" sz="quarter" idx="10"/>
+          </p:nvPr>
+        </p:nvSpPr>
+        <p:spPr/>
+        <p:txBody>
+          <a:bodyPr/>
+          <a:lstStyle/>
+          <a:p>
+            <a:fld id="{F7021451-1387-4CA6-816F-3879F97B5CBC}" type="slidenum">
+              <a:rPr lang="en-US"/>
+              <a:t>28</a:t>
             </a:fld>
             <a:endParaRPr lang="en-US"/>
           </a:p>
@@ -3998,6 +4087,753 @@
                 <a:ea typeface="Cambria" pitchFamily="34" charset="-122"/>
                 <a:cs typeface="Cambria" pitchFamily="34" charset="-120"/>
               </a:rPr>
+              <a:t>What Happens on Submit</a:t>
+            </a:r>
+            <a:endParaRPr lang="en-US" sz="3400" dirty="0"/>
+          </a:p>
+        </p:txBody>
+      </p:sp>
+      <p:sp>
+        <p:nvSpPr>
+          <p:cNvPr id="4" name="Shape 2"/>
+          <p:cNvSpPr/>
+          <p:nvPr/>
+        </p:nvSpPr>
+        <p:spPr>
+          <a:xfrm>
+            <a:off x="640080" y="2514600"/>
+            <a:ext cx="1779971" cy="1371600"/>
+          </a:xfrm>
+          <a:prstGeom prst="roundRect">
+            <a:avLst>
+              <a:gd name="adj" fmla="val 5333"/>
+            </a:avLst>
+          </a:prstGeom>
+          <a:solidFill>
+            <a:srgbClr val="2B2B7A"/>
+          </a:solidFill>
+          <a:ln/>
+        </p:spPr>
+      </p:sp>
+      <p:sp>
+        <p:nvSpPr>
+          <p:cNvPr id="5" name="Text 3"/>
+          <p:cNvSpPr txBox="1"/>
+          <p:nvPr/>
+        </p:nvSpPr>
+        <p:spPr>
+          <a:xfrm>
+            <a:off x="731520" y="2624328"/>
+            <a:ext cx="1597091" cy="1152144"/>
+          </a:xfrm>
+          <a:prstGeom prst="rect">
+            <a:avLst/>
+          </a:prstGeom>
+          <a:noFill/>
+          <a:ln/>
+        </p:spPr>
+        <p:txBody>
+          <a:bodyPr wrap="square" lIns="0" tIns="0" rIns="0" bIns="0" rtlCol="0" anchor="ctr"/>
+          <a:lstStyle/>
+          <a:p>
+            <a:pPr algn="ctr" indent="0" marL="0">
+              <a:buNone/>
+            </a:pPr>
+            <a:r>
+              <a:rPr lang="en-US" sz="1250" b="1" dirty="0">
+                <a:solidFill>
+                  <a:srgbClr val="FFFFFF"/>
+                </a:solidFill>
+                <a:latin typeface="Calibri" pitchFamily="34" charset="0"/>
+                <a:ea typeface="Calibri" pitchFamily="34" charset="-122"/>
+                <a:cs typeface="Calibri" pitchFamily="34" charset="-120"/>
+              </a:rPr>
+              <a:t>User fills in</a:t>
+            </a:r>
+            <a:endParaRPr lang="en-US" sz="1250" dirty="0"/>
+          </a:p>
+          <a:p>
+            <a:pPr algn="ctr" indent="0" marL="0">
+              <a:buNone/>
+            </a:pPr>
+            <a:r>
+              <a:rPr lang="en-US" sz="1250" b="1" dirty="0">
+                <a:solidFill>
+                  <a:srgbClr val="FFFFFF"/>
+                </a:solidFill>
+                <a:latin typeface="Calibri" pitchFamily="34" charset="0"/>
+                <a:ea typeface="Calibri" pitchFamily="34" charset="-122"/>
+                <a:cs typeface="Calibri" pitchFamily="34" charset="-120"/>
+              </a:rPr>
+              <a:t>form fields</a:t>
+            </a:r>
+            <a:endParaRPr lang="en-US" sz="1250" dirty="0"/>
+          </a:p>
+        </p:txBody>
+      </p:sp>
+      <p:sp>
+        <p:nvSpPr>
+          <p:cNvPr id="6" name="Shape 4"/>
+          <p:cNvSpPr/>
+          <p:nvPr/>
+        </p:nvSpPr>
+        <p:spPr>
+          <a:xfrm>
+            <a:off x="2420051" y="3200400"/>
+            <a:ext cx="502920" cy="0"/>
+          </a:xfrm>
+          <a:prstGeom prst="line">
+            <a:avLst/>
+          </a:prstGeom>
+          <a:noFill/>
+          <a:ln w="25400">
+            <a:solidFill>
+              <a:srgbClr val="5D5D72"/>
+            </a:solidFill>
+            <a:prstDash val="solid"/>
+            <a:tailEnd type="triangle"/>
+          </a:ln>
+        </p:spPr>
+      </p:sp>
+      <p:sp>
+        <p:nvSpPr>
+          <p:cNvPr id="7" name="Shape 5"/>
+          <p:cNvSpPr/>
+          <p:nvPr/>
+        </p:nvSpPr>
+        <p:spPr>
+          <a:xfrm>
+            <a:off x="2922971" y="2514600"/>
+            <a:ext cx="1779971" cy="1371600"/>
+          </a:xfrm>
+          <a:prstGeom prst="roundRect">
+            <a:avLst>
+              <a:gd name="adj" fmla="val 5333"/>
+            </a:avLst>
+          </a:prstGeom>
+          <a:solidFill>
+            <a:srgbClr val="2B2B7A"/>
+          </a:solidFill>
+          <a:ln/>
+        </p:spPr>
+      </p:sp>
+      <p:sp>
+        <p:nvSpPr>
+          <p:cNvPr id="8" name="Text 6"/>
+          <p:cNvSpPr txBox="1"/>
+          <p:nvPr/>
+        </p:nvSpPr>
+        <p:spPr>
+          <a:xfrm>
+            <a:off x="3014411" y="2624328"/>
+            <a:ext cx="1597091" cy="1152144"/>
+          </a:xfrm>
+          <a:prstGeom prst="rect">
+            <a:avLst/>
+          </a:prstGeom>
+          <a:noFill/>
+          <a:ln/>
+        </p:spPr>
+        <p:txBody>
+          <a:bodyPr wrap="square" lIns="0" tIns="0" rIns="0" bIns="0" rtlCol="0" anchor="ctr"/>
+          <a:lstStyle/>
+          <a:p>
+            <a:pPr algn="ctr" indent="0" marL="0">
+              <a:buNone/>
+            </a:pPr>
+            <a:r>
+              <a:rPr lang="en-US" sz="1250" b="1" dirty="0">
+                <a:solidFill>
+                  <a:srgbClr val="FFFFFF"/>
+                </a:solidFill>
+                <a:latin typeface="Calibri" pitchFamily="34" charset="0"/>
+                <a:ea typeface="Calibri" pitchFamily="34" charset="-122"/>
+                <a:cs typeface="Calibri" pitchFamily="34" charset="-120"/>
+              </a:rPr>
+              <a:t>Clicks the</a:t>
+            </a:r>
+            <a:endParaRPr lang="en-US" sz="1250" dirty="0"/>
+          </a:p>
+          <a:p>
+            <a:pPr algn="ctr" indent="0" marL="0">
+              <a:buNone/>
+            </a:pPr>
+            <a:r>
+              <a:rPr lang="en-US" sz="1250" b="1" dirty="0">
+                <a:solidFill>
+                  <a:srgbClr val="FFFFFF"/>
+                </a:solidFill>
+                <a:latin typeface="Calibri" pitchFamily="34" charset="0"/>
+                <a:ea typeface="Calibri" pitchFamily="34" charset="-122"/>
+                <a:cs typeface="Calibri" pitchFamily="34" charset="-120"/>
+              </a:rPr>
+              <a:t>Submit button</a:t>
+            </a:r>
+            <a:endParaRPr lang="en-US" sz="1250" dirty="0"/>
+          </a:p>
+        </p:txBody>
+      </p:sp>
+      <p:sp>
+        <p:nvSpPr>
+          <p:cNvPr id="9" name="Shape 7"/>
+          <p:cNvSpPr/>
+          <p:nvPr/>
+        </p:nvSpPr>
+        <p:spPr>
+          <a:xfrm>
+            <a:off x="4702942" y="3200400"/>
+            <a:ext cx="502920" cy="0"/>
+          </a:xfrm>
+          <a:prstGeom prst="line">
+            <a:avLst/>
+          </a:prstGeom>
+          <a:noFill/>
+          <a:ln w="25400">
+            <a:solidFill>
+              <a:srgbClr val="5D5D72"/>
+            </a:solidFill>
+            <a:prstDash val="solid"/>
+            <a:tailEnd type="triangle"/>
+          </a:ln>
+        </p:spPr>
+      </p:sp>
+      <p:sp>
+        <p:nvSpPr>
+          <p:cNvPr id="10" name="Shape 8"/>
+          <p:cNvSpPr/>
+          <p:nvPr/>
+        </p:nvSpPr>
+        <p:spPr>
+          <a:xfrm>
+            <a:off x="5205862" y="2514600"/>
+            <a:ext cx="1779971" cy="1371600"/>
+          </a:xfrm>
+          <a:prstGeom prst="roundRect">
+            <a:avLst>
+              <a:gd name="adj" fmla="val 5333"/>
+            </a:avLst>
+          </a:prstGeom>
+          <a:solidFill>
+            <a:srgbClr val="2B2B7A"/>
+          </a:solidFill>
+          <a:ln/>
+        </p:spPr>
+      </p:sp>
+      <p:sp>
+        <p:nvSpPr>
+          <p:cNvPr id="11" name="Text 9"/>
+          <p:cNvSpPr txBox="1"/>
+          <p:nvPr/>
+        </p:nvSpPr>
+        <p:spPr>
+          <a:xfrm>
+            <a:off x="5297302" y="2624328"/>
+            <a:ext cx="1597091" cy="1152144"/>
+          </a:xfrm>
+          <a:prstGeom prst="rect">
+            <a:avLst/>
+          </a:prstGeom>
+          <a:noFill/>
+          <a:ln/>
+        </p:spPr>
+        <p:txBody>
+          <a:bodyPr wrap="square" lIns="0" tIns="0" rIns="0" bIns="0" rtlCol="0" anchor="ctr"/>
+          <a:lstStyle/>
+          <a:p>
+            <a:pPr algn="ctr" indent="0" marL="0">
+              <a:buNone/>
+            </a:pPr>
+            <a:r>
+              <a:rPr lang="en-US" sz="1250" b="1" dirty="0">
+                <a:solidFill>
+                  <a:srgbClr val="FFFFFF"/>
+                </a:solidFill>
+                <a:latin typeface="Calibri" pitchFamily="34" charset="0"/>
+                <a:ea typeface="Calibri" pitchFamily="34" charset="-122"/>
+                <a:cs typeface="Calibri" pitchFamily="34" charset="-120"/>
+              </a:rPr>
+              <a:t>Browser sends an</a:t>
+            </a:r>
+            <a:endParaRPr lang="en-US" sz="1250" dirty="0"/>
+          </a:p>
+          <a:p>
+            <a:pPr algn="ctr" indent="0" marL="0">
+              <a:buNone/>
+            </a:pPr>
+            <a:r>
+              <a:rPr lang="en-US" sz="1250" b="1" dirty="0">
+                <a:solidFill>
+                  <a:srgbClr val="FFFFFF"/>
+                </a:solidFill>
+                <a:latin typeface="Calibri" pitchFamily="34" charset="0"/>
+                <a:ea typeface="Calibri" pitchFamily="34" charset="-122"/>
+                <a:cs typeface="Calibri" pitchFamily="34" charset="-120"/>
+              </a:rPr>
+              <a:t>HTTP request to</a:t>
+            </a:r>
+            <a:endParaRPr lang="en-US" sz="1250" dirty="0"/>
+          </a:p>
+          <a:p>
+            <a:pPr algn="ctr" indent="0" marL="0">
+              <a:buNone/>
+            </a:pPr>
+            <a:r>
+              <a:rPr lang="en-US" sz="1250" b="1" dirty="0">
+                <a:solidFill>
+                  <a:srgbClr val="FFFFFF"/>
+                </a:solidFill>
+                <a:latin typeface="Calibri" pitchFamily="34" charset="0"/>
+                <a:ea typeface="Calibri" pitchFamily="34" charset="-122"/>
+                <a:cs typeface="Calibri" pitchFamily="34" charset="-120"/>
+              </a:rPr>
+              <a:t>the action URL</a:t>
+            </a:r>
+            <a:endParaRPr lang="en-US" sz="1250" dirty="0"/>
+          </a:p>
+        </p:txBody>
+      </p:sp>
+      <p:sp>
+        <p:nvSpPr>
+          <p:cNvPr id="12" name="Shape 10"/>
+          <p:cNvSpPr/>
+          <p:nvPr/>
+        </p:nvSpPr>
+        <p:spPr>
+          <a:xfrm>
+            <a:off x="6985833" y="3200400"/>
+            <a:ext cx="502920" cy="0"/>
+          </a:xfrm>
+          <a:prstGeom prst="line">
+            <a:avLst/>
+          </a:prstGeom>
+          <a:noFill/>
+          <a:ln w="25400">
+            <a:solidFill>
+              <a:srgbClr val="5D5D72"/>
+            </a:solidFill>
+            <a:prstDash val="solid"/>
+            <a:tailEnd type="triangle"/>
+          </a:ln>
+        </p:spPr>
+      </p:sp>
+      <p:sp>
+        <p:nvSpPr>
+          <p:cNvPr id="13" name="Shape 11"/>
+          <p:cNvSpPr/>
+          <p:nvPr/>
+        </p:nvSpPr>
+        <p:spPr>
+          <a:xfrm>
+            <a:off x="7488753" y="2514600"/>
+            <a:ext cx="1779971" cy="1371600"/>
+          </a:xfrm>
+          <a:prstGeom prst="roundRect">
+            <a:avLst>
+              <a:gd name="adj" fmla="val 5333"/>
+            </a:avLst>
+          </a:prstGeom>
+          <a:solidFill>
+            <a:srgbClr val="2B2B7A"/>
+          </a:solidFill>
+          <a:ln/>
+        </p:spPr>
+      </p:sp>
+      <p:sp>
+        <p:nvSpPr>
+          <p:cNvPr id="14" name="Text 12"/>
+          <p:cNvSpPr txBox="1"/>
+          <p:nvPr/>
+        </p:nvSpPr>
+        <p:spPr>
+          <a:xfrm>
+            <a:off x="7580193" y="2624328"/>
+            <a:ext cx="1597091" cy="1152144"/>
+          </a:xfrm>
+          <a:prstGeom prst="rect">
+            <a:avLst/>
+          </a:prstGeom>
+          <a:noFill/>
+          <a:ln/>
+        </p:spPr>
+        <p:txBody>
+          <a:bodyPr wrap="square" lIns="0" tIns="0" rIns="0" bIns="0" rtlCol="0" anchor="ctr"/>
+          <a:lstStyle/>
+          <a:p>
+            <a:pPr algn="ctr" indent="0" marL="0">
+              <a:buNone/>
+            </a:pPr>
+            <a:r>
+              <a:rPr lang="en-US" sz="1250" b="1" dirty="0">
+                <a:solidFill>
+                  <a:srgbClr val="FFFFFF"/>
+                </a:solidFill>
+                <a:latin typeface="Calibri" pitchFamily="34" charset="0"/>
+                <a:ea typeface="Calibri" pitchFamily="34" charset="-122"/>
+                <a:cs typeface="Calibri" pitchFamily="34" charset="-120"/>
+              </a:rPr>
+              <a:t>Server</a:t>
+            </a:r>
+            <a:endParaRPr lang="en-US" sz="1250" dirty="0"/>
+          </a:p>
+          <a:p>
+            <a:pPr algn="ctr" indent="0" marL="0">
+              <a:buNone/>
+            </a:pPr>
+            <a:r>
+              <a:rPr lang="en-US" sz="1250" b="1" dirty="0">
+                <a:solidFill>
+                  <a:srgbClr val="FFFFFF"/>
+                </a:solidFill>
+                <a:latin typeface="Calibri" pitchFamily="34" charset="0"/>
+                <a:ea typeface="Calibri" pitchFamily="34" charset="-122"/>
+                <a:cs typeface="Calibri" pitchFamily="34" charset="-120"/>
+              </a:rPr>
+              <a:t>processes</a:t>
+            </a:r>
+            <a:endParaRPr lang="en-US" sz="1250" dirty="0"/>
+          </a:p>
+          <a:p>
+            <a:pPr algn="ctr" indent="0" marL="0">
+              <a:buNone/>
+            </a:pPr>
+            <a:r>
+              <a:rPr lang="en-US" sz="1250" b="1" dirty="0">
+                <a:solidFill>
+                  <a:srgbClr val="FFFFFF"/>
+                </a:solidFill>
+                <a:latin typeface="Calibri" pitchFamily="34" charset="0"/>
+                <a:ea typeface="Calibri" pitchFamily="34" charset="-122"/>
+                <a:cs typeface="Calibri" pitchFamily="34" charset="-120"/>
+              </a:rPr>
+              <a:t>the data</a:t>
+            </a:r>
+            <a:endParaRPr lang="en-US" sz="1250" dirty="0"/>
+          </a:p>
+        </p:txBody>
+      </p:sp>
+      <p:sp>
+        <p:nvSpPr>
+          <p:cNvPr id="15" name="Shape 13"/>
+          <p:cNvSpPr/>
+          <p:nvPr/>
+        </p:nvSpPr>
+        <p:spPr>
+          <a:xfrm>
+            <a:off x="9268724" y="3200400"/>
+            <a:ext cx="502920" cy="0"/>
+          </a:xfrm>
+          <a:prstGeom prst="line">
+            <a:avLst/>
+          </a:prstGeom>
+          <a:noFill/>
+          <a:ln w="25400">
+            <a:solidFill>
+              <a:srgbClr val="5D5D72"/>
+            </a:solidFill>
+            <a:prstDash val="solid"/>
+            <a:tailEnd type="triangle"/>
+          </a:ln>
+        </p:spPr>
+      </p:sp>
+      <p:sp>
+        <p:nvSpPr>
+          <p:cNvPr id="16" name="Shape 14"/>
+          <p:cNvSpPr/>
+          <p:nvPr/>
+        </p:nvSpPr>
+        <p:spPr>
+          <a:xfrm>
+            <a:off x="9771644" y="2514600"/>
+            <a:ext cx="1779971" cy="1371600"/>
+          </a:xfrm>
+          <a:prstGeom prst="roundRect">
+            <a:avLst>
+              <a:gd name="adj" fmla="val 5333"/>
+            </a:avLst>
+          </a:prstGeom>
+          <a:solidFill>
+            <a:srgbClr val="E67528"/>
+          </a:solidFill>
+          <a:ln/>
+        </p:spPr>
+      </p:sp>
+      <p:sp>
+        <p:nvSpPr>
+          <p:cNvPr id="17" name="Text 15"/>
+          <p:cNvSpPr txBox="1"/>
+          <p:nvPr/>
+        </p:nvSpPr>
+        <p:spPr>
+          <a:xfrm>
+            <a:off x="9863084" y="2624328"/>
+            <a:ext cx="1597091" cy="1152144"/>
+          </a:xfrm>
+          <a:prstGeom prst="rect">
+            <a:avLst/>
+          </a:prstGeom>
+          <a:noFill/>
+          <a:ln/>
+        </p:spPr>
+        <p:txBody>
+          <a:bodyPr wrap="square" lIns="0" tIns="0" rIns="0" bIns="0" rtlCol="0" anchor="ctr"/>
+          <a:lstStyle/>
+          <a:p>
+            <a:pPr algn="ctr" indent="0" marL="0">
+              <a:buNone/>
+            </a:pPr>
+            <a:r>
+              <a:rPr lang="en-US" sz="1250" b="1" dirty="0">
+                <a:solidFill>
+                  <a:srgbClr val="FFFFFF"/>
+                </a:solidFill>
+                <a:latin typeface="Calibri" pitchFamily="34" charset="0"/>
+                <a:ea typeface="Calibri" pitchFamily="34" charset="-122"/>
+                <a:cs typeface="Calibri" pitchFamily="34" charset="-120"/>
+              </a:rPr>
+              <a:t>Server sends</a:t>
+            </a:r>
+            <a:endParaRPr lang="en-US" sz="1250" dirty="0"/>
+          </a:p>
+          <a:p>
+            <a:pPr algn="ctr" indent="0" marL="0">
+              <a:buNone/>
+            </a:pPr>
+            <a:r>
+              <a:rPr lang="en-US" sz="1250" b="1" dirty="0">
+                <a:solidFill>
+                  <a:srgbClr val="FFFFFF"/>
+                </a:solidFill>
+                <a:latin typeface="Calibri" pitchFamily="34" charset="0"/>
+                <a:ea typeface="Calibri" pitchFamily="34" charset="-122"/>
+                <a:cs typeface="Calibri" pitchFamily="34" charset="-120"/>
+              </a:rPr>
+              <a:t>back a response</a:t>
+            </a:r>
+            <a:endParaRPr lang="en-US" sz="1250" dirty="0"/>
+          </a:p>
+        </p:txBody>
+      </p:sp>
+      <p:sp>
+        <p:nvSpPr>
+          <p:cNvPr id="18" name="Text 16"/>
+          <p:cNvSpPr txBox="1"/>
+          <p:nvPr/>
+        </p:nvSpPr>
+        <p:spPr>
+          <a:xfrm>
+            <a:off x="640080" y="4343400"/>
+            <a:ext cx="10911535" cy="1371600"/>
+          </a:xfrm>
+          <a:prstGeom prst="rect">
+            <a:avLst/>
+          </a:prstGeom>
+          <a:noFill/>
+          <a:ln/>
+        </p:spPr>
+        <p:txBody>
+          <a:bodyPr wrap="square" lIns="0" tIns="0" rIns="0" bIns="0" rtlCol="0" anchor="t"/>
+          <a:lstStyle/>
+          <a:p>
+            <a:pPr indent="0" marL="0">
+              <a:buNone/>
+            </a:pPr>
+            <a:r>
+              <a:rPr lang="en-US" sz="1300" dirty="0">
+                <a:solidFill>
+                  <a:srgbClr val="26262F"/>
+                </a:solidFill>
+                <a:latin typeface="Calibri" pitchFamily="34" charset="0"/>
+                <a:ea typeface="Calibri" pitchFamily="34" charset="-122"/>
+                <a:cs typeface="Calibri" pitchFamily="34" charset="-120"/>
+              </a:rPr>
+              <a:t>The action URL and the method (GET or POST) decide where the request goes and how the form's data is packaged inside it.</a:t>
+            </a:r>
+            <a:endParaRPr lang="en-US" sz="1300" dirty="0"/>
+          </a:p>
+        </p:txBody>
+      </p:sp>
+      <p:sp>
+        <p:nvSpPr>
+          <p:cNvPr id="19" name="Text 17"/>
+          <p:cNvSpPr txBox="1"/>
+          <p:nvPr/>
+        </p:nvSpPr>
+        <p:spPr>
+          <a:xfrm>
+            <a:off x="640080" y="6446520"/>
+            <a:ext cx="8686800" cy="292608"/>
+          </a:xfrm>
+          <a:prstGeom prst="rect">
+            <a:avLst/>
+          </a:prstGeom>
+          <a:noFill/>
+          <a:ln/>
+        </p:spPr>
+        <p:txBody>
+          <a:bodyPr wrap="square" lIns="0" tIns="0" rIns="0" bIns="0" rtlCol="0" anchor="ctr"/>
+          <a:lstStyle/>
+          <a:p>
+            <a:pPr algn="l" indent="0" marL="0">
+              <a:buNone/>
+            </a:pPr>
+            <a:r>
+              <a:rPr lang="en-US" sz="900" dirty="0">
+                <a:solidFill>
+                  <a:srgbClr val="5D5D72"/>
+                </a:solidFill>
+                <a:latin typeface="Calibri" pitchFamily="34" charset="0"/>
+                <a:ea typeface="Calibri" pitchFamily="34" charset="-122"/>
+                <a:cs typeface="Calibri" pitchFamily="34" charset="-120"/>
+              </a:rPr>
+              <a:t>Usman Akram  •  COMSATS University Islamabad</a:t>
+            </a:r>
+            <a:endParaRPr lang="en-US" sz="900" dirty="0"/>
+          </a:p>
+        </p:txBody>
+      </p:sp>
+      <p:sp>
+        <p:nvSpPr>
+          <p:cNvPr id="20" name="Text 18"/>
+          <p:cNvSpPr txBox="1"/>
+          <p:nvPr/>
+        </p:nvSpPr>
+        <p:spPr>
+          <a:xfrm>
+            <a:off x="11155680" y="6446520"/>
+            <a:ext cx="457200" cy="292608"/>
+          </a:xfrm>
+          <a:prstGeom prst="rect">
+            <a:avLst/>
+          </a:prstGeom>
+          <a:noFill/>
+          <a:ln/>
+        </p:spPr>
+        <p:txBody>
+          <a:bodyPr wrap="square" lIns="0" tIns="0" rIns="0" bIns="0" rtlCol="0" anchor="ctr"/>
+          <a:lstStyle/>
+          <a:p>
+            <a:pPr algn="r" indent="0" marL="0">
+              <a:buNone/>
+            </a:pPr>
+            <a:r>
+              <a:rPr lang="en-US" sz="900" dirty="0">
+                <a:solidFill>
+                  <a:srgbClr val="5D5D72"/>
+                </a:solidFill>
+                <a:latin typeface="Calibri" pitchFamily="34" charset="0"/>
+                <a:ea typeface="Calibri" pitchFamily="34" charset="-122"/>
+                <a:cs typeface="Calibri" pitchFamily="34" charset="-120"/>
+              </a:rPr>
+              <a:t>11</a:t>
+            </a:r>
+            <a:endParaRPr lang="en-US" sz="900" dirty="0"/>
+          </a:p>
+        </p:txBody>
+      </p:sp>
+    </p:spTree>
+  </p:cSld>
+  <p:clrMapOvr>
+    <a:masterClrMapping/>
+  </p:clrMapOvr>
+</p:sld>
+</file>
+
+<file path=ppt/slides/slide12.xml><?xml version="1.0" encoding="utf-8"?>
+<p:sld xmlns:a="http://schemas.openxmlformats.org/drawingml/2006/main" xmlns:r="http://schemas.openxmlformats.org/officeDocument/2006/relationships" xmlns:p="http://schemas.openxmlformats.org/presentationml/2006/main">
+  <p:cSld name="Slide 12">
+    <p:bg>
+      <p:bgPr>
+        <a:solidFill>
+          <a:srgbClr val="FFFFFF"/>
+        </a:solidFill>
+      </p:bgPr>
+    </p:bg>
+    <p:spTree>
+      <p:nvGrpSpPr>
+        <p:cNvPr id="1" name=""/>
+        <p:cNvGrpSpPr/>
+        <p:nvPr/>
+      </p:nvGrpSpPr>
+      <p:grpSpPr>
+        <a:xfrm>
+          <a:off x="0" y="0"/>
+          <a:ext cx="0" cy="0"/>
+          <a:chOff x="0" y="0"/>
+          <a:chExt cx="0" cy="0"/>
+        </a:xfrm>
+      </p:grpSpPr>
+      <p:sp>
+        <p:nvSpPr>
+          <p:cNvPr id="2" name="Text 0"/>
+          <p:cNvSpPr txBox="1"/>
+          <p:nvPr/>
+        </p:nvSpPr>
+        <p:spPr>
+          <a:xfrm>
+            <a:off x="640080" y="457200"/>
+            <a:ext cx="10058400" cy="365760"/>
+          </a:xfrm>
+          <a:prstGeom prst="rect">
+            <a:avLst/>
+          </a:prstGeom>
+          <a:noFill/>
+          <a:ln/>
+        </p:spPr>
+        <p:txBody>
+          <a:bodyPr wrap="square" lIns="0" tIns="0" rIns="0" bIns="0" rtlCol="0" anchor="ctr"/>
+          <a:lstStyle/>
+          <a:p>
+            <a:pPr algn="l" indent="0" marL="0">
+              <a:buNone/>
+            </a:pPr>
+            <a:r>
+              <a:rPr lang="en-US" sz="1300" b="1" spc="300" kern="0" dirty="0">
+                <a:solidFill>
+                  <a:srgbClr val="FF8A3D"/>
+                </a:solidFill>
+                <a:latin typeface="Calibri" pitchFamily="34" charset="0"/>
+                <a:ea typeface="Calibri" pitchFamily="34" charset="-122"/>
+                <a:cs typeface="Calibri" pitchFamily="34" charset="-120"/>
+              </a:rPr>
+              <a:t>HTML FORMS</a:t>
+            </a:r>
+            <a:endParaRPr lang="en-US" sz="1300" dirty="0"/>
+          </a:p>
+        </p:txBody>
+      </p:sp>
+      <p:sp>
+        <p:nvSpPr>
+          <p:cNvPr id="3" name="Text 1"/>
+          <p:cNvSpPr txBox="1"/>
+          <p:nvPr/>
+        </p:nvSpPr>
+        <p:spPr>
+          <a:xfrm>
+            <a:off x="640080" y="841248"/>
+            <a:ext cx="10881360" cy="914400"/>
+          </a:xfrm>
+          <a:prstGeom prst="rect">
+            <a:avLst/>
+          </a:prstGeom>
+          <a:noFill/>
+          <a:ln/>
+        </p:spPr>
+        <p:txBody>
+          <a:bodyPr wrap="square" lIns="0" tIns="0" rIns="0" bIns="0" rtlCol="0" anchor="ctr"/>
+          <a:lstStyle/>
+          <a:p>
+            <a:pPr algn="l" indent="0" marL="0">
+              <a:buNone/>
+            </a:pPr>
+            <a:r>
+              <a:rPr lang="en-US" sz="3400" b="1" dirty="0">
+                <a:solidFill>
+                  <a:srgbClr val="2B2B7A"/>
+                </a:solidFill>
+                <a:latin typeface="Cambria" pitchFamily="34" charset="0"/>
+                <a:ea typeface="Cambria" pitchFamily="34" charset="-122"/>
+                <a:cs typeface="Cambria" pitchFamily="34" charset="-120"/>
+              </a:rPr>
               <a:t>The action and method Attributes</a:t>
             </a:r>
             <a:endParaRPr lang="en-US" sz="3400" dirty="0"/>
@@ -4006,7 +4842,7 @@
       </p:sp>
       <p:graphicFrame>
         <p:nvGraphicFramePr>
-          <p:cNvPr id="12" name="Table 0"/>
+          <p:cNvPr id="13" name="Table 0"/>
           <p:cNvGraphicFramePr>
             <a:graphicFrameLocks noGrp="1"/>
           </p:cNvGraphicFramePr>
@@ -4658,299 +5494,6 @@
                 <a:ea typeface="Calibri" pitchFamily="34" charset="-122"/>
                 <a:cs typeface="Calibri" pitchFamily="34" charset="-120"/>
               </a:rPr>
-              <a:t>11</a:t>
-            </a:r>
-            <a:endParaRPr lang="en-US" sz="900" dirty="0"/>
-          </a:p>
-        </p:txBody>
-      </p:sp>
-    </p:spTree>
-  </p:cSld>
-  <p:clrMapOvr>
-    <a:masterClrMapping/>
-  </p:clrMapOvr>
-</p:sld>
-</file>
-
-<file path=ppt/slides/slide12.xml><?xml version="1.0" encoding="utf-8"?>
-<p:sld xmlns:a="http://schemas.openxmlformats.org/drawingml/2006/main" xmlns:r="http://schemas.openxmlformats.org/officeDocument/2006/relationships" xmlns:p="http://schemas.openxmlformats.org/presentationml/2006/main">
-  <p:cSld name="Slide 12">
-    <p:bg>
-      <p:bgPr>
-        <a:solidFill>
-          <a:srgbClr val="FFFFFF"/>
-        </a:solidFill>
-      </p:bgPr>
-    </p:bg>
-    <p:spTree>
-      <p:nvGrpSpPr>
-        <p:cNvPr id="1" name=""/>
-        <p:cNvGrpSpPr/>
-        <p:nvPr/>
-      </p:nvGrpSpPr>
-      <p:grpSpPr>
-        <a:xfrm>
-          <a:off x="0" y="0"/>
-          <a:ext cx="0" cy="0"/>
-          <a:chOff x="0" y="0"/>
-          <a:chExt cx="0" cy="0"/>
-        </a:xfrm>
-      </p:grpSpPr>
-      <p:sp>
-        <p:nvSpPr>
-          <p:cNvPr id="2" name="Text 0"/>
-          <p:cNvSpPr txBox="1"/>
-          <p:nvPr/>
-        </p:nvSpPr>
-        <p:spPr>
-          <a:xfrm>
-            <a:off x="640080" y="457200"/>
-            <a:ext cx="10058400" cy="365760"/>
-          </a:xfrm>
-          <a:prstGeom prst="rect">
-            <a:avLst/>
-          </a:prstGeom>
-          <a:noFill/>
-          <a:ln/>
-        </p:spPr>
-        <p:txBody>
-          <a:bodyPr wrap="square" lIns="0" tIns="0" rIns="0" bIns="0" rtlCol="0" anchor="ctr"/>
-          <a:lstStyle/>
-          <a:p>
-            <a:pPr algn="l" indent="0" marL="0">
-              <a:buNone/>
-            </a:pPr>
-            <a:r>
-              <a:rPr lang="en-US" sz="1300" b="1" spc="300" kern="0" dirty="0">
-                <a:solidFill>
-                  <a:srgbClr val="FF8A3D"/>
-                </a:solidFill>
-                <a:latin typeface="Calibri" pitchFamily="34" charset="0"/>
-                <a:ea typeface="Calibri" pitchFamily="34" charset="-122"/>
-                <a:cs typeface="Calibri" pitchFamily="34" charset="-120"/>
-              </a:rPr>
-              <a:t>SECURITY</a:t>
-            </a:r>
-            <a:endParaRPr lang="en-US" sz="1300" dirty="0"/>
-          </a:p>
-        </p:txBody>
-      </p:sp>
-      <p:sp>
-        <p:nvSpPr>
-          <p:cNvPr id="3" name="Text 1"/>
-          <p:cNvSpPr txBox="1"/>
-          <p:nvPr/>
-        </p:nvSpPr>
-        <p:spPr>
-          <a:xfrm>
-            <a:off x="640080" y="841248"/>
-            <a:ext cx="10881360" cy="914400"/>
-          </a:xfrm>
-          <a:prstGeom prst="rect">
-            <a:avLst/>
-          </a:prstGeom>
-          <a:noFill/>
-          <a:ln/>
-        </p:spPr>
-        <p:txBody>
-          <a:bodyPr wrap="square" lIns="0" tIns="0" rIns="0" bIns="0" rtlCol="0" anchor="ctr"/>
-          <a:lstStyle/>
-          <a:p>
-            <a:pPr algn="l" indent="0" marL="0">
-              <a:buNone/>
-            </a:pPr>
-            <a:r>
-              <a:rPr lang="en-US" sz="3400" b="1" dirty="0">
-                <a:solidFill>
-                  <a:srgbClr val="2B2B7A"/>
-                </a:solidFill>
-                <a:latin typeface="Cambria" pitchFamily="34" charset="0"/>
-                <a:ea typeface="Cambria" pitchFamily="34" charset="-122"/>
-                <a:cs typeface="Cambria" pitchFamily="34" charset="-120"/>
-              </a:rPr>
-              <a:t>Never Use GET for Passwords</a:t>
-            </a:r>
-            <a:endParaRPr lang="en-US" sz="3400" dirty="0"/>
-          </a:p>
-        </p:txBody>
-      </p:sp>
-      <p:sp>
-        <p:nvSpPr>
-          <p:cNvPr id="4" name="Shape 2"/>
-          <p:cNvSpPr/>
-          <p:nvPr/>
-        </p:nvSpPr>
-        <p:spPr>
-          <a:xfrm>
-            <a:off x="640080" y="1965960"/>
-            <a:ext cx="10911535" cy="1554480"/>
-          </a:xfrm>
-          <a:prstGeom prst="roundRect">
-            <a:avLst>
-              <a:gd name="adj" fmla="val 3529"/>
-            </a:avLst>
-          </a:prstGeom>
-          <a:solidFill>
-            <a:srgbClr val="FDECE0"/>
-          </a:solidFill>
-          <a:ln w="12700">
-            <a:solidFill>
-              <a:srgbClr val="FF8A3D"/>
-            </a:solidFill>
-            <a:prstDash val="solid"/>
-          </a:ln>
-        </p:spPr>
-      </p:sp>
-      <p:sp>
-        <p:nvSpPr>
-          <p:cNvPr id="5" name="Text 3"/>
-          <p:cNvSpPr txBox="1"/>
-          <p:nvPr/>
-        </p:nvSpPr>
-        <p:spPr>
-          <a:xfrm>
-            <a:off x="868680" y="2103120"/>
-            <a:ext cx="10454335" cy="274320"/>
-          </a:xfrm>
-          <a:prstGeom prst="rect">
-            <a:avLst/>
-          </a:prstGeom>
-          <a:noFill/>
-          <a:ln/>
-        </p:spPr>
-        <p:txBody>
-          <a:bodyPr wrap="square" lIns="0" tIns="0" rIns="0" bIns="0" rtlCol="0" anchor="ctr"/>
-          <a:lstStyle/>
-          <a:p>
-            <a:pPr indent="0" marL="0">
-              <a:buNone/>
-            </a:pPr>
-            <a:r>
-              <a:rPr lang="en-US" sz="1000" b="1" spc="200" kern="0" dirty="0">
-                <a:solidFill>
-                  <a:srgbClr val="8A3A12"/>
-                </a:solidFill>
-                <a:latin typeface="Calibri" pitchFamily="34" charset="0"/>
-                <a:ea typeface="Calibri" pitchFamily="34" charset="-122"/>
-                <a:cs typeface="Calibri" pitchFamily="34" charset="-120"/>
-              </a:rPr>
-              <a:t>WARNING</a:t>
-            </a:r>
-            <a:endParaRPr lang="en-US" sz="1000" dirty="0"/>
-          </a:p>
-        </p:txBody>
-      </p:sp>
-      <p:sp>
-        <p:nvSpPr>
-          <p:cNvPr id="6" name="Text 4"/>
-          <p:cNvSpPr txBox="1"/>
-          <p:nvPr/>
-        </p:nvSpPr>
-        <p:spPr>
-          <a:xfrm>
-            <a:off x="868680" y="2404872"/>
-            <a:ext cx="10454335" cy="960120"/>
-          </a:xfrm>
-          <a:prstGeom prst="rect">
-            <a:avLst/>
-          </a:prstGeom>
-          <a:noFill/>
-          <a:ln/>
-        </p:spPr>
-        <p:txBody>
-          <a:bodyPr wrap="square" lIns="0" tIns="0" rIns="0" bIns="0" rtlCol="0" anchor="t"/>
-          <a:lstStyle/>
-          <a:p>
-            <a:pPr indent="0" marL="0">
-              <a:buNone/>
-            </a:pPr>
-            <a:r>
-              <a:rPr lang="en-US" sz="1250" dirty="0">
-                <a:solidFill>
-                  <a:srgbClr val="26262F"/>
-                </a:solidFill>
-                <a:latin typeface="Calibri" pitchFamily="34" charset="0"/>
-                <a:ea typeface="Calibri" pitchFamily="34" charset="-122"/>
-                <a:cs typeface="Calibri" pitchFamily="34" charset="-120"/>
-              </a:rPr>
-              <a:t>GET puts form values directly into the URL, where they can end up saved in browser history, server logs, and shared links. Always use POST for passwords and other sensitive information.</a:t>
-            </a:r>
-            <a:endParaRPr lang="en-US" sz="1250" dirty="0"/>
-          </a:p>
-        </p:txBody>
-      </p:sp>
-      <p:sp>
-        <p:nvSpPr>
-          <p:cNvPr id="7" name="Text 5"/>
-          <p:cNvSpPr txBox="1"/>
-          <p:nvPr/>
-        </p:nvSpPr>
-        <p:spPr>
-          <a:xfrm>
-            <a:off x="640080" y="6446520"/>
-            <a:ext cx="8686800" cy="292608"/>
-          </a:xfrm>
-          <a:prstGeom prst="rect">
-            <a:avLst/>
-          </a:prstGeom>
-          <a:noFill/>
-          <a:ln/>
-        </p:spPr>
-        <p:txBody>
-          <a:bodyPr wrap="square" lIns="0" tIns="0" rIns="0" bIns="0" rtlCol="0" anchor="ctr"/>
-          <a:lstStyle/>
-          <a:p>
-            <a:pPr algn="l" indent="0" marL="0">
-              <a:buNone/>
-            </a:pPr>
-            <a:r>
-              <a:rPr lang="en-US" sz="900" dirty="0">
-                <a:solidFill>
-                  <a:srgbClr val="5D5D72"/>
-                </a:solidFill>
-                <a:latin typeface="Calibri" pitchFamily="34" charset="0"/>
-                <a:ea typeface="Calibri" pitchFamily="34" charset="-122"/>
-                <a:cs typeface="Calibri" pitchFamily="34" charset="-120"/>
-              </a:rPr>
-              <a:t>Usman Akram  •  COMSATS University Islamabad</a:t>
-            </a:r>
-            <a:endParaRPr lang="en-US" sz="900" dirty="0"/>
-          </a:p>
-        </p:txBody>
-      </p:sp>
-      <p:sp>
-        <p:nvSpPr>
-          <p:cNvPr id="8" name="Text 6"/>
-          <p:cNvSpPr txBox="1"/>
-          <p:nvPr/>
-        </p:nvSpPr>
-        <p:spPr>
-          <a:xfrm>
-            <a:off x="11155680" y="6446520"/>
-            <a:ext cx="457200" cy="292608"/>
-          </a:xfrm>
-          <a:prstGeom prst="rect">
-            <a:avLst/>
-          </a:prstGeom>
-          <a:noFill/>
-          <a:ln/>
-        </p:spPr>
-        <p:txBody>
-          <a:bodyPr wrap="square" lIns="0" tIns="0" rIns="0" bIns="0" rtlCol="0" anchor="ctr"/>
-          <a:lstStyle/>
-          <a:p>
-            <a:pPr algn="r" indent="0" marL="0">
-              <a:buNone/>
-            </a:pPr>
-            <a:r>
-              <a:rPr lang="en-US" sz="900" dirty="0">
-                <a:solidFill>
-                  <a:srgbClr val="5D5D72"/>
-                </a:solidFill>
-                <a:latin typeface="Calibri" pitchFamily="34" charset="0"/>
-                <a:ea typeface="Calibri" pitchFamily="34" charset="-122"/>
-                <a:cs typeface="Calibri" pitchFamily="34" charset="-120"/>
-              </a:rPr>
               <a:t>12</a:t>
             </a:r>
             <a:endParaRPr lang="en-US" sz="900" dirty="0"/>
@@ -5022,7 +5565,7 @@
                 <a:ea typeface="Calibri" pitchFamily="34" charset="-122"/>
                 <a:cs typeface="Calibri" pitchFamily="34" charset="-120"/>
               </a:rPr>
-              <a:t>A REAL EXAMPLE</a:t>
+              <a:t>SECURITY</a:t>
             </a:r>
             <a:endParaRPr lang="en-US" sz="1300" dirty="0"/>
           </a:p>
@@ -5061,7 +5604,7 @@
                 <a:ea typeface="Cambria" pitchFamily="34" charset="-122"/>
                 <a:cs typeface="Cambria" pitchFamily="34" charset="-120"/>
               </a:rPr>
-              <a:t>Searching Google with a GET Form</a:t>
+              <a:t>Never Use GET for Passwords</a:t>
             </a:r>
             <a:endParaRPr lang="en-US" sz="3400" dirty="0"/>
           </a:p>
@@ -5069,14 +5612,41 @@
       </p:sp>
       <p:sp>
         <p:nvSpPr>
-          <p:cNvPr id="4" name="Text 2"/>
-          <p:cNvSpPr txBox="1"/>
-          <p:nvPr/>
-        </p:nvSpPr>
-        <p:spPr>
-          <a:xfrm>
-            <a:off x="640080" y="1691640"/>
-            <a:ext cx="10911535" cy="411480"/>
+          <p:cNvPr id="4" name="Shape 2"/>
+          <p:cNvSpPr/>
+          <p:nvPr/>
+        </p:nvSpPr>
+        <p:spPr>
+          <a:xfrm>
+            <a:off x="640080" y="1965960"/>
+            <a:ext cx="10911535" cy="1554480"/>
+          </a:xfrm>
+          <a:prstGeom prst="roundRect">
+            <a:avLst>
+              <a:gd name="adj" fmla="val 3529"/>
+            </a:avLst>
+          </a:prstGeom>
+          <a:solidFill>
+            <a:srgbClr val="FDECE0"/>
+          </a:solidFill>
+          <a:ln w="12700">
+            <a:solidFill>
+              <a:srgbClr val="FF8A3D"/>
+            </a:solidFill>
+            <a:prstDash val="solid"/>
+          </a:ln>
+        </p:spPr>
+      </p:sp>
+      <p:sp>
+        <p:nvSpPr>
+          <p:cNvPr id="5" name="Text 3"/>
+          <p:cNvSpPr txBox="1"/>
+          <p:nvPr/>
+        </p:nvSpPr>
+        <p:spPr>
+          <a:xfrm>
+            <a:off x="868680" y="2103120"/>
+            <a:ext cx="10454335" cy="274320"/>
           </a:xfrm>
           <a:prstGeom prst="rect">
             <a:avLst/>
@@ -5092,41 +5662,19 @@
               <a:buNone/>
             </a:pPr>
             <a:r>
-              <a:rPr lang="en-US" sz="1350" i="1" dirty="0">
-                <a:solidFill>
-                  <a:srgbClr val="5D5D72"/>
+              <a:rPr lang="en-US" sz="1000" b="1" spc="200" kern="0" dirty="0">
+                <a:solidFill>
+                  <a:srgbClr val="8A3A12"/>
                 </a:solidFill>
                 <a:latin typeface="Calibri" pitchFamily="34" charset="0"/>
                 <a:ea typeface="Calibri" pitchFamily="34" charset="-122"/>
                 <a:cs typeface="Calibri" pitchFamily="34" charset="-120"/>
               </a:rPr>
-              <a:t>name="q" is the exact query-parameter name Google's search endpoint expects — submitting this form genuinely searches Google.</a:t>
-            </a:r>
-            <a:endParaRPr lang="en-US" sz="1350" dirty="0"/>
-          </a:p>
-        </p:txBody>
-      </p:sp>
-      <p:sp>
-        <p:nvSpPr>
-          <p:cNvPr id="5" name="Shape 3"/>
-          <p:cNvSpPr/>
-          <p:nvPr/>
-        </p:nvSpPr>
-        <p:spPr>
-          <a:xfrm>
-            <a:off x="640080" y="2240280"/>
-            <a:ext cx="10911535" cy="1739265"/>
-          </a:xfrm>
-          <a:prstGeom prst="roundRect">
-            <a:avLst>
-              <a:gd name="adj" fmla="val 4206"/>
-            </a:avLst>
-          </a:prstGeom>
-          <a:solidFill>
-            <a:srgbClr val="1E1E4C"/>
-          </a:solidFill>
-          <a:ln/>
-        </p:spPr>
+              <a:t>WARNING</a:t>
+            </a:r>
+            <a:endParaRPr lang="en-US" sz="1000" dirty="0"/>
+          </a:p>
+        </p:txBody>
       </p:sp>
       <p:sp>
         <p:nvSpPr>
@@ -5136,8 +5684,8 @@
         </p:nvSpPr>
         <p:spPr>
           <a:xfrm>
-            <a:off x="960120" y="2468880"/>
-            <a:ext cx="10271455" cy="1282065"/>
+            <a:off x="868680" y="2404872"/>
+            <a:ext cx="10454335" cy="960120"/>
           </a:xfrm>
           <a:prstGeom prst="rect">
             <a:avLst/>
@@ -5150,197 +5698,56 @@
           <a:lstStyle/>
           <a:p>
             <a:pPr indent="0" marL="0">
-              <a:lnSpc>
-                <a:spcPct val="125000"/>
-              </a:lnSpc>
               <a:buNone/>
             </a:pPr>
             <a:r>
               <a:rPr lang="en-US" sz="1250" dirty="0">
                 <a:solidFill>
-                  <a:srgbClr val="C9D3F5"/>
-                </a:solidFill>
-                <a:latin typeface="Courier New" pitchFamily="34" charset="0"/>
-                <a:ea typeface="Courier New" pitchFamily="34" charset="-122"/>
-                <a:cs typeface="Courier New" pitchFamily="34" charset="-120"/>
-              </a:rPr>
-              <a:t>&lt;form action="https://www.google.com/search" method="GET"&gt;</a:t>
-            </a:r>
-            <a:endParaRPr lang="en-US" sz="1250" dirty="0"/>
-          </a:p>
-          <a:p>
-            <a:pPr indent="0" marL="0">
-              <a:lnSpc>
-                <a:spcPct val="125000"/>
-              </a:lnSpc>
-              <a:buNone/>
-            </a:pPr>
-            <a:r>
-              <a:rPr lang="en-US" sz="1250" dirty="0">
-                <a:solidFill>
-                  <a:srgbClr val="C9D3F5"/>
-                </a:solidFill>
-                <a:latin typeface="Courier New" pitchFamily="34" charset="0"/>
-                <a:ea typeface="Courier New" pitchFamily="34" charset="-122"/>
-                <a:cs typeface="Courier New" pitchFamily="34" charset="-120"/>
-              </a:rPr>
-              <a:t>    &lt;label for="q"&gt;Search Google:&lt;/label&gt;</a:t>
-            </a:r>
-            <a:endParaRPr lang="en-US" sz="1250" dirty="0"/>
-          </a:p>
-          <a:p>
-            <a:pPr indent="0" marL="0">
-              <a:lnSpc>
-                <a:spcPct val="125000"/>
-              </a:lnSpc>
-              <a:buNone/>
-            </a:pPr>
-            <a:r>
-              <a:rPr lang="en-US" sz="1250" dirty="0">
-                <a:solidFill>
-                  <a:srgbClr val="C9D3F5"/>
-                </a:solidFill>
-                <a:latin typeface="Courier New" pitchFamily="34" charset="0"/>
-                <a:ea typeface="Courier New" pitchFamily="34" charset="-122"/>
-                <a:cs typeface="Courier New" pitchFamily="34" charset="-120"/>
-              </a:rPr>
-              <a:t>    &lt;input type="text" id="q" name="q" placeholder="Type your search..."&gt;</a:t>
-            </a:r>
-            <a:endParaRPr lang="en-US" sz="1250" dirty="0"/>
-          </a:p>
-          <a:p>
-            <a:pPr indent="0" marL="0">
-              <a:lnSpc>
-                <a:spcPct val="125000"/>
-              </a:lnSpc>
-              <a:buNone/>
-            </a:pPr>
-            <a:r>
-              <a:rPr lang="en-US" sz="1250" dirty="0">
-                <a:solidFill>
-                  <a:srgbClr val="C9D3F5"/>
-                </a:solidFill>
-                <a:latin typeface="Courier New" pitchFamily="34" charset="0"/>
-                <a:ea typeface="Courier New" pitchFamily="34" charset="-122"/>
-                <a:cs typeface="Courier New" pitchFamily="34" charset="-120"/>
-              </a:rPr>
-              <a:t>    &lt;button type="submit"&gt;Search&lt;/button&gt;</a:t>
-            </a:r>
-            <a:endParaRPr lang="en-US" sz="1250" dirty="0"/>
-          </a:p>
-          <a:p>
-            <a:pPr indent="0" marL="0">
-              <a:lnSpc>
-                <a:spcPct val="125000"/>
-              </a:lnSpc>
-              <a:buNone/>
-            </a:pPr>
-            <a:r>
-              <a:rPr lang="en-US" sz="1250" dirty="0">
-                <a:solidFill>
-                  <a:srgbClr val="C9D3F5"/>
-                </a:solidFill>
-                <a:latin typeface="Courier New" pitchFamily="34" charset="0"/>
-                <a:ea typeface="Courier New" pitchFamily="34" charset="-122"/>
-                <a:cs typeface="Courier New" pitchFamily="34" charset="-120"/>
-              </a:rPr>
-              <a:t>&lt;/form&gt;</a:t>
-            </a:r>
-            <a:endParaRPr lang="en-US" sz="1250" dirty="0"/>
-          </a:p>
-        </p:txBody>
-      </p:sp>
-      <p:sp>
-        <p:nvSpPr>
-          <p:cNvPr id="7" name="Shape 5"/>
-          <p:cNvSpPr/>
-          <p:nvPr/>
-        </p:nvSpPr>
-        <p:spPr>
-          <a:xfrm>
-            <a:off x="530352" y="4144137"/>
-            <a:ext cx="11130991" cy="2183511"/>
-          </a:xfrm>
-          <a:prstGeom prst="roundRect">
-            <a:avLst>
-              <a:gd name="adj" fmla="val 2513"/>
-            </a:avLst>
-          </a:prstGeom>
-          <a:solidFill>
-            <a:srgbClr val="FFFFFF"/>
-          </a:solidFill>
-          <a:ln w="12700">
-            <a:solidFill>
-              <a:srgbClr val="E2E2EE"/>
-            </a:solidFill>
-            <a:prstDash val="solid"/>
-          </a:ln>
-          <a:effectLst>
-            <a:outerShdw sx="100000" sy="100000" kx="0" ky="0" algn="bl" rotWithShape="0" blurRad="101600" dist="38100" dir="5400000">
-              <a:srgbClr val="000000">
-                <a:alpha val="12000"/>
-              </a:srgbClr>
-            </a:outerShdw>
-          </a:effectLst>
-        </p:spPr>
-      </p:sp>
-      <p:pic>
-        <p:nvPicPr>
-          <p:cNvPr id="8" name="Image 0" descr="D:/GitHub/mern-web-book/docs/assets/img/lecture-04/google-search-form.png">    </p:cNvPr>
-          <p:cNvPicPr>
-            <a:picLocks noChangeAspect="1"/>
-          </p:cNvPicPr>
-          <p:nvPr/>
-        </p:nvPicPr>
-        <p:blipFill>
-          <a:blip r:embed="rId1"/>
-          <a:stretch>
-            <a:fillRect/>
-          </a:stretch>
-        </p:blipFill>
-        <p:spPr>
-          <a:xfrm>
-            <a:off x="640080" y="4589503"/>
-            <a:ext cx="10911535" cy="1292780"/>
-          </a:xfrm>
-          <a:prstGeom prst="rect">
-            <a:avLst/>
-          </a:prstGeom>
-        </p:spPr>
-      </p:pic>
-      <p:sp>
-        <p:nvSpPr>
-          <p:cNvPr id="9" name="Text 6"/>
-          <p:cNvSpPr txBox="1"/>
-          <p:nvPr/>
-        </p:nvSpPr>
-        <p:spPr>
-          <a:xfrm>
-            <a:off x="640080" y="6446520"/>
-            <a:ext cx="8686800" cy="292608"/>
-          </a:xfrm>
-          <a:prstGeom prst="rect">
-            <a:avLst/>
-          </a:prstGeom>
-          <a:noFill/>
-          <a:ln/>
-        </p:spPr>
-        <p:txBody>
-          <a:bodyPr wrap="square" lIns="0" tIns="0" rIns="0" bIns="0" rtlCol="0" anchor="ctr"/>
-          <a:lstStyle/>
-          <a:p>
-            <a:pPr algn="l" indent="0" marL="0">
-              <a:buNone/>
-            </a:pPr>
-            <a:r>
-              <a:rPr lang="en-US" sz="900" dirty="0">
-                <a:solidFill>
-                  <a:srgbClr val="5D5D72"/>
+                  <a:srgbClr val="26262F"/>
                 </a:solidFill>
                 <a:latin typeface="Calibri" pitchFamily="34" charset="0"/>
                 <a:ea typeface="Calibri" pitchFamily="34" charset="-122"/>
                 <a:cs typeface="Calibri" pitchFamily="34" charset="-120"/>
               </a:rPr>
+              <a:t>GET puts form values directly into the URL, where they can end up saved in browser history, server logs, and shared links. Always use POST for passwords and other sensitive information.</a:t>
+            </a:r>
+            <a:endParaRPr lang="en-US" sz="1250" dirty="0"/>
+          </a:p>
+        </p:txBody>
+      </p:sp>
+      <p:sp>
+        <p:nvSpPr>
+          <p:cNvPr id="7" name="Text 5"/>
+          <p:cNvSpPr txBox="1"/>
+          <p:nvPr/>
+        </p:nvSpPr>
+        <p:spPr>
+          <a:xfrm>
+            <a:off x="640080" y="6446520"/>
+            <a:ext cx="8686800" cy="292608"/>
+          </a:xfrm>
+          <a:prstGeom prst="rect">
+            <a:avLst/>
+          </a:prstGeom>
+          <a:noFill/>
+          <a:ln/>
+        </p:spPr>
+        <p:txBody>
+          <a:bodyPr wrap="square" lIns="0" tIns="0" rIns="0" bIns="0" rtlCol="0" anchor="ctr"/>
+          <a:lstStyle/>
+          <a:p>
+            <a:pPr algn="l" indent="0" marL="0">
+              <a:buNone/>
+            </a:pPr>
+            <a:r>
+              <a:rPr lang="en-US" sz="900" dirty="0">
+                <a:solidFill>
+                  <a:srgbClr val="5D5D72"/>
+                </a:solidFill>
+                <a:latin typeface="Calibri" pitchFamily="34" charset="0"/>
+                <a:ea typeface="Calibri" pitchFamily="34" charset="-122"/>
+                <a:cs typeface="Calibri" pitchFamily="34" charset="-120"/>
+              </a:rPr>
               <a:t>Usman Akram  •  COMSATS University Islamabad</a:t>
             </a:r>
             <a:endParaRPr lang="en-US" sz="900" dirty="0"/>
@@ -5349,7 +5756,7 @@
       </p:sp>
       <p:sp>
         <p:nvSpPr>
-          <p:cNvPr id="10" name="Text 7"/>
+          <p:cNvPr id="8" name="Text 6"/>
           <p:cNvSpPr txBox="1"/>
           <p:nvPr/>
         </p:nvSpPr>
@@ -5451,7 +5858,7 @@
                 <a:ea typeface="Calibri" pitchFamily="34" charset="-122"/>
                 <a:cs typeface="Calibri" pitchFamily="34" charset="-120"/>
               </a:rPr>
-              <a:t>INPUT TYPES</a:t>
+              <a:t>A REAL EXAMPLE</a:t>
             </a:r>
             <a:endParaRPr lang="en-US" sz="1300" dirty="0"/>
           </a:p>
@@ -5490,6 +5897,435 @@
                 <a:ea typeface="Cambria" pitchFamily="34" charset="-122"/>
                 <a:cs typeface="Cambria" pitchFamily="34" charset="-120"/>
               </a:rPr>
+              <a:t>Searching Google with a GET Form</a:t>
+            </a:r>
+            <a:endParaRPr lang="en-US" sz="3400" dirty="0"/>
+          </a:p>
+        </p:txBody>
+      </p:sp>
+      <p:sp>
+        <p:nvSpPr>
+          <p:cNvPr id="4" name="Text 2"/>
+          <p:cNvSpPr txBox="1"/>
+          <p:nvPr/>
+        </p:nvSpPr>
+        <p:spPr>
+          <a:xfrm>
+            <a:off x="640080" y="1691640"/>
+            <a:ext cx="10911535" cy="411480"/>
+          </a:xfrm>
+          <a:prstGeom prst="rect">
+            <a:avLst/>
+          </a:prstGeom>
+          <a:noFill/>
+          <a:ln/>
+        </p:spPr>
+        <p:txBody>
+          <a:bodyPr wrap="square" lIns="0" tIns="0" rIns="0" bIns="0" rtlCol="0" anchor="ctr"/>
+          <a:lstStyle/>
+          <a:p>
+            <a:pPr indent="0" marL="0">
+              <a:buNone/>
+            </a:pPr>
+            <a:r>
+              <a:rPr lang="en-US" sz="1350" i="1" dirty="0">
+                <a:solidFill>
+                  <a:srgbClr val="5D5D72"/>
+                </a:solidFill>
+                <a:latin typeface="Calibri" pitchFamily="34" charset="0"/>
+                <a:ea typeface="Calibri" pitchFamily="34" charset="-122"/>
+                <a:cs typeface="Calibri" pitchFamily="34" charset="-120"/>
+              </a:rPr>
+              <a:t>name="q" is the exact query-parameter name Google's search endpoint expects — submitting this form genuinely searches Google.</a:t>
+            </a:r>
+            <a:endParaRPr lang="en-US" sz="1350" dirty="0"/>
+          </a:p>
+        </p:txBody>
+      </p:sp>
+      <p:sp>
+        <p:nvSpPr>
+          <p:cNvPr id="5" name="Shape 3"/>
+          <p:cNvSpPr/>
+          <p:nvPr/>
+        </p:nvSpPr>
+        <p:spPr>
+          <a:xfrm>
+            <a:off x="640080" y="2240280"/>
+            <a:ext cx="10911535" cy="1739265"/>
+          </a:xfrm>
+          <a:prstGeom prst="roundRect">
+            <a:avLst>
+              <a:gd name="adj" fmla="val 4206"/>
+            </a:avLst>
+          </a:prstGeom>
+          <a:solidFill>
+            <a:srgbClr val="1E1E4C"/>
+          </a:solidFill>
+          <a:ln/>
+        </p:spPr>
+      </p:sp>
+      <p:sp>
+        <p:nvSpPr>
+          <p:cNvPr id="6" name="Text 4"/>
+          <p:cNvSpPr txBox="1"/>
+          <p:nvPr/>
+        </p:nvSpPr>
+        <p:spPr>
+          <a:xfrm>
+            <a:off x="960120" y="2468880"/>
+            <a:ext cx="10271455" cy="1282065"/>
+          </a:xfrm>
+          <a:prstGeom prst="rect">
+            <a:avLst/>
+          </a:prstGeom>
+          <a:noFill/>
+          <a:ln/>
+        </p:spPr>
+        <p:txBody>
+          <a:bodyPr wrap="square" lIns="0" tIns="0" rIns="0" bIns="0" rtlCol="0" anchor="t"/>
+          <a:lstStyle/>
+          <a:p>
+            <a:pPr indent="0" marL="0">
+              <a:lnSpc>
+                <a:spcPct val="125000"/>
+              </a:lnSpc>
+              <a:buNone/>
+            </a:pPr>
+            <a:r>
+              <a:rPr lang="en-US" sz="1250" dirty="0">
+                <a:solidFill>
+                  <a:srgbClr val="C9D3F5"/>
+                </a:solidFill>
+                <a:latin typeface="Courier New" pitchFamily="34" charset="0"/>
+                <a:ea typeface="Courier New" pitchFamily="34" charset="-122"/>
+                <a:cs typeface="Courier New" pitchFamily="34" charset="-120"/>
+              </a:rPr>
+              <a:t>&lt;form action="https://www.google.com/search" method="GET"&gt;</a:t>
+            </a:r>
+            <a:endParaRPr lang="en-US" sz="1250" dirty="0"/>
+          </a:p>
+          <a:p>
+            <a:pPr indent="0" marL="0">
+              <a:lnSpc>
+                <a:spcPct val="125000"/>
+              </a:lnSpc>
+              <a:buNone/>
+            </a:pPr>
+            <a:r>
+              <a:rPr lang="en-US" sz="1250" dirty="0">
+                <a:solidFill>
+                  <a:srgbClr val="C9D3F5"/>
+                </a:solidFill>
+                <a:latin typeface="Courier New" pitchFamily="34" charset="0"/>
+                <a:ea typeface="Courier New" pitchFamily="34" charset="-122"/>
+                <a:cs typeface="Courier New" pitchFamily="34" charset="-120"/>
+              </a:rPr>
+              <a:t>    &lt;label for="q"&gt;Search Google:&lt;/label&gt;</a:t>
+            </a:r>
+            <a:endParaRPr lang="en-US" sz="1250" dirty="0"/>
+          </a:p>
+          <a:p>
+            <a:pPr indent="0" marL="0">
+              <a:lnSpc>
+                <a:spcPct val="125000"/>
+              </a:lnSpc>
+              <a:buNone/>
+            </a:pPr>
+            <a:r>
+              <a:rPr lang="en-US" sz="1250" dirty="0">
+                <a:solidFill>
+                  <a:srgbClr val="C9D3F5"/>
+                </a:solidFill>
+                <a:latin typeface="Courier New" pitchFamily="34" charset="0"/>
+                <a:ea typeface="Courier New" pitchFamily="34" charset="-122"/>
+                <a:cs typeface="Courier New" pitchFamily="34" charset="-120"/>
+              </a:rPr>
+              <a:t>    &lt;input type="text" id="q" name="q" placeholder="Type your search..."&gt;</a:t>
+            </a:r>
+            <a:endParaRPr lang="en-US" sz="1250" dirty="0"/>
+          </a:p>
+          <a:p>
+            <a:pPr indent="0" marL="0">
+              <a:lnSpc>
+                <a:spcPct val="125000"/>
+              </a:lnSpc>
+              <a:buNone/>
+            </a:pPr>
+            <a:r>
+              <a:rPr lang="en-US" sz="1250" dirty="0">
+                <a:solidFill>
+                  <a:srgbClr val="C9D3F5"/>
+                </a:solidFill>
+                <a:latin typeface="Courier New" pitchFamily="34" charset="0"/>
+                <a:ea typeface="Courier New" pitchFamily="34" charset="-122"/>
+                <a:cs typeface="Courier New" pitchFamily="34" charset="-120"/>
+              </a:rPr>
+              <a:t>    &lt;button type="submit"&gt;Search&lt;/button&gt;</a:t>
+            </a:r>
+            <a:endParaRPr lang="en-US" sz="1250" dirty="0"/>
+          </a:p>
+          <a:p>
+            <a:pPr indent="0" marL="0">
+              <a:lnSpc>
+                <a:spcPct val="125000"/>
+              </a:lnSpc>
+              <a:buNone/>
+            </a:pPr>
+            <a:r>
+              <a:rPr lang="en-US" sz="1250" dirty="0">
+                <a:solidFill>
+                  <a:srgbClr val="C9D3F5"/>
+                </a:solidFill>
+                <a:latin typeface="Courier New" pitchFamily="34" charset="0"/>
+                <a:ea typeface="Courier New" pitchFamily="34" charset="-122"/>
+                <a:cs typeface="Courier New" pitchFamily="34" charset="-120"/>
+              </a:rPr>
+              <a:t>&lt;/form&gt;</a:t>
+            </a:r>
+            <a:endParaRPr lang="en-US" sz="1250" dirty="0"/>
+          </a:p>
+        </p:txBody>
+      </p:sp>
+      <p:sp>
+        <p:nvSpPr>
+          <p:cNvPr id="7" name="Shape 5"/>
+          <p:cNvSpPr/>
+          <p:nvPr/>
+        </p:nvSpPr>
+        <p:spPr>
+          <a:xfrm>
+            <a:off x="530352" y="4144137"/>
+            <a:ext cx="11130991" cy="2183511"/>
+          </a:xfrm>
+          <a:prstGeom prst="roundRect">
+            <a:avLst>
+              <a:gd name="adj" fmla="val 2513"/>
+            </a:avLst>
+          </a:prstGeom>
+          <a:solidFill>
+            <a:srgbClr val="FFFFFF"/>
+          </a:solidFill>
+          <a:ln w="12700">
+            <a:solidFill>
+              <a:srgbClr val="E2E2EE"/>
+            </a:solidFill>
+            <a:prstDash val="solid"/>
+          </a:ln>
+          <a:effectLst>
+            <a:outerShdw sx="100000" sy="100000" kx="0" ky="0" algn="bl" rotWithShape="0" blurRad="101600" dist="38100" dir="5400000">
+              <a:srgbClr val="000000">
+                <a:alpha val="12000"/>
+              </a:srgbClr>
+            </a:outerShdw>
+          </a:effectLst>
+        </p:spPr>
+      </p:sp>
+      <p:pic>
+        <p:nvPicPr>
+          <p:cNvPr id="8" name="Image 0" descr="D:/GitHub/mern-web-book/docs/assets/img/lecture-04/google-search-form.png">    </p:cNvPr>
+          <p:cNvPicPr>
+            <a:picLocks noChangeAspect="1"/>
+          </p:cNvPicPr>
+          <p:nvPr/>
+        </p:nvPicPr>
+        <p:blipFill>
+          <a:blip r:embed="rId1"/>
+          <a:stretch>
+            <a:fillRect/>
+          </a:stretch>
+        </p:blipFill>
+        <p:spPr>
+          <a:xfrm>
+            <a:off x="640080" y="4589503"/>
+            <a:ext cx="10911535" cy="1292780"/>
+          </a:xfrm>
+          <a:prstGeom prst="rect">
+            <a:avLst/>
+          </a:prstGeom>
+        </p:spPr>
+      </p:pic>
+      <p:sp>
+        <p:nvSpPr>
+          <p:cNvPr id="9" name="Text 6"/>
+          <p:cNvSpPr txBox="1"/>
+          <p:nvPr/>
+        </p:nvSpPr>
+        <p:spPr>
+          <a:xfrm>
+            <a:off x="640080" y="6446520"/>
+            <a:ext cx="8686800" cy="292608"/>
+          </a:xfrm>
+          <a:prstGeom prst="rect">
+            <a:avLst/>
+          </a:prstGeom>
+          <a:noFill/>
+          <a:ln/>
+        </p:spPr>
+        <p:txBody>
+          <a:bodyPr wrap="square" lIns="0" tIns="0" rIns="0" bIns="0" rtlCol="0" anchor="ctr"/>
+          <a:lstStyle/>
+          <a:p>
+            <a:pPr algn="l" indent="0" marL="0">
+              <a:buNone/>
+            </a:pPr>
+            <a:r>
+              <a:rPr lang="en-US" sz="900" dirty="0">
+                <a:solidFill>
+                  <a:srgbClr val="5D5D72"/>
+                </a:solidFill>
+                <a:latin typeface="Calibri" pitchFamily="34" charset="0"/>
+                <a:ea typeface="Calibri" pitchFamily="34" charset="-122"/>
+                <a:cs typeface="Calibri" pitchFamily="34" charset="-120"/>
+              </a:rPr>
+              <a:t>Usman Akram  •  COMSATS University Islamabad</a:t>
+            </a:r>
+            <a:endParaRPr lang="en-US" sz="900" dirty="0"/>
+          </a:p>
+        </p:txBody>
+      </p:sp>
+      <p:sp>
+        <p:nvSpPr>
+          <p:cNvPr id="10" name="Text 7"/>
+          <p:cNvSpPr txBox="1"/>
+          <p:nvPr/>
+        </p:nvSpPr>
+        <p:spPr>
+          <a:xfrm>
+            <a:off x="11155680" y="6446520"/>
+            <a:ext cx="457200" cy="292608"/>
+          </a:xfrm>
+          <a:prstGeom prst="rect">
+            <a:avLst/>
+          </a:prstGeom>
+          <a:noFill/>
+          <a:ln/>
+        </p:spPr>
+        <p:txBody>
+          <a:bodyPr wrap="square" lIns="0" tIns="0" rIns="0" bIns="0" rtlCol="0" anchor="ctr"/>
+          <a:lstStyle/>
+          <a:p>
+            <a:pPr algn="r" indent="0" marL="0">
+              <a:buNone/>
+            </a:pPr>
+            <a:r>
+              <a:rPr lang="en-US" sz="900" dirty="0">
+                <a:solidFill>
+                  <a:srgbClr val="5D5D72"/>
+                </a:solidFill>
+                <a:latin typeface="Calibri" pitchFamily="34" charset="0"/>
+                <a:ea typeface="Calibri" pitchFamily="34" charset="-122"/>
+                <a:cs typeface="Calibri" pitchFamily="34" charset="-120"/>
+              </a:rPr>
+              <a:t>14</a:t>
+            </a:r>
+            <a:endParaRPr lang="en-US" sz="900" dirty="0"/>
+          </a:p>
+        </p:txBody>
+      </p:sp>
+    </p:spTree>
+  </p:cSld>
+  <p:clrMapOvr>
+    <a:masterClrMapping/>
+  </p:clrMapOvr>
+</p:sld>
+</file>
+
+<file path=ppt/slides/slide15.xml><?xml version="1.0" encoding="utf-8"?>
+<p:sld xmlns:a="http://schemas.openxmlformats.org/drawingml/2006/main" xmlns:r="http://schemas.openxmlformats.org/officeDocument/2006/relationships" xmlns:p="http://schemas.openxmlformats.org/presentationml/2006/main">
+  <p:cSld name="Slide 15">
+    <p:bg>
+      <p:bgPr>
+        <a:solidFill>
+          <a:srgbClr val="FFFFFF"/>
+        </a:solidFill>
+      </p:bgPr>
+    </p:bg>
+    <p:spTree>
+      <p:nvGrpSpPr>
+        <p:cNvPr id="1" name=""/>
+        <p:cNvGrpSpPr/>
+        <p:nvPr/>
+      </p:nvGrpSpPr>
+      <p:grpSpPr>
+        <a:xfrm>
+          <a:off x="0" y="0"/>
+          <a:ext cx="0" cy="0"/>
+          <a:chOff x="0" y="0"/>
+          <a:chExt cx="0" cy="0"/>
+        </a:xfrm>
+      </p:grpSpPr>
+      <p:sp>
+        <p:nvSpPr>
+          <p:cNvPr id="2" name="Text 0"/>
+          <p:cNvSpPr txBox="1"/>
+          <p:nvPr/>
+        </p:nvSpPr>
+        <p:spPr>
+          <a:xfrm>
+            <a:off x="640080" y="457200"/>
+            <a:ext cx="10058400" cy="365760"/>
+          </a:xfrm>
+          <a:prstGeom prst="rect">
+            <a:avLst/>
+          </a:prstGeom>
+          <a:noFill/>
+          <a:ln/>
+        </p:spPr>
+        <p:txBody>
+          <a:bodyPr wrap="square" lIns="0" tIns="0" rIns="0" bIns="0" rtlCol="0" anchor="ctr"/>
+          <a:lstStyle/>
+          <a:p>
+            <a:pPr algn="l" indent="0" marL="0">
+              <a:buNone/>
+            </a:pPr>
+            <a:r>
+              <a:rPr lang="en-US" sz="1300" b="1" spc="300" kern="0" dirty="0">
+                <a:solidFill>
+                  <a:srgbClr val="FF8A3D"/>
+                </a:solidFill>
+                <a:latin typeface="Calibri" pitchFamily="34" charset="0"/>
+                <a:ea typeface="Calibri" pitchFamily="34" charset="-122"/>
+                <a:cs typeface="Calibri" pitchFamily="34" charset="-120"/>
+              </a:rPr>
+              <a:t>INPUT TYPES</a:t>
+            </a:r>
+            <a:endParaRPr lang="en-US" sz="1300" dirty="0"/>
+          </a:p>
+        </p:txBody>
+      </p:sp>
+      <p:sp>
+        <p:nvSpPr>
+          <p:cNvPr id="3" name="Text 1"/>
+          <p:cNvSpPr txBox="1"/>
+          <p:nvPr/>
+        </p:nvSpPr>
+        <p:spPr>
+          <a:xfrm>
+            <a:off x="640080" y="841248"/>
+            <a:ext cx="10881360" cy="914400"/>
+          </a:xfrm>
+          <a:prstGeom prst="rect">
+            <a:avLst/>
+          </a:prstGeom>
+          <a:noFill/>
+          <a:ln/>
+        </p:spPr>
+        <p:txBody>
+          <a:bodyPr wrap="square" lIns="0" tIns="0" rIns="0" bIns="0" rtlCol="0" anchor="ctr"/>
+          <a:lstStyle/>
+          <a:p>
+            <a:pPr algn="l" indent="0" marL="0">
+              <a:buNone/>
+            </a:pPr>
+            <a:r>
+              <a:rPr lang="en-US" sz="3400" b="1" dirty="0">
+                <a:solidFill>
+                  <a:srgbClr val="2B2B7A"/>
+                </a:solidFill>
+                <a:latin typeface="Cambria" pitchFamily="34" charset="0"/>
+                <a:ea typeface="Cambria" pitchFamily="34" charset="-122"/>
+                <a:cs typeface="Cambria" pitchFamily="34" charset="-120"/>
+              </a:rPr>
               <a:t>Common &lt;input&gt; Types</a:t>
             </a:r>
             <a:endParaRPr lang="en-US" sz="3400" dirty="0"/>
@@ -5498,7 +6334,7 @@
       </p:sp>
       <p:graphicFrame>
         <p:nvGraphicFramePr>
-          <p:cNvPr id="15" name="Table 0"/>
+          <p:cNvPr id="16" name="Table 0"/>
           <p:cNvGraphicFramePr>
             <a:graphicFrameLocks noGrp="1"/>
           </p:cNvGraphicFramePr>
@@ -6564,478 +7400,6 @@
                 <a:ea typeface="Calibri" pitchFamily="34" charset="-122"/>
                 <a:cs typeface="Calibri" pitchFamily="34" charset="-120"/>
               </a:rPr>
-              <a:t>14</a:t>
-            </a:r>
-            <a:endParaRPr lang="en-US" sz="900" dirty="0"/>
-          </a:p>
-        </p:txBody>
-      </p:sp>
-    </p:spTree>
-  </p:cSld>
-  <p:clrMapOvr>
-    <a:masterClrMapping/>
-  </p:clrMapOvr>
-</p:sld>
-</file>
-
-<file path=ppt/slides/slide15.xml><?xml version="1.0" encoding="utf-8"?>
-<p:sld xmlns:a="http://schemas.openxmlformats.org/drawingml/2006/main" xmlns:r="http://schemas.openxmlformats.org/officeDocument/2006/relationships" xmlns:p="http://schemas.openxmlformats.org/presentationml/2006/main">
-  <p:cSld name="Slide 15">
-    <p:bg>
-      <p:bgPr>
-        <a:solidFill>
-          <a:srgbClr val="FFFFFF"/>
-        </a:solidFill>
-      </p:bgPr>
-    </p:bg>
-    <p:spTree>
-      <p:nvGrpSpPr>
-        <p:cNvPr id="1" name=""/>
-        <p:cNvGrpSpPr/>
-        <p:nvPr/>
-      </p:nvGrpSpPr>
-      <p:grpSpPr>
-        <a:xfrm>
-          <a:off x="0" y="0"/>
-          <a:ext cx="0" cy="0"/>
-          <a:chOff x="0" y="0"/>
-          <a:chExt cx="0" cy="0"/>
-        </a:xfrm>
-      </p:grpSpPr>
-      <p:sp>
-        <p:nvSpPr>
-          <p:cNvPr id="2" name="Text 0"/>
-          <p:cNvSpPr txBox="1"/>
-          <p:nvPr/>
-        </p:nvSpPr>
-        <p:spPr>
-          <a:xfrm>
-            <a:off x="640080" y="457200"/>
-            <a:ext cx="10058400" cy="365760"/>
-          </a:xfrm>
-          <a:prstGeom prst="rect">
-            <a:avLst/>
-          </a:prstGeom>
-          <a:noFill/>
-          <a:ln/>
-        </p:spPr>
-        <p:txBody>
-          <a:bodyPr wrap="square" lIns="0" tIns="0" rIns="0" bIns="0" rtlCol="0" anchor="ctr"/>
-          <a:lstStyle/>
-          <a:p>
-            <a:pPr algn="l" indent="0" marL="0">
-              <a:buNone/>
-            </a:pPr>
-            <a:r>
-              <a:rPr lang="en-US" sz="1300" b="1" spc="300" kern="0" dirty="0">
-                <a:solidFill>
-                  <a:srgbClr val="FF8A3D"/>
-                </a:solidFill>
-                <a:latin typeface="Calibri" pitchFamily="34" charset="0"/>
-                <a:ea typeface="Calibri" pitchFamily="34" charset="-122"/>
-                <a:cs typeface="Calibri" pitchFamily="34" charset="-120"/>
-              </a:rPr>
-              <a:t>INPUT TYPES</a:t>
-            </a:r>
-            <a:endParaRPr lang="en-US" sz="1300" dirty="0"/>
-          </a:p>
-        </p:txBody>
-      </p:sp>
-      <p:sp>
-        <p:nvSpPr>
-          <p:cNvPr id="3" name="Text 1"/>
-          <p:cNvSpPr txBox="1"/>
-          <p:nvPr/>
-        </p:nvSpPr>
-        <p:spPr>
-          <a:xfrm>
-            <a:off x="640080" y="841248"/>
-            <a:ext cx="10881360" cy="914400"/>
-          </a:xfrm>
-          <a:prstGeom prst="rect">
-            <a:avLst/>
-          </a:prstGeom>
-          <a:noFill/>
-          <a:ln/>
-        </p:spPr>
-        <p:txBody>
-          <a:bodyPr wrap="square" lIns="0" tIns="0" rIns="0" bIns="0" rtlCol="0" anchor="ctr"/>
-          <a:lstStyle/>
-          <a:p>
-            <a:pPr algn="l" indent="0" marL="0">
-              <a:buNone/>
-            </a:pPr>
-            <a:r>
-              <a:rPr lang="en-US" sz="3400" b="1" dirty="0">
-                <a:solidFill>
-                  <a:srgbClr val="2B2B7A"/>
-                </a:solidFill>
-                <a:latin typeface="Cambria" pitchFamily="34" charset="0"/>
-                <a:ea typeface="Cambria" pitchFamily="34" charset="-122"/>
-                <a:cs typeface="Cambria" pitchFamily="34" charset="-120"/>
-              </a:rPr>
-              <a:t>Every &lt;input&gt; Type</a:t>
-            </a:r>
-            <a:endParaRPr lang="en-US" sz="3400" dirty="0"/>
-          </a:p>
-        </p:txBody>
-      </p:sp>
-      <p:sp>
-        <p:nvSpPr>
-          <p:cNvPr id="4" name="Shape 2"/>
-          <p:cNvSpPr/>
-          <p:nvPr/>
-        </p:nvSpPr>
-        <p:spPr>
-          <a:xfrm>
-            <a:off x="640080" y="1965960"/>
-            <a:ext cx="10911535" cy="3749040"/>
-          </a:xfrm>
-          <a:prstGeom prst="roundRect">
-            <a:avLst>
-              <a:gd name="adj" fmla="val 1951"/>
-            </a:avLst>
-          </a:prstGeom>
-          <a:solidFill>
-            <a:srgbClr val="1E1E4C"/>
-          </a:solidFill>
-          <a:ln/>
-        </p:spPr>
-      </p:sp>
-      <p:sp>
-        <p:nvSpPr>
-          <p:cNvPr id="5" name="Text 3"/>
-          <p:cNvSpPr txBox="1"/>
-          <p:nvPr/>
-        </p:nvSpPr>
-        <p:spPr>
-          <a:xfrm>
-            <a:off x="960120" y="2194560"/>
-            <a:ext cx="10271455" cy="3291840"/>
-          </a:xfrm>
-          <a:prstGeom prst="rect">
-            <a:avLst/>
-          </a:prstGeom>
-          <a:noFill/>
-          <a:ln/>
-        </p:spPr>
-        <p:txBody>
-          <a:bodyPr wrap="square" lIns="0" tIns="0" rIns="0" bIns="0" rtlCol="0" anchor="t"/>
-          <a:lstStyle/>
-          <a:p>
-            <a:pPr indent="0" marL="0">
-              <a:lnSpc>
-                <a:spcPct val="125000"/>
-              </a:lnSpc>
-              <a:buNone/>
-            </a:pPr>
-            <a:r>
-              <a:rPr lang="en-US" sz="1400" dirty="0">
-                <a:solidFill>
-                  <a:srgbClr val="C9D3F5"/>
-                </a:solidFill>
-                <a:latin typeface="Courier New" pitchFamily="34" charset="0"/>
-                <a:ea typeface="Courier New" pitchFamily="34" charset="-122"/>
-                <a:cs typeface="Courier New" pitchFamily="34" charset="-120"/>
-              </a:rPr>
-              <a:t>&lt;input type="text" name="fullname" placeholder="Full name"&gt;</a:t>
-            </a:r>
-            <a:endParaRPr lang="en-US" sz="1400" dirty="0"/>
-          </a:p>
-          <a:p>
-            <a:pPr indent="0" marL="0">
-              <a:lnSpc>
-                <a:spcPct val="125000"/>
-              </a:lnSpc>
-              <a:buNone/>
-            </a:pPr>
-            <a:r>
-              <a:rPr lang="en-US" sz="1400" dirty="0">
-                <a:solidFill>
-                  <a:srgbClr val="C9D3F5"/>
-                </a:solidFill>
-                <a:latin typeface="Courier New" pitchFamily="34" charset="0"/>
-                <a:ea typeface="Courier New" pitchFamily="34" charset="-122"/>
-                <a:cs typeface="Courier New" pitchFamily="34" charset="-120"/>
-              </a:rPr>
-              <a:t>&lt;input type="email" name="email" placeholder="you@example.com"&gt;</a:t>
-            </a:r>
-            <a:endParaRPr lang="en-US" sz="1400" dirty="0"/>
-          </a:p>
-          <a:p>
-            <a:pPr indent="0" marL="0">
-              <a:lnSpc>
-                <a:spcPct val="125000"/>
-              </a:lnSpc>
-              <a:buNone/>
-            </a:pPr>
-            <a:r>
-              <a:rPr lang="en-US" sz="1400" dirty="0">
-                <a:solidFill>
-                  <a:srgbClr val="C9D3F5"/>
-                </a:solidFill>
-                <a:latin typeface="Courier New" pitchFamily="34" charset="0"/>
-                <a:ea typeface="Courier New" pitchFamily="34" charset="-122"/>
-                <a:cs typeface="Courier New" pitchFamily="34" charset="-120"/>
-              </a:rPr>
-              <a:t>&lt;input type="password" name="password"&gt;</a:t>
-            </a:r>
-            <a:endParaRPr lang="en-US" sz="1400" dirty="0"/>
-          </a:p>
-          <a:p>
-            <a:pPr indent="0" marL="0">
-              <a:lnSpc>
-                <a:spcPct val="125000"/>
-              </a:lnSpc>
-              <a:buNone/>
-            </a:pPr>
-            <a:r>
-              <a:rPr lang="en-US" sz="1400" dirty="0">
-                <a:solidFill>
-                  <a:srgbClr val="C9D3F5"/>
-                </a:solidFill>
-                <a:latin typeface="Courier New" pitchFamily="34" charset="0"/>
-                <a:ea typeface="Courier New" pitchFamily="34" charset="-122"/>
-                <a:cs typeface="Courier New" pitchFamily="34" charset="-120"/>
-              </a:rPr>
-              <a:t>&lt;input type="number" name="age" min="1" max="120"&gt;</a:t>
-            </a:r>
-            <a:endParaRPr lang="en-US" sz="1400" dirty="0"/>
-          </a:p>
-          <a:p>
-            <a:pPr indent="0" marL="0">
-              <a:lnSpc>
-                <a:spcPct val="125000"/>
-              </a:lnSpc>
-              <a:buNone/>
-            </a:pPr>
-            <a:r>
-              <a:rPr lang="en-US" sz="1400" dirty="0">
-                <a:solidFill>
-                  <a:srgbClr val="C9D3F5"/>
-                </a:solidFill>
-                <a:latin typeface="Courier New" pitchFamily="34" charset="0"/>
-                <a:ea typeface="Courier New" pitchFamily="34" charset="-122"/>
-                <a:cs typeface="Courier New" pitchFamily="34" charset="-120"/>
-              </a:rPr>
-              <a:t>&lt;input type="date" name="birthday"&gt;</a:t>
-            </a:r>
-            <a:endParaRPr lang="en-US" sz="1400" dirty="0"/>
-          </a:p>
-          <a:p>
-            <a:pPr indent="0" marL="0">
-              <a:lnSpc>
-                <a:spcPct val="125000"/>
-              </a:lnSpc>
-              <a:buNone/>
-            </a:pPr>
-            <a:r>
-              <a:rPr lang="en-US" sz="1400" dirty="0">
-                <a:solidFill>
-                  <a:srgbClr val="C9D3F5"/>
-                </a:solidFill>
-                <a:latin typeface="Courier New" pitchFamily="34" charset="0"/>
-                <a:ea typeface="Courier New" pitchFamily="34" charset="-122"/>
-                <a:cs typeface="Courier New" pitchFamily="34" charset="-120"/>
-              </a:rPr>
-              <a:t>&lt;input type="checkbox" name="subscribe" checked&gt;</a:t>
-            </a:r>
-            <a:endParaRPr lang="en-US" sz="1400" dirty="0"/>
-          </a:p>
-          <a:p>
-            <a:pPr indent="0" marL="0">
-              <a:lnSpc>
-                <a:spcPct val="125000"/>
-              </a:lnSpc>
-              <a:buNone/>
-            </a:pPr>
-            <a:r>
-              <a:rPr lang="en-US" sz="1400" dirty="0">
-                <a:solidFill>
-                  <a:srgbClr val="C9D3F5"/>
-                </a:solidFill>
-                <a:latin typeface="Courier New" pitchFamily="34" charset="0"/>
-                <a:ea typeface="Courier New" pitchFamily="34" charset="-122"/>
-                <a:cs typeface="Courier New" pitchFamily="34" charset="-120"/>
-              </a:rPr>
-              <a:t>&lt;input type="radio" name="gender" value="male"&gt; Male</a:t>
-            </a:r>
-            <a:endParaRPr lang="en-US" sz="1400" dirty="0"/>
-          </a:p>
-          <a:p>
-            <a:pPr indent="0" marL="0">
-              <a:lnSpc>
-                <a:spcPct val="125000"/>
-              </a:lnSpc>
-              <a:buNone/>
-            </a:pPr>
-            <a:r>
-              <a:rPr lang="en-US" sz="1400" dirty="0">
-                <a:solidFill>
-                  <a:srgbClr val="C9D3F5"/>
-                </a:solidFill>
-                <a:latin typeface="Courier New" pitchFamily="34" charset="0"/>
-                <a:ea typeface="Courier New" pitchFamily="34" charset="-122"/>
-                <a:cs typeface="Courier New" pitchFamily="34" charset="-120"/>
-              </a:rPr>
-              <a:t>&lt;input type="radio" name="gender" value="female"&gt; Female</a:t>
-            </a:r>
-            <a:endParaRPr lang="en-US" sz="1400" dirty="0"/>
-          </a:p>
-          <a:p>
-            <a:pPr indent="0" marL="0">
-              <a:lnSpc>
-                <a:spcPct val="125000"/>
-              </a:lnSpc>
-              <a:buNone/>
-            </a:pPr>
-            <a:r>
-              <a:rPr lang="en-US" sz="1400" dirty="0">
-                <a:solidFill>
-                  <a:srgbClr val="C9D3F5"/>
-                </a:solidFill>
-                <a:latin typeface="Courier New" pitchFamily="34" charset="0"/>
-                <a:ea typeface="Courier New" pitchFamily="34" charset="-122"/>
-                <a:cs typeface="Courier New" pitchFamily="34" charset="-120"/>
-              </a:rPr>
-              <a:t>&lt;input type="file" name="resume"&gt;</a:t>
-            </a:r>
-            <a:endParaRPr lang="en-US" sz="1400" dirty="0"/>
-          </a:p>
-          <a:p>
-            <a:pPr indent="0" marL="0">
-              <a:lnSpc>
-                <a:spcPct val="125000"/>
-              </a:lnSpc>
-              <a:buNone/>
-            </a:pPr>
-            <a:r>
-              <a:rPr lang="en-US" sz="1400" dirty="0">
-                <a:solidFill>
-                  <a:srgbClr val="C9D3F5"/>
-                </a:solidFill>
-                <a:latin typeface="Courier New" pitchFamily="34" charset="0"/>
-                <a:ea typeface="Courier New" pitchFamily="34" charset="-122"/>
-                <a:cs typeface="Courier New" pitchFamily="34" charset="-120"/>
-              </a:rPr>
-              <a:t>&lt;input type="range" name="volume" min="0" max="100"&gt;</a:t>
-            </a:r>
-            <a:endParaRPr lang="en-US" sz="1400" dirty="0"/>
-          </a:p>
-          <a:p>
-            <a:pPr indent="0" marL="0">
-              <a:lnSpc>
-                <a:spcPct val="125000"/>
-              </a:lnSpc>
-              <a:buNone/>
-            </a:pPr>
-            <a:r>
-              <a:rPr lang="en-US" sz="1400" dirty="0">
-                <a:solidFill>
-                  <a:srgbClr val="C9D3F5"/>
-                </a:solidFill>
-                <a:latin typeface="Courier New" pitchFamily="34" charset="0"/>
-                <a:ea typeface="Courier New" pitchFamily="34" charset="-122"/>
-                <a:cs typeface="Courier New" pitchFamily="34" charset="-120"/>
-              </a:rPr>
-              <a:t>&lt;input type="color" name="favcolor"&gt;</a:t>
-            </a:r>
-            <a:endParaRPr lang="en-US" sz="1400" dirty="0"/>
-          </a:p>
-          <a:p>
-            <a:pPr indent="0" marL="0">
-              <a:lnSpc>
-                <a:spcPct val="125000"/>
-              </a:lnSpc>
-              <a:buNone/>
-            </a:pPr>
-            <a:r>
-              <a:rPr lang="en-US" sz="1400" dirty="0">
-                <a:solidFill>
-                  <a:srgbClr val="C9D3F5"/>
-                </a:solidFill>
-                <a:latin typeface="Courier New" pitchFamily="34" charset="0"/>
-                <a:ea typeface="Courier New" pitchFamily="34" charset="-122"/>
-                <a:cs typeface="Courier New" pitchFamily="34" charset="-120"/>
-              </a:rPr>
-              <a:t>&lt;input type="submit" value="Send"&gt;</a:t>
-            </a:r>
-            <a:endParaRPr lang="en-US" sz="1400" dirty="0"/>
-          </a:p>
-        </p:txBody>
-      </p:sp>
-      <p:sp>
-        <p:nvSpPr>
-          <p:cNvPr id="6" name="Text 4"/>
-          <p:cNvSpPr txBox="1"/>
-          <p:nvPr/>
-        </p:nvSpPr>
-        <p:spPr>
-          <a:xfrm>
-            <a:off x="640080" y="6446520"/>
-            <a:ext cx="8686800" cy="292608"/>
-          </a:xfrm>
-          <a:prstGeom prst="rect">
-            <a:avLst/>
-          </a:prstGeom>
-          <a:noFill/>
-          <a:ln/>
-        </p:spPr>
-        <p:txBody>
-          <a:bodyPr wrap="square" lIns="0" tIns="0" rIns="0" bIns="0" rtlCol="0" anchor="ctr"/>
-          <a:lstStyle/>
-          <a:p>
-            <a:pPr algn="l" indent="0" marL="0">
-              <a:buNone/>
-            </a:pPr>
-            <a:r>
-              <a:rPr lang="en-US" sz="900" dirty="0">
-                <a:solidFill>
-                  <a:srgbClr val="5D5D72"/>
-                </a:solidFill>
-                <a:latin typeface="Calibri" pitchFamily="34" charset="0"/>
-                <a:ea typeface="Calibri" pitchFamily="34" charset="-122"/>
-                <a:cs typeface="Calibri" pitchFamily="34" charset="-120"/>
-              </a:rPr>
-              <a:t>Usman Akram  •  COMSATS University Islamabad</a:t>
-            </a:r>
-            <a:endParaRPr lang="en-US" sz="900" dirty="0"/>
-          </a:p>
-        </p:txBody>
-      </p:sp>
-      <p:sp>
-        <p:nvSpPr>
-          <p:cNvPr id="7" name="Text 5"/>
-          <p:cNvSpPr txBox="1"/>
-          <p:nvPr/>
-        </p:nvSpPr>
-        <p:spPr>
-          <a:xfrm>
-            <a:off x="11155680" y="6446520"/>
-            <a:ext cx="457200" cy="292608"/>
-          </a:xfrm>
-          <a:prstGeom prst="rect">
-            <a:avLst/>
-          </a:prstGeom>
-          <a:noFill/>
-          <a:ln/>
-        </p:spPr>
-        <p:txBody>
-          <a:bodyPr wrap="square" lIns="0" tIns="0" rIns="0" bIns="0" rtlCol="0" anchor="ctr"/>
-          <a:lstStyle/>
-          <a:p>
-            <a:pPr algn="r" indent="0" marL="0">
-              <a:buNone/>
-            </a:pPr>
-            <a:r>
-              <a:rPr lang="en-US" sz="900" dirty="0">
-                <a:solidFill>
-                  <a:srgbClr val="5D5D72"/>
-                </a:solidFill>
-                <a:latin typeface="Calibri" pitchFamily="34" charset="0"/>
-                <a:ea typeface="Calibri" pitchFamily="34" charset="-122"/>
-                <a:cs typeface="Calibri" pitchFamily="34" charset="-120"/>
-              </a:rPr>
               <a:t>15</a:t>
             </a:r>
             <a:endParaRPr lang="en-US" sz="900" dirty="0"/>
@@ -7146,7 +7510,7 @@
                 <a:ea typeface="Cambria" pitchFamily="34" charset="-122"/>
                 <a:cs typeface="Cambria" pitchFamily="34" charset="-120"/>
               </a:rPr>
-              <a:t>Every Input Type, Rendered</a:t>
+              <a:t>Every &lt;input&gt; Type</a:t>
             </a:r>
             <a:endParaRPr lang="en-US" sz="3400" dirty="0"/>
           </a:p>
@@ -7154,14 +7518,298 @@
       </p:sp>
       <p:sp>
         <p:nvSpPr>
-          <p:cNvPr id="4" name="Text 2"/>
-          <p:cNvSpPr txBox="1"/>
-          <p:nvPr/>
-        </p:nvSpPr>
-        <p:spPr>
-          <a:xfrm>
-            <a:off x="640080" y="1691640"/>
-            <a:ext cx="10911535" cy="411480"/>
+          <p:cNvPr id="4" name="Shape 2"/>
+          <p:cNvSpPr/>
+          <p:nvPr/>
+        </p:nvSpPr>
+        <p:spPr>
+          <a:xfrm>
+            <a:off x="640080" y="1965960"/>
+            <a:ext cx="10911535" cy="3749040"/>
+          </a:xfrm>
+          <a:prstGeom prst="roundRect">
+            <a:avLst>
+              <a:gd name="adj" fmla="val 1951"/>
+            </a:avLst>
+          </a:prstGeom>
+          <a:solidFill>
+            <a:srgbClr val="1E1E4C"/>
+          </a:solidFill>
+          <a:ln/>
+        </p:spPr>
+      </p:sp>
+      <p:sp>
+        <p:nvSpPr>
+          <p:cNvPr id="5" name="Text 3"/>
+          <p:cNvSpPr txBox="1"/>
+          <p:nvPr/>
+        </p:nvSpPr>
+        <p:spPr>
+          <a:xfrm>
+            <a:off x="960120" y="2194560"/>
+            <a:ext cx="10271455" cy="3291840"/>
+          </a:xfrm>
+          <a:prstGeom prst="rect">
+            <a:avLst/>
+          </a:prstGeom>
+          <a:noFill/>
+          <a:ln/>
+        </p:spPr>
+        <p:txBody>
+          <a:bodyPr wrap="square" lIns="0" tIns="0" rIns="0" bIns="0" rtlCol="0" anchor="t"/>
+          <a:lstStyle/>
+          <a:p>
+            <a:pPr indent="0" marL="0">
+              <a:lnSpc>
+                <a:spcPct val="125000"/>
+              </a:lnSpc>
+              <a:buNone/>
+            </a:pPr>
+            <a:r>
+              <a:rPr lang="en-US" sz="1400" dirty="0">
+                <a:solidFill>
+                  <a:srgbClr val="C9D3F5"/>
+                </a:solidFill>
+                <a:latin typeface="Courier New" pitchFamily="34" charset="0"/>
+                <a:ea typeface="Courier New" pitchFamily="34" charset="-122"/>
+                <a:cs typeface="Courier New" pitchFamily="34" charset="-120"/>
+              </a:rPr>
+              <a:t>&lt;input type="text" name="fullname" placeholder="Full name"&gt;</a:t>
+            </a:r>
+            <a:endParaRPr lang="en-US" sz="1400" dirty="0"/>
+          </a:p>
+          <a:p>
+            <a:pPr indent="0" marL="0">
+              <a:lnSpc>
+                <a:spcPct val="125000"/>
+              </a:lnSpc>
+              <a:buNone/>
+            </a:pPr>
+            <a:r>
+              <a:rPr lang="en-US" sz="1400" dirty="0">
+                <a:solidFill>
+                  <a:srgbClr val="C9D3F5"/>
+                </a:solidFill>
+                <a:latin typeface="Courier New" pitchFamily="34" charset="0"/>
+                <a:ea typeface="Courier New" pitchFamily="34" charset="-122"/>
+                <a:cs typeface="Courier New" pitchFamily="34" charset="-120"/>
+              </a:rPr>
+              <a:t>&lt;input type="email" name="email" placeholder="you@example.com"&gt;</a:t>
+            </a:r>
+            <a:endParaRPr lang="en-US" sz="1400" dirty="0"/>
+          </a:p>
+          <a:p>
+            <a:pPr indent="0" marL="0">
+              <a:lnSpc>
+                <a:spcPct val="125000"/>
+              </a:lnSpc>
+              <a:buNone/>
+            </a:pPr>
+            <a:r>
+              <a:rPr lang="en-US" sz="1400" dirty="0">
+                <a:solidFill>
+                  <a:srgbClr val="C9D3F5"/>
+                </a:solidFill>
+                <a:latin typeface="Courier New" pitchFamily="34" charset="0"/>
+                <a:ea typeface="Courier New" pitchFamily="34" charset="-122"/>
+                <a:cs typeface="Courier New" pitchFamily="34" charset="-120"/>
+              </a:rPr>
+              <a:t>&lt;input type="password" name="password"&gt;</a:t>
+            </a:r>
+            <a:endParaRPr lang="en-US" sz="1400" dirty="0"/>
+          </a:p>
+          <a:p>
+            <a:pPr indent="0" marL="0">
+              <a:lnSpc>
+                <a:spcPct val="125000"/>
+              </a:lnSpc>
+              <a:buNone/>
+            </a:pPr>
+            <a:r>
+              <a:rPr lang="en-US" sz="1400" dirty="0">
+                <a:solidFill>
+                  <a:srgbClr val="C9D3F5"/>
+                </a:solidFill>
+                <a:latin typeface="Courier New" pitchFamily="34" charset="0"/>
+                <a:ea typeface="Courier New" pitchFamily="34" charset="-122"/>
+                <a:cs typeface="Courier New" pitchFamily="34" charset="-120"/>
+              </a:rPr>
+              <a:t>&lt;input type="number" name="age" min="1" max="120"&gt;</a:t>
+            </a:r>
+            <a:endParaRPr lang="en-US" sz="1400" dirty="0"/>
+          </a:p>
+          <a:p>
+            <a:pPr indent="0" marL="0">
+              <a:lnSpc>
+                <a:spcPct val="125000"/>
+              </a:lnSpc>
+              <a:buNone/>
+            </a:pPr>
+            <a:r>
+              <a:rPr lang="en-US" sz="1400" dirty="0">
+                <a:solidFill>
+                  <a:srgbClr val="C9D3F5"/>
+                </a:solidFill>
+                <a:latin typeface="Courier New" pitchFamily="34" charset="0"/>
+                <a:ea typeface="Courier New" pitchFamily="34" charset="-122"/>
+                <a:cs typeface="Courier New" pitchFamily="34" charset="-120"/>
+              </a:rPr>
+              <a:t>&lt;input type="date" name="birthday"&gt;</a:t>
+            </a:r>
+            <a:endParaRPr lang="en-US" sz="1400" dirty="0"/>
+          </a:p>
+          <a:p>
+            <a:pPr indent="0" marL="0">
+              <a:lnSpc>
+                <a:spcPct val="125000"/>
+              </a:lnSpc>
+              <a:buNone/>
+            </a:pPr>
+            <a:r>
+              <a:rPr lang="en-US" sz="1400" dirty="0">
+                <a:solidFill>
+                  <a:srgbClr val="C9D3F5"/>
+                </a:solidFill>
+                <a:latin typeface="Courier New" pitchFamily="34" charset="0"/>
+                <a:ea typeface="Courier New" pitchFamily="34" charset="-122"/>
+                <a:cs typeface="Courier New" pitchFamily="34" charset="-120"/>
+              </a:rPr>
+              <a:t>&lt;input type="checkbox" name="subscribe" checked&gt;</a:t>
+            </a:r>
+            <a:endParaRPr lang="en-US" sz="1400" dirty="0"/>
+          </a:p>
+          <a:p>
+            <a:pPr indent="0" marL="0">
+              <a:lnSpc>
+                <a:spcPct val="125000"/>
+              </a:lnSpc>
+              <a:buNone/>
+            </a:pPr>
+            <a:r>
+              <a:rPr lang="en-US" sz="1400" dirty="0">
+                <a:solidFill>
+                  <a:srgbClr val="C9D3F5"/>
+                </a:solidFill>
+                <a:latin typeface="Courier New" pitchFamily="34" charset="0"/>
+                <a:ea typeface="Courier New" pitchFamily="34" charset="-122"/>
+                <a:cs typeface="Courier New" pitchFamily="34" charset="-120"/>
+              </a:rPr>
+              <a:t>&lt;input type="radio" name="gender" value="male"&gt; Male</a:t>
+            </a:r>
+            <a:endParaRPr lang="en-US" sz="1400" dirty="0"/>
+          </a:p>
+          <a:p>
+            <a:pPr indent="0" marL="0">
+              <a:lnSpc>
+                <a:spcPct val="125000"/>
+              </a:lnSpc>
+              <a:buNone/>
+            </a:pPr>
+            <a:r>
+              <a:rPr lang="en-US" sz="1400" dirty="0">
+                <a:solidFill>
+                  <a:srgbClr val="C9D3F5"/>
+                </a:solidFill>
+                <a:latin typeface="Courier New" pitchFamily="34" charset="0"/>
+                <a:ea typeface="Courier New" pitchFamily="34" charset="-122"/>
+                <a:cs typeface="Courier New" pitchFamily="34" charset="-120"/>
+              </a:rPr>
+              <a:t>&lt;input type="radio" name="gender" value="female"&gt; Female</a:t>
+            </a:r>
+            <a:endParaRPr lang="en-US" sz="1400" dirty="0"/>
+          </a:p>
+          <a:p>
+            <a:pPr indent="0" marL="0">
+              <a:lnSpc>
+                <a:spcPct val="125000"/>
+              </a:lnSpc>
+              <a:buNone/>
+            </a:pPr>
+            <a:r>
+              <a:rPr lang="en-US" sz="1400" dirty="0">
+                <a:solidFill>
+                  <a:srgbClr val="C9D3F5"/>
+                </a:solidFill>
+                <a:latin typeface="Courier New" pitchFamily="34" charset="0"/>
+                <a:ea typeface="Courier New" pitchFamily="34" charset="-122"/>
+                <a:cs typeface="Courier New" pitchFamily="34" charset="-120"/>
+              </a:rPr>
+              <a:t>&lt;input type="file" name="resume"&gt;</a:t>
+            </a:r>
+            <a:endParaRPr lang="en-US" sz="1400" dirty="0"/>
+          </a:p>
+          <a:p>
+            <a:pPr indent="0" marL="0">
+              <a:lnSpc>
+                <a:spcPct val="125000"/>
+              </a:lnSpc>
+              <a:buNone/>
+            </a:pPr>
+            <a:r>
+              <a:rPr lang="en-US" sz="1400" dirty="0">
+                <a:solidFill>
+                  <a:srgbClr val="C9D3F5"/>
+                </a:solidFill>
+                <a:latin typeface="Courier New" pitchFamily="34" charset="0"/>
+                <a:ea typeface="Courier New" pitchFamily="34" charset="-122"/>
+                <a:cs typeface="Courier New" pitchFamily="34" charset="-120"/>
+              </a:rPr>
+              <a:t>&lt;input type="range" name="volume" min="0" max="100"&gt;</a:t>
+            </a:r>
+            <a:endParaRPr lang="en-US" sz="1400" dirty="0"/>
+          </a:p>
+          <a:p>
+            <a:pPr indent="0" marL="0">
+              <a:lnSpc>
+                <a:spcPct val="125000"/>
+              </a:lnSpc>
+              <a:buNone/>
+            </a:pPr>
+            <a:r>
+              <a:rPr lang="en-US" sz="1400" dirty="0">
+                <a:solidFill>
+                  <a:srgbClr val="C9D3F5"/>
+                </a:solidFill>
+                <a:latin typeface="Courier New" pitchFamily="34" charset="0"/>
+                <a:ea typeface="Courier New" pitchFamily="34" charset="-122"/>
+                <a:cs typeface="Courier New" pitchFamily="34" charset="-120"/>
+              </a:rPr>
+              <a:t>&lt;input type="color" name="favcolor"&gt;</a:t>
+            </a:r>
+            <a:endParaRPr lang="en-US" sz="1400" dirty="0"/>
+          </a:p>
+          <a:p>
+            <a:pPr indent="0" marL="0">
+              <a:lnSpc>
+                <a:spcPct val="125000"/>
+              </a:lnSpc>
+              <a:buNone/>
+            </a:pPr>
+            <a:r>
+              <a:rPr lang="en-US" sz="1400" dirty="0">
+                <a:solidFill>
+                  <a:srgbClr val="C9D3F5"/>
+                </a:solidFill>
+                <a:latin typeface="Courier New" pitchFamily="34" charset="0"/>
+                <a:ea typeface="Courier New" pitchFamily="34" charset="-122"/>
+                <a:cs typeface="Courier New" pitchFamily="34" charset="-120"/>
+              </a:rPr>
+              <a:t>&lt;input type="submit" value="Send"&gt;</a:t>
+            </a:r>
+            <a:endParaRPr lang="en-US" sz="1400" dirty="0"/>
+          </a:p>
+        </p:txBody>
+      </p:sp>
+      <p:sp>
+        <p:nvSpPr>
+          <p:cNvPr id="6" name="Text 4"/>
+          <p:cNvSpPr txBox="1"/>
+          <p:nvPr/>
+        </p:nvSpPr>
+        <p:spPr>
+          <a:xfrm>
+            <a:off x="640080" y="6446520"/>
+            <a:ext cx="8686800" cy="292608"/>
           </a:xfrm>
           <a:prstGeom prst="rect">
             <a:avLst/>
@@ -7173,11 +7821,11 @@
           <a:bodyPr wrap="square" lIns="0" tIns="0" rIns="0" bIns="0" rtlCol="0" anchor="ctr"/>
           <a:lstStyle/>
           <a:p>
-            <a:pPr indent="0" marL="0">
-              <a:buNone/>
-            </a:pPr>
-            <a:r>
-              <a:rPr lang="en-US" sz="1350" i="1" dirty="0">
+            <a:pPr algn="l" indent="0" marL="0">
+              <a:buNone/>
+            </a:pPr>
+            <a:r>
+              <a:rPr lang="en-US" sz="900" dirty="0">
                 <a:solidFill>
                   <a:srgbClr val="5D5D72"/>
                 </a:solidFill>
@@ -7185,103 +7833,6 @@
                 <a:ea typeface="Calibri" pitchFamily="34" charset="-122"/>
                 <a:cs typeface="Calibri" pitchFamily="34" charset="-120"/>
               </a:rPr>
-              <a:t>Each type is a genuinely different native control — this is the browser doing most of the work for you.</a:t>
-            </a:r>
-            <a:endParaRPr lang="en-US" sz="1350" dirty="0"/>
-          </a:p>
-        </p:txBody>
-      </p:sp>
-      <p:sp>
-        <p:nvSpPr>
-          <p:cNvPr id="5" name="Shape 3"/>
-          <p:cNvSpPr/>
-          <p:nvPr/>
-        </p:nvSpPr>
-        <p:spPr>
-          <a:xfrm>
-            <a:off x="530352" y="2221992"/>
-            <a:ext cx="11130991" cy="4059936"/>
-          </a:xfrm>
-          <a:prstGeom prst="roundRect">
-            <a:avLst>
-              <a:gd name="adj" fmla="val 1351"/>
-            </a:avLst>
-          </a:prstGeom>
-          <a:solidFill>
-            <a:srgbClr val="FFFFFF"/>
-          </a:solidFill>
-          <a:ln w="12700">
-            <a:solidFill>
-              <a:srgbClr val="E2E2EE"/>
-            </a:solidFill>
-            <a:prstDash val="solid"/>
-          </a:ln>
-          <a:effectLst>
-            <a:outerShdw sx="100000" sy="100000" kx="0" ky="0" algn="bl" rotWithShape="0" blurRad="101600" dist="38100" dir="5400000">
-              <a:srgbClr val="000000">
-                <a:alpha val="12000"/>
-              </a:srgbClr>
-            </a:outerShdw>
-          </a:effectLst>
-        </p:spPr>
-      </p:sp>
-      <p:pic>
-        <p:nvPicPr>
-          <p:cNvPr id="6" name="Image 0" descr="D:/GitHub/mern-web-book/docs/assets/img/lecture-04/input-types.png">    </p:cNvPr>
-          <p:cNvPicPr>
-            <a:picLocks noChangeAspect="1"/>
-          </p:cNvPicPr>
-          <p:nvPr/>
-        </p:nvPicPr>
-        <p:blipFill>
-          <a:blip r:embed="rId1"/>
-          <a:stretch>
-            <a:fillRect/>
-          </a:stretch>
-        </p:blipFill>
-        <p:spPr>
-          <a:xfrm>
-            <a:off x="5156959" y="2331720"/>
-            <a:ext cx="1877778" cy="3840480"/>
-          </a:xfrm>
-          <a:prstGeom prst="rect">
-            <a:avLst/>
-          </a:prstGeom>
-        </p:spPr>
-      </p:pic>
-      <p:sp>
-        <p:nvSpPr>
-          <p:cNvPr id="7" name="Text 4"/>
-          <p:cNvSpPr txBox="1"/>
-          <p:nvPr/>
-        </p:nvSpPr>
-        <p:spPr>
-          <a:xfrm>
-            <a:off x="640080" y="6446520"/>
-            <a:ext cx="8686800" cy="292608"/>
-          </a:xfrm>
-          <a:prstGeom prst="rect">
-            <a:avLst/>
-          </a:prstGeom>
-          <a:noFill/>
-          <a:ln/>
-        </p:spPr>
-        <p:txBody>
-          <a:bodyPr wrap="square" lIns="0" tIns="0" rIns="0" bIns="0" rtlCol="0" anchor="ctr"/>
-          <a:lstStyle/>
-          <a:p>
-            <a:pPr algn="l" indent="0" marL="0">
-              <a:buNone/>
-            </a:pPr>
-            <a:r>
-              <a:rPr lang="en-US" sz="900" dirty="0">
-                <a:solidFill>
-                  <a:srgbClr val="5D5D72"/>
-                </a:solidFill>
-                <a:latin typeface="Calibri" pitchFamily="34" charset="0"/>
-                <a:ea typeface="Calibri" pitchFamily="34" charset="-122"/>
-                <a:cs typeface="Calibri" pitchFamily="34" charset="-120"/>
-              </a:rPr>
               <a:t>Usman Akram  •  COMSATS University Islamabad</a:t>
             </a:r>
             <a:endParaRPr lang="en-US" sz="900" dirty="0"/>
@@ -7290,7 +7841,7 @@
       </p:sp>
       <p:sp>
         <p:nvSpPr>
-          <p:cNvPr id="8" name="Text 5"/>
+          <p:cNvPr id="7" name="Text 5"/>
           <p:cNvSpPr txBox="1"/>
           <p:nvPr/>
         </p:nvSpPr>
@@ -7392,7 +7943,7 @@
                 <a:ea typeface="Calibri" pitchFamily="34" charset="-122"/>
                 <a:cs typeface="Calibri" pitchFamily="34" charset="-120"/>
               </a:rPr>
-              <a:t>FILE UPLOADS</a:t>
+              <a:t>INPUT TYPES</a:t>
             </a:r>
             <a:endParaRPr lang="en-US" sz="1300" dirty="0"/>
           </a:p>
@@ -7431,7 +7982,7 @@
                 <a:ea typeface="Cambria" pitchFamily="34" charset="-122"/>
                 <a:cs typeface="Cambria" pitchFamily="34" charset="-120"/>
               </a:rPr>
-              <a:t>multipart/form-data</a:t>
+              <a:t>Every Input Type, Rendered</a:t>
             </a:r>
             <a:endParaRPr lang="en-US" sz="3400" dirty="0"/>
           </a:p>
@@ -7439,34 +7990,14 @@
       </p:sp>
       <p:sp>
         <p:nvSpPr>
-          <p:cNvPr id="4" name="Shape 2"/>
-          <p:cNvSpPr/>
-          <p:nvPr/>
-        </p:nvSpPr>
-        <p:spPr>
-          <a:xfrm>
-            <a:off x="685800" y="2185416"/>
-            <a:ext cx="82296" cy="82296"/>
-          </a:xfrm>
-          <a:prstGeom prst="ellipse">
-            <a:avLst/>
-          </a:prstGeom>
-          <a:solidFill>
-            <a:srgbClr val="FF8A3D"/>
-          </a:solidFill>
-          <a:ln/>
-        </p:spPr>
-      </p:sp>
-      <p:sp>
-        <p:nvSpPr>
-          <p:cNvPr id="5" name="Text 3"/>
-          <p:cNvSpPr txBox="1"/>
-          <p:nvPr/>
-        </p:nvSpPr>
-        <p:spPr>
-          <a:xfrm>
-            <a:off x="960120" y="1892808"/>
-            <a:ext cx="10591495" cy="640080"/>
+          <p:cNvPr id="4" name="Text 2"/>
+          <p:cNvSpPr txBox="1"/>
+          <p:nvPr/>
+        </p:nvSpPr>
+        <p:spPr>
+          <a:xfrm>
+            <a:off x="640080" y="1691640"/>
+            <a:ext cx="10911535" cy="411480"/>
           </a:xfrm>
           <a:prstGeom prst="rect">
             <a:avLst/>
@@ -7482,50 +8013,88 @@
               <a:buNone/>
             </a:pPr>
             <a:r>
-              <a:rPr lang="en-US" sz="1500" dirty="0">
-                <a:solidFill>
-                  <a:srgbClr val="26262F"/>
+              <a:rPr lang="en-US" sz="1350" i="1" dirty="0">
+                <a:solidFill>
+                  <a:srgbClr val="5D5D72"/>
                 </a:solidFill>
                 <a:latin typeface="Calibri" pitchFamily="34" charset="0"/>
                 <a:ea typeface="Calibri" pitchFamily="34" charset="-122"/>
                 <a:cs typeface="Calibri" pitchFamily="34" charset="-120"/>
               </a:rPr>
-              <a:t>A file's raw bytes can't fit in a URL — file uploads require method="POST"</a:t>
-            </a:r>
-            <a:endParaRPr lang="en-US" sz="1500" dirty="0"/>
-          </a:p>
-        </p:txBody>
-      </p:sp>
-      <p:sp>
-        <p:nvSpPr>
-          <p:cNvPr id="6" name="Shape 4"/>
+              <a:t>Each type is a genuinely different native control — this is the browser doing most of the work for you.</a:t>
+            </a:r>
+            <a:endParaRPr lang="en-US" sz="1350" dirty="0"/>
+          </a:p>
+        </p:txBody>
+      </p:sp>
+      <p:sp>
+        <p:nvSpPr>
+          <p:cNvPr id="5" name="Shape 3"/>
           <p:cNvSpPr/>
           <p:nvPr/>
         </p:nvSpPr>
         <p:spPr>
           <a:xfrm>
-            <a:off x="685800" y="3008376"/>
-            <a:ext cx="82296" cy="82296"/>
-          </a:xfrm>
-          <a:prstGeom prst="ellipse">
-            <a:avLst/>
+            <a:off x="530352" y="2221992"/>
+            <a:ext cx="11130991" cy="4059936"/>
+          </a:xfrm>
+          <a:prstGeom prst="roundRect">
+            <a:avLst>
+              <a:gd name="adj" fmla="val 1351"/>
+            </a:avLst>
           </a:prstGeom>
           <a:solidFill>
-            <a:srgbClr val="FF8A3D"/>
+            <a:srgbClr val="FFFFFF"/>
           </a:solidFill>
-          <a:ln/>
-        </p:spPr>
-      </p:sp>
-      <p:sp>
-        <p:nvSpPr>
-          <p:cNvPr id="7" name="Text 5"/>
-          <p:cNvSpPr txBox="1"/>
-          <p:nvPr/>
-        </p:nvSpPr>
-        <p:spPr>
-          <a:xfrm>
-            <a:off x="960120" y="2715768"/>
-            <a:ext cx="10591495" cy="640080"/>
+          <a:ln w="12700">
+            <a:solidFill>
+              <a:srgbClr val="E2E2EE"/>
+            </a:solidFill>
+            <a:prstDash val="solid"/>
+          </a:ln>
+          <a:effectLst>
+            <a:outerShdw sx="100000" sy="100000" kx="0" ky="0" algn="bl" rotWithShape="0" blurRad="101600" dist="38100" dir="5400000">
+              <a:srgbClr val="000000">
+                <a:alpha val="12000"/>
+              </a:srgbClr>
+            </a:outerShdw>
+          </a:effectLst>
+        </p:spPr>
+      </p:sp>
+      <p:pic>
+        <p:nvPicPr>
+          <p:cNvPr id="6" name="Image 0" descr="D:/GitHub/mern-web-book/docs/assets/img/lecture-04/input-types.png">    </p:cNvPr>
+          <p:cNvPicPr>
+            <a:picLocks noChangeAspect="1"/>
+          </p:cNvPicPr>
+          <p:nvPr/>
+        </p:nvPicPr>
+        <p:blipFill>
+          <a:blip r:embed="rId1"/>
+          <a:stretch>
+            <a:fillRect/>
+          </a:stretch>
+        </p:blipFill>
+        <p:spPr>
+          <a:xfrm>
+            <a:off x="5156959" y="2331720"/>
+            <a:ext cx="1877778" cy="3840480"/>
+          </a:xfrm>
+          <a:prstGeom prst="rect">
+            <a:avLst/>
+          </a:prstGeom>
+        </p:spPr>
+      </p:pic>
+      <p:sp>
+        <p:nvSpPr>
+          <p:cNvPr id="7" name="Text 4"/>
+          <p:cNvSpPr txBox="1"/>
+          <p:nvPr/>
+        </p:nvSpPr>
+        <p:spPr>
+          <a:xfrm>
+            <a:off x="640080" y="6446520"/>
+            <a:ext cx="8686800" cy="292608"/>
           </a:xfrm>
           <a:prstGeom prst="rect">
             <a:avLst/>
@@ -7537,116 +8106,18 @@
           <a:bodyPr wrap="square" lIns="0" tIns="0" rIns="0" bIns="0" rtlCol="0" anchor="ctr"/>
           <a:lstStyle/>
           <a:p>
-            <a:pPr indent="0" marL="0">
-              <a:buNone/>
-            </a:pPr>
-            <a:r>
-              <a:rPr lang="en-US" sz="1500" dirty="0">
-                <a:solidFill>
-                  <a:srgbClr val="26262F"/>
+            <a:pPr algn="l" indent="0" marL="0">
+              <a:buNone/>
+            </a:pPr>
+            <a:r>
+              <a:rPr lang="en-US" sz="900" dirty="0">
+                <a:solidFill>
+                  <a:srgbClr val="5D5D72"/>
                 </a:solidFill>
                 <a:latin typeface="Calibri" pitchFamily="34" charset="0"/>
                 <a:ea typeface="Calibri" pitchFamily="34" charset="-122"/>
                 <a:cs typeface="Calibri" pitchFamily="34" charset="-120"/>
               </a:rPr>
-              <a:t>enctype="multipart/form-data" switches the request body format so text fields and raw file bytes can travel together</a:t>
-            </a:r>
-            <a:endParaRPr lang="en-US" sz="1500" dirty="0"/>
-          </a:p>
-        </p:txBody>
-      </p:sp>
-      <p:sp>
-        <p:nvSpPr>
-          <p:cNvPr id="8" name="Shape 6"/>
-          <p:cNvSpPr/>
-          <p:nvPr/>
-        </p:nvSpPr>
-        <p:spPr>
-          <a:xfrm>
-            <a:off x="685800" y="3831336"/>
-            <a:ext cx="82296" cy="82296"/>
-          </a:xfrm>
-          <a:prstGeom prst="ellipse">
-            <a:avLst/>
-          </a:prstGeom>
-          <a:solidFill>
-            <a:srgbClr val="FF8A3D"/>
-          </a:solidFill>
-          <a:ln/>
-        </p:spPr>
-      </p:sp>
-      <p:sp>
-        <p:nvSpPr>
-          <p:cNvPr id="9" name="Text 7"/>
-          <p:cNvSpPr txBox="1"/>
-          <p:nvPr/>
-        </p:nvSpPr>
-        <p:spPr>
-          <a:xfrm>
-            <a:off x="960120" y="3538728"/>
-            <a:ext cx="10591495" cy="640080"/>
-          </a:xfrm>
-          <a:prstGeom prst="rect">
-            <a:avLst/>
-          </a:prstGeom>
-          <a:noFill/>
-          <a:ln/>
-        </p:spPr>
-        <p:txBody>
-          <a:bodyPr wrap="square" lIns="0" tIns="0" rIns="0" bIns="0" rtlCol="0" anchor="ctr"/>
-          <a:lstStyle/>
-          <a:p>
-            <a:pPr indent="0" marL="0">
-              <a:buNone/>
-            </a:pPr>
-            <a:r>
-              <a:rPr lang="en-US" sz="1500" dirty="0">
-                <a:solidFill>
-                  <a:srgbClr val="26262F"/>
-                </a:solidFill>
-                <a:latin typeface="Calibri" pitchFamily="34" charset="0"/>
-                <a:ea typeface="Calibri" pitchFamily="34" charset="-122"/>
-                <a:cs typeface="Calibri" pitchFamily="34" charset="-120"/>
-              </a:rPr>
-              <a:t>accept is a filter hint for the file picker, not a security check — the server must always re-validate the uploaded file</a:t>
-            </a:r>
-            <a:endParaRPr lang="en-US" sz="1500" dirty="0"/>
-          </a:p>
-        </p:txBody>
-      </p:sp>
-      <p:sp>
-        <p:nvSpPr>
-          <p:cNvPr id="10" name="Text 8"/>
-          <p:cNvSpPr txBox="1"/>
-          <p:nvPr/>
-        </p:nvSpPr>
-        <p:spPr>
-          <a:xfrm>
-            <a:off x="640080" y="6446520"/>
-            <a:ext cx="8686800" cy="292608"/>
-          </a:xfrm>
-          <a:prstGeom prst="rect">
-            <a:avLst/>
-          </a:prstGeom>
-          <a:noFill/>
-          <a:ln/>
-        </p:spPr>
-        <p:txBody>
-          <a:bodyPr wrap="square" lIns="0" tIns="0" rIns="0" bIns="0" rtlCol="0" anchor="ctr"/>
-          <a:lstStyle/>
-          <a:p>
-            <a:pPr algn="l" indent="0" marL="0">
-              <a:buNone/>
-            </a:pPr>
-            <a:r>
-              <a:rPr lang="en-US" sz="900" dirty="0">
-                <a:solidFill>
-                  <a:srgbClr val="5D5D72"/>
-                </a:solidFill>
-                <a:latin typeface="Calibri" pitchFamily="34" charset="0"/>
-                <a:ea typeface="Calibri" pitchFamily="34" charset="-122"/>
-                <a:cs typeface="Calibri" pitchFamily="34" charset="-120"/>
-              </a:rPr>
               <a:t>Usman Akram  •  COMSATS University Islamabad</a:t>
             </a:r>
             <a:endParaRPr lang="en-US" sz="900" dirty="0"/>
@@ -7655,7 +8126,7 @@
       </p:sp>
       <p:sp>
         <p:nvSpPr>
-          <p:cNvPr id="11" name="Text 9"/>
+          <p:cNvPr id="8" name="Text 5"/>
           <p:cNvSpPr txBox="1"/>
           <p:nvPr/>
         </p:nvSpPr>
@@ -7796,7 +8267,7 @@
                 <a:ea typeface="Cambria" pitchFamily="34" charset="-122"/>
                 <a:cs typeface="Cambria" pitchFamily="34" charset="-120"/>
               </a:rPr>
-              <a:t>What multipart/form-data Looks Like</a:t>
+              <a:t>multipart/form-data</a:t>
             </a:r>
             <a:endParaRPr lang="en-US" sz="3400" dirty="0"/>
           </a:p>
@@ -7810,16 +8281,14 @@
         </p:nvSpPr>
         <p:spPr>
           <a:xfrm>
-            <a:off x="640080" y="1965960"/>
-            <a:ext cx="10911535" cy="2682240"/>
-          </a:xfrm>
-          <a:prstGeom prst="roundRect">
-            <a:avLst>
-              <a:gd name="adj" fmla="val 2727"/>
-            </a:avLst>
+            <a:off x="685800" y="2185416"/>
+            <a:ext cx="82296" cy="82296"/>
+          </a:xfrm>
+          <a:prstGeom prst="ellipse">
+            <a:avLst/>
           </a:prstGeom>
           <a:solidFill>
-            <a:srgbClr val="1E1E4C"/>
+            <a:srgbClr val="FF8A3D"/>
           </a:solidFill>
           <a:ln/>
         </p:spPr>
@@ -7832,184 +8301,24 @@
         </p:nvSpPr>
         <p:spPr>
           <a:xfrm>
-            <a:off x="960120" y="2194560"/>
-            <a:ext cx="10271455" cy="2225040"/>
-          </a:xfrm>
-          <a:prstGeom prst="rect">
-            <a:avLst/>
-          </a:prstGeom>
-          <a:noFill/>
-          <a:ln/>
-        </p:spPr>
-        <p:txBody>
-          <a:bodyPr wrap="square" lIns="0" tIns="0" rIns="0" bIns="0" rtlCol="0" anchor="t"/>
+            <a:off x="960120" y="1892808"/>
+            <a:ext cx="10591495" cy="640080"/>
+          </a:xfrm>
+          <a:prstGeom prst="rect">
+            <a:avLst/>
+          </a:prstGeom>
+          <a:noFill/>
+          <a:ln/>
+        </p:spPr>
+        <p:txBody>
+          <a:bodyPr wrap="square" lIns="0" tIns="0" rIns="0" bIns="0" rtlCol="0" anchor="ctr"/>
           <a:lstStyle/>
           <a:p>
             <a:pPr indent="0" marL="0">
-              <a:lnSpc>
-                <a:spcPct val="125000"/>
-              </a:lnSpc>
-              <a:buNone/>
-            </a:pPr>
-            <a:r>
-              <a:rPr lang="en-US" sz="1400" dirty="0">
-                <a:solidFill>
-                  <a:srgbClr val="C9D3F5"/>
-                </a:solidFill>
-                <a:latin typeface="Courier New" pitchFamily="34" charset="0"/>
-                <a:ea typeface="Courier New" pitchFamily="34" charset="-122"/>
-                <a:cs typeface="Courier New" pitchFamily="34" charset="-120"/>
-              </a:rPr>
-              <a:t>POST /upload-resume HTTP/1.1</a:t>
-            </a:r>
-            <a:endParaRPr lang="en-US" sz="1400" dirty="0"/>
-          </a:p>
-          <a:p>
-            <a:pPr indent="0" marL="0">
-              <a:lnSpc>
-                <a:spcPct val="125000"/>
-              </a:lnSpc>
-              <a:buNone/>
-            </a:pPr>
-            <a:r>
-              <a:rPr lang="en-US" sz="1400" dirty="0">
-                <a:solidFill>
-                  <a:srgbClr val="C9D3F5"/>
-                </a:solidFill>
-                <a:latin typeface="Courier New" pitchFamily="34" charset="0"/>
-                <a:ea typeface="Courier New" pitchFamily="34" charset="-122"/>
-                <a:cs typeface="Courier New" pitchFamily="34" charset="-120"/>
-              </a:rPr>
-              <a:t>Content-Type: multipart/form-data; boundary=----Bnd123</a:t>
-            </a:r>
-            <a:endParaRPr lang="en-US" sz="1400" dirty="0"/>
-          </a:p>
-          <a:p>
-            <a:pPr indent="0" marL="0">
-              <a:lnSpc>
-                <a:spcPct val="125000"/>
-              </a:lnSpc>
-              <a:buNone/>
-            </a:pPr>
-            <a:endParaRPr lang="en-US" sz="1400" dirty="0"/>
-          </a:p>
-          <a:p>
-            <a:pPr indent="0" marL="0">
-              <a:lnSpc>
-                <a:spcPct val="125000"/>
-              </a:lnSpc>
-              <a:buNone/>
-            </a:pPr>
-            <a:r>
-              <a:rPr lang="en-US" sz="1400" dirty="0">
-                <a:solidFill>
-                  <a:srgbClr val="C9D3F5"/>
-                </a:solidFill>
-                <a:latin typeface="Courier New" pitchFamily="34" charset="0"/>
-                <a:ea typeface="Courier New" pitchFamily="34" charset="-122"/>
-                <a:cs typeface="Courier New" pitchFamily="34" charset="-120"/>
-              </a:rPr>
-              <a:t>------Bnd123</a:t>
-            </a:r>
-            <a:endParaRPr lang="en-US" sz="1400" dirty="0"/>
-          </a:p>
-          <a:p>
-            <a:pPr indent="0" marL="0">
-              <a:lnSpc>
-                <a:spcPct val="125000"/>
-              </a:lnSpc>
-              <a:buNone/>
-            </a:pPr>
-            <a:r>
-              <a:rPr lang="en-US" sz="1400" dirty="0">
-                <a:solidFill>
-                  <a:srgbClr val="C9D3F5"/>
-                </a:solidFill>
-                <a:latin typeface="Courier New" pitchFamily="34" charset="0"/>
-                <a:ea typeface="Courier New" pitchFamily="34" charset="-122"/>
-                <a:cs typeface="Courier New" pitchFamily="34" charset="-120"/>
-              </a:rPr>
-              <a:t>Content-Disposition: form-data; name="resume"; filename="cv.pdf"</a:t>
-            </a:r>
-            <a:endParaRPr lang="en-US" sz="1400" dirty="0"/>
-          </a:p>
-          <a:p>
-            <a:pPr indent="0" marL="0">
-              <a:lnSpc>
-                <a:spcPct val="125000"/>
-              </a:lnSpc>
-              <a:buNone/>
-            </a:pPr>
-            <a:endParaRPr lang="en-US" sz="1400" dirty="0"/>
-          </a:p>
-          <a:p>
-            <a:pPr indent="0" marL="0">
-              <a:lnSpc>
-                <a:spcPct val="125000"/>
-              </a:lnSpc>
-              <a:buNone/>
-            </a:pPr>
-            <a:r>
-              <a:rPr lang="en-US" sz="1400" dirty="0">
-                <a:solidFill>
-                  <a:srgbClr val="C9D3F5"/>
-                </a:solidFill>
-                <a:latin typeface="Courier New" pitchFamily="34" charset="0"/>
-                <a:ea typeface="Courier New" pitchFamily="34" charset="-122"/>
-                <a:cs typeface="Courier New" pitchFamily="34" charset="-120"/>
-              </a:rPr>
-              <a:t>%PDF-1.4 ...(raw binary bytes)...</a:t>
-            </a:r>
-            <a:endParaRPr lang="en-US" sz="1400" dirty="0"/>
-          </a:p>
-          <a:p>
-            <a:pPr indent="0" marL="0">
-              <a:lnSpc>
-                <a:spcPct val="125000"/>
-              </a:lnSpc>
-              <a:buNone/>
-            </a:pPr>
-            <a:r>
-              <a:rPr lang="en-US" sz="1400" dirty="0">
-                <a:solidFill>
-                  <a:srgbClr val="C9D3F5"/>
-                </a:solidFill>
-                <a:latin typeface="Courier New" pitchFamily="34" charset="0"/>
-                <a:ea typeface="Courier New" pitchFamily="34" charset="-122"/>
-                <a:cs typeface="Courier New" pitchFamily="34" charset="-120"/>
-              </a:rPr>
-              <a:t>------Bnd123--</a:t>
-            </a:r>
-            <a:endParaRPr lang="en-US" sz="1400" dirty="0"/>
-          </a:p>
-        </p:txBody>
-      </p:sp>
-      <p:sp>
-        <p:nvSpPr>
-          <p:cNvPr id="6" name="Text 4"/>
-          <p:cNvSpPr txBox="1"/>
-          <p:nvPr/>
-        </p:nvSpPr>
-        <p:spPr>
-          <a:xfrm>
-            <a:off x="640080" y="4876800"/>
-            <a:ext cx="10911535" cy="1386840"/>
-          </a:xfrm>
-          <a:prstGeom prst="rect">
-            <a:avLst/>
-          </a:prstGeom>
-          <a:noFill/>
-          <a:ln/>
-        </p:spPr>
-        <p:txBody>
-          <a:bodyPr wrap="square" lIns="0" tIns="0" rIns="0" bIns="0" rtlCol="0" anchor="t"/>
-          <a:lstStyle/>
-          <a:p>
-            <a:pPr indent="0" marL="0">
-              <a:buNone/>
-            </a:pPr>
-            <a:r>
-              <a:rPr lang="en-US" sz="1300" dirty="0">
+              <a:buNone/>
+            </a:pPr>
+            <a:r>
+              <a:rPr lang="en-US" sz="1500" dirty="0">
                 <a:solidFill>
                   <a:srgbClr val="26262F"/>
                 </a:solidFill>
@@ -8017,11 +8326,31 @@
                 <a:ea typeface="Calibri" pitchFamily="34" charset="-122"/>
                 <a:cs typeface="Calibri" pitchFamily="34" charset="-120"/>
               </a:rPr>
-              <a:t>Node.js/Express (with multer) parses this format for you automatically — you'll never write boundary-splitting code by hand.</a:t>
-            </a:r>
-            <a:endParaRPr lang="en-US" sz="1300" dirty="0"/>
-          </a:p>
-        </p:txBody>
+              <a:t>A file's raw bytes can't fit in a URL — file uploads require method="POST"</a:t>
+            </a:r>
+            <a:endParaRPr lang="en-US" sz="1500" dirty="0"/>
+          </a:p>
+        </p:txBody>
+      </p:sp>
+      <p:sp>
+        <p:nvSpPr>
+          <p:cNvPr id="6" name="Shape 4"/>
+          <p:cNvSpPr/>
+          <p:nvPr/>
+        </p:nvSpPr>
+        <p:spPr>
+          <a:xfrm>
+            <a:off x="685800" y="3008376"/>
+            <a:ext cx="82296" cy="82296"/>
+          </a:xfrm>
+          <a:prstGeom prst="ellipse">
+            <a:avLst/>
+          </a:prstGeom>
+          <a:solidFill>
+            <a:srgbClr val="FF8A3D"/>
+          </a:solidFill>
+          <a:ln/>
+        </p:spPr>
       </p:sp>
       <p:sp>
         <p:nvSpPr>
@@ -8031,8 +8360,8 @@
         </p:nvSpPr>
         <p:spPr>
           <a:xfrm>
-            <a:off x="640080" y="6446520"/>
-            <a:ext cx="8686800" cy="292608"/>
+            <a:off x="960120" y="2715768"/>
+            <a:ext cx="10591495" cy="640080"/>
           </a:xfrm>
           <a:prstGeom prst="rect">
             <a:avLst/>
@@ -8044,18 +8373,116 @@
           <a:bodyPr wrap="square" lIns="0" tIns="0" rIns="0" bIns="0" rtlCol="0" anchor="ctr"/>
           <a:lstStyle/>
           <a:p>
-            <a:pPr algn="l" indent="0" marL="0">
-              <a:buNone/>
-            </a:pPr>
-            <a:r>
-              <a:rPr lang="en-US" sz="900" dirty="0">
-                <a:solidFill>
-                  <a:srgbClr val="5D5D72"/>
+            <a:pPr indent="0" marL="0">
+              <a:buNone/>
+            </a:pPr>
+            <a:r>
+              <a:rPr lang="en-US" sz="1500" dirty="0">
+                <a:solidFill>
+                  <a:srgbClr val="26262F"/>
                 </a:solidFill>
                 <a:latin typeface="Calibri" pitchFamily="34" charset="0"/>
                 <a:ea typeface="Calibri" pitchFamily="34" charset="-122"/>
                 <a:cs typeface="Calibri" pitchFamily="34" charset="-120"/>
               </a:rPr>
+              <a:t>enctype="multipart/form-data" switches the request body format so text fields and raw file bytes can travel together</a:t>
+            </a:r>
+            <a:endParaRPr lang="en-US" sz="1500" dirty="0"/>
+          </a:p>
+        </p:txBody>
+      </p:sp>
+      <p:sp>
+        <p:nvSpPr>
+          <p:cNvPr id="8" name="Shape 6"/>
+          <p:cNvSpPr/>
+          <p:nvPr/>
+        </p:nvSpPr>
+        <p:spPr>
+          <a:xfrm>
+            <a:off x="685800" y="3831336"/>
+            <a:ext cx="82296" cy="82296"/>
+          </a:xfrm>
+          <a:prstGeom prst="ellipse">
+            <a:avLst/>
+          </a:prstGeom>
+          <a:solidFill>
+            <a:srgbClr val="FF8A3D"/>
+          </a:solidFill>
+          <a:ln/>
+        </p:spPr>
+      </p:sp>
+      <p:sp>
+        <p:nvSpPr>
+          <p:cNvPr id="9" name="Text 7"/>
+          <p:cNvSpPr txBox="1"/>
+          <p:nvPr/>
+        </p:nvSpPr>
+        <p:spPr>
+          <a:xfrm>
+            <a:off x="960120" y="3538728"/>
+            <a:ext cx="10591495" cy="640080"/>
+          </a:xfrm>
+          <a:prstGeom prst="rect">
+            <a:avLst/>
+          </a:prstGeom>
+          <a:noFill/>
+          <a:ln/>
+        </p:spPr>
+        <p:txBody>
+          <a:bodyPr wrap="square" lIns="0" tIns="0" rIns="0" bIns="0" rtlCol="0" anchor="ctr"/>
+          <a:lstStyle/>
+          <a:p>
+            <a:pPr indent="0" marL="0">
+              <a:buNone/>
+            </a:pPr>
+            <a:r>
+              <a:rPr lang="en-US" sz="1500" dirty="0">
+                <a:solidFill>
+                  <a:srgbClr val="26262F"/>
+                </a:solidFill>
+                <a:latin typeface="Calibri" pitchFamily="34" charset="0"/>
+                <a:ea typeface="Calibri" pitchFamily="34" charset="-122"/>
+                <a:cs typeface="Calibri" pitchFamily="34" charset="-120"/>
+              </a:rPr>
+              <a:t>accept is a filter hint for the file picker, not a security check — the server must always re-validate the uploaded file</a:t>
+            </a:r>
+            <a:endParaRPr lang="en-US" sz="1500" dirty="0"/>
+          </a:p>
+        </p:txBody>
+      </p:sp>
+      <p:sp>
+        <p:nvSpPr>
+          <p:cNvPr id="10" name="Text 8"/>
+          <p:cNvSpPr txBox="1"/>
+          <p:nvPr/>
+        </p:nvSpPr>
+        <p:spPr>
+          <a:xfrm>
+            <a:off x="640080" y="6446520"/>
+            <a:ext cx="8686800" cy="292608"/>
+          </a:xfrm>
+          <a:prstGeom prst="rect">
+            <a:avLst/>
+          </a:prstGeom>
+          <a:noFill/>
+          <a:ln/>
+        </p:spPr>
+        <p:txBody>
+          <a:bodyPr wrap="square" lIns="0" tIns="0" rIns="0" bIns="0" rtlCol="0" anchor="ctr"/>
+          <a:lstStyle/>
+          <a:p>
+            <a:pPr algn="l" indent="0" marL="0">
+              <a:buNone/>
+            </a:pPr>
+            <a:r>
+              <a:rPr lang="en-US" sz="900" dirty="0">
+                <a:solidFill>
+                  <a:srgbClr val="5D5D72"/>
+                </a:solidFill>
+                <a:latin typeface="Calibri" pitchFamily="34" charset="0"/>
+                <a:ea typeface="Calibri" pitchFamily="34" charset="-122"/>
+                <a:cs typeface="Calibri" pitchFamily="34" charset="-120"/>
+              </a:rPr>
               <a:t>Usman Akram  •  COMSATS University Islamabad</a:t>
             </a:r>
             <a:endParaRPr lang="en-US" sz="900" dirty="0"/>
@@ -8064,7 +8491,7 @@
       </p:sp>
       <p:sp>
         <p:nvSpPr>
-          <p:cNvPr id="8" name="Text 6"/>
+          <p:cNvPr id="11" name="Text 9"/>
           <p:cNvSpPr txBox="1"/>
           <p:nvPr/>
         </p:nvSpPr>
@@ -8166,7 +8593,7 @@
                 <a:ea typeface="Calibri" pitchFamily="34" charset="-122"/>
                 <a:cs typeface="Calibri" pitchFamily="34" charset="-120"/>
               </a:rPr>
-              <a:t>MORE CONTROLS</a:t>
+              <a:t>FILE UPLOADS</a:t>
             </a:r>
             <a:endParaRPr lang="en-US" sz="1300" dirty="0"/>
           </a:p>
@@ -8205,7 +8632,7 @@
                 <a:ea typeface="Cambria" pitchFamily="34" charset="-122"/>
                 <a:cs typeface="Cambria" pitchFamily="34" charset="-120"/>
               </a:rPr>
-              <a:t>&lt;select&gt;, &lt;textarea&gt;, and &lt;button&gt;</a:t>
+              <a:t>What multipart/form-data Looks Like</a:t>
             </a:r>
             <a:endParaRPr lang="en-US" sz="3400" dirty="0"/>
           </a:p>
@@ -8219,14 +8646,16 @@
         </p:nvSpPr>
         <p:spPr>
           <a:xfrm>
-            <a:off x="685800" y="1965960"/>
-            <a:ext cx="457200" cy="457200"/>
-          </a:xfrm>
-          <a:prstGeom prst="ellipse">
-            <a:avLst/>
+            <a:off x="640080" y="1965960"/>
+            <a:ext cx="10911535" cy="2682240"/>
+          </a:xfrm>
+          <a:prstGeom prst="roundRect">
+            <a:avLst>
+              <a:gd name="adj" fmla="val 2727"/>
+            </a:avLst>
           </a:prstGeom>
           <a:solidFill>
-            <a:srgbClr val="FF8A3D"/>
+            <a:srgbClr val="1E1E4C"/>
           </a:solidFill>
           <a:ln/>
         </p:spPr>
@@ -8239,47 +8668,207 @@
         </p:nvSpPr>
         <p:spPr>
           <a:xfrm>
-            <a:off x="685800" y="1965960"/>
-            <a:ext cx="457200" cy="457200"/>
-          </a:xfrm>
-          <a:prstGeom prst="rect">
-            <a:avLst/>
-          </a:prstGeom>
-          <a:noFill/>
-          <a:ln/>
-        </p:spPr>
-        <p:txBody>
-          <a:bodyPr wrap="square" lIns="0" tIns="0" rIns="0" bIns="0" rtlCol="0" anchor="ctr"/>
-          <a:lstStyle/>
-          <a:p>
-            <a:pPr algn="ctr" indent="0" marL="0">
-              <a:buNone/>
-            </a:pPr>
-            <a:r>
-              <a:rPr lang="en-US" sz="1500" b="1" dirty="0">
-                <a:solidFill>
-                  <a:srgbClr val="FFFFFF"/>
+            <a:off x="960120" y="2194560"/>
+            <a:ext cx="10271455" cy="2225040"/>
+          </a:xfrm>
+          <a:prstGeom prst="rect">
+            <a:avLst/>
+          </a:prstGeom>
+          <a:noFill/>
+          <a:ln/>
+        </p:spPr>
+        <p:txBody>
+          <a:bodyPr wrap="square" lIns="0" tIns="0" rIns="0" bIns="0" rtlCol="0" anchor="t"/>
+          <a:lstStyle/>
+          <a:p>
+            <a:pPr indent="0" marL="0">
+              <a:lnSpc>
+                <a:spcPct val="125000"/>
+              </a:lnSpc>
+              <a:buNone/>
+            </a:pPr>
+            <a:r>
+              <a:rPr lang="en-US" sz="1400" dirty="0">
+                <a:solidFill>
+                  <a:srgbClr val="C9D3F5"/>
+                </a:solidFill>
+                <a:latin typeface="Courier New" pitchFamily="34" charset="0"/>
+                <a:ea typeface="Courier New" pitchFamily="34" charset="-122"/>
+                <a:cs typeface="Courier New" pitchFamily="34" charset="-120"/>
+              </a:rPr>
+              <a:t>POST /upload-resume HTTP/1.1</a:t>
+            </a:r>
+            <a:endParaRPr lang="en-US" sz="1400" dirty="0"/>
+          </a:p>
+          <a:p>
+            <a:pPr indent="0" marL="0">
+              <a:lnSpc>
+                <a:spcPct val="125000"/>
+              </a:lnSpc>
+              <a:buNone/>
+            </a:pPr>
+            <a:r>
+              <a:rPr lang="en-US" sz="1400" dirty="0">
+                <a:solidFill>
+                  <a:srgbClr val="C9D3F5"/>
+                </a:solidFill>
+                <a:latin typeface="Courier New" pitchFamily="34" charset="0"/>
+                <a:ea typeface="Courier New" pitchFamily="34" charset="-122"/>
+                <a:cs typeface="Courier New" pitchFamily="34" charset="-120"/>
+              </a:rPr>
+              <a:t>Content-Type: multipart/form-data; boundary=----Bnd123</a:t>
+            </a:r>
+            <a:endParaRPr lang="en-US" sz="1400" dirty="0"/>
+          </a:p>
+          <a:p>
+            <a:pPr indent="0" marL="0">
+              <a:lnSpc>
+                <a:spcPct val="125000"/>
+              </a:lnSpc>
+              <a:buNone/>
+            </a:pPr>
+            <a:endParaRPr lang="en-US" sz="1400" dirty="0"/>
+          </a:p>
+          <a:p>
+            <a:pPr indent="0" marL="0">
+              <a:lnSpc>
+                <a:spcPct val="125000"/>
+              </a:lnSpc>
+              <a:buNone/>
+            </a:pPr>
+            <a:r>
+              <a:rPr lang="en-US" sz="1400" dirty="0">
+                <a:solidFill>
+                  <a:srgbClr val="C9D3F5"/>
+                </a:solidFill>
+                <a:latin typeface="Courier New" pitchFamily="34" charset="0"/>
+                <a:ea typeface="Courier New" pitchFamily="34" charset="-122"/>
+                <a:cs typeface="Courier New" pitchFamily="34" charset="-120"/>
+              </a:rPr>
+              <a:t>------Bnd123</a:t>
+            </a:r>
+            <a:endParaRPr lang="en-US" sz="1400" dirty="0"/>
+          </a:p>
+          <a:p>
+            <a:pPr indent="0" marL="0">
+              <a:lnSpc>
+                <a:spcPct val="125000"/>
+              </a:lnSpc>
+              <a:buNone/>
+            </a:pPr>
+            <a:r>
+              <a:rPr lang="en-US" sz="1400" dirty="0">
+                <a:solidFill>
+                  <a:srgbClr val="C9D3F5"/>
+                </a:solidFill>
+                <a:latin typeface="Courier New" pitchFamily="34" charset="0"/>
+                <a:ea typeface="Courier New" pitchFamily="34" charset="-122"/>
+                <a:cs typeface="Courier New" pitchFamily="34" charset="-120"/>
+              </a:rPr>
+              <a:t>Content-Disposition: form-data; name="resume"; filename="cv.pdf"</a:t>
+            </a:r>
+            <a:endParaRPr lang="en-US" sz="1400" dirty="0"/>
+          </a:p>
+          <a:p>
+            <a:pPr indent="0" marL="0">
+              <a:lnSpc>
+                <a:spcPct val="125000"/>
+              </a:lnSpc>
+              <a:buNone/>
+            </a:pPr>
+            <a:endParaRPr lang="en-US" sz="1400" dirty="0"/>
+          </a:p>
+          <a:p>
+            <a:pPr indent="0" marL="0">
+              <a:lnSpc>
+                <a:spcPct val="125000"/>
+              </a:lnSpc>
+              <a:buNone/>
+            </a:pPr>
+            <a:r>
+              <a:rPr lang="en-US" sz="1400" dirty="0">
+                <a:solidFill>
+                  <a:srgbClr val="C9D3F5"/>
+                </a:solidFill>
+                <a:latin typeface="Courier New" pitchFamily="34" charset="0"/>
+                <a:ea typeface="Courier New" pitchFamily="34" charset="-122"/>
+                <a:cs typeface="Courier New" pitchFamily="34" charset="-120"/>
+              </a:rPr>
+              <a:t>%PDF-1.4 ...(raw binary bytes)...</a:t>
+            </a:r>
+            <a:endParaRPr lang="en-US" sz="1400" dirty="0"/>
+          </a:p>
+          <a:p>
+            <a:pPr indent="0" marL="0">
+              <a:lnSpc>
+                <a:spcPct val="125000"/>
+              </a:lnSpc>
+              <a:buNone/>
+            </a:pPr>
+            <a:r>
+              <a:rPr lang="en-US" sz="1400" dirty="0">
+                <a:solidFill>
+                  <a:srgbClr val="C9D3F5"/>
+                </a:solidFill>
+                <a:latin typeface="Courier New" pitchFamily="34" charset="0"/>
+                <a:ea typeface="Courier New" pitchFamily="34" charset="-122"/>
+                <a:cs typeface="Courier New" pitchFamily="34" charset="-120"/>
+              </a:rPr>
+              <a:t>------Bnd123--</a:t>
+            </a:r>
+            <a:endParaRPr lang="en-US" sz="1400" dirty="0"/>
+          </a:p>
+        </p:txBody>
+      </p:sp>
+      <p:sp>
+        <p:nvSpPr>
+          <p:cNvPr id="6" name="Text 4"/>
+          <p:cNvSpPr txBox="1"/>
+          <p:nvPr/>
+        </p:nvSpPr>
+        <p:spPr>
+          <a:xfrm>
+            <a:off x="640080" y="4876800"/>
+            <a:ext cx="10911535" cy="1386840"/>
+          </a:xfrm>
+          <a:prstGeom prst="rect">
+            <a:avLst/>
+          </a:prstGeom>
+          <a:noFill/>
+          <a:ln/>
+        </p:spPr>
+        <p:txBody>
+          <a:bodyPr wrap="square" lIns="0" tIns="0" rIns="0" bIns="0" rtlCol="0" anchor="t"/>
+          <a:lstStyle/>
+          <a:p>
+            <a:pPr indent="0" marL="0">
+              <a:buNone/>
+            </a:pPr>
+            <a:r>
+              <a:rPr lang="en-US" sz="1300" dirty="0">
+                <a:solidFill>
+                  <a:srgbClr val="26262F"/>
                 </a:solidFill>
                 <a:latin typeface="Calibri" pitchFamily="34" charset="0"/>
                 <a:ea typeface="Calibri" pitchFamily="34" charset="-122"/>
                 <a:cs typeface="Calibri" pitchFamily="34" charset="-120"/>
               </a:rPr>
-              <a:t>1</a:t>
-            </a:r>
-            <a:endParaRPr lang="en-US" sz="1500" dirty="0"/>
-          </a:p>
-        </p:txBody>
-      </p:sp>
-      <p:sp>
-        <p:nvSpPr>
-          <p:cNvPr id="6" name="Text 4"/>
-          <p:cNvSpPr txBox="1"/>
-          <p:nvPr/>
-        </p:nvSpPr>
-        <p:spPr>
-          <a:xfrm>
-            <a:off x="1371600" y="1892808"/>
-            <a:ext cx="10180015" cy="640080"/>
+              <a:t>Node.js/Express (with multer) parses this format for you automatically — you'll never write boundary-splitting code by hand.</a:t>
+            </a:r>
+            <a:endParaRPr lang="en-US" sz="1300" dirty="0"/>
+          </a:p>
+        </p:txBody>
+      </p:sp>
+      <p:sp>
+        <p:nvSpPr>
+          <p:cNvPr id="7" name="Text 5"/>
+          <p:cNvSpPr txBox="1"/>
+          <p:nvPr/>
+        </p:nvSpPr>
+        <p:spPr>
+          <a:xfrm>
+            <a:off x="640080" y="6446520"/>
+            <a:ext cx="8686800" cy="292608"/>
           </a:xfrm>
           <a:prstGeom prst="rect">
             <a:avLst/>
@@ -8291,262 +8880,27 @@
           <a:bodyPr wrap="square" lIns="0" tIns="0" rIns="0" bIns="0" rtlCol="0" anchor="ctr"/>
           <a:lstStyle/>
           <a:p>
-            <a:pPr indent="0" marL="0">
-              <a:buNone/>
-            </a:pPr>
-            <a:r>
-              <a:rPr lang="en-US" sz="1500" dirty="0">
-                <a:solidFill>
-                  <a:srgbClr val="26262F"/>
+            <a:pPr algn="l" indent="0" marL="0">
+              <a:buNone/>
+            </a:pPr>
+            <a:r>
+              <a:rPr lang="en-US" sz="900" dirty="0">
+                <a:solidFill>
+                  <a:srgbClr val="5D5D72"/>
                 </a:solidFill>
                 <a:latin typeface="Calibri" pitchFamily="34" charset="0"/>
                 <a:ea typeface="Calibri" pitchFamily="34" charset="-122"/>
                 <a:cs typeface="Calibri" pitchFamily="34" charset="-120"/>
               </a:rPr>
-              <a:t>&lt;select&gt; + &lt;option&gt; creates a dropdown; the selected attribute pre-picks one</a:t>
-            </a:r>
-            <a:endParaRPr lang="en-US" sz="1500" dirty="0"/>
-          </a:p>
-        </p:txBody>
-      </p:sp>
-      <p:sp>
-        <p:nvSpPr>
-          <p:cNvPr id="7" name="Shape 5"/>
-          <p:cNvSpPr/>
-          <p:nvPr/>
-        </p:nvSpPr>
-        <p:spPr>
-          <a:xfrm>
-            <a:off x="685800" y="2788920"/>
-            <a:ext cx="457200" cy="457200"/>
-          </a:xfrm>
-          <a:prstGeom prst="ellipse">
-            <a:avLst/>
-          </a:prstGeom>
-          <a:solidFill>
-            <a:srgbClr val="FF8A3D"/>
-          </a:solidFill>
-          <a:ln/>
-        </p:spPr>
+              <a:t>Usman Akram  •  COMSATS University Islamabad</a:t>
+            </a:r>
+            <a:endParaRPr lang="en-US" sz="900" dirty="0"/>
+          </a:p>
+        </p:txBody>
       </p:sp>
       <p:sp>
         <p:nvSpPr>
           <p:cNvPr id="8" name="Text 6"/>
-          <p:cNvSpPr txBox="1"/>
-          <p:nvPr/>
-        </p:nvSpPr>
-        <p:spPr>
-          <a:xfrm>
-            <a:off x="685800" y="2788920"/>
-            <a:ext cx="457200" cy="457200"/>
-          </a:xfrm>
-          <a:prstGeom prst="rect">
-            <a:avLst/>
-          </a:prstGeom>
-          <a:noFill/>
-          <a:ln/>
-        </p:spPr>
-        <p:txBody>
-          <a:bodyPr wrap="square" lIns="0" tIns="0" rIns="0" bIns="0" rtlCol="0" anchor="ctr"/>
-          <a:lstStyle/>
-          <a:p>
-            <a:pPr algn="ctr" indent="0" marL="0">
-              <a:buNone/>
-            </a:pPr>
-            <a:r>
-              <a:rPr lang="en-US" sz="1500" b="1" dirty="0">
-                <a:solidFill>
-                  <a:srgbClr val="FFFFFF"/>
-                </a:solidFill>
-                <a:latin typeface="Calibri" pitchFamily="34" charset="0"/>
-                <a:ea typeface="Calibri" pitchFamily="34" charset="-122"/>
-                <a:cs typeface="Calibri" pitchFamily="34" charset="-120"/>
-              </a:rPr>
-              <a:t>2</a:t>
-            </a:r>
-            <a:endParaRPr lang="en-US" sz="1500" dirty="0"/>
-          </a:p>
-        </p:txBody>
-      </p:sp>
-      <p:sp>
-        <p:nvSpPr>
-          <p:cNvPr id="9" name="Text 7"/>
-          <p:cNvSpPr txBox="1"/>
-          <p:nvPr/>
-        </p:nvSpPr>
-        <p:spPr>
-          <a:xfrm>
-            <a:off x="1371600" y="2715768"/>
-            <a:ext cx="10180015" cy="640080"/>
-          </a:xfrm>
-          <a:prstGeom prst="rect">
-            <a:avLst/>
-          </a:prstGeom>
-          <a:noFill/>
-          <a:ln/>
-        </p:spPr>
-        <p:txBody>
-          <a:bodyPr wrap="square" lIns="0" tIns="0" rIns="0" bIns="0" rtlCol="0" anchor="ctr"/>
-          <a:lstStyle/>
-          <a:p>
-            <a:pPr indent="0" marL="0">
-              <a:buNone/>
-            </a:pPr>
-            <a:r>
-              <a:rPr lang="en-US" sz="1500" dirty="0">
-                <a:solidFill>
-                  <a:srgbClr val="26262F"/>
-                </a:solidFill>
-                <a:latin typeface="Calibri" pitchFamily="34" charset="0"/>
-                <a:ea typeface="Calibri" pitchFamily="34" charset="-122"/>
-                <a:cs typeface="Calibri" pitchFamily="34" charset="-120"/>
-              </a:rPr>
-              <a:t>&lt;textarea&gt; is a resizable, multi-line text box — its default text goes between the tags, not in a value attribute</a:t>
-            </a:r>
-            <a:endParaRPr lang="en-US" sz="1500" dirty="0"/>
-          </a:p>
-        </p:txBody>
-      </p:sp>
-      <p:sp>
-        <p:nvSpPr>
-          <p:cNvPr id="10" name="Shape 8"/>
-          <p:cNvSpPr/>
-          <p:nvPr/>
-        </p:nvSpPr>
-        <p:spPr>
-          <a:xfrm>
-            <a:off x="685800" y="3611880"/>
-            <a:ext cx="457200" cy="457200"/>
-          </a:xfrm>
-          <a:prstGeom prst="ellipse">
-            <a:avLst/>
-          </a:prstGeom>
-          <a:solidFill>
-            <a:srgbClr val="FF8A3D"/>
-          </a:solidFill>
-          <a:ln/>
-        </p:spPr>
-      </p:sp>
-      <p:sp>
-        <p:nvSpPr>
-          <p:cNvPr id="11" name="Text 9"/>
-          <p:cNvSpPr txBox="1"/>
-          <p:nvPr/>
-        </p:nvSpPr>
-        <p:spPr>
-          <a:xfrm>
-            <a:off x="685800" y="3611880"/>
-            <a:ext cx="457200" cy="457200"/>
-          </a:xfrm>
-          <a:prstGeom prst="rect">
-            <a:avLst/>
-          </a:prstGeom>
-          <a:noFill/>
-          <a:ln/>
-        </p:spPr>
-        <p:txBody>
-          <a:bodyPr wrap="square" lIns="0" tIns="0" rIns="0" bIns="0" rtlCol="0" anchor="ctr"/>
-          <a:lstStyle/>
-          <a:p>
-            <a:pPr algn="ctr" indent="0" marL="0">
-              <a:buNone/>
-            </a:pPr>
-            <a:r>
-              <a:rPr lang="en-US" sz="1500" b="1" dirty="0">
-                <a:solidFill>
-                  <a:srgbClr val="FFFFFF"/>
-                </a:solidFill>
-                <a:latin typeface="Calibri" pitchFamily="34" charset="0"/>
-                <a:ea typeface="Calibri" pitchFamily="34" charset="-122"/>
-                <a:cs typeface="Calibri" pitchFamily="34" charset="-120"/>
-              </a:rPr>
-              <a:t>3</a:t>
-            </a:r>
-            <a:endParaRPr lang="en-US" sz="1500" dirty="0"/>
-          </a:p>
-        </p:txBody>
-      </p:sp>
-      <p:sp>
-        <p:nvSpPr>
-          <p:cNvPr id="12" name="Text 10"/>
-          <p:cNvSpPr txBox="1"/>
-          <p:nvPr/>
-        </p:nvSpPr>
-        <p:spPr>
-          <a:xfrm>
-            <a:off x="1371600" y="3538728"/>
-            <a:ext cx="10180015" cy="640080"/>
-          </a:xfrm>
-          <a:prstGeom prst="rect">
-            <a:avLst/>
-          </a:prstGeom>
-          <a:noFill/>
-          <a:ln/>
-        </p:spPr>
-        <p:txBody>
-          <a:bodyPr wrap="square" lIns="0" tIns="0" rIns="0" bIns="0" rtlCol="0" anchor="ctr"/>
-          <a:lstStyle/>
-          <a:p>
-            <a:pPr indent="0" marL="0">
-              <a:buNone/>
-            </a:pPr>
-            <a:r>
-              <a:rPr lang="en-US" sz="1500" dirty="0">
-                <a:solidFill>
-                  <a:srgbClr val="26262F"/>
-                </a:solidFill>
-                <a:latin typeface="Calibri" pitchFamily="34" charset="0"/>
-                <a:ea typeface="Calibri" pitchFamily="34" charset="-122"/>
-                <a:cs typeface="Calibri" pitchFamily="34" charset="-120"/>
-              </a:rPr>
-              <a:t>&lt;button&gt; is more flexible than &lt;input type="submit"&gt; because it can contain other HTML</a:t>
-            </a:r>
-            <a:endParaRPr lang="en-US" sz="1500" dirty="0"/>
-          </a:p>
-        </p:txBody>
-      </p:sp>
-      <p:sp>
-        <p:nvSpPr>
-          <p:cNvPr id="13" name="Text 11"/>
-          <p:cNvSpPr txBox="1"/>
-          <p:nvPr/>
-        </p:nvSpPr>
-        <p:spPr>
-          <a:xfrm>
-            <a:off x="640080" y="6446520"/>
-            <a:ext cx="8686800" cy="292608"/>
-          </a:xfrm>
-          <a:prstGeom prst="rect">
-            <a:avLst/>
-          </a:prstGeom>
-          <a:noFill/>
-          <a:ln/>
-        </p:spPr>
-        <p:txBody>
-          <a:bodyPr wrap="square" lIns="0" tIns="0" rIns="0" bIns="0" rtlCol="0" anchor="ctr"/>
-          <a:lstStyle/>
-          <a:p>
-            <a:pPr algn="l" indent="0" marL="0">
-              <a:buNone/>
-            </a:pPr>
-            <a:r>
-              <a:rPr lang="en-US" sz="900" dirty="0">
-                <a:solidFill>
-                  <a:srgbClr val="5D5D72"/>
-                </a:solidFill>
-                <a:latin typeface="Calibri" pitchFamily="34" charset="0"/>
-                <a:ea typeface="Calibri" pitchFamily="34" charset="-122"/>
-                <a:cs typeface="Calibri" pitchFamily="34" charset="-120"/>
-              </a:rPr>
-              <a:t>Usman Akram  •  COMSATS University Islamabad</a:t>
-            </a:r>
-            <a:endParaRPr lang="en-US" sz="900" dirty="0"/>
-          </a:p>
-        </p:txBody>
-      </p:sp>
-      <p:sp>
-        <p:nvSpPr>
-          <p:cNvPr id="14" name="Text 12"/>
           <p:cNvSpPr txBox="1"/>
           <p:nvPr/>
         </p:nvSpPr>
@@ -8799,7 +9153,7 @@
         </p:nvSpPr>
         <p:spPr>
           <a:xfrm>
-            <a:off x="685800" y="2679192"/>
+            <a:off x="685800" y="2689860"/>
             <a:ext cx="457200" cy="457200"/>
           </a:xfrm>
           <a:prstGeom prst="ellipse">
@@ -8819,7 +9173,7 @@
         </p:nvSpPr>
         <p:spPr>
           <a:xfrm>
-            <a:off x="685800" y="2679192"/>
+            <a:off x="685800" y="2689860"/>
             <a:ext cx="457200" cy="457200"/>
           </a:xfrm>
           <a:prstGeom prst="rect">
@@ -8858,7 +9212,7 @@
         </p:nvSpPr>
         <p:spPr>
           <a:xfrm>
-            <a:off x="1371600" y="2606040"/>
+            <a:off x="1371600" y="2616708"/>
             <a:ext cx="10180015" cy="640080"/>
           </a:xfrm>
           <a:prstGeom prst="rect">
@@ -8897,7 +9251,7 @@
         </p:nvSpPr>
         <p:spPr>
           <a:xfrm>
-            <a:off x="685800" y="3392424"/>
+            <a:off x="685800" y="3413760"/>
             <a:ext cx="457200" cy="457200"/>
           </a:xfrm>
           <a:prstGeom prst="ellipse">
@@ -8917,7 +9271,7 @@
         </p:nvSpPr>
         <p:spPr>
           <a:xfrm>
-            <a:off x="685800" y="3392424"/>
+            <a:off x="685800" y="3413760"/>
             <a:ext cx="457200" cy="457200"/>
           </a:xfrm>
           <a:prstGeom prst="rect">
@@ -8956,7 +9310,7 @@
         </p:nvSpPr>
         <p:spPr>
           <a:xfrm>
-            <a:off x="1371600" y="3319272"/>
+            <a:off x="1371600" y="3340608"/>
             <a:ext cx="10180015" cy="640080"/>
           </a:xfrm>
           <a:prstGeom prst="rect">
@@ -8995,7 +9349,7 @@
         </p:nvSpPr>
         <p:spPr>
           <a:xfrm>
-            <a:off x="685800" y="4105656"/>
+            <a:off x="685800" y="4137660"/>
             <a:ext cx="457200" cy="457200"/>
           </a:xfrm>
           <a:prstGeom prst="ellipse">
@@ -9015,7 +9369,7 @@
         </p:nvSpPr>
         <p:spPr>
           <a:xfrm>
-            <a:off x="685800" y="4105656"/>
+            <a:off x="685800" y="4137660"/>
             <a:ext cx="457200" cy="457200"/>
           </a:xfrm>
           <a:prstGeom prst="rect">
@@ -9054,7 +9408,7 @@
         </p:nvSpPr>
         <p:spPr>
           <a:xfrm>
-            <a:off x="1371600" y="4032504"/>
+            <a:off x="1371600" y="4064508"/>
             <a:ext cx="10180015" cy="640080"/>
           </a:xfrm>
           <a:prstGeom prst="rect">
@@ -9093,7 +9447,7 @@
         </p:nvSpPr>
         <p:spPr>
           <a:xfrm>
-            <a:off x="685800" y="4818888"/>
+            <a:off x="685800" y="4861560"/>
             <a:ext cx="457200" cy="457200"/>
           </a:xfrm>
           <a:prstGeom prst="ellipse">
@@ -9113,7 +9467,7 @@
         </p:nvSpPr>
         <p:spPr>
           <a:xfrm>
-            <a:off x="685800" y="4818888"/>
+            <a:off x="685800" y="4861560"/>
             <a:ext cx="457200" cy="457200"/>
           </a:xfrm>
           <a:prstGeom prst="rect">
@@ -9152,7 +9506,7 @@
         </p:nvSpPr>
         <p:spPr>
           <a:xfrm>
-            <a:off x="1371600" y="4745736"/>
+            <a:off x="1371600" y="4788408"/>
             <a:ext cx="10180015" cy="640080"/>
           </a:xfrm>
           <a:prstGeom prst="rect">
@@ -9191,7 +9545,7 @@
         </p:nvSpPr>
         <p:spPr>
           <a:xfrm>
-            <a:off x="685800" y="5532120"/>
+            <a:off x="685800" y="5585460"/>
             <a:ext cx="457200" cy="457200"/>
           </a:xfrm>
           <a:prstGeom prst="ellipse">
@@ -9211,7 +9565,7 @@
         </p:nvSpPr>
         <p:spPr>
           <a:xfrm>
-            <a:off x="685800" y="5532120"/>
+            <a:off x="685800" y="5585460"/>
             <a:ext cx="457200" cy="457200"/>
           </a:xfrm>
           <a:prstGeom prst="rect">
@@ -9250,7 +9604,7 @@
         </p:nvSpPr>
         <p:spPr>
           <a:xfrm>
-            <a:off x="1371600" y="5458968"/>
+            <a:off x="1371600" y="5512308"/>
             <a:ext cx="10180015" cy="640080"/>
           </a:xfrm>
           <a:prstGeom prst="rect">
@@ -9463,7 +9817,7 @@
                 <a:ea typeface="Cambria" pitchFamily="34" charset="-122"/>
                 <a:cs typeface="Cambria" pitchFamily="34" charset="-120"/>
               </a:rPr>
-              <a:t>&lt;select&gt; and &lt;textarea&gt; Markup</a:t>
+              <a:t>&lt;select&gt;, &lt;textarea&gt;, and &lt;button&gt;</a:t>
             </a:r>
             <a:endParaRPr lang="en-US" sz="3400" dirty="0"/>
           </a:p>
@@ -9477,16 +9831,14 @@
         </p:nvSpPr>
         <p:spPr>
           <a:xfrm>
-            <a:off x="640080" y="1965960"/>
-            <a:ext cx="10911535" cy="2148840"/>
-          </a:xfrm>
-          <a:prstGeom prst="roundRect">
-            <a:avLst>
-              <a:gd name="adj" fmla="val 3404"/>
-            </a:avLst>
+            <a:off x="685800" y="1965960"/>
+            <a:ext cx="457200" cy="457200"/>
+          </a:xfrm>
+          <a:prstGeom prst="ellipse">
+            <a:avLst/>
           </a:prstGeom>
           <a:solidFill>
-            <a:srgbClr val="1E1E4C"/>
+            <a:srgbClr val="FF8A3D"/>
           </a:solidFill>
           <a:ln/>
         </p:spPr>
@@ -9499,139 +9851,8 @@
         </p:nvSpPr>
         <p:spPr>
           <a:xfrm>
-            <a:off x="960120" y="2194560"/>
-            <a:ext cx="10271455" cy="1691640"/>
-          </a:xfrm>
-          <a:prstGeom prst="rect">
-            <a:avLst/>
-          </a:prstGeom>
-          <a:noFill/>
-          <a:ln/>
-        </p:spPr>
-        <p:txBody>
-          <a:bodyPr wrap="square" lIns="0" tIns="0" rIns="0" bIns="0" rtlCol="0" anchor="t"/>
-          <a:lstStyle/>
-          <a:p>
-            <a:pPr indent="0" marL="0">
-              <a:lnSpc>
-                <a:spcPct val="125000"/>
-              </a:lnSpc>
-              <a:buNone/>
-            </a:pPr>
-            <a:r>
-              <a:rPr lang="en-US" sz="1400" dirty="0">
-                <a:solidFill>
-                  <a:srgbClr val="C9D3F5"/>
-                </a:solidFill>
-                <a:latin typeface="Courier New" pitchFamily="34" charset="0"/>
-                <a:ea typeface="Courier New" pitchFamily="34" charset="-122"/>
-                <a:cs typeface="Courier New" pitchFamily="34" charset="-120"/>
-              </a:rPr>
-              <a:t>&lt;select id="course" name="course"&gt;</a:t>
-            </a:r>
-            <a:endParaRPr lang="en-US" sz="1400" dirty="0"/>
-          </a:p>
-          <a:p>
-            <a:pPr indent="0" marL="0">
-              <a:lnSpc>
-                <a:spcPct val="125000"/>
-              </a:lnSpc>
-              <a:buNone/>
-            </a:pPr>
-            <a:r>
-              <a:rPr lang="en-US" sz="1400" dirty="0">
-                <a:solidFill>
-                  <a:srgbClr val="C9D3F5"/>
-                </a:solidFill>
-                <a:latin typeface="Courier New" pitchFamily="34" charset="0"/>
-                <a:ea typeface="Courier New" pitchFamily="34" charset="-122"/>
-                <a:cs typeface="Courier New" pitchFamily="34" charset="-120"/>
-              </a:rPr>
-              <a:t>    &lt;option value="csc336"&gt;Web Technologies&lt;/option&gt;</a:t>
-            </a:r>
-            <a:endParaRPr lang="en-US" sz="1400" dirty="0"/>
-          </a:p>
-          <a:p>
-            <a:pPr indent="0" marL="0">
-              <a:lnSpc>
-                <a:spcPct val="125000"/>
-              </a:lnSpc>
-              <a:buNone/>
-            </a:pPr>
-            <a:r>
-              <a:rPr lang="en-US" sz="1400" dirty="0">
-                <a:solidFill>
-                  <a:srgbClr val="C9D3F5"/>
-                </a:solidFill>
-                <a:latin typeface="Courier New" pitchFamily="34" charset="0"/>
-                <a:ea typeface="Courier New" pitchFamily="34" charset="-122"/>
-                <a:cs typeface="Courier New" pitchFamily="34" charset="-120"/>
-              </a:rPr>
-              <a:t>    &lt;option value="csc337" selected&gt;Advanced Web Technologies&lt;/option&gt;</a:t>
-            </a:r>
-            <a:endParaRPr lang="en-US" sz="1400" dirty="0"/>
-          </a:p>
-          <a:p>
-            <a:pPr indent="0" marL="0">
-              <a:lnSpc>
-                <a:spcPct val="125000"/>
-              </a:lnSpc>
-              <a:buNone/>
-            </a:pPr>
-            <a:r>
-              <a:rPr lang="en-US" sz="1400" dirty="0">
-                <a:solidFill>
-                  <a:srgbClr val="C9D3F5"/>
-                </a:solidFill>
-                <a:latin typeface="Courier New" pitchFamily="34" charset="0"/>
-                <a:ea typeface="Courier New" pitchFamily="34" charset="-122"/>
-                <a:cs typeface="Courier New" pitchFamily="34" charset="-120"/>
-              </a:rPr>
-              <a:t>&lt;/select&gt;</a:t>
-            </a:r>
-            <a:endParaRPr lang="en-US" sz="1400" dirty="0"/>
-          </a:p>
-          <a:p>
-            <a:pPr indent="0" marL="0">
-              <a:lnSpc>
-                <a:spcPct val="125000"/>
-              </a:lnSpc>
-              <a:buNone/>
-            </a:pPr>
-            <a:endParaRPr lang="en-US" sz="1400" dirty="0"/>
-          </a:p>
-          <a:p>
-            <a:pPr indent="0" marL="0">
-              <a:lnSpc>
-                <a:spcPct val="125000"/>
-              </a:lnSpc>
-              <a:buNone/>
-            </a:pPr>
-            <a:r>
-              <a:rPr lang="en-US" sz="1400" dirty="0">
-                <a:solidFill>
-                  <a:srgbClr val="C9D3F5"/>
-                </a:solidFill>
-                <a:latin typeface="Courier New" pitchFamily="34" charset="0"/>
-                <a:ea typeface="Courier New" pitchFamily="34" charset="-122"/>
-                <a:cs typeface="Courier New" pitchFamily="34" charset="-120"/>
-              </a:rPr>
-              <a:t>&lt;textarea id="message" name="message" rows="5" cols="40"&gt;Type here...&lt;/textarea&gt;</a:t>
-            </a:r>
-            <a:endParaRPr lang="en-US" sz="1400" dirty="0"/>
-          </a:p>
-        </p:txBody>
-      </p:sp>
-      <p:sp>
-        <p:nvSpPr>
-          <p:cNvPr id="6" name="Text 4"/>
-          <p:cNvSpPr txBox="1"/>
-          <p:nvPr/>
-        </p:nvSpPr>
-        <p:spPr>
-          <a:xfrm>
-            <a:off x="640080" y="6446520"/>
-            <a:ext cx="8686800" cy="292608"/>
+            <a:off x="685800" y="1965960"/>
+            <a:ext cx="457200" cy="457200"/>
           </a:xfrm>
           <a:prstGeom prst="rect">
             <a:avLst/>
@@ -9643,18 +9864,292 @@
           <a:bodyPr wrap="square" lIns="0" tIns="0" rIns="0" bIns="0" rtlCol="0" anchor="ctr"/>
           <a:lstStyle/>
           <a:p>
-            <a:pPr algn="l" indent="0" marL="0">
-              <a:buNone/>
-            </a:pPr>
-            <a:r>
-              <a:rPr lang="en-US" sz="900" dirty="0">
-                <a:solidFill>
-                  <a:srgbClr val="5D5D72"/>
+            <a:pPr algn="ctr" indent="0" marL="0">
+              <a:buNone/>
+            </a:pPr>
+            <a:r>
+              <a:rPr lang="en-US" sz="1500" b="1" dirty="0">
+                <a:solidFill>
+                  <a:srgbClr val="FFFFFF"/>
                 </a:solidFill>
                 <a:latin typeface="Calibri" pitchFamily="34" charset="0"/>
                 <a:ea typeface="Calibri" pitchFamily="34" charset="-122"/>
                 <a:cs typeface="Calibri" pitchFamily="34" charset="-120"/>
               </a:rPr>
+              <a:t>1</a:t>
+            </a:r>
+            <a:endParaRPr lang="en-US" sz="1500" dirty="0"/>
+          </a:p>
+        </p:txBody>
+      </p:sp>
+      <p:sp>
+        <p:nvSpPr>
+          <p:cNvPr id="6" name="Text 4"/>
+          <p:cNvSpPr txBox="1"/>
+          <p:nvPr/>
+        </p:nvSpPr>
+        <p:spPr>
+          <a:xfrm>
+            <a:off x="1371600" y="1892808"/>
+            <a:ext cx="10180015" cy="640080"/>
+          </a:xfrm>
+          <a:prstGeom prst="rect">
+            <a:avLst/>
+          </a:prstGeom>
+          <a:noFill/>
+          <a:ln/>
+        </p:spPr>
+        <p:txBody>
+          <a:bodyPr wrap="square" lIns="0" tIns="0" rIns="0" bIns="0" rtlCol="0" anchor="ctr"/>
+          <a:lstStyle/>
+          <a:p>
+            <a:pPr indent="0" marL="0">
+              <a:buNone/>
+            </a:pPr>
+            <a:r>
+              <a:rPr lang="en-US" sz="1500" dirty="0">
+                <a:solidFill>
+                  <a:srgbClr val="26262F"/>
+                </a:solidFill>
+                <a:latin typeface="Calibri" pitchFamily="34" charset="0"/>
+                <a:ea typeface="Calibri" pitchFamily="34" charset="-122"/>
+                <a:cs typeface="Calibri" pitchFamily="34" charset="-120"/>
+              </a:rPr>
+              <a:t>&lt;select&gt; + &lt;option&gt; creates a dropdown; the selected attribute pre-picks one</a:t>
+            </a:r>
+            <a:endParaRPr lang="en-US" sz="1500" dirty="0"/>
+          </a:p>
+        </p:txBody>
+      </p:sp>
+      <p:sp>
+        <p:nvSpPr>
+          <p:cNvPr id="7" name="Shape 5"/>
+          <p:cNvSpPr/>
+          <p:nvPr/>
+        </p:nvSpPr>
+        <p:spPr>
+          <a:xfrm>
+            <a:off x="685800" y="2788920"/>
+            <a:ext cx="457200" cy="457200"/>
+          </a:xfrm>
+          <a:prstGeom prst="ellipse">
+            <a:avLst/>
+          </a:prstGeom>
+          <a:solidFill>
+            <a:srgbClr val="FF8A3D"/>
+          </a:solidFill>
+          <a:ln/>
+        </p:spPr>
+      </p:sp>
+      <p:sp>
+        <p:nvSpPr>
+          <p:cNvPr id="8" name="Text 6"/>
+          <p:cNvSpPr txBox="1"/>
+          <p:nvPr/>
+        </p:nvSpPr>
+        <p:spPr>
+          <a:xfrm>
+            <a:off x="685800" y="2788920"/>
+            <a:ext cx="457200" cy="457200"/>
+          </a:xfrm>
+          <a:prstGeom prst="rect">
+            <a:avLst/>
+          </a:prstGeom>
+          <a:noFill/>
+          <a:ln/>
+        </p:spPr>
+        <p:txBody>
+          <a:bodyPr wrap="square" lIns="0" tIns="0" rIns="0" bIns="0" rtlCol="0" anchor="ctr"/>
+          <a:lstStyle/>
+          <a:p>
+            <a:pPr algn="ctr" indent="0" marL="0">
+              <a:buNone/>
+            </a:pPr>
+            <a:r>
+              <a:rPr lang="en-US" sz="1500" b="1" dirty="0">
+                <a:solidFill>
+                  <a:srgbClr val="FFFFFF"/>
+                </a:solidFill>
+                <a:latin typeface="Calibri" pitchFamily="34" charset="0"/>
+                <a:ea typeface="Calibri" pitchFamily="34" charset="-122"/>
+                <a:cs typeface="Calibri" pitchFamily="34" charset="-120"/>
+              </a:rPr>
+              <a:t>2</a:t>
+            </a:r>
+            <a:endParaRPr lang="en-US" sz="1500" dirty="0"/>
+          </a:p>
+        </p:txBody>
+      </p:sp>
+      <p:sp>
+        <p:nvSpPr>
+          <p:cNvPr id="9" name="Text 7"/>
+          <p:cNvSpPr txBox="1"/>
+          <p:nvPr/>
+        </p:nvSpPr>
+        <p:spPr>
+          <a:xfrm>
+            <a:off x="1371600" y="2715768"/>
+            <a:ext cx="10180015" cy="640080"/>
+          </a:xfrm>
+          <a:prstGeom prst="rect">
+            <a:avLst/>
+          </a:prstGeom>
+          <a:noFill/>
+          <a:ln/>
+        </p:spPr>
+        <p:txBody>
+          <a:bodyPr wrap="square" lIns="0" tIns="0" rIns="0" bIns="0" rtlCol="0" anchor="ctr"/>
+          <a:lstStyle/>
+          <a:p>
+            <a:pPr indent="0" marL="0">
+              <a:buNone/>
+            </a:pPr>
+            <a:r>
+              <a:rPr lang="en-US" sz="1500" dirty="0">
+                <a:solidFill>
+                  <a:srgbClr val="26262F"/>
+                </a:solidFill>
+                <a:latin typeface="Calibri" pitchFamily="34" charset="0"/>
+                <a:ea typeface="Calibri" pitchFamily="34" charset="-122"/>
+                <a:cs typeface="Calibri" pitchFamily="34" charset="-120"/>
+              </a:rPr>
+              <a:t>&lt;textarea&gt; is a resizable, multi-line text box — its default text goes between the tags, not in a value attribute</a:t>
+            </a:r>
+            <a:endParaRPr lang="en-US" sz="1500" dirty="0"/>
+          </a:p>
+        </p:txBody>
+      </p:sp>
+      <p:sp>
+        <p:nvSpPr>
+          <p:cNvPr id="10" name="Shape 8"/>
+          <p:cNvSpPr/>
+          <p:nvPr/>
+        </p:nvSpPr>
+        <p:spPr>
+          <a:xfrm>
+            <a:off x="685800" y="3611880"/>
+            <a:ext cx="457200" cy="457200"/>
+          </a:xfrm>
+          <a:prstGeom prst="ellipse">
+            <a:avLst/>
+          </a:prstGeom>
+          <a:solidFill>
+            <a:srgbClr val="FF8A3D"/>
+          </a:solidFill>
+          <a:ln/>
+        </p:spPr>
+      </p:sp>
+      <p:sp>
+        <p:nvSpPr>
+          <p:cNvPr id="11" name="Text 9"/>
+          <p:cNvSpPr txBox="1"/>
+          <p:nvPr/>
+        </p:nvSpPr>
+        <p:spPr>
+          <a:xfrm>
+            <a:off x="685800" y="3611880"/>
+            <a:ext cx="457200" cy="457200"/>
+          </a:xfrm>
+          <a:prstGeom prst="rect">
+            <a:avLst/>
+          </a:prstGeom>
+          <a:noFill/>
+          <a:ln/>
+        </p:spPr>
+        <p:txBody>
+          <a:bodyPr wrap="square" lIns="0" tIns="0" rIns="0" bIns="0" rtlCol="0" anchor="ctr"/>
+          <a:lstStyle/>
+          <a:p>
+            <a:pPr algn="ctr" indent="0" marL="0">
+              <a:buNone/>
+            </a:pPr>
+            <a:r>
+              <a:rPr lang="en-US" sz="1500" b="1" dirty="0">
+                <a:solidFill>
+                  <a:srgbClr val="FFFFFF"/>
+                </a:solidFill>
+                <a:latin typeface="Calibri" pitchFamily="34" charset="0"/>
+                <a:ea typeface="Calibri" pitchFamily="34" charset="-122"/>
+                <a:cs typeface="Calibri" pitchFamily="34" charset="-120"/>
+              </a:rPr>
+              <a:t>3</a:t>
+            </a:r>
+            <a:endParaRPr lang="en-US" sz="1500" dirty="0"/>
+          </a:p>
+        </p:txBody>
+      </p:sp>
+      <p:sp>
+        <p:nvSpPr>
+          <p:cNvPr id="12" name="Text 10"/>
+          <p:cNvSpPr txBox="1"/>
+          <p:nvPr/>
+        </p:nvSpPr>
+        <p:spPr>
+          <a:xfrm>
+            <a:off x="1371600" y="3538728"/>
+            <a:ext cx="10180015" cy="640080"/>
+          </a:xfrm>
+          <a:prstGeom prst="rect">
+            <a:avLst/>
+          </a:prstGeom>
+          <a:noFill/>
+          <a:ln/>
+        </p:spPr>
+        <p:txBody>
+          <a:bodyPr wrap="square" lIns="0" tIns="0" rIns="0" bIns="0" rtlCol="0" anchor="ctr"/>
+          <a:lstStyle/>
+          <a:p>
+            <a:pPr indent="0" marL="0">
+              <a:buNone/>
+            </a:pPr>
+            <a:r>
+              <a:rPr lang="en-US" sz="1500" dirty="0">
+                <a:solidFill>
+                  <a:srgbClr val="26262F"/>
+                </a:solidFill>
+                <a:latin typeface="Calibri" pitchFamily="34" charset="0"/>
+                <a:ea typeface="Calibri" pitchFamily="34" charset="-122"/>
+                <a:cs typeface="Calibri" pitchFamily="34" charset="-120"/>
+              </a:rPr>
+              <a:t>&lt;button&gt; is more flexible than &lt;input type="submit"&gt; because it can contain other HTML</a:t>
+            </a:r>
+            <a:endParaRPr lang="en-US" sz="1500" dirty="0"/>
+          </a:p>
+        </p:txBody>
+      </p:sp>
+      <p:sp>
+        <p:nvSpPr>
+          <p:cNvPr id="13" name="Text 11"/>
+          <p:cNvSpPr txBox="1"/>
+          <p:nvPr/>
+        </p:nvSpPr>
+        <p:spPr>
+          <a:xfrm>
+            <a:off x="640080" y="6446520"/>
+            <a:ext cx="8686800" cy="292608"/>
+          </a:xfrm>
+          <a:prstGeom prst="rect">
+            <a:avLst/>
+          </a:prstGeom>
+          <a:noFill/>
+          <a:ln/>
+        </p:spPr>
+        <p:txBody>
+          <a:bodyPr wrap="square" lIns="0" tIns="0" rIns="0" bIns="0" rtlCol="0" anchor="ctr"/>
+          <a:lstStyle/>
+          <a:p>
+            <a:pPr algn="l" indent="0" marL="0">
+              <a:buNone/>
+            </a:pPr>
+            <a:r>
+              <a:rPr lang="en-US" sz="900" dirty="0">
+                <a:solidFill>
+                  <a:srgbClr val="5D5D72"/>
+                </a:solidFill>
+                <a:latin typeface="Calibri" pitchFamily="34" charset="0"/>
+                <a:ea typeface="Calibri" pitchFamily="34" charset="-122"/>
+                <a:cs typeface="Calibri" pitchFamily="34" charset="-120"/>
+              </a:rPr>
               <a:t>Usman Akram  •  COMSATS University Islamabad</a:t>
             </a:r>
             <a:endParaRPr lang="en-US" sz="900" dirty="0"/>
@@ -9663,7 +10158,7 @@
       </p:sp>
       <p:sp>
         <p:nvSpPr>
-          <p:cNvPr id="7" name="Text 5"/>
+          <p:cNvPr id="14" name="Text 12"/>
           <p:cNvSpPr txBox="1"/>
           <p:nvPr/>
         </p:nvSpPr>
@@ -9804,7 +10299,7 @@
                 <a:ea typeface="Cambria" pitchFamily="34" charset="-122"/>
                 <a:cs typeface="Cambria" pitchFamily="34" charset="-120"/>
               </a:rPr>
-              <a:t>Dropdown and Textarea, Rendered</a:t>
+              <a:t>&lt;select&gt; and &lt;textarea&gt; Markup</a:t>
             </a:r>
             <a:endParaRPr lang="en-US" sz="3400" dirty="0"/>
           </a:p>
@@ -9812,14 +10307,167 @@
       </p:sp>
       <p:sp>
         <p:nvSpPr>
-          <p:cNvPr id="4" name="Text 2"/>
-          <p:cNvSpPr txBox="1"/>
+          <p:cNvPr id="4" name="Shape 2"/>
+          <p:cNvSpPr/>
           <p:nvPr/>
         </p:nvSpPr>
         <p:spPr>
           <a:xfrm>
             <a:off x="640080" y="1965960"/>
-            <a:ext cx="5272888" cy="365760"/>
+            <a:ext cx="10911535" cy="2148840"/>
+          </a:xfrm>
+          <a:prstGeom prst="roundRect">
+            <a:avLst>
+              <a:gd name="adj" fmla="val 3404"/>
+            </a:avLst>
+          </a:prstGeom>
+          <a:solidFill>
+            <a:srgbClr val="1E1E4C"/>
+          </a:solidFill>
+          <a:ln/>
+        </p:spPr>
+      </p:sp>
+      <p:sp>
+        <p:nvSpPr>
+          <p:cNvPr id="5" name="Text 3"/>
+          <p:cNvSpPr txBox="1"/>
+          <p:nvPr/>
+        </p:nvSpPr>
+        <p:spPr>
+          <a:xfrm>
+            <a:off x="960120" y="2194560"/>
+            <a:ext cx="10271455" cy="1691640"/>
+          </a:xfrm>
+          <a:prstGeom prst="rect">
+            <a:avLst/>
+          </a:prstGeom>
+          <a:noFill/>
+          <a:ln/>
+        </p:spPr>
+        <p:txBody>
+          <a:bodyPr wrap="square" lIns="0" tIns="0" rIns="0" bIns="0" rtlCol="0" anchor="t"/>
+          <a:lstStyle/>
+          <a:p>
+            <a:pPr indent="0" marL="0">
+              <a:lnSpc>
+                <a:spcPct val="125000"/>
+              </a:lnSpc>
+              <a:buNone/>
+            </a:pPr>
+            <a:r>
+              <a:rPr lang="en-US" sz="1400" dirty="0">
+                <a:solidFill>
+                  <a:srgbClr val="C9D3F5"/>
+                </a:solidFill>
+                <a:latin typeface="Courier New" pitchFamily="34" charset="0"/>
+                <a:ea typeface="Courier New" pitchFamily="34" charset="-122"/>
+                <a:cs typeface="Courier New" pitchFamily="34" charset="-120"/>
+              </a:rPr>
+              <a:t>&lt;select id="course" name="course"&gt;</a:t>
+            </a:r>
+            <a:endParaRPr lang="en-US" sz="1400" dirty="0"/>
+          </a:p>
+          <a:p>
+            <a:pPr indent="0" marL="0">
+              <a:lnSpc>
+                <a:spcPct val="125000"/>
+              </a:lnSpc>
+              <a:buNone/>
+            </a:pPr>
+            <a:r>
+              <a:rPr lang="en-US" sz="1400" dirty="0">
+                <a:solidFill>
+                  <a:srgbClr val="C9D3F5"/>
+                </a:solidFill>
+                <a:latin typeface="Courier New" pitchFamily="34" charset="0"/>
+                <a:ea typeface="Courier New" pitchFamily="34" charset="-122"/>
+                <a:cs typeface="Courier New" pitchFamily="34" charset="-120"/>
+              </a:rPr>
+              <a:t>    &lt;option value="csc336"&gt;Web Technologies&lt;/option&gt;</a:t>
+            </a:r>
+            <a:endParaRPr lang="en-US" sz="1400" dirty="0"/>
+          </a:p>
+          <a:p>
+            <a:pPr indent="0" marL="0">
+              <a:lnSpc>
+                <a:spcPct val="125000"/>
+              </a:lnSpc>
+              <a:buNone/>
+            </a:pPr>
+            <a:r>
+              <a:rPr lang="en-US" sz="1400" dirty="0">
+                <a:solidFill>
+                  <a:srgbClr val="C9D3F5"/>
+                </a:solidFill>
+                <a:latin typeface="Courier New" pitchFamily="34" charset="0"/>
+                <a:ea typeface="Courier New" pitchFamily="34" charset="-122"/>
+                <a:cs typeface="Courier New" pitchFamily="34" charset="-120"/>
+              </a:rPr>
+              <a:t>    &lt;option value="csc337" selected&gt;Advanced Web Technologies&lt;/option&gt;</a:t>
+            </a:r>
+            <a:endParaRPr lang="en-US" sz="1400" dirty="0"/>
+          </a:p>
+          <a:p>
+            <a:pPr indent="0" marL="0">
+              <a:lnSpc>
+                <a:spcPct val="125000"/>
+              </a:lnSpc>
+              <a:buNone/>
+            </a:pPr>
+            <a:r>
+              <a:rPr lang="en-US" sz="1400" dirty="0">
+                <a:solidFill>
+                  <a:srgbClr val="C9D3F5"/>
+                </a:solidFill>
+                <a:latin typeface="Courier New" pitchFamily="34" charset="0"/>
+                <a:ea typeface="Courier New" pitchFamily="34" charset="-122"/>
+                <a:cs typeface="Courier New" pitchFamily="34" charset="-120"/>
+              </a:rPr>
+              <a:t>&lt;/select&gt;</a:t>
+            </a:r>
+            <a:endParaRPr lang="en-US" sz="1400" dirty="0"/>
+          </a:p>
+          <a:p>
+            <a:pPr indent="0" marL="0">
+              <a:lnSpc>
+                <a:spcPct val="125000"/>
+              </a:lnSpc>
+              <a:buNone/>
+            </a:pPr>
+            <a:endParaRPr lang="en-US" sz="1400" dirty="0"/>
+          </a:p>
+          <a:p>
+            <a:pPr indent="0" marL="0">
+              <a:lnSpc>
+                <a:spcPct val="125000"/>
+              </a:lnSpc>
+              <a:buNone/>
+            </a:pPr>
+            <a:r>
+              <a:rPr lang="en-US" sz="1400" dirty="0">
+                <a:solidFill>
+                  <a:srgbClr val="C9D3F5"/>
+                </a:solidFill>
+                <a:latin typeface="Courier New" pitchFamily="34" charset="0"/>
+                <a:ea typeface="Courier New" pitchFamily="34" charset="-122"/>
+                <a:cs typeface="Courier New" pitchFamily="34" charset="-120"/>
+              </a:rPr>
+              <a:t>&lt;textarea id="message" name="message" rows="5" cols="40"&gt;Type here...&lt;/textarea&gt;</a:t>
+            </a:r>
+            <a:endParaRPr lang="en-US" sz="1400" dirty="0"/>
+          </a:p>
+        </p:txBody>
+      </p:sp>
+      <p:sp>
+        <p:nvSpPr>
+          <p:cNvPr id="6" name="Text 4"/>
+          <p:cNvSpPr txBox="1"/>
+          <p:nvPr/>
+        </p:nvSpPr>
+        <p:spPr>
+          <a:xfrm>
+            <a:off x="640080" y="6446520"/>
+            <a:ext cx="8686800" cy="292608"/>
           </a:xfrm>
           <a:prstGeom prst="rect">
             <a:avLst/>
@@ -9831,212 +10479,18 @@
           <a:bodyPr wrap="square" lIns="0" tIns="0" rIns="0" bIns="0" rtlCol="0" anchor="ctr"/>
           <a:lstStyle/>
           <a:p>
-            <a:pPr algn="ctr" indent="0" marL="0">
-              <a:buNone/>
-            </a:pPr>
-            <a:r>
-              <a:rPr lang="en-US" sz="1100" b="1" spc="150" kern="0" dirty="0">
-                <a:solidFill>
-                  <a:srgbClr val="E67528"/>
+            <a:pPr algn="l" indent="0" marL="0">
+              <a:buNone/>
+            </a:pPr>
+            <a:r>
+              <a:rPr lang="en-US" sz="900" dirty="0">
+                <a:solidFill>
+                  <a:srgbClr val="5D5D72"/>
                 </a:solidFill>
                 <a:latin typeface="Calibri" pitchFamily="34" charset="0"/>
                 <a:ea typeface="Calibri" pitchFamily="34" charset="-122"/>
                 <a:cs typeface="Calibri" pitchFamily="34" charset="-120"/>
               </a:rPr>
-              <a:t>SELECT</a:t>
-            </a:r>
-            <a:endParaRPr lang="en-US" sz="1100" dirty="0"/>
-          </a:p>
-        </p:txBody>
-      </p:sp>
-      <p:sp>
-        <p:nvSpPr>
-          <p:cNvPr id="5" name="Shape 3"/>
-          <p:cNvSpPr/>
-          <p:nvPr/>
-        </p:nvSpPr>
-        <p:spPr>
-          <a:xfrm>
-            <a:off x="530352" y="2313432"/>
-            <a:ext cx="5492344" cy="3831336"/>
-          </a:xfrm>
-          <a:prstGeom prst="roundRect">
-            <a:avLst>
-              <a:gd name="adj" fmla="val 1432"/>
-            </a:avLst>
-          </a:prstGeom>
-          <a:solidFill>
-            <a:srgbClr val="FFFFFF"/>
-          </a:solidFill>
-          <a:ln w="12700">
-            <a:solidFill>
-              <a:srgbClr val="E2E2EE"/>
-            </a:solidFill>
-            <a:prstDash val="solid"/>
-          </a:ln>
-          <a:effectLst>
-            <a:outerShdw sx="100000" sy="100000" kx="0" ky="0" algn="bl" rotWithShape="0" blurRad="101600" dist="38100" dir="5400000">
-              <a:srgbClr val="000000">
-                <a:alpha val="12000"/>
-              </a:srgbClr>
-            </a:outerShdw>
-          </a:effectLst>
-        </p:spPr>
-      </p:sp>
-      <p:pic>
-        <p:nvPicPr>
-          <p:cNvPr id="6" name="Image 0" descr="D:/GitHub/mern-web-book/docs/assets/img/lecture-04/select-dropdown.png">    </p:cNvPr>
-          <p:cNvPicPr>
-            <a:picLocks noChangeAspect="1"/>
-          </p:cNvPicPr>
-          <p:nvPr/>
-        </p:nvPicPr>
-        <p:blipFill>
-          <a:blip r:embed="rId1"/>
-          <a:stretch>
-            <a:fillRect/>
-          </a:stretch>
-        </p:blipFill>
-        <p:spPr>
-          <a:xfrm>
-            <a:off x="640080" y="3907947"/>
-            <a:ext cx="5272888" cy="642306"/>
-          </a:xfrm>
-          <a:prstGeom prst="rect">
-            <a:avLst/>
-          </a:prstGeom>
-        </p:spPr>
-      </p:pic>
-      <p:sp>
-        <p:nvSpPr>
-          <p:cNvPr id="7" name="Text 4"/>
-          <p:cNvSpPr txBox="1"/>
-          <p:nvPr/>
-        </p:nvSpPr>
-        <p:spPr>
-          <a:xfrm>
-            <a:off x="6278728" y="1965960"/>
-            <a:ext cx="5272888" cy="365760"/>
-          </a:xfrm>
-          <a:prstGeom prst="rect">
-            <a:avLst/>
-          </a:prstGeom>
-          <a:noFill/>
-          <a:ln/>
-        </p:spPr>
-        <p:txBody>
-          <a:bodyPr wrap="square" lIns="0" tIns="0" rIns="0" bIns="0" rtlCol="0" anchor="ctr"/>
-          <a:lstStyle/>
-          <a:p>
-            <a:pPr algn="ctr" indent="0" marL="0">
-              <a:buNone/>
-            </a:pPr>
-            <a:r>
-              <a:rPr lang="en-US" sz="1100" b="1" spc="150" kern="0" dirty="0">
-                <a:solidFill>
-                  <a:srgbClr val="E67528"/>
-                </a:solidFill>
-                <a:latin typeface="Calibri" pitchFamily="34" charset="0"/>
-                <a:ea typeface="Calibri" pitchFamily="34" charset="-122"/>
-                <a:cs typeface="Calibri" pitchFamily="34" charset="-120"/>
-              </a:rPr>
-              <a:t>TEXTAREA</a:t>
-            </a:r>
-            <a:endParaRPr lang="en-US" sz="1100" dirty="0"/>
-          </a:p>
-        </p:txBody>
-      </p:sp>
-      <p:sp>
-        <p:nvSpPr>
-          <p:cNvPr id="8" name="Shape 5"/>
-          <p:cNvSpPr/>
-          <p:nvPr/>
-        </p:nvSpPr>
-        <p:spPr>
-          <a:xfrm>
-            <a:off x="6169000" y="2313432"/>
-            <a:ext cx="5492344" cy="3831336"/>
-          </a:xfrm>
-          <a:prstGeom prst="roundRect">
-            <a:avLst>
-              <a:gd name="adj" fmla="val 1432"/>
-            </a:avLst>
-          </a:prstGeom>
-          <a:solidFill>
-            <a:srgbClr val="FFFFFF"/>
-          </a:solidFill>
-          <a:ln w="12700">
-            <a:solidFill>
-              <a:srgbClr val="E2E2EE"/>
-            </a:solidFill>
-            <a:prstDash val="solid"/>
-          </a:ln>
-          <a:effectLst>
-            <a:outerShdw sx="100000" sy="100000" kx="0" ky="0" algn="bl" rotWithShape="0" blurRad="101600" dist="38100" dir="5400000">
-              <a:srgbClr val="000000">
-                <a:alpha val="12000"/>
-              </a:srgbClr>
-            </a:outerShdw>
-          </a:effectLst>
-        </p:spPr>
-      </p:sp>
-      <p:pic>
-        <p:nvPicPr>
-          <p:cNvPr id="9" name="Image 1" descr="D:/GitHub/mern-web-book/docs/assets/img/lecture-04/textarea.png">    </p:cNvPr>
-          <p:cNvPicPr>
-            <a:picLocks noChangeAspect="1"/>
-          </p:cNvPicPr>
-          <p:nvPr/>
-        </p:nvPicPr>
-        <p:blipFill>
-          <a:blip r:embed="rId2"/>
-          <a:stretch>
-            <a:fillRect/>
-          </a:stretch>
-        </p:blipFill>
-        <p:spPr>
-          <a:xfrm>
-            <a:off x="6278728" y="3516377"/>
-            <a:ext cx="5272888" cy="1425446"/>
-          </a:xfrm>
-          <a:prstGeom prst="rect">
-            <a:avLst/>
-          </a:prstGeom>
-        </p:spPr>
-      </p:pic>
-      <p:sp>
-        <p:nvSpPr>
-          <p:cNvPr id="10" name="Text 6"/>
-          <p:cNvSpPr txBox="1"/>
-          <p:nvPr/>
-        </p:nvSpPr>
-        <p:spPr>
-          <a:xfrm>
-            <a:off x="640080" y="6446520"/>
-            <a:ext cx="8686800" cy="292608"/>
-          </a:xfrm>
-          <a:prstGeom prst="rect">
-            <a:avLst/>
-          </a:prstGeom>
-          <a:noFill/>
-          <a:ln/>
-        </p:spPr>
-        <p:txBody>
-          <a:bodyPr wrap="square" lIns="0" tIns="0" rIns="0" bIns="0" rtlCol="0" anchor="ctr"/>
-          <a:lstStyle/>
-          <a:p>
-            <a:pPr algn="l" indent="0" marL="0">
-              <a:buNone/>
-            </a:pPr>
-            <a:r>
-              <a:rPr lang="en-US" sz="900" dirty="0">
-                <a:solidFill>
-                  <a:srgbClr val="5D5D72"/>
-                </a:solidFill>
-                <a:latin typeface="Calibri" pitchFamily="34" charset="0"/>
-                <a:ea typeface="Calibri" pitchFamily="34" charset="-122"/>
-                <a:cs typeface="Calibri" pitchFamily="34" charset="-120"/>
-              </a:rPr>
               <a:t>Usman Akram  •  COMSATS University Islamabad</a:t>
             </a:r>
             <a:endParaRPr lang="en-US" sz="900" dirty="0"/>
@@ -10045,7 +10499,7 @@
       </p:sp>
       <p:sp>
         <p:nvSpPr>
-          <p:cNvPr id="11" name="Text 7"/>
+          <p:cNvPr id="7" name="Text 5"/>
           <p:cNvSpPr txBox="1"/>
           <p:nvPr/>
         </p:nvSpPr>
@@ -10186,7 +10640,7 @@
                 <a:ea typeface="Cambria" pitchFamily="34" charset="-122"/>
                 <a:cs typeface="Cambria" pitchFamily="34" charset="-120"/>
               </a:rPr>
-              <a:t>Three Button Types</a:t>
+              <a:t>Dropdown and Textarea, Rendered</a:t>
             </a:r>
             <a:endParaRPr lang="en-US" sz="3400" dirty="0"/>
           </a:p>
@@ -10200,8 +10654,8 @@
         </p:nvSpPr>
         <p:spPr>
           <a:xfrm>
-            <a:off x="640080" y="1691640"/>
-            <a:ext cx="10911535" cy="411480"/>
+            <a:off x="640080" y="1965960"/>
+            <a:ext cx="5272888" cy="365760"/>
           </a:xfrm>
           <a:prstGeom prst="rect">
             <a:avLst/>
@@ -10213,21 +10667,21 @@
           <a:bodyPr wrap="square" lIns="0" tIns="0" rIns="0" bIns="0" rtlCol="0" anchor="ctr"/>
           <a:lstStyle/>
           <a:p>
-            <a:pPr indent="0" marL="0">
-              <a:buNone/>
-            </a:pPr>
-            <a:r>
-              <a:rPr lang="en-US" sz="1350" i="1" dirty="0">
-                <a:solidFill>
-                  <a:srgbClr val="5D5D72"/>
+            <a:pPr algn="ctr" indent="0" marL="0">
+              <a:buNone/>
+            </a:pPr>
+            <a:r>
+              <a:rPr lang="en-US" sz="1100" b="1" spc="150" kern="0" dirty="0">
+                <a:solidFill>
+                  <a:srgbClr val="E67528"/>
                 </a:solidFill>
                 <a:latin typeface="Calibri" pitchFamily="34" charset="0"/>
                 <a:ea typeface="Calibri" pitchFamily="34" charset="-122"/>
                 <a:cs typeface="Calibri" pitchFamily="34" charset="-120"/>
               </a:rPr>
-              <a:t>submit submits the form, reset clears it, button does nothing on its own (wired up with JavaScript later).</a:t>
-            </a:r>
-            <a:endParaRPr lang="en-US" sz="1350" dirty="0"/>
+              <a:t>SELECT</a:t>
+            </a:r>
+            <a:endParaRPr lang="en-US" sz="1100" dirty="0"/>
           </a:p>
         </p:txBody>
       </p:sp>
@@ -10239,116 +10693,12 @@
         </p:nvSpPr>
         <p:spPr>
           <a:xfrm>
-            <a:off x="640080" y="2240280"/>
-            <a:ext cx="10911535" cy="1263015"/>
+            <a:off x="530352" y="2313432"/>
+            <a:ext cx="5492344" cy="3831336"/>
           </a:xfrm>
           <a:prstGeom prst="roundRect">
             <a:avLst>
-              <a:gd name="adj" fmla="val 5792"/>
-            </a:avLst>
-          </a:prstGeom>
-          <a:solidFill>
-            <a:srgbClr val="1E1E4C"/>
-          </a:solidFill>
-          <a:ln/>
-        </p:spPr>
-      </p:sp>
-      <p:sp>
-        <p:nvSpPr>
-          <p:cNvPr id="6" name="Text 4"/>
-          <p:cNvSpPr txBox="1"/>
-          <p:nvPr/>
-        </p:nvSpPr>
-        <p:spPr>
-          <a:xfrm>
-            <a:off x="960120" y="2468880"/>
-            <a:ext cx="10271455" cy="805815"/>
-          </a:xfrm>
-          <a:prstGeom prst="rect">
-            <a:avLst/>
-          </a:prstGeom>
-          <a:noFill/>
-          <a:ln/>
-        </p:spPr>
-        <p:txBody>
-          <a:bodyPr wrap="square" lIns="0" tIns="0" rIns="0" bIns="0" rtlCol="0" anchor="t"/>
-          <a:lstStyle/>
-          <a:p>
-            <a:pPr indent="0" marL="0">
-              <a:lnSpc>
-                <a:spcPct val="125000"/>
-              </a:lnSpc>
-              <a:buNone/>
-            </a:pPr>
-            <a:r>
-              <a:rPr lang="en-US" sz="1250" dirty="0">
-                <a:solidFill>
-                  <a:srgbClr val="C9D3F5"/>
-                </a:solidFill>
-                <a:latin typeface="Courier New" pitchFamily="34" charset="0"/>
-                <a:ea typeface="Courier New" pitchFamily="34" charset="-122"/>
-                <a:cs typeface="Courier New" pitchFamily="34" charset="-120"/>
-              </a:rPr>
-              <a:t>&lt;button type="submit"&gt;Submit&lt;/button&gt;</a:t>
-            </a:r>
-            <a:endParaRPr lang="en-US" sz="1250" dirty="0"/>
-          </a:p>
-          <a:p>
-            <a:pPr indent="0" marL="0">
-              <a:lnSpc>
-                <a:spcPct val="125000"/>
-              </a:lnSpc>
-              <a:buNone/>
-            </a:pPr>
-            <a:r>
-              <a:rPr lang="en-US" sz="1250" dirty="0">
-                <a:solidFill>
-                  <a:srgbClr val="C9D3F5"/>
-                </a:solidFill>
-                <a:latin typeface="Courier New" pitchFamily="34" charset="0"/>
-                <a:ea typeface="Courier New" pitchFamily="34" charset="-122"/>
-                <a:cs typeface="Courier New" pitchFamily="34" charset="-120"/>
-              </a:rPr>
-              <a:t>&lt;button type="reset"&gt;Clear Form&lt;/button&gt;</a:t>
-            </a:r>
-            <a:endParaRPr lang="en-US" sz="1250" dirty="0"/>
-          </a:p>
-          <a:p>
-            <a:pPr indent="0" marL="0">
-              <a:lnSpc>
-                <a:spcPct val="125000"/>
-              </a:lnSpc>
-              <a:buNone/>
-            </a:pPr>
-            <a:r>
-              <a:rPr lang="en-US" sz="1250" dirty="0">
-                <a:solidFill>
-                  <a:srgbClr val="C9D3F5"/>
-                </a:solidFill>
-                <a:latin typeface="Courier New" pitchFamily="34" charset="0"/>
-                <a:ea typeface="Courier New" pitchFamily="34" charset="-122"/>
-                <a:cs typeface="Courier New" pitchFamily="34" charset="-120"/>
-              </a:rPr>
-              <a:t>&lt;button type="button"&gt;Just a Button (does nothing by itself)&lt;/button&gt;</a:t>
-            </a:r>
-            <a:endParaRPr lang="en-US" sz="1250" dirty="0"/>
-          </a:p>
-        </p:txBody>
-      </p:sp>
-      <p:sp>
-        <p:nvSpPr>
-          <p:cNvPr id="7" name="Shape 5"/>
-          <p:cNvSpPr/>
-          <p:nvPr/>
-        </p:nvSpPr>
-        <p:spPr>
-          <a:xfrm>
-            <a:off x="530352" y="3667887"/>
-            <a:ext cx="11130991" cy="2659761"/>
-          </a:xfrm>
-          <a:prstGeom prst="roundRect">
-            <a:avLst>
-              <a:gd name="adj" fmla="val 2063"/>
+              <a:gd name="adj" fmla="val 1432"/>
             </a:avLst>
           </a:prstGeom>
           <a:solidFill>
@@ -10371,7 +10721,7 @@
       </p:sp>
       <p:pic>
         <p:nvPicPr>
-          <p:cNvPr id="8" name="Image 0" descr="D:/GitHub/mern-web-book/docs/assets/img/lecture-04/buttons.png">    </p:cNvPr>
+          <p:cNvPr id="6" name="Image 0" descr="D:/GitHub/mern-web-book/docs/assets/img/lecture-04/select-dropdown.png">    </p:cNvPr>
           <p:cNvPicPr>
             <a:picLocks noChangeAspect="1"/>
           </p:cNvPicPr>
@@ -10385,8 +10735,8 @@
         </p:blipFill>
         <p:spPr>
           <a:xfrm>
-            <a:off x="640080" y="4384078"/>
-            <a:ext cx="10911535" cy="1227379"/>
+            <a:off x="640080" y="3907947"/>
+            <a:ext cx="5272888" cy="642306"/>
           </a:xfrm>
           <a:prstGeom prst="rect">
             <a:avLst/>
@@ -10395,14 +10745,14 @@
       </p:pic>
       <p:sp>
         <p:nvSpPr>
-          <p:cNvPr id="9" name="Text 6"/>
-          <p:cNvSpPr txBox="1"/>
-          <p:nvPr/>
-        </p:nvSpPr>
-        <p:spPr>
-          <a:xfrm>
-            <a:off x="640080" y="6446520"/>
-            <a:ext cx="8686800" cy="292608"/>
+          <p:cNvPr id="7" name="Text 4"/>
+          <p:cNvSpPr txBox="1"/>
+          <p:nvPr/>
+        </p:nvSpPr>
+        <p:spPr>
+          <a:xfrm>
+            <a:off x="6278728" y="1965960"/>
+            <a:ext cx="5272888" cy="365760"/>
           </a:xfrm>
           <a:prstGeom prst="rect">
             <a:avLst/>
@@ -10414,18 +10764,115 @@
           <a:bodyPr wrap="square" lIns="0" tIns="0" rIns="0" bIns="0" rtlCol="0" anchor="ctr"/>
           <a:lstStyle/>
           <a:p>
-            <a:pPr algn="l" indent="0" marL="0">
-              <a:buNone/>
-            </a:pPr>
-            <a:r>
-              <a:rPr lang="en-US" sz="900" dirty="0">
-                <a:solidFill>
-                  <a:srgbClr val="5D5D72"/>
+            <a:pPr algn="ctr" indent="0" marL="0">
+              <a:buNone/>
+            </a:pPr>
+            <a:r>
+              <a:rPr lang="en-US" sz="1100" b="1" spc="150" kern="0" dirty="0">
+                <a:solidFill>
+                  <a:srgbClr val="E67528"/>
                 </a:solidFill>
                 <a:latin typeface="Calibri" pitchFamily="34" charset="0"/>
                 <a:ea typeface="Calibri" pitchFamily="34" charset="-122"/>
                 <a:cs typeface="Calibri" pitchFamily="34" charset="-120"/>
               </a:rPr>
+              <a:t>TEXTAREA</a:t>
+            </a:r>
+            <a:endParaRPr lang="en-US" sz="1100" dirty="0"/>
+          </a:p>
+        </p:txBody>
+      </p:sp>
+      <p:sp>
+        <p:nvSpPr>
+          <p:cNvPr id="8" name="Shape 5"/>
+          <p:cNvSpPr/>
+          <p:nvPr/>
+        </p:nvSpPr>
+        <p:spPr>
+          <a:xfrm>
+            <a:off x="6169000" y="2313432"/>
+            <a:ext cx="5492344" cy="3831336"/>
+          </a:xfrm>
+          <a:prstGeom prst="roundRect">
+            <a:avLst>
+              <a:gd name="adj" fmla="val 1432"/>
+            </a:avLst>
+          </a:prstGeom>
+          <a:solidFill>
+            <a:srgbClr val="FFFFFF"/>
+          </a:solidFill>
+          <a:ln w="12700">
+            <a:solidFill>
+              <a:srgbClr val="E2E2EE"/>
+            </a:solidFill>
+            <a:prstDash val="solid"/>
+          </a:ln>
+          <a:effectLst>
+            <a:outerShdw sx="100000" sy="100000" kx="0" ky="0" algn="bl" rotWithShape="0" blurRad="101600" dist="38100" dir="5400000">
+              <a:srgbClr val="000000">
+                <a:alpha val="12000"/>
+              </a:srgbClr>
+            </a:outerShdw>
+          </a:effectLst>
+        </p:spPr>
+      </p:sp>
+      <p:pic>
+        <p:nvPicPr>
+          <p:cNvPr id="9" name="Image 1" descr="D:/GitHub/mern-web-book/docs/assets/img/lecture-04/textarea.png">    </p:cNvPr>
+          <p:cNvPicPr>
+            <a:picLocks noChangeAspect="1"/>
+          </p:cNvPicPr>
+          <p:nvPr/>
+        </p:nvPicPr>
+        <p:blipFill>
+          <a:blip r:embed="rId2"/>
+          <a:stretch>
+            <a:fillRect/>
+          </a:stretch>
+        </p:blipFill>
+        <p:spPr>
+          <a:xfrm>
+            <a:off x="6278728" y="3516377"/>
+            <a:ext cx="5272888" cy="1425446"/>
+          </a:xfrm>
+          <a:prstGeom prst="rect">
+            <a:avLst/>
+          </a:prstGeom>
+        </p:spPr>
+      </p:pic>
+      <p:sp>
+        <p:nvSpPr>
+          <p:cNvPr id="10" name="Text 6"/>
+          <p:cNvSpPr txBox="1"/>
+          <p:nvPr/>
+        </p:nvSpPr>
+        <p:spPr>
+          <a:xfrm>
+            <a:off x="640080" y="6446520"/>
+            <a:ext cx="8686800" cy="292608"/>
+          </a:xfrm>
+          <a:prstGeom prst="rect">
+            <a:avLst/>
+          </a:prstGeom>
+          <a:noFill/>
+          <a:ln/>
+        </p:spPr>
+        <p:txBody>
+          <a:bodyPr wrap="square" lIns="0" tIns="0" rIns="0" bIns="0" rtlCol="0" anchor="ctr"/>
+          <a:lstStyle/>
+          <a:p>
+            <a:pPr algn="l" indent="0" marL="0">
+              <a:buNone/>
+            </a:pPr>
+            <a:r>
+              <a:rPr lang="en-US" sz="900" dirty="0">
+                <a:solidFill>
+                  <a:srgbClr val="5D5D72"/>
+                </a:solidFill>
+                <a:latin typeface="Calibri" pitchFamily="34" charset="0"/>
+                <a:ea typeface="Calibri" pitchFamily="34" charset="-122"/>
+                <a:cs typeface="Calibri" pitchFamily="34" charset="-120"/>
+              </a:rPr>
               <a:t>Usman Akram  •  COMSATS University Islamabad</a:t>
             </a:r>
             <a:endParaRPr lang="en-US" sz="900" dirty="0"/>
@@ -10434,7 +10881,7 @@
       </p:sp>
       <p:sp>
         <p:nvSpPr>
-          <p:cNvPr id="10" name="Text 7"/>
+          <p:cNvPr id="11" name="Text 7"/>
           <p:cNvSpPr txBox="1"/>
           <p:nvPr/>
         </p:nvSpPr>
@@ -10536,7 +10983,7 @@
                 <a:ea typeface="Calibri" pitchFamily="34" charset="-122"/>
                 <a:cs typeface="Calibri" pitchFamily="34" charset="-120"/>
               </a:rPr>
-              <a:t>VALIDATION</a:t>
+              <a:t>MORE CONTROLS</a:t>
             </a:r>
             <a:endParaRPr lang="en-US" sz="1300" dirty="0"/>
           </a:p>
@@ -10575,6 +11022,395 @@
                 <a:ea typeface="Cambria" pitchFamily="34" charset="-122"/>
                 <a:cs typeface="Cambria" pitchFamily="34" charset="-120"/>
               </a:rPr>
+              <a:t>Three Button Types</a:t>
+            </a:r>
+            <a:endParaRPr lang="en-US" sz="3400" dirty="0"/>
+          </a:p>
+        </p:txBody>
+      </p:sp>
+      <p:sp>
+        <p:nvSpPr>
+          <p:cNvPr id="4" name="Text 2"/>
+          <p:cNvSpPr txBox="1"/>
+          <p:nvPr/>
+        </p:nvSpPr>
+        <p:spPr>
+          <a:xfrm>
+            <a:off x="640080" y="1691640"/>
+            <a:ext cx="10911535" cy="411480"/>
+          </a:xfrm>
+          <a:prstGeom prst="rect">
+            <a:avLst/>
+          </a:prstGeom>
+          <a:noFill/>
+          <a:ln/>
+        </p:spPr>
+        <p:txBody>
+          <a:bodyPr wrap="square" lIns="0" tIns="0" rIns="0" bIns="0" rtlCol="0" anchor="ctr"/>
+          <a:lstStyle/>
+          <a:p>
+            <a:pPr indent="0" marL="0">
+              <a:buNone/>
+            </a:pPr>
+            <a:r>
+              <a:rPr lang="en-US" sz="1350" i="1" dirty="0">
+                <a:solidFill>
+                  <a:srgbClr val="5D5D72"/>
+                </a:solidFill>
+                <a:latin typeface="Calibri" pitchFamily="34" charset="0"/>
+                <a:ea typeface="Calibri" pitchFamily="34" charset="-122"/>
+                <a:cs typeface="Calibri" pitchFamily="34" charset="-120"/>
+              </a:rPr>
+              <a:t>submit submits the form, reset clears it, button does nothing on its own (wired up with JavaScript later).</a:t>
+            </a:r>
+            <a:endParaRPr lang="en-US" sz="1350" dirty="0"/>
+          </a:p>
+        </p:txBody>
+      </p:sp>
+      <p:sp>
+        <p:nvSpPr>
+          <p:cNvPr id="5" name="Shape 3"/>
+          <p:cNvSpPr/>
+          <p:nvPr/>
+        </p:nvSpPr>
+        <p:spPr>
+          <a:xfrm>
+            <a:off x="640080" y="2240280"/>
+            <a:ext cx="10911535" cy="1263015"/>
+          </a:xfrm>
+          <a:prstGeom prst="roundRect">
+            <a:avLst>
+              <a:gd name="adj" fmla="val 5792"/>
+            </a:avLst>
+          </a:prstGeom>
+          <a:solidFill>
+            <a:srgbClr val="1E1E4C"/>
+          </a:solidFill>
+          <a:ln/>
+        </p:spPr>
+      </p:sp>
+      <p:sp>
+        <p:nvSpPr>
+          <p:cNvPr id="6" name="Text 4"/>
+          <p:cNvSpPr txBox="1"/>
+          <p:nvPr/>
+        </p:nvSpPr>
+        <p:spPr>
+          <a:xfrm>
+            <a:off x="960120" y="2468880"/>
+            <a:ext cx="10271455" cy="805815"/>
+          </a:xfrm>
+          <a:prstGeom prst="rect">
+            <a:avLst/>
+          </a:prstGeom>
+          <a:noFill/>
+          <a:ln/>
+        </p:spPr>
+        <p:txBody>
+          <a:bodyPr wrap="square" lIns="0" tIns="0" rIns="0" bIns="0" rtlCol="0" anchor="t"/>
+          <a:lstStyle/>
+          <a:p>
+            <a:pPr indent="0" marL="0">
+              <a:lnSpc>
+                <a:spcPct val="125000"/>
+              </a:lnSpc>
+              <a:buNone/>
+            </a:pPr>
+            <a:r>
+              <a:rPr lang="en-US" sz="1250" dirty="0">
+                <a:solidFill>
+                  <a:srgbClr val="C9D3F5"/>
+                </a:solidFill>
+                <a:latin typeface="Courier New" pitchFamily="34" charset="0"/>
+                <a:ea typeface="Courier New" pitchFamily="34" charset="-122"/>
+                <a:cs typeface="Courier New" pitchFamily="34" charset="-120"/>
+              </a:rPr>
+              <a:t>&lt;button type="submit"&gt;Submit&lt;/button&gt;</a:t>
+            </a:r>
+            <a:endParaRPr lang="en-US" sz="1250" dirty="0"/>
+          </a:p>
+          <a:p>
+            <a:pPr indent="0" marL="0">
+              <a:lnSpc>
+                <a:spcPct val="125000"/>
+              </a:lnSpc>
+              <a:buNone/>
+            </a:pPr>
+            <a:r>
+              <a:rPr lang="en-US" sz="1250" dirty="0">
+                <a:solidFill>
+                  <a:srgbClr val="C9D3F5"/>
+                </a:solidFill>
+                <a:latin typeface="Courier New" pitchFamily="34" charset="0"/>
+                <a:ea typeface="Courier New" pitchFamily="34" charset="-122"/>
+                <a:cs typeface="Courier New" pitchFamily="34" charset="-120"/>
+              </a:rPr>
+              <a:t>&lt;button type="reset"&gt;Clear Form&lt;/button&gt;</a:t>
+            </a:r>
+            <a:endParaRPr lang="en-US" sz="1250" dirty="0"/>
+          </a:p>
+          <a:p>
+            <a:pPr indent="0" marL="0">
+              <a:lnSpc>
+                <a:spcPct val="125000"/>
+              </a:lnSpc>
+              <a:buNone/>
+            </a:pPr>
+            <a:r>
+              <a:rPr lang="en-US" sz="1250" dirty="0">
+                <a:solidFill>
+                  <a:srgbClr val="C9D3F5"/>
+                </a:solidFill>
+                <a:latin typeface="Courier New" pitchFamily="34" charset="0"/>
+                <a:ea typeface="Courier New" pitchFamily="34" charset="-122"/>
+                <a:cs typeface="Courier New" pitchFamily="34" charset="-120"/>
+              </a:rPr>
+              <a:t>&lt;button type="button"&gt;Just a Button (does nothing by itself)&lt;/button&gt;</a:t>
+            </a:r>
+            <a:endParaRPr lang="en-US" sz="1250" dirty="0"/>
+          </a:p>
+        </p:txBody>
+      </p:sp>
+      <p:sp>
+        <p:nvSpPr>
+          <p:cNvPr id="7" name="Shape 5"/>
+          <p:cNvSpPr/>
+          <p:nvPr/>
+        </p:nvSpPr>
+        <p:spPr>
+          <a:xfrm>
+            <a:off x="530352" y="3667887"/>
+            <a:ext cx="11130991" cy="2659761"/>
+          </a:xfrm>
+          <a:prstGeom prst="roundRect">
+            <a:avLst>
+              <a:gd name="adj" fmla="val 2063"/>
+            </a:avLst>
+          </a:prstGeom>
+          <a:solidFill>
+            <a:srgbClr val="FFFFFF"/>
+          </a:solidFill>
+          <a:ln w="12700">
+            <a:solidFill>
+              <a:srgbClr val="E2E2EE"/>
+            </a:solidFill>
+            <a:prstDash val="solid"/>
+          </a:ln>
+          <a:effectLst>
+            <a:outerShdw sx="100000" sy="100000" kx="0" ky="0" algn="bl" rotWithShape="0" blurRad="101600" dist="38100" dir="5400000">
+              <a:srgbClr val="000000">
+                <a:alpha val="12000"/>
+              </a:srgbClr>
+            </a:outerShdw>
+          </a:effectLst>
+        </p:spPr>
+      </p:sp>
+      <p:pic>
+        <p:nvPicPr>
+          <p:cNvPr id="8" name="Image 0" descr="D:/GitHub/mern-web-book/docs/assets/img/lecture-04/buttons.png">    </p:cNvPr>
+          <p:cNvPicPr>
+            <a:picLocks noChangeAspect="1"/>
+          </p:cNvPicPr>
+          <p:nvPr/>
+        </p:nvPicPr>
+        <p:blipFill>
+          <a:blip r:embed="rId1"/>
+          <a:stretch>
+            <a:fillRect/>
+          </a:stretch>
+        </p:blipFill>
+        <p:spPr>
+          <a:xfrm>
+            <a:off x="640080" y="4384078"/>
+            <a:ext cx="10911535" cy="1227379"/>
+          </a:xfrm>
+          <a:prstGeom prst="rect">
+            <a:avLst/>
+          </a:prstGeom>
+        </p:spPr>
+      </p:pic>
+      <p:sp>
+        <p:nvSpPr>
+          <p:cNvPr id="9" name="Text 6"/>
+          <p:cNvSpPr txBox="1"/>
+          <p:nvPr/>
+        </p:nvSpPr>
+        <p:spPr>
+          <a:xfrm>
+            <a:off x="640080" y="6446520"/>
+            <a:ext cx="8686800" cy="292608"/>
+          </a:xfrm>
+          <a:prstGeom prst="rect">
+            <a:avLst/>
+          </a:prstGeom>
+          <a:noFill/>
+          <a:ln/>
+        </p:spPr>
+        <p:txBody>
+          <a:bodyPr wrap="square" lIns="0" tIns="0" rIns="0" bIns="0" rtlCol="0" anchor="ctr"/>
+          <a:lstStyle/>
+          <a:p>
+            <a:pPr algn="l" indent="0" marL="0">
+              <a:buNone/>
+            </a:pPr>
+            <a:r>
+              <a:rPr lang="en-US" sz="900" dirty="0">
+                <a:solidFill>
+                  <a:srgbClr val="5D5D72"/>
+                </a:solidFill>
+                <a:latin typeface="Calibri" pitchFamily="34" charset="0"/>
+                <a:ea typeface="Calibri" pitchFamily="34" charset="-122"/>
+                <a:cs typeface="Calibri" pitchFamily="34" charset="-120"/>
+              </a:rPr>
+              <a:t>Usman Akram  •  COMSATS University Islamabad</a:t>
+            </a:r>
+            <a:endParaRPr lang="en-US" sz="900" dirty="0"/>
+          </a:p>
+        </p:txBody>
+      </p:sp>
+      <p:sp>
+        <p:nvSpPr>
+          <p:cNvPr id="10" name="Text 7"/>
+          <p:cNvSpPr txBox="1"/>
+          <p:nvPr/>
+        </p:nvSpPr>
+        <p:spPr>
+          <a:xfrm>
+            <a:off x="11155680" y="6446520"/>
+            <a:ext cx="457200" cy="292608"/>
+          </a:xfrm>
+          <a:prstGeom prst="rect">
+            <a:avLst/>
+          </a:prstGeom>
+          <a:noFill/>
+          <a:ln/>
+        </p:spPr>
+        <p:txBody>
+          <a:bodyPr wrap="square" lIns="0" tIns="0" rIns="0" bIns="0" rtlCol="0" anchor="ctr"/>
+          <a:lstStyle/>
+          <a:p>
+            <a:pPr algn="r" indent="0" marL="0">
+              <a:buNone/>
+            </a:pPr>
+            <a:r>
+              <a:rPr lang="en-US" sz="900" dirty="0">
+                <a:solidFill>
+                  <a:srgbClr val="5D5D72"/>
+                </a:solidFill>
+                <a:latin typeface="Calibri" pitchFamily="34" charset="0"/>
+                <a:ea typeface="Calibri" pitchFamily="34" charset="-122"/>
+                <a:cs typeface="Calibri" pitchFamily="34" charset="-120"/>
+              </a:rPr>
+              <a:t>23</a:t>
+            </a:r>
+            <a:endParaRPr lang="en-US" sz="900" dirty="0"/>
+          </a:p>
+        </p:txBody>
+      </p:sp>
+    </p:spTree>
+  </p:cSld>
+  <p:clrMapOvr>
+    <a:masterClrMapping/>
+  </p:clrMapOvr>
+</p:sld>
+</file>
+
+<file path=ppt/slides/slide24.xml><?xml version="1.0" encoding="utf-8"?>
+<p:sld xmlns:a="http://schemas.openxmlformats.org/drawingml/2006/main" xmlns:r="http://schemas.openxmlformats.org/officeDocument/2006/relationships" xmlns:p="http://schemas.openxmlformats.org/presentationml/2006/main">
+  <p:cSld name="Slide 24">
+    <p:bg>
+      <p:bgPr>
+        <a:solidFill>
+          <a:srgbClr val="FFFFFF"/>
+        </a:solidFill>
+      </p:bgPr>
+    </p:bg>
+    <p:spTree>
+      <p:nvGrpSpPr>
+        <p:cNvPr id="1" name=""/>
+        <p:cNvGrpSpPr/>
+        <p:nvPr/>
+      </p:nvGrpSpPr>
+      <p:grpSpPr>
+        <a:xfrm>
+          <a:off x="0" y="0"/>
+          <a:ext cx="0" cy="0"/>
+          <a:chOff x="0" y="0"/>
+          <a:chExt cx="0" cy="0"/>
+        </a:xfrm>
+      </p:grpSpPr>
+      <p:sp>
+        <p:nvSpPr>
+          <p:cNvPr id="2" name="Text 0"/>
+          <p:cNvSpPr txBox="1"/>
+          <p:nvPr/>
+        </p:nvSpPr>
+        <p:spPr>
+          <a:xfrm>
+            <a:off x="640080" y="457200"/>
+            <a:ext cx="10058400" cy="365760"/>
+          </a:xfrm>
+          <a:prstGeom prst="rect">
+            <a:avLst/>
+          </a:prstGeom>
+          <a:noFill/>
+          <a:ln/>
+        </p:spPr>
+        <p:txBody>
+          <a:bodyPr wrap="square" lIns="0" tIns="0" rIns="0" bIns="0" rtlCol="0" anchor="ctr"/>
+          <a:lstStyle/>
+          <a:p>
+            <a:pPr algn="l" indent="0" marL="0">
+              <a:buNone/>
+            </a:pPr>
+            <a:r>
+              <a:rPr lang="en-US" sz="1300" b="1" spc="300" kern="0" dirty="0">
+                <a:solidFill>
+                  <a:srgbClr val="FF8A3D"/>
+                </a:solidFill>
+                <a:latin typeface="Calibri" pitchFamily="34" charset="0"/>
+                <a:ea typeface="Calibri" pitchFamily="34" charset="-122"/>
+                <a:cs typeface="Calibri" pitchFamily="34" charset="-120"/>
+              </a:rPr>
+              <a:t>VALIDATION</a:t>
+            </a:r>
+            <a:endParaRPr lang="en-US" sz="1300" dirty="0"/>
+          </a:p>
+        </p:txBody>
+      </p:sp>
+      <p:sp>
+        <p:nvSpPr>
+          <p:cNvPr id="3" name="Text 1"/>
+          <p:cNvSpPr txBox="1"/>
+          <p:nvPr/>
+        </p:nvSpPr>
+        <p:spPr>
+          <a:xfrm>
+            <a:off x="640080" y="841248"/>
+            <a:ext cx="10881360" cy="914400"/>
+          </a:xfrm>
+          <a:prstGeom prst="rect">
+            <a:avLst/>
+          </a:prstGeom>
+          <a:noFill/>
+          <a:ln/>
+        </p:spPr>
+        <p:txBody>
+          <a:bodyPr wrap="square" lIns="0" tIns="0" rIns="0" bIns="0" rtlCol="0" anchor="ctr"/>
+          <a:lstStyle/>
+          <a:p>
+            <a:pPr algn="l" indent="0" marL="0">
+              <a:buNone/>
+            </a:pPr>
+            <a:r>
+              <a:rPr lang="en-US" sz="3400" b="1" dirty="0">
+                <a:solidFill>
+                  <a:srgbClr val="2B2B7A"/>
+                </a:solidFill>
+                <a:latin typeface="Cambria" pitchFamily="34" charset="0"/>
+                <a:ea typeface="Cambria" pitchFamily="34" charset="-122"/>
+                <a:cs typeface="Cambria" pitchFamily="34" charset="-120"/>
+              </a:rPr>
               <a:t>HTML5 Client-Side Validation</a:t>
             </a:r>
             <a:endParaRPr lang="en-US" sz="3400" dirty="0"/>
@@ -10583,7 +11419,7 @@
       </p:sp>
       <p:graphicFrame>
         <p:nvGraphicFramePr>
-          <p:cNvPr id="24" name="Table 0"/>
+          <p:cNvPr id="25" name="Table 0"/>
           <p:cNvGraphicFramePr>
             <a:graphicFrameLocks noGrp="1"/>
           </p:cNvGraphicFramePr>
@@ -11373,465 +12209,6 @@
                 <a:ea typeface="Calibri" pitchFamily="34" charset="-122"/>
                 <a:cs typeface="Calibri" pitchFamily="34" charset="-120"/>
               </a:rPr>
-              <a:t>23</a:t>
-            </a:r>
-            <a:endParaRPr lang="en-US" sz="900" dirty="0"/>
-          </a:p>
-        </p:txBody>
-      </p:sp>
-    </p:spTree>
-  </p:cSld>
-  <p:clrMapOvr>
-    <a:masterClrMapping/>
-  </p:clrMapOvr>
-</p:sld>
-</file>
-
-<file path=ppt/slides/slide24.xml><?xml version="1.0" encoding="utf-8"?>
-<p:sld xmlns:a="http://schemas.openxmlformats.org/drawingml/2006/main" xmlns:r="http://schemas.openxmlformats.org/officeDocument/2006/relationships" xmlns:p="http://schemas.openxmlformats.org/presentationml/2006/main">
-  <p:cSld name="Slide 24">
-    <p:bg>
-      <p:bgPr>
-        <a:solidFill>
-          <a:srgbClr val="FFFFFF"/>
-        </a:solidFill>
-      </p:bgPr>
-    </p:bg>
-    <p:spTree>
-      <p:nvGrpSpPr>
-        <p:cNvPr id="1" name=""/>
-        <p:cNvGrpSpPr/>
-        <p:nvPr/>
-      </p:nvGrpSpPr>
-      <p:grpSpPr>
-        <a:xfrm>
-          <a:off x="0" y="0"/>
-          <a:ext cx="0" cy="0"/>
-          <a:chOff x="0" y="0"/>
-          <a:chExt cx="0" cy="0"/>
-        </a:xfrm>
-      </p:grpSpPr>
-      <p:sp>
-        <p:nvSpPr>
-          <p:cNvPr id="2" name="Text 0"/>
-          <p:cNvSpPr txBox="1"/>
-          <p:nvPr/>
-        </p:nvSpPr>
-        <p:spPr>
-          <a:xfrm>
-            <a:off x="640080" y="457200"/>
-            <a:ext cx="10058400" cy="365760"/>
-          </a:xfrm>
-          <a:prstGeom prst="rect">
-            <a:avLst/>
-          </a:prstGeom>
-          <a:noFill/>
-          <a:ln/>
-        </p:spPr>
-        <p:txBody>
-          <a:bodyPr wrap="square" lIns="0" tIns="0" rIns="0" bIns="0" rtlCol="0" anchor="ctr"/>
-          <a:lstStyle/>
-          <a:p>
-            <a:pPr algn="l" indent="0" marL="0">
-              <a:buNone/>
-            </a:pPr>
-            <a:r>
-              <a:rPr lang="en-US" sz="1300" b="1" spc="300" kern="0" dirty="0">
-                <a:solidFill>
-                  <a:srgbClr val="FF8A3D"/>
-                </a:solidFill>
-                <a:latin typeface="Calibri" pitchFamily="34" charset="0"/>
-                <a:ea typeface="Calibri" pitchFamily="34" charset="-122"/>
-                <a:cs typeface="Calibri" pitchFamily="34" charset="-120"/>
-              </a:rPr>
-              <a:t>VALIDATION</a:t>
-            </a:r>
-            <a:endParaRPr lang="en-US" sz="1300" dirty="0"/>
-          </a:p>
-        </p:txBody>
-      </p:sp>
-      <p:sp>
-        <p:nvSpPr>
-          <p:cNvPr id="3" name="Text 1"/>
-          <p:cNvSpPr txBox="1"/>
-          <p:nvPr/>
-        </p:nvSpPr>
-        <p:spPr>
-          <a:xfrm>
-            <a:off x="640080" y="841248"/>
-            <a:ext cx="10881360" cy="914400"/>
-          </a:xfrm>
-          <a:prstGeom prst="rect">
-            <a:avLst/>
-          </a:prstGeom>
-          <a:noFill/>
-          <a:ln/>
-        </p:spPr>
-        <p:txBody>
-          <a:bodyPr wrap="square" lIns="0" tIns="0" rIns="0" bIns="0" rtlCol="0" anchor="ctr"/>
-          <a:lstStyle/>
-          <a:p>
-            <a:pPr algn="l" indent="0" marL="0">
-              <a:buNone/>
-            </a:pPr>
-            <a:r>
-              <a:rPr lang="en-US" sz="3400" b="1" dirty="0">
-                <a:solidFill>
-                  <a:srgbClr val="2B2B7A"/>
-                </a:solidFill>
-                <a:latin typeface="Cambria" pitchFamily="34" charset="0"/>
-                <a:ea typeface="Cambria" pitchFamily="34" charset="-122"/>
-                <a:cs typeface="Cambria" pitchFamily="34" charset="-120"/>
-              </a:rPr>
-              <a:t>A Validated Registration Form</a:t>
-            </a:r>
-            <a:endParaRPr lang="en-US" sz="3400" dirty="0"/>
-          </a:p>
-        </p:txBody>
-      </p:sp>
-      <p:sp>
-        <p:nvSpPr>
-          <p:cNvPr id="4" name="Shape 2"/>
-          <p:cNvSpPr/>
-          <p:nvPr/>
-        </p:nvSpPr>
-        <p:spPr>
-          <a:xfrm>
-            <a:off x="640080" y="1965960"/>
-            <a:ext cx="10911535" cy="3931920"/>
-          </a:xfrm>
-          <a:prstGeom prst="roundRect">
-            <a:avLst>
-              <a:gd name="adj" fmla="val 1860"/>
-            </a:avLst>
-          </a:prstGeom>
-          <a:solidFill>
-            <a:srgbClr val="1E1E4C"/>
-          </a:solidFill>
-          <a:ln/>
-        </p:spPr>
-      </p:sp>
-      <p:sp>
-        <p:nvSpPr>
-          <p:cNvPr id="5" name="Text 3"/>
-          <p:cNvSpPr txBox="1"/>
-          <p:nvPr/>
-        </p:nvSpPr>
-        <p:spPr>
-          <a:xfrm>
-            <a:off x="960120" y="2194560"/>
-            <a:ext cx="10271455" cy="3474720"/>
-          </a:xfrm>
-          <a:prstGeom prst="rect">
-            <a:avLst/>
-          </a:prstGeom>
-          <a:noFill/>
-          <a:ln/>
-        </p:spPr>
-        <p:txBody>
-          <a:bodyPr wrap="square" lIns="0" tIns="0" rIns="0" bIns="0" rtlCol="0" anchor="t"/>
-          <a:lstStyle/>
-          <a:p>
-            <a:pPr indent="0" marL="0">
-              <a:lnSpc>
-                <a:spcPct val="125000"/>
-              </a:lnSpc>
-              <a:buNone/>
-            </a:pPr>
-            <a:r>
-              <a:rPr lang="en-US" sz="1366" dirty="0">
-                <a:solidFill>
-                  <a:srgbClr val="C9D3F5"/>
-                </a:solidFill>
-                <a:latin typeface="Courier New" pitchFamily="34" charset="0"/>
-                <a:ea typeface="Courier New" pitchFamily="34" charset="-122"/>
-                <a:cs typeface="Courier New" pitchFamily="34" charset="-120"/>
-              </a:rPr>
-              <a:t>&lt;form action="/register" method="POST"&gt;</a:t>
-            </a:r>
-            <a:endParaRPr lang="en-US" sz="1366" dirty="0"/>
-          </a:p>
-          <a:p>
-            <a:pPr indent="0" marL="0">
-              <a:lnSpc>
-                <a:spcPct val="125000"/>
-              </a:lnSpc>
-              <a:buNone/>
-            </a:pPr>
-            <a:r>
-              <a:rPr lang="en-US" sz="1366" dirty="0">
-                <a:solidFill>
-                  <a:srgbClr val="C9D3F5"/>
-                </a:solidFill>
-                <a:latin typeface="Courier New" pitchFamily="34" charset="0"/>
-                <a:ea typeface="Courier New" pitchFamily="34" charset="-122"/>
-                <a:cs typeface="Courier New" pitchFamily="34" charset="-120"/>
-              </a:rPr>
-              <a:t>    &lt;label for="uname"&gt;Username (required):&lt;/label&gt;</a:t>
-            </a:r>
-            <a:endParaRPr lang="en-US" sz="1366" dirty="0"/>
-          </a:p>
-          <a:p>
-            <a:pPr indent="0" marL="0">
-              <a:lnSpc>
-                <a:spcPct val="125000"/>
-              </a:lnSpc>
-              <a:buNone/>
-            </a:pPr>
-            <a:r>
-              <a:rPr lang="en-US" sz="1366" dirty="0">
-                <a:solidFill>
-                  <a:srgbClr val="C9D3F5"/>
-                </a:solidFill>
-                <a:latin typeface="Courier New" pitchFamily="34" charset="0"/>
-                <a:ea typeface="Courier New" pitchFamily="34" charset="-122"/>
-                <a:cs typeface="Courier New" pitchFamily="34" charset="-120"/>
-              </a:rPr>
-              <a:t>    &lt;input type="text" id="uname" name="uname" required&gt;</a:t>
-            </a:r>
-            <a:endParaRPr lang="en-US" sz="1366" dirty="0"/>
-          </a:p>
-          <a:p>
-            <a:pPr indent="0" marL="0">
-              <a:lnSpc>
-                <a:spcPct val="125000"/>
-              </a:lnSpc>
-              <a:buNone/>
-            </a:pPr>
-            <a:endParaRPr lang="en-US" sz="1366" dirty="0"/>
-          </a:p>
-          <a:p>
-            <a:pPr indent="0" marL="0">
-              <a:lnSpc>
-                <a:spcPct val="125000"/>
-              </a:lnSpc>
-              <a:buNone/>
-            </a:pPr>
-            <a:r>
-              <a:rPr lang="en-US" sz="1366" dirty="0">
-                <a:solidFill>
-                  <a:srgbClr val="C9D3F5"/>
-                </a:solidFill>
-                <a:latin typeface="Courier New" pitchFamily="34" charset="0"/>
-                <a:ea typeface="Courier New" pitchFamily="34" charset="-122"/>
-                <a:cs typeface="Courier New" pitchFamily="34" charset="-120"/>
-              </a:rPr>
-              <a:t>    &lt;label for="cnic"&gt;CNIC (format 00000-0000000-0):&lt;/label&gt;</a:t>
-            </a:r>
-            <a:endParaRPr lang="en-US" sz="1366" dirty="0"/>
-          </a:p>
-          <a:p>
-            <a:pPr indent="0" marL="0">
-              <a:lnSpc>
-                <a:spcPct val="125000"/>
-              </a:lnSpc>
-              <a:buNone/>
-            </a:pPr>
-            <a:r>
-              <a:rPr lang="en-US" sz="1366" dirty="0">
-                <a:solidFill>
-                  <a:srgbClr val="C9D3F5"/>
-                </a:solidFill>
-                <a:latin typeface="Courier New" pitchFamily="34" charset="0"/>
-                <a:ea typeface="Courier New" pitchFamily="34" charset="-122"/>
-                <a:cs typeface="Courier New" pitchFamily="34" charset="-120"/>
-              </a:rPr>
-              <a:t>    &lt;input type="text" id="cnic" name="cnic"</a:t>
-            </a:r>
-            <a:endParaRPr lang="en-US" sz="1366" dirty="0"/>
-          </a:p>
-          <a:p>
-            <a:pPr indent="0" marL="0">
-              <a:lnSpc>
-                <a:spcPct val="125000"/>
-              </a:lnSpc>
-              <a:buNone/>
-            </a:pPr>
-            <a:r>
-              <a:rPr lang="en-US" sz="1366" dirty="0">
-                <a:solidFill>
-                  <a:srgbClr val="C9D3F5"/>
-                </a:solidFill>
-                <a:latin typeface="Courier New" pitchFamily="34" charset="0"/>
-                <a:ea typeface="Courier New" pitchFamily="34" charset="-122"/>
-                <a:cs typeface="Courier New" pitchFamily="34" charset="-120"/>
-              </a:rPr>
-              <a:t>           pattern="\d{5}-\d{7}-\d" title="Format: 00000-0000000-0"&gt;</a:t>
-            </a:r>
-            <a:endParaRPr lang="en-US" sz="1366" dirty="0"/>
-          </a:p>
-          <a:p>
-            <a:pPr indent="0" marL="0">
-              <a:lnSpc>
-                <a:spcPct val="125000"/>
-              </a:lnSpc>
-              <a:buNone/>
-            </a:pPr>
-            <a:endParaRPr lang="en-US" sz="1366" dirty="0"/>
-          </a:p>
-          <a:p>
-            <a:pPr indent="0" marL="0">
-              <a:lnSpc>
-                <a:spcPct val="125000"/>
-              </a:lnSpc>
-              <a:buNone/>
-            </a:pPr>
-            <a:r>
-              <a:rPr lang="en-US" sz="1366" dirty="0">
-                <a:solidFill>
-                  <a:srgbClr val="C9D3F5"/>
-                </a:solidFill>
-                <a:latin typeface="Courier New" pitchFamily="34" charset="0"/>
-                <a:ea typeface="Courier New" pitchFamily="34" charset="-122"/>
-                <a:cs typeface="Courier New" pitchFamily="34" charset="-120"/>
-              </a:rPr>
-              <a:t>    &lt;label for="age"&gt;Age (18–60):&lt;/label&gt;</a:t>
-            </a:r>
-            <a:endParaRPr lang="en-US" sz="1366" dirty="0"/>
-          </a:p>
-          <a:p>
-            <a:pPr indent="0" marL="0">
-              <a:lnSpc>
-                <a:spcPct val="125000"/>
-              </a:lnSpc>
-              <a:buNone/>
-            </a:pPr>
-            <a:r>
-              <a:rPr lang="en-US" sz="1366" dirty="0">
-                <a:solidFill>
-                  <a:srgbClr val="C9D3F5"/>
-                </a:solidFill>
-                <a:latin typeface="Courier New" pitchFamily="34" charset="0"/>
-                <a:ea typeface="Courier New" pitchFamily="34" charset="-122"/>
-                <a:cs typeface="Courier New" pitchFamily="34" charset="-120"/>
-              </a:rPr>
-              <a:t>    &lt;input type="number" id="age" name="age" min="18" max="60"&gt;</a:t>
-            </a:r>
-            <a:endParaRPr lang="en-US" sz="1366" dirty="0"/>
-          </a:p>
-          <a:p>
-            <a:pPr indent="0" marL="0">
-              <a:lnSpc>
-                <a:spcPct val="125000"/>
-              </a:lnSpc>
-              <a:buNone/>
-            </a:pPr>
-            <a:endParaRPr lang="en-US" sz="1366" dirty="0"/>
-          </a:p>
-          <a:p>
-            <a:pPr indent="0" marL="0">
-              <a:lnSpc>
-                <a:spcPct val="125000"/>
-              </a:lnSpc>
-              <a:buNone/>
-            </a:pPr>
-            <a:r>
-              <a:rPr lang="en-US" sz="1366" dirty="0">
-                <a:solidFill>
-                  <a:srgbClr val="C9D3F5"/>
-                </a:solidFill>
-                <a:latin typeface="Courier New" pitchFamily="34" charset="0"/>
-                <a:ea typeface="Courier New" pitchFamily="34" charset="-122"/>
-                <a:cs typeface="Courier New" pitchFamily="34" charset="-120"/>
-              </a:rPr>
-              <a:t>    &lt;button type="submit"&gt;Register&lt;/button&gt;</a:t>
-            </a:r>
-            <a:endParaRPr lang="en-US" sz="1366" dirty="0"/>
-          </a:p>
-          <a:p>
-            <a:pPr indent="0" marL="0">
-              <a:lnSpc>
-                <a:spcPct val="125000"/>
-              </a:lnSpc>
-              <a:buNone/>
-            </a:pPr>
-            <a:r>
-              <a:rPr lang="en-US" sz="1366" dirty="0">
-                <a:solidFill>
-                  <a:srgbClr val="C9D3F5"/>
-                </a:solidFill>
-                <a:latin typeface="Courier New" pitchFamily="34" charset="0"/>
-                <a:ea typeface="Courier New" pitchFamily="34" charset="-122"/>
-                <a:cs typeface="Courier New" pitchFamily="34" charset="-120"/>
-              </a:rPr>
-              <a:t>&lt;/form&gt;</a:t>
-            </a:r>
-            <a:endParaRPr lang="en-US" sz="1366" dirty="0"/>
-          </a:p>
-        </p:txBody>
-      </p:sp>
-      <p:sp>
-        <p:nvSpPr>
-          <p:cNvPr id="6" name="Text 4"/>
-          <p:cNvSpPr txBox="1"/>
-          <p:nvPr/>
-        </p:nvSpPr>
-        <p:spPr>
-          <a:xfrm>
-            <a:off x="640080" y="6446520"/>
-            <a:ext cx="8686800" cy="292608"/>
-          </a:xfrm>
-          <a:prstGeom prst="rect">
-            <a:avLst/>
-          </a:prstGeom>
-          <a:noFill/>
-          <a:ln/>
-        </p:spPr>
-        <p:txBody>
-          <a:bodyPr wrap="square" lIns="0" tIns="0" rIns="0" bIns="0" rtlCol="0" anchor="ctr"/>
-          <a:lstStyle/>
-          <a:p>
-            <a:pPr algn="l" indent="0" marL="0">
-              <a:buNone/>
-            </a:pPr>
-            <a:r>
-              <a:rPr lang="en-US" sz="900" dirty="0">
-                <a:solidFill>
-                  <a:srgbClr val="5D5D72"/>
-                </a:solidFill>
-                <a:latin typeface="Calibri" pitchFamily="34" charset="0"/>
-                <a:ea typeface="Calibri" pitchFamily="34" charset="-122"/>
-                <a:cs typeface="Calibri" pitchFamily="34" charset="-120"/>
-              </a:rPr>
-              <a:t>Usman Akram  •  COMSATS University Islamabad</a:t>
-            </a:r>
-            <a:endParaRPr lang="en-US" sz="900" dirty="0"/>
-          </a:p>
-        </p:txBody>
-      </p:sp>
-      <p:sp>
-        <p:nvSpPr>
-          <p:cNvPr id="7" name="Text 5"/>
-          <p:cNvSpPr txBox="1"/>
-          <p:nvPr/>
-        </p:nvSpPr>
-        <p:spPr>
-          <a:xfrm>
-            <a:off x="11155680" y="6446520"/>
-            <a:ext cx="457200" cy="292608"/>
-          </a:xfrm>
-          <a:prstGeom prst="rect">
-            <a:avLst/>
-          </a:prstGeom>
-          <a:noFill/>
-          <a:ln/>
-        </p:spPr>
-        <p:txBody>
-          <a:bodyPr wrap="square" lIns="0" tIns="0" rIns="0" bIns="0" rtlCol="0" anchor="ctr"/>
-          <a:lstStyle/>
-          <a:p>
-            <a:pPr algn="r" indent="0" marL="0">
-              <a:buNone/>
-            </a:pPr>
-            <a:r>
-              <a:rPr lang="en-US" sz="900" dirty="0">
-                <a:solidFill>
-                  <a:srgbClr val="5D5D72"/>
-                </a:solidFill>
-                <a:latin typeface="Calibri" pitchFamily="34" charset="0"/>
-                <a:ea typeface="Calibri" pitchFamily="34" charset="-122"/>
-                <a:cs typeface="Calibri" pitchFamily="34" charset="-120"/>
-              </a:rPr>
               <a:t>24</a:t>
             </a:r>
             <a:endParaRPr lang="en-US" sz="900" dirty="0"/>
@@ -11942,7 +12319,7 @@
                 <a:ea typeface="Cambria" pitchFamily="34" charset="-122"/>
                 <a:cs typeface="Cambria" pitchFamily="34" charset="-120"/>
               </a:rPr>
-              <a:t>A Validated Form, Rendered</a:t>
+              <a:t>A Validated Registration Form</a:t>
             </a:r>
             <a:endParaRPr lang="en-US" sz="3400" dirty="0"/>
           </a:p>
@@ -11950,14 +12327,285 @@
       </p:sp>
       <p:sp>
         <p:nvSpPr>
-          <p:cNvPr id="4" name="Text 2"/>
-          <p:cNvSpPr txBox="1"/>
-          <p:nvPr/>
-        </p:nvSpPr>
-        <p:spPr>
-          <a:xfrm>
-            <a:off x="640080" y="1691640"/>
-            <a:ext cx="10911535" cy="411480"/>
+          <p:cNvPr id="4" name="Shape 2"/>
+          <p:cNvSpPr/>
+          <p:nvPr/>
+        </p:nvSpPr>
+        <p:spPr>
+          <a:xfrm>
+            <a:off x="640080" y="1965960"/>
+            <a:ext cx="10911535" cy="3931920"/>
+          </a:xfrm>
+          <a:prstGeom prst="roundRect">
+            <a:avLst>
+              <a:gd name="adj" fmla="val 1860"/>
+            </a:avLst>
+          </a:prstGeom>
+          <a:solidFill>
+            <a:srgbClr val="1E1E4C"/>
+          </a:solidFill>
+          <a:ln/>
+        </p:spPr>
+      </p:sp>
+      <p:sp>
+        <p:nvSpPr>
+          <p:cNvPr id="5" name="Text 3"/>
+          <p:cNvSpPr txBox="1"/>
+          <p:nvPr/>
+        </p:nvSpPr>
+        <p:spPr>
+          <a:xfrm>
+            <a:off x="960120" y="2194560"/>
+            <a:ext cx="10271455" cy="3474720"/>
+          </a:xfrm>
+          <a:prstGeom prst="rect">
+            <a:avLst/>
+          </a:prstGeom>
+          <a:noFill/>
+          <a:ln/>
+        </p:spPr>
+        <p:txBody>
+          <a:bodyPr wrap="square" lIns="0" tIns="0" rIns="0" bIns="0" rtlCol="0" anchor="t"/>
+          <a:lstStyle/>
+          <a:p>
+            <a:pPr indent="0" marL="0">
+              <a:lnSpc>
+                <a:spcPct val="125000"/>
+              </a:lnSpc>
+              <a:buNone/>
+            </a:pPr>
+            <a:r>
+              <a:rPr lang="en-US" sz="1366" dirty="0">
+                <a:solidFill>
+                  <a:srgbClr val="C9D3F5"/>
+                </a:solidFill>
+                <a:latin typeface="Courier New" pitchFamily="34" charset="0"/>
+                <a:ea typeface="Courier New" pitchFamily="34" charset="-122"/>
+                <a:cs typeface="Courier New" pitchFamily="34" charset="-120"/>
+              </a:rPr>
+              <a:t>&lt;form action="/register" method="POST"&gt;</a:t>
+            </a:r>
+            <a:endParaRPr lang="en-US" sz="1366" dirty="0"/>
+          </a:p>
+          <a:p>
+            <a:pPr indent="0" marL="0">
+              <a:lnSpc>
+                <a:spcPct val="125000"/>
+              </a:lnSpc>
+              <a:buNone/>
+            </a:pPr>
+            <a:r>
+              <a:rPr lang="en-US" sz="1366" dirty="0">
+                <a:solidFill>
+                  <a:srgbClr val="C9D3F5"/>
+                </a:solidFill>
+                <a:latin typeface="Courier New" pitchFamily="34" charset="0"/>
+                <a:ea typeface="Courier New" pitchFamily="34" charset="-122"/>
+                <a:cs typeface="Courier New" pitchFamily="34" charset="-120"/>
+              </a:rPr>
+              <a:t>    &lt;label for="uname"&gt;Username (required):&lt;/label&gt;</a:t>
+            </a:r>
+            <a:endParaRPr lang="en-US" sz="1366" dirty="0"/>
+          </a:p>
+          <a:p>
+            <a:pPr indent="0" marL="0">
+              <a:lnSpc>
+                <a:spcPct val="125000"/>
+              </a:lnSpc>
+              <a:buNone/>
+            </a:pPr>
+            <a:r>
+              <a:rPr lang="en-US" sz="1366" dirty="0">
+                <a:solidFill>
+                  <a:srgbClr val="C9D3F5"/>
+                </a:solidFill>
+                <a:latin typeface="Courier New" pitchFamily="34" charset="0"/>
+                <a:ea typeface="Courier New" pitchFamily="34" charset="-122"/>
+                <a:cs typeface="Courier New" pitchFamily="34" charset="-120"/>
+              </a:rPr>
+              <a:t>    &lt;input type="text" id="uname" name="uname" required&gt;</a:t>
+            </a:r>
+            <a:endParaRPr lang="en-US" sz="1366" dirty="0"/>
+          </a:p>
+          <a:p>
+            <a:pPr indent="0" marL="0">
+              <a:lnSpc>
+                <a:spcPct val="125000"/>
+              </a:lnSpc>
+              <a:buNone/>
+            </a:pPr>
+            <a:endParaRPr lang="en-US" sz="1366" dirty="0"/>
+          </a:p>
+          <a:p>
+            <a:pPr indent="0" marL="0">
+              <a:lnSpc>
+                <a:spcPct val="125000"/>
+              </a:lnSpc>
+              <a:buNone/>
+            </a:pPr>
+            <a:r>
+              <a:rPr lang="en-US" sz="1366" dirty="0">
+                <a:solidFill>
+                  <a:srgbClr val="C9D3F5"/>
+                </a:solidFill>
+                <a:latin typeface="Courier New" pitchFamily="34" charset="0"/>
+                <a:ea typeface="Courier New" pitchFamily="34" charset="-122"/>
+                <a:cs typeface="Courier New" pitchFamily="34" charset="-120"/>
+              </a:rPr>
+              <a:t>    &lt;label for="cnic"&gt;CNIC (format 00000-0000000-0):&lt;/label&gt;</a:t>
+            </a:r>
+            <a:endParaRPr lang="en-US" sz="1366" dirty="0"/>
+          </a:p>
+          <a:p>
+            <a:pPr indent="0" marL="0">
+              <a:lnSpc>
+                <a:spcPct val="125000"/>
+              </a:lnSpc>
+              <a:buNone/>
+            </a:pPr>
+            <a:r>
+              <a:rPr lang="en-US" sz="1366" dirty="0">
+                <a:solidFill>
+                  <a:srgbClr val="C9D3F5"/>
+                </a:solidFill>
+                <a:latin typeface="Courier New" pitchFamily="34" charset="0"/>
+                <a:ea typeface="Courier New" pitchFamily="34" charset="-122"/>
+                <a:cs typeface="Courier New" pitchFamily="34" charset="-120"/>
+              </a:rPr>
+              <a:t>    &lt;input type="text" id="cnic" name="cnic"</a:t>
+            </a:r>
+            <a:endParaRPr lang="en-US" sz="1366" dirty="0"/>
+          </a:p>
+          <a:p>
+            <a:pPr indent="0" marL="0">
+              <a:lnSpc>
+                <a:spcPct val="125000"/>
+              </a:lnSpc>
+              <a:buNone/>
+            </a:pPr>
+            <a:r>
+              <a:rPr lang="en-US" sz="1366" dirty="0">
+                <a:solidFill>
+                  <a:srgbClr val="C9D3F5"/>
+                </a:solidFill>
+                <a:latin typeface="Courier New" pitchFamily="34" charset="0"/>
+                <a:ea typeface="Courier New" pitchFamily="34" charset="-122"/>
+                <a:cs typeface="Courier New" pitchFamily="34" charset="-120"/>
+              </a:rPr>
+              <a:t>           pattern="\d{5}-\d{7}-\d" title="Format: 00000-0000000-0"&gt;</a:t>
+            </a:r>
+            <a:endParaRPr lang="en-US" sz="1366" dirty="0"/>
+          </a:p>
+          <a:p>
+            <a:pPr indent="0" marL="0">
+              <a:lnSpc>
+                <a:spcPct val="125000"/>
+              </a:lnSpc>
+              <a:buNone/>
+            </a:pPr>
+            <a:endParaRPr lang="en-US" sz="1366" dirty="0"/>
+          </a:p>
+          <a:p>
+            <a:pPr indent="0" marL="0">
+              <a:lnSpc>
+                <a:spcPct val="125000"/>
+              </a:lnSpc>
+              <a:buNone/>
+            </a:pPr>
+            <a:r>
+              <a:rPr lang="en-US" sz="1366" dirty="0">
+                <a:solidFill>
+                  <a:srgbClr val="C9D3F5"/>
+                </a:solidFill>
+                <a:latin typeface="Courier New" pitchFamily="34" charset="0"/>
+                <a:ea typeface="Courier New" pitchFamily="34" charset="-122"/>
+                <a:cs typeface="Courier New" pitchFamily="34" charset="-120"/>
+              </a:rPr>
+              <a:t>    &lt;label for="age"&gt;Age (18–60):&lt;/label&gt;</a:t>
+            </a:r>
+            <a:endParaRPr lang="en-US" sz="1366" dirty="0"/>
+          </a:p>
+          <a:p>
+            <a:pPr indent="0" marL="0">
+              <a:lnSpc>
+                <a:spcPct val="125000"/>
+              </a:lnSpc>
+              <a:buNone/>
+            </a:pPr>
+            <a:r>
+              <a:rPr lang="en-US" sz="1366" dirty="0">
+                <a:solidFill>
+                  <a:srgbClr val="C9D3F5"/>
+                </a:solidFill>
+                <a:latin typeface="Courier New" pitchFamily="34" charset="0"/>
+                <a:ea typeface="Courier New" pitchFamily="34" charset="-122"/>
+                <a:cs typeface="Courier New" pitchFamily="34" charset="-120"/>
+              </a:rPr>
+              <a:t>    &lt;input type="number" id="age" name="age" min="18" max="60"&gt;</a:t>
+            </a:r>
+            <a:endParaRPr lang="en-US" sz="1366" dirty="0"/>
+          </a:p>
+          <a:p>
+            <a:pPr indent="0" marL="0">
+              <a:lnSpc>
+                <a:spcPct val="125000"/>
+              </a:lnSpc>
+              <a:buNone/>
+            </a:pPr>
+            <a:endParaRPr lang="en-US" sz="1366" dirty="0"/>
+          </a:p>
+          <a:p>
+            <a:pPr indent="0" marL="0">
+              <a:lnSpc>
+                <a:spcPct val="125000"/>
+              </a:lnSpc>
+              <a:buNone/>
+            </a:pPr>
+            <a:r>
+              <a:rPr lang="en-US" sz="1366" dirty="0">
+                <a:solidFill>
+                  <a:srgbClr val="C9D3F5"/>
+                </a:solidFill>
+                <a:latin typeface="Courier New" pitchFamily="34" charset="0"/>
+                <a:ea typeface="Courier New" pitchFamily="34" charset="-122"/>
+                <a:cs typeface="Courier New" pitchFamily="34" charset="-120"/>
+              </a:rPr>
+              <a:t>    &lt;button type="submit"&gt;Register&lt;/button&gt;</a:t>
+            </a:r>
+            <a:endParaRPr lang="en-US" sz="1366" dirty="0"/>
+          </a:p>
+          <a:p>
+            <a:pPr indent="0" marL="0">
+              <a:lnSpc>
+                <a:spcPct val="125000"/>
+              </a:lnSpc>
+              <a:buNone/>
+            </a:pPr>
+            <a:r>
+              <a:rPr lang="en-US" sz="1366" dirty="0">
+                <a:solidFill>
+                  <a:srgbClr val="C9D3F5"/>
+                </a:solidFill>
+                <a:latin typeface="Courier New" pitchFamily="34" charset="0"/>
+                <a:ea typeface="Courier New" pitchFamily="34" charset="-122"/>
+                <a:cs typeface="Courier New" pitchFamily="34" charset="-120"/>
+              </a:rPr>
+              <a:t>&lt;/form&gt;</a:t>
+            </a:r>
+            <a:endParaRPr lang="en-US" sz="1366" dirty="0"/>
+          </a:p>
+        </p:txBody>
+      </p:sp>
+      <p:sp>
+        <p:nvSpPr>
+          <p:cNvPr id="6" name="Text 4"/>
+          <p:cNvSpPr txBox="1"/>
+          <p:nvPr/>
+        </p:nvSpPr>
+        <p:spPr>
+          <a:xfrm>
+            <a:off x="640080" y="6446520"/>
+            <a:ext cx="8686800" cy="292608"/>
           </a:xfrm>
           <a:prstGeom prst="rect">
             <a:avLst/>
@@ -11969,11 +12617,11 @@
           <a:bodyPr wrap="square" lIns="0" tIns="0" rIns="0" bIns="0" rtlCol="0" anchor="ctr"/>
           <a:lstStyle/>
           <a:p>
-            <a:pPr indent="0" marL="0">
-              <a:buNone/>
-            </a:pPr>
-            <a:r>
-              <a:rPr lang="en-US" sz="1350" i="1" dirty="0">
+            <a:pPr algn="l" indent="0" marL="0">
+              <a:buNone/>
+            </a:pPr>
+            <a:r>
+              <a:rPr lang="en-US" sz="900" dirty="0">
                 <a:solidFill>
                   <a:srgbClr val="5D5D72"/>
                 </a:solidFill>
@@ -11981,103 +12629,6 @@
                 <a:ea typeface="Calibri" pitchFamily="34" charset="-122"/>
                 <a:cs typeface="Calibri" pitchFamily="34" charset="-120"/>
               </a:rPr>
-              <a:t>The warning bubbles only appear live in a browser when you try to submit invalid or missing data.</a:t>
-            </a:r>
-            <a:endParaRPr lang="en-US" sz="1350" dirty="0"/>
-          </a:p>
-        </p:txBody>
-      </p:sp>
-      <p:sp>
-        <p:nvSpPr>
-          <p:cNvPr id="5" name="Shape 3"/>
-          <p:cNvSpPr/>
-          <p:nvPr/>
-        </p:nvSpPr>
-        <p:spPr>
-          <a:xfrm>
-            <a:off x="530352" y="2221992"/>
-            <a:ext cx="11130991" cy="4059936"/>
-          </a:xfrm>
-          <a:prstGeom prst="roundRect">
-            <a:avLst>
-              <a:gd name="adj" fmla="val 1351"/>
-            </a:avLst>
-          </a:prstGeom>
-          <a:solidFill>
-            <a:srgbClr val="FFFFFF"/>
-          </a:solidFill>
-          <a:ln w="12700">
-            <a:solidFill>
-              <a:srgbClr val="E2E2EE"/>
-            </a:solidFill>
-            <a:prstDash val="solid"/>
-          </a:ln>
-          <a:effectLst>
-            <a:outerShdw sx="100000" sy="100000" kx="0" ky="0" algn="bl" rotWithShape="0" blurRad="101600" dist="38100" dir="5400000">
-              <a:srgbClr val="000000">
-                <a:alpha val="12000"/>
-              </a:srgbClr>
-            </a:outerShdw>
-          </a:effectLst>
-        </p:spPr>
-      </p:sp>
-      <p:pic>
-        <p:nvPicPr>
-          <p:cNvPr id="6" name="Image 0" descr="D:/GitHub/mern-web-book/docs/assets/img/lecture-04/validation-form.png">    </p:cNvPr>
-          <p:cNvPicPr>
-            <a:picLocks noChangeAspect="1"/>
-          </p:cNvPicPr>
-          <p:nvPr/>
-        </p:nvPicPr>
-        <p:blipFill>
-          <a:blip r:embed="rId1"/>
-          <a:stretch>
-            <a:fillRect/>
-          </a:stretch>
-        </p:blipFill>
-        <p:spPr>
-          <a:xfrm>
-            <a:off x="640080" y="3631355"/>
-            <a:ext cx="10911535" cy="1241210"/>
-          </a:xfrm>
-          <a:prstGeom prst="rect">
-            <a:avLst/>
-          </a:prstGeom>
-        </p:spPr>
-      </p:pic>
-      <p:sp>
-        <p:nvSpPr>
-          <p:cNvPr id="7" name="Text 4"/>
-          <p:cNvSpPr txBox="1"/>
-          <p:nvPr/>
-        </p:nvSpPr>
-        <p:spPr>
-          <a:xfrm>
-            <a:off x="640080" y="6446520"/>
-            <a:ext cx="8686800" cy="292608"/>
-          </a:xfrm>
-          <a:prstGeom prst="rect">
-            <a:avLst/>
-          </a:prstGeom>
-          <a:noFill/>
-          <a:ln/>
-        </p:spPr>
-        <p:txBody>
-          <a:bodyPr wrap="square" lIns="0" tIns="0" rIns="0" bIns="0" rtlCol="0" anchor="ctr"/>
-          <a:lstStyle/>
-          <a:p>
-            <a:pPr algn="l" indent="0" marL="0">
-              <a:buNone/>
-            </a:pPr>
-            <a:r>
-              <a:rPr lang="en-US" sz="900" dirty="0">
-                <a:solidFill>
-                  <a:srgbClr val="5D5D72"/>
-                </a:solidFill>
-                <a:latin typeface="Calibri" pitchFamily="34" charset="0"/>
-                <a:ea typeface="Calibri" pitchFamily="34" charset="-122"/>
-                <a:cs typeface="Calibri" pitchFamily="34" charset="-120"/>
-              </a:rPr>
               <a:t>Usman Akram  •  COMSATS University Islamabad</a:t>
             </a:r>
             <a:endParaRPr lang="en-US" sz="900" dirty="0"/>
@@ -12086,7 +12637,7 @@
       </p:sp>
       <p:sp>
         <p:nvSpPr>
-          <p:cNvPr id="8" name="Text 5"/>
+          <p:cNvPr id="7" name="Text 5"/>
           <p:cNvSpPr txBox="1"/>
           <p:nvPr/>
         </p:nvSpPr>
@@ -12227,7 +12778,7 @@
                 <a:ea typeface="Cambria" pitchFamily="34" charset="-122"/>
                 <a:cs typeface="Cambria" pitchFamily="34" charset="-120"/>
               </a:rPr>
-              <a:t>Client-Side Validation Is Not Enough</a:t>
+              <a:t>A Validated Form, Rendered</a:t>
             </a:r>
             <a:endParaRPr lang="en-US" sz="3400" dirty="0"/>
           </a:p>
@@ -12235,41 +12786,111 @@
       </p:sp>
       <p:sp>
         <p:nvSpPr>
-          <p:cNvPr id="4" name="Shape 2"/>
+          <p:cNvPr id="4" name="Text 2"/>
+          <p:cNvSpPr txBox="1"/>
+          <p:nvPr/>
+        </p:nvSpPr>
+        <p:spPr>
+          <a:xfrm>
+            <a:off x="640080" y="1691640"/>
+            <a:ext cx="10911535" cy="411480"/>
+          </a:xfrm>
+          <a:prstGeom prst="rect">
+            <a:avLst/>
+          </a:prstGeom>
+          <a:noFill/>
+          <a:ln/>
+        </p:spPr>
+        <p:txBody>
+          <a:bodyPr wrap="square" lIns="0" tIns="0" rIns="0" bIns="0" rtlCol="0" anchor="ctr"/>
+          <a:lstStyle/>
+          <a:p>
+            <a:pPr indent="0" marL="0">
+              <a:buNone/>
+            </a:pPr>
+            <a:r>
+              <a:rPr lang="en-US" sz="1350" i="1" dirty="0">
+                <a:solidFill>
+                  <a:srgbClr val="5D5D72"/>
+                </a:solidFill>
+                <a:latin typeface="Calibri" pitchFamily="34" charset="0"/>
+                <a:ea typeface="Calibri" pitchFamily="34" charset="-122"/>
+                <a:cs typeface="Calibri" pitchFamily="34" charset="-120"/>
+              </a:rPr>
+              <a:t>The warning bubbles only appear live in a browser when you try to submit invalid or missing data.</a:t>
+            </a:r>
+            <a:endParaRPr lang="en-US" sz="1350" dirty="0"/>
+          </a:p>
+        </p:txBody>
+      </p:sp>
+      <p:sp>
+        <p:nvSpPr>
+          <p:cNvPr id="5" name="Shape 3"/>
           <p:cNvSpPr/>
           <p:nvPr/>
         </p:nvSpPr>
         <p:spPr>
           <a:xfrm>
-            <a:off x="640080" y="1965960"/>
-            <a:ext cx="10911535" cy="1737360"/>
+            <a:off x="530352" y="2221992"/>
+            <a:ext cx="11130991" cy="4059936"/>
           </a:xfrm>
           <a:prstGeom prst="roundRect">
             <a:avLst>
-              <a:gd name="adj" fmla="val 3158"/>
+              <a:gd name="adj" fmla="val 1351"/>
             </a:avLst>
           </a:prstGeom>
           <a:solidFill>
-            <a:srgbClr val="FDECE0"/>
+            <a:srgbClr val="FFFFFF"/>
           </a:solidFill>
           <a:ln w="12700">
             <a:solidFill>
-              <a:srgbClr val="FF8A3D"/>
+              <a:srgbClr val="E2E2EE"/>
             </a:solidFill>
             <a:prstDash val="solid"/>
           </a:ln>
-        </p:spPr>
-      </p:sp>
-      <p:sp>
-        <p:nvSpPr>
-          <p:cNvPr id="5" name="Text 3"/>
-          <p:cNvSpPr txBox="1"/>
-          <p:nvPr/>
-        </p:nvSpPr>
-        <p:spPr>
-          <a:xfrm>
-            <a:off x="868680" y="2103120"/>
-            <a:ext cx="10454335" cy="274320"/>
+          <a:effectLst>
+            <a:outerShdw sx="100000" sy="100000" kx="0" ky="0" algn="bl" rotWithShape="0" blurRad="101600" dist="38100" dir="5400000">
+              <a:srgbClr val="000000">
+                <a:alpha val="12000"/>
+              </a:srgbClr>
+            </a:outerShdw>
+          </a:effectLst>
+        </p:spPr>
+      </p:sp>
+      <p:pic>
+        <p:nvPicPr>
+          <p:cNvPr id="6" name="Image 0" descr="D:/GitHub/mern-web-book/docs/assets/img/lecture-04/validation-form.png">    </p:cNvPr>
+          <p:cNvPicPr>
+            <a:picLocks noChangeAspect="1"/>
+          </p:cNvPicPr>
+          <p:nvPr/>
+        </p:nvPicPr>
+        <p:blipFill>
+          <a:blip r:embed="rId1"/>
+          <a:stretch>
+            <a:fillRect/>
+          </a:stretch>
+        </p:blipFill>
+        <p:spPr>
+          <a:xfrm>
+            <a:off x="640080" y="3631355"/>
+            <a:ext cx="10911535" cy="1241210"/>
+          </a:xfrm>
+          <a:prstGeom prst="rect">
+            <a:avLst/>
+          </a:prstGeom>
+        </p:spPr>
+      </p:pic>
+      <p:sp>
+        <p:nvSpPr>
+          <p:cNvPr id="7" name="Text 4"/>
+          <p:cNvSpPr txBox="1"/>
+          <p:nvPr/>
+        </p:nvSpPr>
+        <p:spPr>
+          <a:xfrm>
+            <a:off x="640080" y="6446520"/>
+            <a:ext cx="8686800" cy="292608"/>
           </a:xfrm>
           <a:prstGeom prst="rect">
             <a:avLst/>
@@ -12281,96 +12902,18 @@
           <a:bodyPr wrap="square" lIns="0" tIns="0" rIns="0" bIns="0" rtlCol="0" anchor="ctr"/>
           <a:lstStyle/>
           <a:p>
-            <a:pPr indent="0" marL="0">
-              <a:buNone/>
-            </a:pPr>
-            <a:r>
-              <a:rPr lang="en-US" sz="1000" b="1" spc="200" kern="0" dirty="0">
-                <a:solidFill>
-                  <a:srgbClr val="8A3A12"/>
+            <a:pPr algn="l" indent="0" marL="0">
+              <a:buNone/>
+            </a:pPr>
+            <a:r>
+              <a:rPr lang="en-US" sz="900" dirty="0">
+                <a:solidFill>
+                  <a:srgbClr val="5D5D72"/>
                 </a:solidFill>
                 <a:latin typeface="Calibri" pitchFamily="34" charset="0"/>
                 <a:ea typeface="Calibri" pitchFamily="34" charset="-122"/>
                 <a:cs typeface="Calibri" pitchFamily="34" charset="-120"/>
               </a:rPr>
-              <a:t>WARNING</a:t>
-            </a:r>
-            <a:endParaRPr lang="en-US" sz="1000" dirty="0"/>
-          </a:p>
-        </p:txBody>
-      </p:sp>
-      <p:sp>
-        <p:nvSpPr>
-          <p:cNvPr id="6" name="Text 4"/>
-          <p:cNvSpPr txBox="1"/>
-          <p:nvPr/>
-        </p:nvSpPr>
-        <p:spPr>
-          <a:xfrm>
-            <a:off x="868680" y="2404872"/>
-            <a:ext cx="10454335" cy="1143000"/>
-          </a:xfrm>
-          <a:prstGeom prst="rect">
-            <a:avLst/>
-          </a:prstGeom>
-          <a:noFill/>
-          <a:ln/>
-        </p:spPr>
-        <p:txBody>
-          <a:bodyPr wrap="square" lIns="0" tIns="0" rIns="0" bIns="0" rtlCol="0" anchor="t"/>
-          <a:lstStyle/>
-          <a:p>
-            <a:pPr indent="0" marL="0">
-              <a:buNone/>
-            </a:pPr>
-            <a:r>
-              <a:rPr lang="en-US" sz="1250" dirty="0">
-                <a:solidFill>
-                  <a:srgbClr val="26262F"/>
-                </a:solidFill>
-                <a:latin typeface="Calibri" pitchFamily="34" charset="0"/>
-                <a:ea typeface="Calibri" pitchFamily="34" charset="-122"/>
-                <a:cs typeface="Calibri" pitchFamily="34" charset="-120"/>
-              </a:rPr>
-              <a:t>A user can disable JavaScript or edit HTML in dev tools. Client-side validation is a convenience for instant feedback — it is not security. Every submission must also be validated again on the server.</a:t>
-            </a:r>
-            <a:endParaRPr lang="en-US" sz="1250" dirty="0"/>
-          </a:p>
-        </p:txBody>
-      </p:sp>
-      <p:sp>
-        <p:nvSpPr>
-          <p:cNvPr id="7" name="Text 5"/>
-          <p:cNvSpPr txBox="1"/>
-          <p:nvPr/>
-        </p:nvSpPr>
-        <p:spPr>
-          <a:xfrm>
-            <a:off x="640080" y="6446520"/>
-            <a:ext cx="8686800" cy="292608"/>
-          </a:xfrm>
-          <a:prstGeom prst="rect">
-            <a:avLst/>
-          </a:prstGeom>
-          <a:noFill/>
-          <a:ln/>
-        </p:spPr>
-        <p:txBody>
-          <a:bodyPr wrap="square" lIns="0" tIns="0" rIns="0" bIns="0" rtlCol="0" anchor="ctr"/>
-          <a:lstStyle/>
-          <a:p>
-            <a:pPr algn="l" indent="0" marL="0">
-              <a:buNone/>
-            </a:pPr>
-            <a:r>
-              <a:rPr lang="en-US" sz="900" dirty="0">
-                <a:solidFill>
-                  <a:srgbClr val="5D5D72"/>
-                </a:solidFill>
-                <a:latin typeface="Calibri" pitchFamily="34" charset="0"/>
-                <a:ea typeface="Calibri" pitchFamily="34" charset="-122"/>
-                <a:cs typeface="Calibri" pitchFamily="34" charset="-120"/>
-              </a:rPr>
               <a:t>Usman Akram  •  COMSATS University Islamabad</a:t>
             </a:r>
             <a:endParaRPr lang="en-US" sz="900" dirty="0"/>
@@ -12379,7 +12922,7 @@
       </p:sp>
       <p:sp>
         <p:nvSpPr>
-          <p:cNvPr id="8" name="Text 6"/>
+          <p:cNvPr id="8" name="Text 5"/>
           <p:cNvSpPr txBox="1"/>
           <p:nvPr/>
         </p:nvSpPr>
@@ -12427,6 +12970,299 @@
 <file path=ppt/slides/slide27.xml><?xml version="1.0" encoding="utf-8"?>
 <p:sld xmlns:a="http://schemas.openxmlformats.org/drawingml/2006/main" xmlns:r="http://schemas.openxmlformats.org/officeDocument/2006/relationships" xmlns:p="http://schemas.openxmlformats.org/presentationml/2006/main">
   <p:cSld name="Slide 27">
+    <p:bg>
+      <p:bgPr>
+        <a:solidFill>
+          <a:srgbClr val="FFFFFF"/>
+        </a:solidFill>
+      </p:bgPr>
+    </p:bg>
+    <p:spTree>
+      <p:nvGrpSpPr>
+        <p:cNvPr id="1" name=""/>
+        <p:cNvGrpSpPr/>
+        <p:nvPr/>
+      </p:nvGrpSpPr>
+      <p:grpSpPr>
+        <a:xfrm>
+          <a:off x="0" y="0"/>
+          <a:ext cx="0" cy="0"/>
+          <a:chOff x="0" y="0"/>
+          <a:chExt cx="0" cy="0"/>
+        </a:xfrm>
+      </p:grpSpPr>
+      <p:sp>
+        <p:nvSpPr>
+          <p:cNvPr id="2" name="Text 0"/>
+          <p:cNvSpPr txBox="1"/>
+          <p:nvPr/>
+        </p:nvSpPr>
+        <p:spPr>
+          <a:xfrm>
+            <a:off x="640080" y="457200"/>
+            <a:ext cx="10058400" cy="365760"/>
+          </a:xfrm>
+          <a:prstGeom prst="rect">
+            <a:avLst/>
+          </a:prstGeom>
+          <a:noFill/>
+          <a:ln/>
+        </p:spPr>
+        <p:txBody>
+          <a:bodyPr wrap="square" lIns="0" tIns="0" rIns="0" bIns="0" rtlCol="0" anchor="ctr"/>
+          <a:lstStyle/>
+          <a:p>
+            <a:pPr algn="l" indent="0" marL="0">
+              <a:buNone/>
+            </a:pPr>
+            <a:r>
+              <a:rPr lang="en-US" sz="1300" b="1" spc="300" kern="0" dirty="0">
+                <a:solidFill>
+                  <a:srgbClr val="FF8A3D"/>
+                </a:solidFill>
+                <a:latin typeface="Calibri" pitchFamily="34" charset="0"/>
+                <a:ea typeface="Calibri" pitchFamily="34" charset="-122"/>
+                <a:cs typeface="Calibri" pitchFamily="34" charset="-120"/>
+              </a:rPr>
+              <a:t>VALIDATION</a:t>
+            </a:r>
+            <a:endParaRPr lang="en-US" sz="1300" dirty="0"/>
+          </a:p>
+        </p:txBody>
+      </p:sp>
+      <p:sp>
+        <p:nvSpPr>
+          <p:cNvPr id="3" name="Text 1"/>
+          <p:cNvSpPr txBox="1"/>
+          <p:nvPr/>
+        </p:nvSpPr>
+        <p:spPr>
+          <a:xfrm>
+            <a:off x="640080" y="841248"/>
+            <a:ext cx="10881360" cy="914400"/>
+          </a:xfrm>
+          <a:prstGeom prst="rect">
+            <a:avLst/>
+          </a:prstGeom>
+          <a:noFill/>
+          <a:ln/>
+        </p:spPr>
+        <p:txBody>
+          <a:bodyPr wrap="square" lIns="0" tIns="0" rIns="0" bIns="0" rtlCol="0" anchor="ctr"/>
+          <a:lstStyle/>
+          <a:p>
+            <a:pPr algn="l" indent="0" marL="0">
+              <a:buNone/>
+            </a:pPr>
+            <a:r>
+              <a:rPr lang="en-US" sz="3400" b="1" dirty="0">
+                <a:solidFill>
+                  <a:srgbClr val="2B2B7A"/>
+                </a:solidFill>
+                <a:latin typeface="Cambria" pitchFamily="34" charset="0"/>
+                <a:ea typeface="Cambria" pitchFamily="34" charset="-122"/>
+                <a:cs typeface="Cambria" pitchFamily="34" charset="-120"/>
+              </a:rPr>
+              <a:t>Client-Side Validation Is Not Enough</a:t>
+            </a:r>
+            <a:endParaRPr lang="en-US" sz="3400" dirty="0"/>
+          </a:p>
+        </p:txBody>
+      </p:sp>
+      <p:sp>
+        <p:nvSpPr>
+          <p:cNvPr id="4" name="Shape 2"/>
+          <p:cNvSpPr/>
+          <p:nvPr/>
+        </p:nvSpPr>
+        <p:spPr>
+          <a:xfrm>
+            <a:off x="640080" y="1965960"/>
+            <a:ext cx="10911535" cy="1737360"/>
+          </a:xfrm>
+          <a:prstGeom prst="roundRect">
+            <a:avLst>
+              <a:gd name="adj" fmla="val 3158"/>
+            </a:avLst>
+          </a:prstGeom>
+          <a:solidFill>
+            <a:srgbClr val="FDECE0"/>
+          </a:solidFill>
+          <a:ln w="12700">
+            <a:solidFill>
+              <a:srgbClr val="FF8A3D"/>
+            </a:solidFill>
+            <a:prstDash val="solid"/>
+          </a:ln>
+        </p:spPr>
+      </p:sp>
+      <p:sp>
+        <p:nvSpPr>
+          <p:cNvPr id="5" name="Text 3"/>
+          <p:cNvSpPr txBox="1"/>
+          <p:nvPr/>
+        </p:nvSpPr>
+        <p:spPr>
+          <a:xfrm>
+            <a:off x="868680" y="2103120"/>
+            <a:ext cx="10454335" cy="274320"/>
+          </a:xfrm>
+          <a:prstGeom prst="rect">
+            <a:avLst/>
+          </a:prstGeom>
+          <a:noFill/>
+          <a:ln/>
+        </p:spPr>
+        <p:txBody>
+          <a:bodyPr wrap="square" lIns="0" tIns="0" rIns="0" bIns="0" rtlCol="0" anchor="ctr"/>
+          <a:lstStyle/>
+          <a:p>
+            <a:pPr indent="0" marL="0">
+              <a:buNone/>
+            </a:pPr>
+            <a:r>
+              <a:rPr lang="en-US" sz="1000" b="1" spc="200" kern="0" dirty="0">
+                <a:solidFill>
+                  <a:srgbClr val="8A3A12"/>
+                </a:solidFill>
+                <a:latin typeface="Calibri" pitchFamily="34" charset="0"/>
+                <a:ea typeface="Calibri" pitchFamily="34" charset="-122"/>
+                <a:cs typeface="Calibri" pitchFamily="34" charset="-120"/>
+              </a:rPr>
+              <a:t>WARNING</a:t>
+            </a:r>
+            <a:endParaRPr lang="en-US" sz="1000" dirty="0"/>
+          </a:p>
+        </p:txBody>
+      </p:sp>
+      <p:sp>
+        <p:nvSpPr>
+          <p:cNvPr id="6" name="Text 4"/>
+          <p:cNvSpPr txBox="1"/>
+          <p:nvPr/>
+        </p:nvSpPr>
+        <p:spPr>
+          <a:xfrm>
+            <a:off x="868680" y="2404872"/>
+            <a:ext cx="10454335" cy="1143000"/>
+          </a:xfrm>
+          <a:prstGeom prst="rect">
+            <a:avLst/>
+          </a:prstGeom>
+          <a:noFill/>
+          <a:ln/>
+        </p:spPr>
+        <p:txBody>
+          <a:bodyPr wrap="square" lIns="0" tIns="0" rIns="0" bIns="0" rtlCol="0" anchor="t"/>
+          <a:lstStyle/>
+          <a:p>
+            <a:pPr indent="0" marL="0">
+              <a:buNone/>
+            </a:pPr>
+            <a:r>
+              <a:rPr lang="en-US" sz="1250" dirty="0">
+                <a:solidFill>
+                  <a:srgbClr val="26262F"/>
+                </a:solidFill>
+                <a:latin typeface="Calibri" pitchFamily="34" charset="0"/>
+                <a:ea typeface="Calibri" pitchFamily="34" charset="-122"/>
+                <a:cs typeface="Calibri" pitchFamily="34" charset="-120"/>
+              </a:rPr>
+              <a:t>A user can disable JavaScript or edit HTML in dev tools. Client-side validation is a convenience for instant feedback — it is not security. Every submission must also be validated again on the server.</a:t>
+            </a:r>
+            <a:endParaRPr lang="en-US" sz="1250" dirty="0"/>
+          </a:p>
+        </p:txBody>
+      </p:sp>
+      <p:sp>
+        <p:nvSpPr>
+          <p:cNvPr id="7" name="Text 5"/>
+          <p:cNvSpPr txBox="1"/>
+          <p:nvPr/>
+        </p:nvSpPr>
+        <p:spPr>
+          <a:xfrm>
+            <a:off x="640080" y="6446520"/>
+            <a:ext cx="8686800" cy="292608"/>
+          </a:xfrm>
+          <a:prstGeom prst="rect">
+            <a:avLst/>
+          </a:prstGeom>
+          <a:noFill/>
+          <a:ln/>
+        </p:spPr>
+        <p:txBody>
+          <a:bodyPr wrap="square" lIns="0" tIns="0" rIns="0" bIns="0" rtlCol="0" anchor="ctr"/>
+          <a:lstStyle/>
+          <a:p>
+            <a:pPr algn="l" indent="0" marL="0">
+              <a:buNone/>
+            </a:pPr>
+            <a:r>
+              <a:rPr lang="en-US" sz="900" dirty="0">
+                <a:solidFill>
+                  <a:srgbClr val="5D5D72"/>
+                </a:solidFill>
+                <a:latin typeface="Calibri" pitchFamily="34" charset="0"/>
+                <a:ea typeface="Calibri" pitchFamily="34" charset="-122"/>
+                <a:cs typeface="Calibri" pitchFamily="34" charset="-120"/>
+              </a:rPr>
+              <a:t>Usman Akram  •  COMSATS University Islamabad</a:t>
+            </a:r>
+            <a:endParaRPr lang="en-US" sz="900" dirty="0"/>
+          </a:p>
+        </p:txBody>
+      </p:sp>
+      <p:sp>
+        <p:nvSpPr>
+          <p:cNvPr id="8" name="Text 6"/>
+          <p:cNvSpPr txBox="1"/>
+          <p:nvPr/>
+        </p:nvSpPr>
+        <p:spPr>
+          <a:xfrm>
+            <a:off x="11155680" y="6446520"/>
+            <a:ext cx="457200" cy="292608"/>
+          </a:xfrm>
+          <a:prstGeom prst="rect">
+            <a:avLst/>
+          </a:prstGeom>
+          <a:noFill/>
+          <a:ln/>
+        </p:spPr>
+        <p:txBody>
+          <a:bodyPr wrap="square" lIns="0" tIns="0" rIns="0" bIns="0" rtlCol="0" anchor="ctr"/>
+          <a:lstStyle/>
+          <a:p>
+            <a:pPr algn="r" indent="0" marL="0">
+              <a:buNone/>
+            </a:pPr>
+            <a:r>
+              <a:rPr lang="en-US" sz="900" dirty="0">
+                <a:solidFill>
+                  <a:srgbClr val="5D5D72"/>
+                </a:solidFill>
+                <a:latin typeface="Calibri" pitchFamily="34" charset="0"/>
+                <a:ea typeface="Calibri" pitchFamily="34" charset="-122"/>
+                <a:cs typeface="Calibri" pitchFamily="34" charset="-120"/>
+              </a:rPr>
+              <a:t>27</a:t>
+            </a:r>
+            <a:endParaRPr lang="en-US" sz="900" dirty="0"/>
+          </a:p>
+        </p:txBody>
+      </p:sp>
+    </p:spTree>
+  </p:cSld>
+  <p:clrMapOvr>
+    <a:masterClrMapping/>
+  </p:clrMapOvr>
+</p:sld>
+</file>
+
+<file path=ppt/slides/slide28.xml><?xml version="1.0" encoding="utf-8"?>
+<p:sld xmlns:a="http://schemas.openxmlformats.org/drawingml/2006/main" xmlns:r="http://schemas.openxmlformats.org/officeDocument/2006/relationships" xmlns:p="http://schemas.openxmlformats.org/presentationml/2006/main">
+  <p:cSld name="Slide 28">
     <p:bg>
       <p:bgPr>
         <a:solidFill>
@@ -12594,7 +13430,7 @@
         <p:spPr>
           <a:xfrm>
             <a:off x="1463040" y="2194560"/>
-            <a:ext cx="10058400" cy="640080"/>
+            <a:ext cx="10058400" cy="624840"/>
           </a:xfrm>
           <a:prstGeom prst="rect">
             <a:avLst/>
@@ -12632,7 +13468,7 @@
         </p:nvSpPr>
         <p:spPr>
           <a:xfrm>
-            <a:off x="822960" y="2971800"/>
+            <a:off x="822960" y="2956560"/>
             <a:ext cx="438912" cy="438912"/>
           </a:xfrm>
           <a:prstGeom prst="ellipse">
@@ -12652,7 +13488,7 @@
         </p:nvSpPr>
         <p:spPr>
           <a:xfrm>
-            <a:off x="822960" y="2971800"/>
+            <a:off x="822960" y="2956560"/>
             <a:ext cx="438912" cy="438912"/>
           </a:xfrm>
           <a:prstGeom prst="rect">
@@ -12691,8 +13527,8 @@
         </p:nvSpPr>
         <p:spPr>
           <a:xfrm>
-            <a:off x="1463040" y="2880360"/>
-            <a:ext cx="10058400" cy="640080"/>
+            <a:off x="1463040" y="2865120"/>
+            <a:ext cx="10058400" cy="624840"/>
           </a:xfrm>
           <a:prstGeom prst="rect">
             <a:avLst/>
@@ -12730,7 +13566,7 @@
         </p:nvSpPr>
         <p:spPr>
           <a:xfrm>
-            <a:off x="822960" y="3657600"/>
+            <a:off x="822960" y="3627120"/>
             <a:ext cx="438912" cy="438912"/>
           </a:xfrm>
           <a:prstGeom prst="ellipse">
@@ -12750,7 +13586,7 @@
         </p:nvSpPr>
         <p:spPr>
           <a:xfrm>
-            <a:off x="822960" y="3657600"/>
+            <a:off x="822960" y="3627120"/>
             <a:ext cx="438912" cy="438912"/>
           </a:xfrm>
           <a:prstGeom prst="rect">
@@ -12789,8 +13625,8 @@
         </p:nvSpPr>
         <p:spPr>
           <a:xfrm>
-            <a:off x="1463040" y="3566160"/>
-            <a:ext cx="10058400" cy="640080"/>
+            <a:off x="1463040" y="3535680"/>
+            <a:ext cx="10058400" cy="624840"/>
           </a:xfrm>
           <a:prstGeom prst="rect">
             <a:avLst/>
@@ -12828,7 +13664,7 @@
         </p:nvSpPr>
         <p:spPr>
           <a:xfrm>
-            <a:off x="822960" y="4343400"/>
+            <a:off x="822960" y="4297680"/>
             <a:ext cx="438912" cy="438912"/>
           </a:xfrm>
           <a:prstGeom prst="ellipse">
@@ -12848,7 +13684,7 @@
         </p:nvSpPr>
         <p:spPr>
           <a:xfrm>
-            <a:off x="822960" y="4343400"/>
+            <a:off x="822960" y="4297680"/>
             <a:ext cx="438912" cy="438912"/>
           </a:xfrm>
           <a:prstGeom prst="rect">
@@ -12887,8 +13723,8 @@
         </p:nvSpPr>
         <p:spPr>
           <a:xfrm>
-            <a:off x="1463040" y="4251960"/>
-            <a:ext cx="10058400" cy="640080"/>
+            <a:off x="1463040" y="4206240"/>
+            <a:ext cx="10058400" cy="624840"/>
           </a:xfrm>
           <a:prstGeom prst="rect">
             <a:avLst/>
@@ -12926,7 +13762,7 @@
         </p:nvSpPr>
         <p:spPr>
           <a:xfrm>
-            <a:off x="822960" y="5029200"/>
+            <a:off x="822960" y="4968240"/>
             <a:ext cx="438912" cy="438912"/>
           </a:xfrm>
           <a:prstGeom prst="ellipse">
@@ -12946,7 +13782,7 @@
         </p:nvSpPr>
         <p:spPr>
           <a:xfrm>
-            <a:off x="822960" y="5029200"/>
+            <a:off x="822960" y="4968240"/>
             <a:ext cx="438912" cy="438912"/>
           </a:xfrm>
           <a:prstGeom prst="rect">
@@ -12985,8 +13821,8 @@
         </p:nvSpPr>
         <p:spPr>
           <a:xfrm>
-            <a:off x="1463040" y="4937760"/>
-            <a:ext cx="10058400" cy="640080"/>
+            <a:off x="1463040" y="4876800"/>
+            <a:ext cx="10058400" cy="624840"/>
           </a:xfrm>
           <a:prstGeom prst="rect">
             <a:avLst/>
@@ -13024,7 +13860,7 @@
         </p:nvSpPr>
         <p:spPr>
           <a:xfrm>
-            <a:off x="822960" y="5715000"/>
+            <a:off x="822960" y="5638800"/>
             <a:ext cx="438912" cy="438912"/>
           </a:xfrm>
           <a:prstGeom prst="ellipse">
@@ -13044,7 +13880,7 @@
         </p:nvSpPr>
         <p:spPr>
           <a:xfrm>
-            <a:off x="822960" y="5715000"/>
+            <a:off x="822960" y="5638800"/>
             <a:ext cx="438912" cy="438912"/>
           </a:xfrm>
           <a:prstGeom prst="rect">
@@ -13083,8 +13919,8 @@
         </p:nvSpPr>
         <p:spPr>
           <a:xfrm>
-            <a:off x="1463040" y="5623560"/>
-            <a:ext cx="10058400" cy="640080"/>
+            <a:off x="1463040" y="5547360"/>
+            <a:ext cx="10058400" cy="624840"/>
           </a:xfrm>
           <a:prstGeom prst="rect">
             <a:avLst/>
@@ -13186,7 +14022,7 @@
                 <a:ea typeface="Calibri" pitchFamily="34" charset="-122"/>
                 <a:cs typeface="Calibri" pitchFamily="34" charset="-120"/>
               </a:rPr>
-              <a:t>27</a:t>
+              <a:t>28</a:t>
             </a:r>
             <a:endParaRPr lang="en-US" sz="900" dirty="0"/>
           </a:p>

--- a/slides/CSC336-Lecture-04-Semantic-HTML-and-Forms.pptx
+++ b/slides/CSC336-Lecture-04-Semantic-HTML-and-Forms.pptx
@@ -3459,79 +3459,44 @@
       </p:sp>
       <p:sp>
         <p:nvSpPr>
-          <p:cNvPr id="6" name="Text 4"/>
+          <p:cNvPr id="8" name="cuinotes-footer-mark"/>
           <p:cNvSpPr txBox="1"/>
           <p:nvPr/>
         </p:nvSpPr>
         <p:spPr>
           <a:xfrm>
-            <a:off x="640080" y="6446520"/>
-            <a:ext cx="8686800" cy="292608"/>
+            <a:off x="9951720" y="6455664"/>
+            <a:ext cx="2011680" cy="292608"/>
           </a:xfrm>
           <a:prstGeom prst="rect">
             <a:avLst/>
           </a:prstGeom>
           <a:noFill/>
-          <a:ln/>
-        </p:spPr>
-        <p:txBody>
-          <a:bodyPr wrap="square" lIns="0" tIns="0" rIns="0" bIns="0" rtlCol="0" anchor="ctr"/>
-          <a:lstStyle/>
-          <a:p>
-            <a:pPr algn="l" indent="0" marL="0">
-              <a:buNone/>
-            </a:pPr>
-            <a:r>
-              <a:rPr lang="en-US" sz="900" dirty="0">
-                <a:solidFill>
-                  <a:srgbClr val="9AA3D8"/>
-                </a:solidFill>
-                <a:latin typeface="Calibri" pitchFamily="34" charset="0"/>
-                <a:ea typeface="Calibri" pitchFamily="34" charset="-122"/>
-                <a:cs typeface="Calibri" pitchFamily="34" charset="-120"/>
-              </a:rPr>
-              <a:t>Usman Akram  •  COMSATS University Islamabad</a:t>
-            </a:r>
-            <a:endParaRPr lang="en-US" sz="900" dirty="0"/>
-          </a:p>
-        </p:txBody>
-      </p:sp>
-      <p:sp>
-        <p:nvSpPr>
-          <p:cNvPr id="7" name="Text 5"/>
-          <p:cNvSpPr txBox="1"/>
-          <p:nvPr/>
-        </p:nvSpPr>
-        <p:spPr>
-          <a:xfrm>
-            <a:off x="11155680" y="6446520"/>
-            <a:ext cx="457200" cy="292608"/>
-          </a:xfrm>
-          <a:prstGeom prst="rect">
-            <a:avLst/>
-          </a:prstGeom>
-          <a:noFill/>
-          <a:ln/>
-        </p:spPr>
-        <p:txBody>
-          <a:bodyPr wrap="square" lIns="0" tIns="0" rIns="0" bIns="0" rtlCol="0" anchor="ctr"/>
-          <a:lstStyle/>
-          <a:p>
-            <a:pPr algn="r" indent="0" marL="0">
-              <a:buNone/>
-            </a:pPr>
-            <a:r>
-              <a:rPr lang="en-US" sz="900" dirty="0">
-                <a:solidFill>
-                  <a:srgbClr val="9AA3D8"/>
-                </a:solidFill>
-                <a:latin typeface="Calibri" pitchFamily="34" charset="0"/>
-                <a:ea typeface="Calibri" pitchFamily="34" charset="-122"/>
-                <a:cs typeface="Calibri" pitchFamily="34" charset="-120"/>
-              </a:rPr>
-              <a:t>1</a:t>
-            </a:r>
-            <a:endParaRPr lang="en-US" sz="900" dirty="0"/>
+        </p:spPr>
+        <p:txBody>
+          <a:bodyPr wrap="none" lIns="0" rIns="0" tIns="0" bIns="0">
+            <a:spAutoFit/>
+          </a:bodyPr>
+          <a:lstStyle/>
+          <a:p>
+            <a:pPr algn="r"/>
+            <a:r>
+              <a:rPr sz="1000">
+                <a:solidFill>
+                  <a:srgbClr val="8A939B"/>
+                </a:solidFill>
+                <a:hlinkClick r:id="rId3"/>
+              </a:rPr>
+              <a:t>cuinotes.com</a:t>
+            </a:r>
+            <a:r>
+              <a:rPr sz="1000">
+                <a:solidFill>
+                  <a:srgbClr val="8A939B"/>
+                </a:solidFill>
+              </a:rPr>
+              <a:t>  ·  1</a:t>
+            </a:r>
           </a:p>
         </p:txBody>
       </p:sp>
@@ -3666,6 +3631,10 @@
           </a:solidFill>
           <a:ln/>
         </p:spPr>
+        <p:txBody>
+          <a:bodyPr/>
+          <a:p/>
+        </p:txBody>
       </p:sp>
       <p:sp>
         <p:nvSpPr>
@@ -3880,6 +3849,10 @@
             </a:outerShdw>
           </a:effectLst>
         </p:spPr>
+        <p:txBody>
+          <a:bodyPr/>
+          <a:p/>
+        </p:txBody>
       </p:sp>
       <p:pic>
         <p:nvPicPr>
@@ -3907,79 +3880,44 @@
       </p:pic>
       <p:sp>
         <p:nvSpPr>
-          <p:cNvPr id="8" name="Text 5"/>
+          <p:cNvPr id="10" name="cuinotes-footer-mark"/>
           <p:cNvSpPr txBox="1"/>
           <p:nvPr/>
         </p:nvSpPr>
         <p:spPr>
           <a:xfrm>
-            <a:off x="640080" y="6446520"/>
-            <a:ext cx="8686800" cy="292608"/>
+            <a:off x="9951720" y="6455664"/>
+            <a:ext cx="2011680" cy="292608"/>
           </a:xfrm>
           <a:prstGeom prst="rect">
             <a:avLst/>
           </a:prstGeom>
           <a:noFill/>
-          <a:ln/>
-        </p:spPr>
-        <p:txBody>
-          <a:bodyPr wrap="square" lIns="0" tIns="0" rIns="0" bIns="0" rtlCol="0" anchor="ctr"/>
-          <a:lstStyle/>
-          <a:p>
-            <a:pPr algn="l" indent="0" marL="0">
-              <a:buNone/>
-            </a:pPr>
-            <a:r>
-              <a:rPr lang="en-US" sz="900" dirty="0">
-                <a:solidFill>
-                  <a:srgbClr val="5D5D72"/>
-                </a:solidFill>
-                <a:latin typeface="Calibri" pitchFamily="34" charset="0"/>
-                <a:ea typeface="Calibri" pitchFamily="34" charset="-122"/>
-                <a:cs typeface="Calibri" pitchFamily="34" charset="-120"/>
-              </a:rPr>
-              <a:t>Usman Akram  •  COMSATS University Islamabad</a:t>
-            </a:r>
-            <a:endParaRPr lang="en-US" sz="900" dirty="0"/>
-          </a:p>
-        </p:txBody>
-      </p:sp>
-      <p:sp>
-        <p:nvSpPr>
-          <p:cNvPr id="9" name="Text 6"/>
-          <p:cNvSpPr txBox="1"/>
-          <p:nvPr/>
-        </p:nvSpPr>
-        <p:spPr>
-          <a:xfrm>
-            <a:off x="11155680" y="6446520"/>
-            <a:ext cx="457200" cy="292608"/>
-          </a:xfrm>
-          <a:prstGeom prst="rect">
-            <a:avLst/>
-          </a:prstGeom>
-          <a:noFill/>
-          <a:ln/>
-        </p:spPr>
-        <p:txBody>
-          <a:bodyPr wrap="square" lIns="0" tIns="0" rIns="0" bIns="0" rtlCol="0" anchor="ctr"/>
-          <a:lstStyle/>
-          <a:p>
-            <a:pPr algn="r" indent="0" marL="0">
-              <a:buNone/>
-            </a:pPr>
-            <a:r>
-              <a:rPr lang="en-US" sz="900" dirty="0">
-                <a:solidFill>
-                  <a:srgbClr val="5D5D72"/>
-                </a:solidFill>
-                <a:latin typeface="Calibri" pitchFamily="34" charset="0"/>
-                <a:ea typeface="Calibri" pitchFamily="34" charset="-122"/>
-                <a:cs typeface="Calibri" pitchFamily="34" charset="-120"/>
-              </a:rPr>
-              <a:t>10</a:t>
-            </a:r>
-            <a:endParaRPr lang="en-US" sz="900" dirty="0"/>
+        </p:spPr>
+        <p:txBody>
+          <a:bodyPr wrap="none" lIns="0" rIns="0" tIns="0" bIns="0">
+            <a:spAutoFit/>
+          </a:bodyPr>
+          <a:lstStyle/>
+          <a:p>
+            <a:pPr algn="r"/>
+            <a:r>
+              <a:rPr sz="1000">
+                <a:solidFill>
+                  <a:srgbClr val="8A939B"/>
+                </a:solidFill>
+                <a:hlinkClick r:id="rId4"/>
+              </a:rPr>
+              <a:t>cuinotes.com</a:t>
+            </a:r>
+            <a:r>
+              <a:rPr sz="1000">
+                <a:solidFill>
+                  <a:srgbClr val="8A939B"/>
+                </a:solidFill>
+              </a:rPr>
+              <a:t>  ·  10</a:t>
+            </a:r>
           </a:p>
         </p:txBody>
       </p:sp>
@@ -4114,6 +4052,10 @@
           </a:solidFill>
           <a:ln/>
         </p:spPr>
+        <p:txBody>
+          <a:bodyPr/>
+          <a:p/>
+        </p:txBody>
       </p:sp>
       <p:sp>
         <p:nvSpPr>
@@ -4194,6 +4136,10 @@
             <a:tailEnd type="triangle"/>
           </a:ln>
         </p:spPr>
+        <p:txBody>
+          <a:bodyPr/>
+          <a:p/>
+        </p:txBody>
       </p:sp>
       <p:sp>
         <p:nvSpPr>
@@ -4216,6 +4162,10 @@
           </a:solidFill>
           <a:ln/>
         </p:spPr>
+        <p:txBody>
+          <a:bodyPr/>
+          <a:p/>
+        </p:txBody>
       </p:sp>
       <p:sp>
         <p:nvSpPr>
@@ -4296,6 +4246,10 @@
             <a:tailEnd type="triangle"/>
           </a:ln>
         </p:spPr>
+        <p:txBody>
+          <a:bodyPr/>
+          <a:p/>
+        </p:txBody>
       </p:sp>
       <p:sp>
         <p:nvSpPr>
@@ -4318,6 +4272,10 @@
           </a:solidFill>
           <a:ln/>
         </p:spPr>
+        <p:txBody>
+          <a:bodyPr/>
+          <a:p/>
+        </p:txBody>
       </p:sp>
       <p:sp>
         <p:nvSpPr>
@@ -4415,6 +4373,10 @@
             <a:tailEnd type="triangle"/>
           </a:ln>
         </p:spPr>
+        <p:txBody>
+          <a:bodyPr/>
+          <a:p/>
+        </p:txBody>
       </p:sp>
       <p:sp>
         <p:nvSpPr>
@@ -4437,6 +4399,10 @@
           </a:solidFill>
           <a:ln/>
         </p:spPr>
+        <p:txBody>
+          <a:bodyPr/>
+          <a:p/>
+        </p:txBody>
       </p:sp>
       <p:sp>
         <p:nvSpPr>
@@ -4534,6 +4500,10 @@
             <a:tailEnd type="triangle"/>
           </a:ln>
         </p:spPr>
+        <p:txBody>
+          <a:bodyPr/>
+          <a:p/>
+        </p:txBody>
       </p:sp>
       <p:sp>
         <p:nvSpPr>
@@ -4556,6 +4526,10 @@
           </a:solidFill>
           <a:ln/>
         </p:spPr>
+        <p:txBody>
+          <a:bodyPr/>
+          <a:p/>
+        </p:txBody>
       </p:sp>
       <p:sp>
         <p:nvSpPr>
@@ -4654,79 +4628,44 @@
       </p:sp>
       <p:sp>
         <p:nvSpPr>
-          <p:cNvPr id="19" name="Text 17"/>
+          <p:cNvPr id="21" name="cuinotes-footer-mark"/>
           <p:cNvSpPr txBox="1"/>
           <p:nvPr/>
         </p:nvSpPr>
         <p:spPr>
           <a:xfrm>
-            <a:off x="640080" y="6446520"/>
-            <a:ext cx="8686800" cy="292608"/>
+            <a:off x="9951720" y="6455664"/>
+            <a:ext cx="2011680" cy="292608"/>
           </a:xfrm>
           <a:prstGeom prst="rect">
             <a:avLst/>
           </a:prstGeom>
           <a:noFill/>
-          <a:ln/>
-        </p:spPr>
-        <p:txBody>
-          <a:bodyPr wrap="square" lIns="0" tIns="0" rIns="0" bIns="0" rtlCol="0" anchor="ctr"/>
-          <a:lstStyle/>
-          <a:p>
-            <a:pPr algn="l" indent="0" marL="0">
-              <a:buNone/>
-            </a:pPr>
-            <a:r>
-              <a:rPr lang="en-US" sz="900" dirty="0">
-                <a:solidFill>
-                  <a:srgbClr val="5D5D72"/>
-                </a:solidFill>
-                <a:latin typeface="Calibri" pitchFamily="34" charset="0"/>
-                <a:ea typeface="Calibri" pitchFamily="34" charset="-122"/>
-                <a:cs typeface="Calibri" pitchFamily="34" charset="-120"/>
-              </a:rPr>
-              <a:t>Usman Akram  •  COMSATS University Islamabad</a:t>
-            </a:r>
-            <a:endParaRPr lang="en-US" sz="900" dirty="0"/>
-          </a:p>
-        </p:txBody>
-      </p:sp>
-      <p:sp>
-        <p:nvSpPr>
-          <p:cNvPr id="20" name="Text 18"/>
-          <p:cNvSpPr txBox="1"/>
-          <p:nvPr/>
-        </p:nvSpPr>
-        <p:spPr>
-          <a:xfrm>
-            <a:off x="11155680" y="6446520"/>
-            <a:ext cx="457200" cy="292608"/>
-          </a:xfrm>
-          <a:prstGeom prst="rect">
-            <a:avLst/>
-          </a:prstGeom>
-          <a:noFill/>
-          <a:ln/>
-        </p:spPr>
-        <p:txBody>
-          <a:bodyPr wrap="square" lIns="0" tIns="0" rIns="0" bIns="0" rtlCol="0" anchor="ctr"/>
-          <a:lstStyle/>
-          <a:p>
-            <a:pPr algn="r" indent="0" marL="0">
-              <a:buNone/>
-            </a:pPr>
-            <a:r>
-              <a:rPr lang="en-US" sz="900" dirty="0">
-                <a:solidFill>
-                  <a:srgbClr val="5D5D72"/>
-                </a:solidFill>
-                <a:latin typeface="Calibri" pitchFamily="34" charset="0"/>
-                <a:ea typeface="Calibri" pitchFamily="34" charset="-122"/>
-                <a:cs typeface="Calibri" pitchFamily="34" charset="-120"/>
-              </a:rPr>
-              <a:t>11</a:t>
-            </a:r>
-            <a:endParaRPr lang="en-US" sz="900" dirty="0"/>
+        </p:spPr>
+        <p:txBody>
+          <a:bodyPr wrap="none" lIns="0" rIns="0" tIns="0" bIns="0">
+            <a:spAutoFit/>
+          </a:bodyPr>
+          <a:lstStyle/>
+          <a:p>
+            <a:pPr algn="r"/>
+            <a:r>
+              <a:rPr sz="1000">
+                <a:solidFill>
+                  <a:srgbClr val="8A939B"/>
+                </a:solidFill>
+                <a:hlinkClick r:id="rId3"/>
+              </a:rPr>
+              <a:t>cuinotes.com</a:t>
+            </a:r>
+            <a:r>
+              <a:rPr sz="1000">
+                <a:solidFill>
+                  <a:srgbClr val="8A939B"/>
+                </a:solidFill>
+              </a:rPr>
+              <a:t>  ·  11</a:t>
+            </a:r>
           </a:p>
         </p:txBody>
       </p:sp>
@@ -5424,79 +5363,44 @@
       </p:graphicFrame>
       <p:sp>
         <p:nvSpPr>
-          <p:cNvPr id="5" name="Text 2"/>
+          <p:cNvPr id="14" name="cuinotes-footer-mark"/>
           <p:cNvSpPr txBox="1"/>
           <p:nvPr/>
         </p:nvSpPr>
         <p:spPr>
           <a:xfrm>
-            <a:off x="640080" y="6446520"/>
-            <a:ext cx="8686800" cy="292608"/>
+            <a:off x="9951720" y="6455664"/>
+            <a:ext cx="2011680" cy="292608"/>
           </a:xfrm>
           <a:prstGeom prst="rect">
             <a:avLst/>
           </a:prstGeom>
           <a:noFill/>
-          <a:ln/>
-        </p:spPr>
-        <p:txBody>
-          <a:bodyPr wrap="square" lIns="0" tIns="0" rIns="0" bIns="0" rtlCol="0" anchor="ctr"/>
-          <a:lstStyle/>
-          <a:p>
-            <a:pPr algn="l" indent="0" marL="0">
-              <a:buNone/>
-            </a:pPr>
-            <a:r>
-              <a:rPr lang="en-US" sz="900" dirty="0">
-                <a:solidFill>
-                  <a:srgbClr val="5D5D72"/>
-                </a:solidFill>
-                <a:latin typeface="Calibri" pitchFamily="34" charset="0"/>
-                <a:ea typeface="Calibri" pitchFamily="34" charset="-122"/>
-                <a:cs typeface="Calibri" pitchFamily="34" charset="-120"/>
-              </a:rPr>
-              <a:t>Usman Akram  •  COMSATS University Islamabad</a:t>
-            </a:r>
-            <a:endParaRPr lang="en-US" sz="900" dirty="0"/>
-          </a:p>
-        </p:txBody>
-      </p:sp>
-      <p:sp>
-        <p:nvSpPr>
-          <p:cNvPr id="6" name="Text 3"/>
-          <p:cNvSpPr txBox="1"/>
-          <p:nvPr/>
-        </p:nvSpPr>
-        <p:spPr>
-          <a:xfrm>
-            <a:off x="11155680" y="6446520"/>
-            <a:ext cx="457200" cy="292608"/>
-          </a:xfrm>
-          <a:prstGeom prst="rect">
-            <a:avLst/>
-          </a:prstGeom>
-          <a:noFill/>
-          <a:ln/>
-        </p:spPr>
-        <p:txBody>
-          <a:bodyPr wrap="square" lIns="0" tIns="0" rIns="0" bIns="0" rtlCol="0" anchor="ctr"/>
-          <a:lstStyle/>
-          <a:p>
-            <a:pPr algn="r" indent="0" marL="0">
-              <a:buNone/>
-            </a:pPr>
-            <a:r>
-              <a:rPr lang="en-US" sz="900" dirty="0">
-                <a:solidFill>
-                  <a:srgbClr val="5D5D72"/>
-                </a:solidFill>
-                <a:latin typeface="Calibri" pitchFamily="34" charset="0"/>
-                <a:ea typeface="Calibri" pitchFamily="34" charset="-122"/>
-                <a:cs typeface="Calibri" pitchFamily="34" charset="-120"/>
-              </a:rPr>
-              <a:t>12</a:t>
-            </a:r>
-            <a:endParaRPr lang="en-US" sz="900" dirty="0"/>
+        </p:spPr>
+        <p:txBody>
+          <a:bodyPr wrap="none" lIns="0" rIns="0" tIns="0" bIns="0">
+            <a:spAutoFit/>
+          </a:bodyPr>
+          <a:lstStyle/>
+          <a:p>
+            <a:pPr algn="r"/>
+            <a:r>
+              <a:rPr sz="1000">
+                <a:solidFill>
+                  <a:srgbClr val="8A939B"/>
+                </a:solidFill>
+                <a:hlinkClick r:id="rId3"/>
+              </a:rPr>
+              <a:t>cuinotes.com</a:t>
+            </a:r>
+            <a:r>
+              <a:rPr sz="1000">
+                <a:solidFill>
+                  <a:srgbClr val="8A939B"/>
+                </a:solidFill>
+              </a:rPr>
+              <a:t>  ·  12</a:t>
+            </a:r>
           </a:p>
         </p:txBody>
       </p:sp>
@@ -5636,6 +5540,10 @@
             <a:prstDash val="solid"/>
           </a:ln>
         </p:spPr>
+        <p:txBody>
+          <a:bodyPr/>
+          <a:p/>
+        </p:txBody>
       </p:sp>
       <p:sp>
         <p:nvSpPr>
@@ -5717,79 +5625,44 @@
       </p:sp>
       <p:sp>
         <p:nvSpPr>
-          <p:cNvPr id="7" name="Text 5"/>
+          <p:cNvPr id="9" name="cuinotes-footer-mark"/>
           <p:cNvSpPr txBox="1"/>
           <p:nvPr/>
         </p:nvSpPr>
         <p:spPr>
           <a:xfrm>
-            <a:off x="640080" y="6446520"/>
-            <a:ext cx="8686800" cy="292608"/>
+            <a:off x="9951720" y="6455664"/>
+            <a:ext cx="2011680" cy="292608"/>
           </a:xfrm>
           <a:prstGeom prst="rect">
             <a:avLst/>
           </a:prstGeom>
           <a:noFill/>
-          <a:ln/>
-        </p:spPr>
-        <p:txBody>
-          <a:bodyPr wrap="square" lIns="0" tIns="0" rIns="0" bIns="0" rtlCol="0" anchor="ctr"/>
-          <a:lstStyle/>
-          <a:p>
-            <a:pPr algn="l" indent="0" marL="0">
-              <a:buNone/>
-            </a:pPr>
-            <a:r>
-              <a:rPr lang="en-US" sz="900" dirty="0">
-                <a:solidFill>
-                  <a:srgbClr val="5D5D72"/>
-                </a:solidFill>
-                <a:latin typeface="Calibri" pitchFamily="34" charset="0"/>
-                <a:ea typeface="Calibri" pitchFamily="34" charset="-122"/>
-                <a:cs typeface="Calibri" pitchFamily="34" charset="-120"/>
-              </a:rPr>
-              <a:t>Usman Akram  •  COMSATS University Islamabad</a:t>
-            </a:r>
-            <a:endParaRPr lang="en-US" sz="900" dirty="0"/>
-          </a:p>
-        </p:txBody>
-      </p:sp>
-      <p:sp>
-        <p:nvSpPr>
-          <p:cNvPr id="8" name="Text 6"/>
-          <p:cNvSpPr txBox="1"/>
-          <p:nvPr/>
-        </p:nvSpPr>
-        <p:spPr>
-          <a:xfrm>
-            <a:off x="11155680" y="6446520"/>
-            <a:ext cx="457200" cy="292608"/>
-          </a:xfrm>
-          <a:prstGeom prst="rect">
-            <a:avLst/>
-          </a:prstGeom>
-          <a:noFill/>
-          <a:ln/>
-        </p:spPr>
-        <p:txBody>
-          <a:bodyPr wrap="square" lIns="0" tIns="0" rIns="0" bIns="0" rtlCol="0" anchor="ctr"/>
-          <a:lstStyle/>
-          <a:p>
-            <a:pPr algn="r" indent="0" marL="0">
-              <a:buNone/>
-            </a:pPr>
-            <a:r>
-              <a:rPr lang="en-US" sz="900" dirty="0">
-                <a:solidFill>
-                  <a:srgbClr val="5D5D72"/>
-                </a:solidFill>
-                <a:latin typeface="Calibri" pitchFamily="34" charset="0"/>
-                <a:ea typeface="Calibri" pitchFamily="34" charset="-122"/>
-                <a:cs typeface="Calibri" pitchFamily="34" charset="-120"/>
-              </a:rPr>
-              <a:t>13</a:t>
-            </a:r>
-            <a:endParaRPr lang="en-US" sz="900" dirty="0"/>
+        </p:spPr>
+        <p:txBody>
+          <a:bodyPr wrap="none" lIns="0" rIns="0" tIns="0" bIns="0">
+            <a:spAutoFit/>
+          </a:bodyPr>
+          <a:lstStyle/>
+          <a:p>
+            <a:pPr algn="r"/>
+            <a:r>
+              <a:rPr sz="1000">
+                <a:solidFill>
+                  <a:srgbClr val="8A939B"/>
+                </a:solidFill>
+                <a:hlinkClick r:id="rId3"/>
+              </a:rPr>
+              <a:t>cuinotes.com</a:t>
+            </a:r>
+            <a:r>
+              <a:rPr sz="1000">
+                <a:solidFill>
+                  <a:srgbClr val="8A939B"/>
+                </a:solidFill>
+              </a:rPr>
+              <a:t>  ·  13</a:t>
+            </a:r>
           </a:p>
         </p:txBody>
       </p:sp>
@@ -5963,6 +5836,10 @@
           </a:solidFill>
           <a:ln/>
         </p:spPr>
+        <p:txBody>
+          <a:bodyPr/>
+          <a:p/>
+        </p:txBody>
       </p:sp>
       <p:sp>
         <p:nvSpPr>
@@ -6119,6 +5996,10 @@
             </a:outerShdw>
           </a:effectLst>
         </p:spPr>
+        <p:txBody>
+          <a:bodyPr/>
+          <a:p/>
+        </p:txBody>
       </p:sp>
       <p:pic>
         <p:nvPicPr>
@@ -6146,79 +6027,44 @@
       </p:pic>
       <p:sp>
         <p:nvSpPr>
-          <p:cNvPr id="9" name="Text 6"/>
+          <p:cNvPr id="11" name="cuinotes-footer-mark"/>
           <p:cNvSpPr txBox="1"/>
           <p:nvPr/>
         </p:nvSpPr>
         <p:spPr>
           <a:xfrm>
-            <a:off x="640080" y="6446520"/>
-            <a:ext cx="8686800" cy="292608"/>
+            <a:off x="9951720" y="6455664"/>
+            <a:ext cx="2011680" cy="292608"/>
           </a:xfrm>
           <a:prstGeom prst="rect">
             <a:avLst/>
           </a:prstGeom>
           <a:noFill/>
-          <a:ln/>
-        </p:spPr>
-        <p:txBody>
-          <a:bodyPr wrap="square" lIns="0" tIns="0" rIns="0" bIns="0" rtlCol="0" anchor="ctr"/>
-          <a:lstStyle/>
-          <a:p>
-            <a:pPr algn="l" indent="0" marL="0">
-              <a:buNone/>
-            </a:pPr>
-            <a:r>
-              <a:rPr lang="en-US" sz="900" dirty="0">
-                <a:solidFill>
-                  <a:srgbClr val="5D5D72"/>
-                </a:solidFill>
-                <a:latin typeface="Calibri" pitchFamily="34" charset="0"/>
-                <a:ea typeface="Calibri" pitchFamily="34" charset="-122"/>
-                <a:cs typeface="Calibri" pitchFamily="34" charset="-120"/>
-              </a:rPr>
-              <a:t>Usman Akram  •  COMSATS University Islamabad</a:t>
-            </a:r>
-            <a:endParaRPr lang="en-US" sz="900" dirty="0"/>
-          </a:p>
-        </p:txBody>
-      </p:sp>
-      <p:sp>
-        <p:nvSpPr>
-          <p:cNvPr id="10" name="Text 7"/>
-          <p:cNvSpPr txBox="1"/>
-          <p:nvPr/>
-        </p:nvSpPr>
-        <p:spPr>
-          <a:xfrm>
-            <a:off x="11155680" y="6446520"/>
-            <a:ext cx="457200" cy="292608"/>
-          </a:xfrm>
-          <a:prstGeom prst="rect">
-            <a:avLst/>
-          </a:prstGeom>
-          <a:noFill/>
-          <a:ln/>
-        </p:spPr>
-        <p:txBody>
-          <a:bodyPr wrap="square" lIns="0" tIns="0" rIns="0" bIns="0" rtlCol="0" anchor="ctr"/>
-          <a:lstStyle/>
-          <a:p>
-            <a:pPr algn="r" indent="0" marL="0">
-              <a:buNone/>
-            </a:pPr>
-            <a:r>
-              <a:rPr lang="en-US" sz="900" dirty="0">
-                <a:solidFill>
-                  <a:srgbClr val="5D5D72"/>
-                </a:solidFill>
-                <a:latin typeface="Calibri" pitchFamily="34" charset="0"/>
-                <a:ea typeface="Calibri" pitchFamily="34" charset="-122"/>
-                <a:cs typeface="Calibri" pitchFamily="34" charset="-120"/>
-              </a:rPr>
-              <a:t>14</a:t>
-            </a:r>
-            <a:endParaRPr lang="en-US" sz="900" dirty="0"/>
+        </p:spPr>
+        <p:txBody>
+          <a:bodyPr wrap="none" lIns="0" rIns="0" tIns="0" bIns="0">
+            <a:spAutoFit/>
+          </a:bodyPr>
+          <a:lstStyle/>
+          <a:p>
+            <a:pPr algn="r"/>
+            <a:r>
+              <a:rPr sz="1000">
+                <a:solidFill>
+                  <a:srgbClr val="8A939B"/>
+                </a:solidFill>
+                <a:hlinkClick r:id="rId4"/>
+              </a:rPr>
+              <a:t>cuinotes.com</a:t>
+            </a:r>
+            <a:r>
+              <a:rPr sz="1000">
+                <a:solidFill>
+                  <a:srgbClr val="8A939B"/>
+                </a:solidFill>
+              </a:rPr>
+              <a:t>  ·  14</a:t>
+            </a:r>
           </a:p>
         </p:txBody>
       </p:sp>
@@ -7330,79 +7176,44 @@
       </p:graphicFrame>
       <p:sp>
         <p:nvSpPr>
-          <p:cNvPr id="5" name="Text 2"/>
+          <p:cNvPr id="17" name="cuinotes-footer-mark"/>
           <p:cNvSpPr txBox="1"/>
           <p:nvPr/>
         </p:nvSpPr>
         <p:spPr>
           <a:xfrm>
-            <a:off x="640080" y="6446520"/>
-            <a:ext cx="8686800" cy="292608"/>
+            <a:off x="9951720" y="6455664"/>
+            <a:ext cx="2011680" cy="292608"/>
           </a:xfrm>
           <a:prstGeom prst="rect">
             <a:avLst/>
           </a:prstGeom>
           <a:noFill/>
-          <a:ln/>
-        </p:spPr>
-        <p:txBody>
-          <a:bodyPr wrap="square" lIns="0" tIns="0" rIns="0" bIns="0" rtlCol="0" anchor="ctr"/>
-          <a:lstStyle/>
-          <a:p>
-            <a:pPr algn="l" indent="0" marL="0">
-              <a:buNone/>
-            </a:pPr>
-            <a:r>
-              <a:rPr lang="en-US" sz="900" dirty="0">
-                <a:solidFill>
-                  <a:srgbClr val="5D5D72"/>
-                </a:solidFill>
-                <a:latin typeface="Calibri" pitchFamily="34" charset="0"/>
-                <a:ea typeface="Calibri" pitchFamily="34" charset="-122"/>
-                <a:cs typeface="Calibri" pitchFamily="34" charset="-120"/>
-              </a:rPr>
-              <a:t>Usman Akram  •  COMSATS University Islamabad</a:t>
-            </a:r>
-            <a:endParaRPr lang="en-US" sz="900" dirty="0"/>
-          </a:p>
-        </p:txBody>
-      </p:sp>
-      <p:sp>
-        <p:nvSpPr>
-          <p:cNvPr id="6" name="Text 3"/>
-          <p:cNvSpPr txBox="1"/>
-          <p:nvPr/>
-        </p:nvSpPr>
-        <p:spPr>
-          <a:xfrm>
-            <a:off x="11155680" y="6446520"/>
-            <a:ext cx="457200" cy="292608"/>
-          </a:xfrm>
-          <a:prstGeom prst="rect">
-            <a:avLst/>
-          </a:prstGeom>
-          <a:noFill/>
-          <a:ln/>
-        </p:spPr>
-        <p:txBody>
-          <a:bodyPr wrap="square" lIns="0" tIns="0" rIns="0" bIns="0" rtlCol="0" anchor="ctr"/>
-          <a:lstStyle/>
-          <a:p>
-            <a:pPr algn="r" indent="0" marL="0">
-              <a:buNone/>
-            </a:pPr>
-            <a:r>
-              <a:rPr lang="en-US" sz="900" dirty="0">
-                <a:solidFill>
-                  <a:srgbClr val="5D5D72"/>
-                </a:solidFill>
-                <a:latin typeface="Calibri" pitchFamily="34" charset="0"/>
-                <a:ea typeface="Calibri" pitchFamily="34" charset="-122"/>
-                <a:cs typeface="Calibri" pitchFamily="34" charset="-120"/>
-              </a:rPr>
-              <a:t>15</a:t>
-            </a:r>
-            <a:endParaRPr lang="en-US" sz="900" dirty="0"/>
+        </p:spPr>
+        <p:txBody>
+          <a:bodyPr wrap="none" lIns="0" rIns="0" tIns="0" bIns="0">
+            <a:spAutoFit/>
+          </a:bodyPr>
+          <a:lstStyle/>
+          <a:p>
+            <a:pPr algn="r"/>
+            <a:r>
+              <a:rPr sz="1000">
+                <a:solidFill>
+                  <a:srgbClr val="8A939B"/>
+                </a:solidFill>
+                <a:hlinkClick r:id="rId3"/>
+              </a:rPr>
+              <a:t>cuinotes.com</a:t>
+            </a:r>
+            <a:r>
+              <a:rPr sz="1000">
+                <a:solidFill>
+                  <a:srgbClr val="8A939B"/>
+                </a:solidFill>
+              </a:rPr>
+              <a:t>  ·  15</a:t>
+            </a:r>
           </a:p>
         </p:txBody>
       </p:sp>
@@ -7537,6 +7348,10 @@
           </a:solidFill>
           <a:ln/>
         </p:spPr>
+        <p:txBody>
+          <a:bodyPr/>
+          <a:p/>
+        </p:txBody>
       </p:sp>
       <p:sp>
         <p:nvSpPr>
@@ -7802,79 +7617,44 @@
       </p:sp>
       <p:sp>
         <p:nvSpPr>
-          <p:cNvPr id="6" name="Text 4"/>
+          <p:cNvPr id="8" name="cuinotes-footer-mark"/>
           <p:cNvSpPr txBox="1"/>
           <p:nvPr/>
         </p:nvSpPr>
         <p:spPr>
           <a:xfrm>
-            <a:off x="640080" y="6446520"/>
-            <a:ext cx="8686800" cy="292608"/>
+            <a:off x="9951720" y="6455664"/>
+            <a:ext cx="2011680" cy="292608"/>
           </a:xfrm>
           <a:prstGeom prst="rect">
             <a:avLst/>
           </a:prstGeom>
           <a:noFill/>
-          <a:ln/>
-        </p:spPr>
-        <p:txBody>
-          <a:bodyPr wrap="square" lIns="0" tIns="0" rIns="0" bIns="0" rtlCol="0" anchor="ctr"/>
-          <a:lstStyle/>
-          <a:p>
-            <a:pPr algn="l" indent="0" marL="0">
-              <a:buNone/>
-            </a:pPr>
-            <a:r>
-              <a:rPr lang="en-US" sz="900" dirty="0">
-                <a:solidFill>
-                  <a:srgbClr val="5D5D72"/>
-                </a:solidFill>
-                <a:latin typeface="Calibri" pitchFamily="34" charset="0"/>
-                <a:ea typeface="Calibri" pitchFamily="34" charset="-122"/>
-                <a:cs typeface="Calibri" pitchFamily="34" charset="-120"/>
-              </a:rPr>
-              <a:t>Usman Akram  •  COMSATS University Islamabad</a:t>
-            </a:r>
-            <a:endParaRPr lang="en-US" sz="900" dirty="0"/>
-          </a:p>
-        </p:txBody>
-      </p:sp>
-      <p:sp>
-        <p:nvSpPr>
-          <p:cNvPr id="7" name="Text 5"/>
-          <p:cNvSpPr txBox="1"/>
-          <p:nvPr/>
-        </p:nvSpPr>
-        <p:spPr>
-          <a:xfrm>
-            <a:off x="11155680" y="6446520"/>
-            <a:ext cx="457200" cy="292608"/>
-          </a:xfrm>
-          <a:prstGeom prst="rect">
-            <a:avLst/>
-          </a:prstGeom>
-          <a:noFill/>
-          <a:ln/>
-        </p:spPr>
-        <p:txBody>
-          <a:bodyPr wrap="square" lIns="0" tIns="0" rIns="0" bIns="0" rtlCol="0" anchor="ctr"/>
-          <a:lstStyle/>
-          <a:p>
-            <a:pPr algn="r" indent="0" marL="0">
-              <a:buNone/>
-            </a:pPr>
-            <a:r>
-              <a:rPr lang="en-US" sz="900" dirty="0">
-                <a:solidFill>
-                  <a:srgbClr val="5D5D72"/>
-                </a:solidFill>
-                <a:latin typeface="Calibri" pitchFamily="34" charset="0"/>
-                <a:ea typeface="Calibri" pitchFamily="34" charset="-122"/>
-                <a:cs typeface="Calibri" pitchFamily="34" charset="-120"/>
-              </a:rPr>
-              <a:t>16</a:t>
-            </a:r>
-            <a:endParaRPr lang="en-US" sz="900" dirty="0"/>
+        </p:spPr>
+        <p:txBody>
+          <a:bodyPr wrap="none" lIns="0" rIns="0" tIns="0" bIns="0">
+            <a:spAutoFit/>
+          </a:bodyPr>
+          <a:lstStyle/>
+          <a:p>
+            <a:pPr algn="r"/>
+            <a:r>
+              <a:rPr sz="1000">
+                <a:solidFill>
+                  <a:srgbClr val="8A939B"/>
+                </a:solidFill>
+                <a:hlinkClick r:id="rId3"/>
+              </a:rPr>
+              <a:t>cuinotes.com</a:t>
+            </a:r>
+            <a:r>
+              <a:rPr sz="1000">
+                <a:solidFill>
+                  <a:srgbClr val="8A939B"/>
+                </a:solidFill>
+              </a:rPr>
+              <a:t>  ·  16</a:t>
+            </a:r>
           </a:p>
         </p:txBody>
       </p:sp>
@@ -8060,6 +7840,10 @@
             </a:outerShdw>
           </a:effectLst>
         </p:spPr>
+        <p:txBody>
+          <a:bodyPr/>
+          <a:p/>
+        </p:txBody>
       </p:sp>
       <p:pic>
         <p:nvPicPr>
@@ -8087,79 +7871,44 @@
       </p:pic>
       <p:sp>
         <p:nvSpPr>
-          <p:cNvPr id="7" name="Text 4"/>
+          <p:cNvPr id="9" name="cuinotes-footer-mark"/>
           <p:cNvSpPr txBox="1"/>
           <p:nvPr/>
         </p:nvSpPr>
         <p:spPr>
           <a:xfrm>
-            <a:off x="640080" y="6446520"/>
-            <a:ext cx="8686800" cy="292608"/>
+            <a:off x="9951720" y="6455664"/>
+            <a:ext cx="2011680" cy="292608"/>
           </a:xfrm>
           <a:prstGeom prst="rect">
             <a:avLst/>
           </a:prstGeom>
           <a:noFill/>
-          <a:ln/>
-        </p:spPr>
-        <p:txBody>
-          <a:bodyPr wrap="square" lIns="0" tIns="0" rIns="0" bIns="0" rtlCol="0" anchor="ctr"/>
-          <a:lstStyle/>
-          <a:p>
-            <a:pPr algn="l" indent="0" marL="0">
-              <a:buNone/>
-            </a:pPr>
-            <a:r>
-              <a:rPr lang="en-US" sz="900" dirty="0">
-                <a:solidFill>
-                  <a:srgbClr val="5D5D72"/>
-                </a:solidFill>
-                <a:latin typeface="Calibri" pitchFamily="34" charset="0"/>
-                <a:ea typeface="Calibri" pitchFamily="34" charset="-122"/>
-                <a:cs typeface="Calibri" pitchFamily="34" charset="-120"/>
-              </a:rPr>
-              <a:t>Usman Akram  •  COMSATS University Islamabad</a:t>
-            </a:r>
-            <a:endParaRPr lang="en-US" sz="900" dirty="0"/>
-          </a:p>
-        </p:txBody>
-      </p:sp>
-      <p:sp>
-        <p:nvSpPr>
-          <p:cNvPr id="8" name="Text 5"/>
-          <p:cNvSpPr txBox="1"/>
-          <p:nvPr/>
-        </p:nvSpPr>
-        <p:spPr>
-          <a:xfrm>
-            <a:off x="11155680" y="6446520"/>
-            <a:ext cx="457200" cy="292608"/>
-          </a:xfrm>
-          <a:prstGeom prst="rect">
-            <a:avLst/>
-          </a:prstGeom>
-          <a:noFill/>
-          <a:ln/>
-        </p:spPr>
-        <p:txBody>
-          <a:bodyPr wrap="square" lIns="0" tIns="0" rIns="0" bIns="0" rtlCol="0" anchor="ctr"/>
-          <a:lstStyle/>
-          <a:p>
-            <a:pPr algn="r" indent="0" marL="0">
-              <a:buNone/>
-            </a:pPr>
-            <a:r>
-              <a:rPr lang="en-US" sz="900" dirty="0">
-                <a:solidFill>
-                  <a:srgbClr val="5D5D72"/>
-                </a:solidFill>
-                <a:latin typeface="Calibri" pitchFamily="34" charset="0"/>
-                <a:ea typeface="Calibri" pitchFamily="34" charset="-122"/>
-                <a:cs typeface="Calibri" pitchFamily="34" charset="-120"/>
-              </a:rPr>
-              <a:t>17</a:t>
-            </a:r>
-            <a:endParaRPr lang="en-US" sz="900" dirty="0"/>
+        </p:spPr>
+        <p:txBody>
+          <a:bodyPr wrap="none" lIns="0" rIns="0" tIns="0" bIns="0">
+            <a:spAutoFit/>
+          </a:bodyPr>
+          <a:lstStyle/>
+          <a:p>
+            <a:pPr algn="r"/>
+            <a:r>
+              <a:rPr sz="1000">
+                <a:solidFill>
+                  <a:srgbClr val="8A939B"/>
+                </a:solidFill>
+                <a:hlinkClick r:id="rId4"/>
+              </a:rPr>
+              <a:t>cuinotes.com</a:t>
+            </a:r>
+            <a:r>
+              <a:rPr sz="1000">
+                <a:solidFill>
+                  <a:srgbClr val="8A939B"/>
+                </a:solidFill>
+              </a:rPr>
+              <a:t>  ·  17</a:t>
+            </a:r>
           </a:p>
         </p:txBody>
       </p:sp>
@@ -8292,6 +8041,10 @@
           </a:solidFill>
           <a:ln/>
         </p:spPr>
+        <p:txBody>
+          <a:bodyPr/>
+          <a:p/>
+        </p:txBody>
       </p:sp>
       <p:sp>
         <p:nvSpPr>
@@ -8351,6 +8104,10 @@
           </a:solidFill>
           <a:ln/>
         </p:spPr>
+        <p:txBody>
+          <a:bodyPr/>
+          <a:p/>
+        </p:txBody>
       </p:sp>
       <p:sp>
         <p:nvSpPr>
@@ -8410,6 +8167,10 @@
           </a:solidFill>
           <a:ln/>
         </p:spPr>
+        <p:txBody>
+          <a:bodyPr/>
+          <a:p/>
+        </p:txBody>
       </p:sp>
       <p:sp>
         <p:nvSpPr>
@@ -8452,79 +8213,44 @@
       </p:sp>
       <p:sp>
         <p:nvSpPr>
-          <p:cNvPr id="10" name="Text 8"/>
+          <p:cNvPr id="12" name="cuinotes-footer-mark"/>
           <p:cNvSpPr txBox="1"/>
           <p:nvPr/>
         </p:nvSpPr>
         <p:spPr>
           <a:xfrm>
-            <a:off x="640080" y="6446520"/>
-            <a:ext cx="8686800" cy="292608"/>
+            <a:off x="9951720" y="6455664"/>
+            <a:ext cx="2011680" cy="292608"/>
           </a:xfrm>
           <a:prstGeom prst="rect">
             <a:avLst/>
           </a:prstGeom>
           <a:noFill/>
-          <a:ln/>
-        </p:spPr>
-        <p:txBody>
-          <a:bodyPr wrap="square" lIns="0" tIns="0" rIns="0" bIns="0" rtlCol="0" anchor="ctr"/>
-          <a:lstStyle/>
-          <a:p>
-            <a:pPr algn="l" indent="0" marL="0">
-              <a:buNone/>
-            </a:pPr>
-            <a:r>
-              <a:rPr lang="en-US" sz="900" dirty="0">
-                <a:solidFill>
-                  <a:srgbClr val="5D5D72"/>
-                </a:solidFill>
-                <a:latin typeface="Calibri" pitchFamily="34" charset="0"/>
-                <a:ea typeface="Calibri" pitchFamily="34" charset="-122"/>
-                <a:cs typeface="Calibri" pitchFamily="34" charset="-120"/>
-              </a:rPr>
-              <a:t>Usman Akram  •  COMSATS University Islamabad</a:t>
-            </a:r>
-            <a:endParaRPr lang="en-US" sz="900" dirty="0"/>
-          </a:p>
-        </p:txBody>
-      </p:sp>
-      <p:sp>
-        <p:nvSpPr>
-          <p:cNvPr id="11" name="Text 9"/>
-          <p:cNvSpPr txBox="1"/>
-          <p:nvPr/>
-        </p:nvSpPr>
-        <p:spPr>
-          <a:xfrm>
-            <a:off x="11155680" y="6446520"/>
-            <a:ext cx="457200" cy="292608"/>
-          </a:xfrm>
-          <a:prstGeom prst="rect">
-            <a:avLst/>
-          </a:prstGeom>
-          <a:noFill/>
-          <a:ln/>
-        </p:spPr>
-        <p:txBody>
-          <a:bodyPr wrap="square" lIns="0" tIns="0" rIns="0" bIns="0" rtlCol="0" anchor="ctr"/>
-          <a:lstStyle/>
-          <a:p>
-            <a:pPr algn="r" indent="0" marL="0">
-              <a:buNone/>
-            </a:pPr>
-            <a:r>
-              <a:rPr lang="en-US" sz="900" dirty="0">
-                <a:solidFill>
-                  <a:srgbClr val="5D5D72"/>
-                </a:solidFill>
-                <a:latin typeface="Calibri" pitchFamily="34" charset="0"/>
-                <a:ea typeface="Calibri" pitchFamily="34" charset="-122"/>
-                <a:cs typeface="Calibri" pitchFamily="34" charset="-120"/>
-              </a:rPr>
-              <a:t>18</a:t>
-            </a:r>
-            <a:endParaRPr lang="en-US" sz="900" dirty="0"/>
+        </p:spPr>
+        <p:txBody>
+          <a:bodyPr wrap="none" lIns="0" rIns="0" tIns="0" bIns="0">
+            <a:spAutoFit/>
+          </a:bodyPr>
+          <a:lstStyle/>
+          <a:p>
+            <a:pPr algn="r"/>
+            <a:r>
+              <a:rPr sz="1000">
+                <a:solidFill>
+                  <a:srgbClr val="8A939B"/>
+                </a:solidFill>
+                <a:hlinkClick r:id="rId3"/>
+              </a:rPr>
+              <a:t>cuinotes.com</a:t>
+            </a:r>
+            <a:r>
+              <a:rPr sz="1000">
+                <a:solidFill>
+                  <a:srgbClr val="8A939B"/>
+                </a:solidFill>
+              </a:rPr>
+              <a:t>  ·  18</a:t>
+            </a:r>
           </a:p>
         </p:txBody>
       </p:sp>
@@ -8659,6 +8385,10 @@
           </a:solidFill>
           <a:ln/>
         </p:spPr>
+        <p:txBody>
+          <a:bodyPr/>
+          <a:p/>
+        </p:txBody>
       </p:sp>
       <p:sp>
         <p:nvSpPr>
@@ -8861,79 +8591,44 @@
       </p:sp>
       <p:sp>
         <p:nvSpPr>
-          <p:cNvPr id="7" name="Text 5"/>
+          <p:cNvPr id="9" name="cuinotes-footer-mark"/>
           <p:cNvSpPr txBox="1"/>
           <p:nvPr/>
         </p:nvSpPr>
         <p:spPr>
           <a:xfrm>
-            <a:off x="640080" y="6446520"/>
-            <a:ext cx="8686800" cy="292608"/>
+            <a:off x="9951720" y="6455664"/>
+            <a:ext cx="2011680" cy="292608"/>
           </a:xfrm>
           <a:prstGeom prst="rect">
             <a:avLst/>
           </a:prstGeom>
           <a:noFill/>
-          <a:ln/>
-        </p:spPr>
-        <p:txBody>
-          <a:bodyPr wrap="square" lIns="0" tIns="0" rIns="0" bIns="0" rtlCol="0" anchor="ctr"/>
-          <a:lstStyle/>
-          <a:p>
-            <a:pPr algn="l" indent="0" marL="0">
-              <a:buNone/>
-            </a:pPr>
-            <a:r>
-              <a:rPr lang="en-US" sz="900" dirty="0">
-                <a:solidFill>
-                  <a:srgbClr val="5D5D72"/>
-                </a:solidFill>
-                <a:latin typeface="Calibri" pitchFamily="34" charset="0"/>
-                <a:ea typeface="Calibri" pitchFamily="34" charset="-122"/>
-                <a:cs typeface="Calibri" pitchFamily="34" charset="-120"/>
-              </a:rPr>
-              <a:t>Usman Akram  •  COMSATS University Islamabad</a:t>
-            </a:r>
-            <a:endParaRPr lang="en-US" sz="900" dirty="0"/>
-          </a:p>
-        </p:txBody>
-      </p:sp>
-      <p:sp>
-        <p:nvSpPr>
-          <p:cNvPr id="8" name="Text 6"/>
-          <p:cNvSpPr txBox="1"/>
-          <p:nvPr/>
-        </p:nvSpPr>
-        <p:spPr>
-          <a:xfrm>
-            <a:off x="11155680" y="6446520"/>
-            <a:ext cx="457200" cy="292608"/>
-          </a:xfrm>
-          <a:prstGeom prst="rect">
-            <a:avLst/>
-          </a:prstGeom>
-          <a:noFill/>
-          <a:ln/>
-        </p:spPr>
-        <p:txBody>
-          <a:bodyPr wrap="square" lIns="0" tIns="0" rIns="0" bIns="0" rtlCol="0" anchor="ctr"/>
-          <a:lstStyle/>
-          <a:p>
-            <a:pPr algn="r" indent="0" marL="0">
-              <a:buNone/>
-            </a:pPr>
-            <a:r>
-              <a:rPr lang="en-US" sz="900" dirty="0">
-                <a:solidFill>
-                  <a:srgbClr val="5D5D72"/>
-                </a:solidFill>
-                <a:latin typeface="Calibri" pitchFamily="34" charset="0"/>
-                <a:ea typeface="Calibri" pitchFamily="34" charset="-122"/>
-                <a:cs typeface="Calibri" pitchFamily="34" charset="-120"/>
-              </a:rPr>
-              <a:t>19</a:t>
-            </a:r>
-            <a:endParaRPr lang="en-US" sz="900" dirty="0"/>
+        </p:spPr>
+        <p:txBody>
+          <a:bodyPr wrap="none" lIns="0" rIns="0" tIns="0" bIns="0">
+            <a:spAutoFit/>
+          </a:bodyPr>
+          <a:lstStyle/>
+          <a:p>
+            <a:pPr algn="r"/>
+            <a:r>
+              <a:rPr sz="1000">
+                <a:solidFill>
+                  <a:srgbClr val="8A939B"/>
+                </a:solidFill>
+                <a:hlinkClick r:id="rId3"/>
+              </a:rPr>
+              <a:t>cuinotes.com</a:t>
+            </a:r>
+            <a:r>
+              <a:rPr sz="1000">
+                <a:solidFill>
+                  <a:srgbClr val="8A939B"/>
+                </a:solidFill>
+              </a:rPr>
+              <a:t>  ·  19</a:t>
+            </a:r>
           </a:p>
         </p:txBody>
       </p:sp>
@@ -9066,6 +8761,10 @@
           </a:solidFill>
           <a:ln/>
         </p:spPr>
+        <p:txBody>
+          <a:bodyPr/>
+          <a:p/>
+        </p:txBody>
       </p:sp>
       <p:sp>
         <p:nvSpPr>
@@ -9164,6 +8863,10 @@
           </a:solidFill>
           <a:ln/>
         </p:spPr>
+        <p:txBody>
+          <a:bodyPr/>
+          <a:p/>
+        </p:txBody>
       </p:sp>
       <p:sp>
         <p:nvSpPr>
@@ -9262,6 +8965,10 @@
           </a:solidFill>
           <a:ln/>
         </p:spPr>
+        <p:txBody>
+          <a:bodyPr/>
+          <a:p/>
+        </p:txBody>
       </p:sp>
       <p:sp>
         <p:nvSpPr>
@@ -9360,6 +9067,10 @@
           </a:solidFill>
           <a:ln/>
         </p:spPr>
+        <p:txBody>
+          <a:bodyPr/>
+          <a:p/>
+        </p:txBody>
       </p:sp>
       <p:sp>
         <p:nvSpPr>
@@ -9458,6 +9169,10 @@
           </a:solidFill>
           <a:ln/>
         </p:spPr>
+        <p:txBody>
+          <a:bodyPr/>
+          <a:p/>
+        </p:txBody>
       </p:sp>
       <p:sp>
         <p:nvSpPr>
@@ -9556,6 +9271,10 @@
           </a:solidFill>
           <a:ln/>
         </p:spPr>
+        <p:txBody>
+          <a:bodyPr/>
+          <a:p/>
+        </p:txBody>
       </p:sp>
       <p:sp>
         <p:nvSpPr>
@@ -9637,79 +9356,44 @@
       </p:sp>
       <p:sp>
         <p:nvSpPr>
-          <p:cNvPr id="22" name="Text 20"/>
+          <p:cNvPr id="24" name="cuinotes-footer-mark"/>
           <p:cNvSpPr txBox="1"/>
           <p:nvPr/>
         </p:nvSpPr>
         <p:spPr>
           <a:xfrm>
-            <a:off x="640080" y="6446520"/>
-            <a:ext cx="8686800" cy="292608"/>
+            <a:off x="9951720" y="6455664"/>
+            <a:ext cx="2011680" cy="292608"/>
           </a:xfrm>
           <a:prstGeom prst="rect">
             <a:avLst/>
           </a:prstGeom>
           <a:noFill/>
-          <a:ln/>
-        </p:spPr>
-        <p:txBody>
-          <a:bodyPr wrap="square" lIns="0" tIns="0" rIns="0" bIns="0" rtlCol="0" anchor="ctr"/>
-          <a:lstStyle/>
-          <a:p>
-            <a:pPr algn="l" indent="0" marL="0">
-              <a:buNone/>
-            </a:pPr>
-            <a:r>
-              <a:rPr lang="en-US" sz="900" dirty="0">
-                <a:solidFill>
-                  <a:srgbClr val="5D5D72"/>
-                </a:solidFill>
-                <a:latin typeface="Calibri" pitchFamily="34" charset="0"/>
-                <a:ea typeface="Calibri" pitchFamily="34" charset="-122"/>
-                <a:cs typeface="Calibri" pitchFamily="34" charset="-120"/>
-              </a:rPr>
-              <a:t>Usman Akram  •  COMSATS University Islamabad</a:t>
-            </a:r>
-            <a:endParaRPr lang="en-US" sz="900" dirty="0"/>
-          </a:p>
-        </p:txBody>
-      </p:sp>
-      <p:sp>
-        <p:nvSpPr>
-          <p:cNvPr id="23" name="Text 21"/>
-          <p:cNvSpPr txBox="1"/>
-          <p:nvPr/>
-        </p:nvSpPr>
-        <p:spPr>
-          <a:xfrm>
-            <a:off x="11155680" y="6446520"/>
-            <a:ext cx="457200" cy="292608"/>
-          </a:xfrm>
-          <a:prstGeom prst="rect">
-            <a:avLst/>
-          </a:prstGeom>
-          <a:noFill/>
-          <a:ln/>
-        </p:spPr>
-        <p:txBody>
-          <a:bodyPr wrap="square" lIns="0" tIns="0" rIns="0" bIns="0" rtlCol="0" anchor="ctr"/>
-          <a:lstStyle/>
-          <a:p>
-            <a:pPr algn="r" indent="0" marL="0">
-              <a:buNone/>
-            </a:pPr>
-            <a:r>
-              <a:rPr lang="en-US" sz="900" dirty="0">
-                <a:solidFill>
-                  <a:srgbClr val="5D5D72"/>
-                </a:solidFill>
-                <a:latin typeface="Calibri" pitchFamily="34" charset="0"/>
-                <a:ea typeface="Calibri" pitchFamily="34" charset="-122"/>
-                <a:cs typeface="Calibri" pitchFamily="34" charset="-120"/>
-              </a:rPr>
-              <a:t>2</a:t>
-            </a:r>
-            <a:endParaRPr lang="en-US" sz="900" dirty="0"/>
+        </p:spPr>
+        <p:txBody>
+          <a:bodyPr wrap="none" lIns="0" rIns="0" tIns="0" bIns="0">
+            <a:spAutoFit/>
+          </a:bodyPr>
+          <a:lstStyle/>
+          <a:p>
+            <a:pPr algn="r"/>
+            <a:r>
+              <a:rPr sz="1000">
+                <a:solidFill>
+                  <a:srgbClr val="8A939B"/>
+                </a:solidFill>
+                <a:hlinkClick r:id="rId3"/>
+              </a:rPr>
+              <a:t>cuinotes.com</a:t>
+            </a:r>
+            <a:r>
+              <a:rPr sz="1000">
+                <a:solidFill>
+                  <a:srgbClr val="8A939B"/>
+                </a:solidFill>
+              </a:rPr>
+              <a:t>  ·  2</a:t>
+            </a:r>
           </a:p>
         </p:txBody>
       </p:sp>
@@ -9842,6 +9526,10 @@
           </a:solidFill>
           <a:ln/>
         </p:spPr>
+        <p:txBody>
+          <a:bodyPr/>
+          <a:p/>
+        </p:txBody>
       </p:sp>
       <p:sp>
         <p:nvSpPr>
@@ -9940,6 +9628,10 @@
           </a:solidFill>
           <a:ln/>
         </p:spPr>
+        <p:txBody>
+          <a:bodyPr/>
+          <a:p/>
+        </p:txBody>
       </p:sp>
       <p:sp>
         <p:nvSpPr>
@@ -10038,6 +9730,10 @@
           </a:solidFill>
           <a:ln/>
         </p:spPr>
+        <p:txBody>
+          <a:bodyPr/>
+          <a:p/>
+        </p:txBody>
       </p:sp>
       <p:sp>
         <p:nvSpPr>
@@ -10119,79 +9815,44 @@
       </p:sp>
       <p:sp>
         <p:nvSpPr>
-          <p:cNvPr id="13" name="Text 11"/>
+          <p:cNvPr id="15" name="cuinotes-footer-mark"/>
           <p:cNvSpPr txBox="1"/>
           <p:nvPr/>
         </p:nvSpPr>
         <p:spPr>
           <a:xfrm>
-            <a:off x="640080" y="6446520"/>
-            <a:ext cx="8686800" cy="292608"/>
+            <a:off x="9951720" y="6455664"/>
+            <a:ext cx="2011680" cy="292608"/>
           </a:xfrm>
           <a:prstGeom prst="rect">
             <a:avLst/>
           </a:prstGeom>
           <a:noFill/>
-          <a:ln/>
-        </p:spPr>
-        <p:txBody>
-          <a:bodyPr wrap="square" lIns="0" tIns="0" rIns="0" bIns="0" rtlCol="0" anchor="ctr"/>
-          <a:lstStyle/>
-          <a:p>
-            <a:pPr algn="l" indent="0" marL="0">
-              <a:buNone/>
-            </a:pPr>
-            <a:r>
-              <a:rPr lang="en-US" sz="900" dirty="0">
-                <a:solidFill>
-                  <a:srgbClr val="5D5D72"/>
-                </a:solidFill>
-                <a:latin typeface="Calibri" pitchFamily="34" charset="0"/>
-                <a:ea typeface="Calibri" pitchFamily="34" charset="-122"/>
-                <a:cs typeface="Calibri" pitchFamily="34" charset="-120"/>
-              </a:rPr>
-              <a:t>Usman Akram  •  COMSATS University Islamabad</a:t>
-            </a:r>
-            <a:endParaRPr lang="en-US" sz="900" dirty="0"/>
-          </a:p>
-        </p:txBody>
-      </p:sp>
-      <p:sp>
-        <p:nvSpPr>
-          <p:cNvPr id="14" name="Text 12"/>
-          <p:cNvSpPr txBox="1"/>
-          <p:nvPr/>
-        </p:nvSpPr>
-        <p:spPr>
-          <a:xfrm>
-            <a:off x="11155680" y="6446520"/>
-            <a:ext cx="457200" cy="292608"/>
-          </a:xfrm>
-          <a:prstGeom prst="rect">
-            <a:avLst/>
-          </a:prstGeom>
-          <a:noFill/>
-          <a:ln/>
-        </p:spPr>
-        <p:txBody>
-          <a:bodyPr wrap="square" lIns="0" tIns="0" rIns="0" bIns="0" rtlCol="0" anchor="ctr"/>
-          <a:lstStyle/>
-          <a:p>
-            <a:pPr algn="r" indent="0" marL="0">
-              <a:buNone/>
-            </a:pPr>
-            <a:r>
-              <a:rPr lang="en-US" sz="900" dirty="0">
-                <a:solidFill>
-                  <a:srgbClr val="5D5D72"/>
-                </a:solidFill>
-                <a:latin typeface="Calibri" pitchFamily="34" charset="0"/>
-                <a:ea typeface="Calibri" pitchFamily="34" charset="-122"/>
-                <a:cs typeface="Calibri" pitchFamily="34" charset="-120"/>
-              </a:rPr>
-              <a:t>20</a:t>
-            </a:r>
-            <a:endParaRPr lang="en-US" sz="900" dirty="0"/>
+        </p:spPr>
+        <p:txBody>
+          <a:bodyPr wrap="none" lIns="0" rIns="0" tIns="0" bIns="0">
+            <a:spAutoFit/>
+          </a:bodyPr>
+          <a:lstStyle/>
+          <a:p>
+            <a:pPr algn="r"/>
+            <a:r>
+              <a:rPr sz="1000">
+                <a:solidFill>
+                  <a:srgbClr val="8A939B"/>
+                </a:solidFill>
+                <a:hlinkClick r:id="rId3"/>
+              </a:rPr>
+              <a:t>cuinotes.com</a:t>
+            </a:r>
+            <a:r>
+              <a:rPr sz="1000">
+                <a:solidFill>
+                  <a:srgbClr val="8A939B"/>
+                </a:solidFill>
+              </a:rPr>
+              <a:t>  ·  20</a:t>
+            </a:r>
           </a:p>
         </p:txBody>
       </p:sp>
@@ -10326,6 +9987,10 @@
           </a:solidFill>
           <a:ln/>
         </p:spPr>
+        <p:txBody>
+          <a:bodyPr/>
+          <a:p/>
+        </p:txBody>
       </p:sp>
       <p:sp>
         <p:nvSpPr>
@@ -10460,79 +10125,44 @@
       </p:sp>
       <p:sp>
         <p:nvSpPr>
-          <p:cNvPr id="6" name="Text 4"/>
+          <p:cNvPr id="8" name="cuinotes-footer-mark"/>
           <p:cNvSpPr txBox="1"/>
           <p:nvPr/>
         </p:nvSpPr>
         <p:spPr>
           <a:xfrm>
-            <a:off x="640080" y="6446520"/>
-            <a:ext cx="8686800" cy="292608"/>
+            <a:off x="9951720" y="6455664"/>
+            <a:ext cx="2011680" cy="292608"/>
           </a:xfrm>
           <a:prstGeom prst="rect">
             <a:avLst/>
           </a:prstGeom>
           <a:noFill/>
-          <a:ln/>
-        </p:spPr>
-        <p:txBody>
-          <a:bodyPr wrap="square" lIns="0" tIns="0" rIns="0" bIns="0" rtlCol="0" anchor="ctr"/>
-          <a:lstStyle/>
-          <a:p>
-            <a:pPr algn="l" indent="0" marL="0">
-              <a:buNone/>
-            </a:pPr>
-            <a:r>
-              <a:rPr lang="en-US" sz="900" dirty="0">
-                <a:solidFill>
-                  <a:srgbClr val="5D5D72"/>
-                </a:solidFill>
-                <a:latin typeface="Calibri" pitchFamily="34" charset="0"/>
-                <a:ea typeface="Calibri" pitchFamily="34" charset="-122"/>
-                <a:cs typeface="Calibri" pitchFamily="34" charset="-120"/>
-              </a:rPr>
-              <a:t>Usman Akram  •  COMSATS University Islamabad</a:t>
-            </a:r>
-            <a:endParaRPr lang="en-US" sz="900" dirty="0"/>
-          </a:p>
-        </p:txBody>
-      </p:sp>
-      <p:sp>
-        <p:nvSpPr>
-          <p:cNvPr id="7" name="Text 5"/>
-          <p:cNvSpPr txBox="1"/>
-          <p:nvPr/>
-        </p:nvSpPr>
-        <p:spPr>
-          <a:xfrm>
-            <a:off x="11155680" y="6446520"/>
-            <a:ext cx="457200" cy="292608"/>
-          </a:xfrm>
-          <a:prstGeom prst="rect">
-            <a:avLst/>
-          </a:prstGeom>
-          <a:noFill/>
-          <a:ln/>
-        </p:spPr>
-        <p:txBody>
-          <a:bodyPr wrap="square" lIns="0" tIns="0" rIns="0" bIns="0" rtlCol="0" anchor="ctr"/>
-          <a:lstStyle/>
-          <a:p>
-            <a:pPr algn="r" indent="0" marL="0">
-              <a:buNone/>
-            </a:pPr>
-            <a:r>
-              <a:rPr lang="en-US" sz="900" dirty="0">
-                <a:solidFill>
-                  <a:srgbClr val="5D5D72"/>
-                </a:solidFill>
-                <a:latin typeface="Calibri" pitchFamily="34" charset="0"/>
-                <a:ea typeface="Calibri" pitchFamily="34" charset="-122"/>
-                <a:cs typeface="Calibri" pitchFamily="34" charset="-120"/>
-              </a:rPr>
-              <a:t>21</a:t>
-            </a:r>
-            <a:endParaRPr lang="en-US" sz="900" dirty="0"/>
+        </p:spPr>
+        <p:txBody>
+          <a:bodyPr wrap="none" lIns="0" rIns="0" tIns="0" bIns="0">
+            <a:spAutoFit/>
+          </a:bodyPr>
+          <a:lstStyle/>
+          <a:p>
+            <a:pPr algn="r"/>
+            <a:r>
+              <a:rPr sz="1000">
+                <a:solidFill>
+                  <a:srgbClr val="8A939B"/>
+                </a:solidFill>
+                <a:hlinkClick r:id="rId3"/>
+              </a:rPr>
+              <a:t>cuinotes.com</a:t>
+            </a:r>
+            <a:r>
+              <a:rPr sz="1000">
+                <a:solidFill>
+                  <a:srgbClr val="8A939B"/>
+                </a:solidFill>
+              </a:rPr>
+              <a:t>  ·  21</a:t>
+            </a:r>
           </a:p>
         </p:txBody>
       </p:sp>
@@ -10718,6 +10348,10 @@
             </a:outerShdw>
           </a:effectLst>
         </p:spPr>
+        <p:txBody>
+          <a:bodyPr/>
+          <a:p/>
+        </p:txBody>
       </p:sp>
       <p:pic>
         <p:nvPicPr>
@@ -10815,6 +10449,10 @@
             </a:outerShdw>
           </a:effectLst>
         </p:spPr>
+        <p:txBody>
+          <a:bodyPr/>
+          <a:p/>
+        </p:txBody>
       </p:sp>
       <p:pic>
         <p:nvPicPr>
@@ -10842,79 +10480,44 @@
       </p:pic>
       <p:sp>
         <p:nvSpPr>
-          <p:cNvPr id="10" name="Text 6"/>
+          <p:cNvPr id="12" name="cuinotes-footer-mark"/>
           <p:cNvSpPr txBox="1"/>
           <p:nvPr/>
         </p:nvSpPr>
         <p:spPr>
           <a:xfrm>
-            <a:off x="640080" y="6446520"/>
-            <a:ext cx="8686800" cy="292608"/>
+            <a:off x="9951720" y="6455664"/>
+            <a:ext cx="2011680" cy="292608"/>
           </a:xfrm>
           <a:prstGeom prst="rect">
             <a:avLst/>
           </a:prstGeom>
           <a:noFill/>
-          <a:ln/>
-        </p:spPr>
-        <p:txBody>
-          <a:bodyPr wrap="square" lIns="0" tIns="0" rIns="0" bIns="0" rtlCol="0" anchor="ctr"/>
-          <a:lstStyle/>
-          <a:p>
-            <a:pPr algn="l" indent="0" marL="0">
-              <a:buNone/>
-            </a:pPr>
-            <a:r>
-              <a:rPr lang="en-US" sz="900" dirty="0">
-                <a:solidFill>
-                  <a:srgbClr val="5D5D72"/>
-                </a:solidFill>
-                <a:latin typeface="Calibri" pitchFamily="34" charset="0"/>
-                <a:ea typeface="Calibri" pitchFamily="34" charset="-122"/>
-                <a:cs typeface="Calibri" pitchFamily="34" charset="-120"/>
-              </a:rPr>
-              <a:t>Usman Akram  •  COMSATS University Islamabad</a:t>
-            </a:r>
-            <a:endParaRPr lang="en-US" sz="900" dirty="0"/>
-          </a:p>
-        </p:txBody>
-      </p:sp>
-      <p:sp>
-        <p:nvSpPr>
-          <p:cNvPr id="11" name="Text 7"/>
-          <p:cNvSpPr txBox="1"/>
-          <p:nvPr/>
-        </p:nvSpPr>
-        <p:spPr>
-          <a:xfrm>
-            <a:off x="11155680" y="6446520"/>
-            <a:ext cx="457200" cy="292608"/>
-          </a:xfrm>
-          <a:prstGeom prst="rect">
-            <a:avLst/>
-          </a:prstGeom>
-          <a:noFill/>
-          <a:ln/>
-        </p:spPr>
-        <p:txBody>
-          <a:bodyPr wrap="square" lIns="0" tIns="0" rIns="0" bIns="0" rtlCol="0" anchor="ctr"/>
-          <a:lstStyle/>
-          <a:p>
-            <a:pPr algn="r" indent="0" marL="0">
-              <a:buNone/>
-            </a:pPr>
-            <a:r>
-              <a:rPr lang="en-US" sz="900" dirty="0">
-                <a:solidFill>
-                  <a:srgbClr val="5D5D72"/>
-                </a:solidFill>
-                <a:latin typeface="Calibri" pitchFamily="34" charset="0"/>
-                <a:ea typeface="Calibri" pitchFamily="34" charset="-122"/>
-                <a:cs typeface="Calibri" pitchFamily="34" charset="-120"/>
-              </a:rPr>
-              <a:t>22</a:t>
-            </a:r>
-            <a:endParaRPr lang="en-US" sz="900" dirty="0"/>
+        </p:spPr>
+        <p:txBody>
+          <a:bodyPr wrap="none" lIns="0" rIns="0" tIns="0" bIns="0">
+            <a:spAutoFit/>
+          </a:bodyPr>
+          <a:lstStyle/>
+          <a:p>
+            <a:pPr algn="r"/>
+            <a:r>
+              <a:rPr sz="1000">
+                <a:solidFill>
+                  <a:srgbClr val="8A939B"/>
+                </a:solidFill>
+                <a:hlinkClick r:id="rId5"/>
+              </a:rPr>
+              <a:t>cuinotes.com</a:t>
+            </a:r>
+            <a:r>
+              <a:rPr sz="1000">
+                <a:solidFill>
+                  <a:srgbClr val="8A939B"/>
+                </a:solidFill>
+              </a:rPr>
+              <a:t>  ·  22</a:t>
+            </a:r>
           </a:p>
         </p:txBody>
       </p:sp>
@@ -11088,6 +10691,10 @@
           </a:solidFill>
           <a:ln/>
         </p:spPr>
+        <p:txBody>
+          <a:bodyPr/>
+          <a:p/>
+        </p:txBody>
       </p:sp>
       <p:sp>
         <p:nvSpPr>
@@ -11204,6 +10811,10 @@
             </a:outerShdw>
           </a:effectLst>
         </p:spPr>
+        <p:txBody>
+          <a:bodyPr/>
+          <a:p/>
+        </p:txBody>
       </p:sp>
       <p:pic>
         <p:nvPicPr>
@@ -11231,79 +10842,44 @@
       </p:pic>
       <p:sp>
         <p:nvSpPr>
-          <p:cNvPr id="9" name="Text 6"/>
+          <p:cNvPr id="11" name="cuinotes-footer-mark"/>
           <p:cNvSpPr txBox="1"/>
           <p:nvPr/>
         </p:nvSpPr>
         <p:spPr>
           <a:xfrm>
-            <a:off x="640080" y="6446520"/>
-            <a:ext cx="8686800" cy="292608"/>
+            <a:off x="9951720" y="6455664"/>
+            <a:ext cx="2011680" cy="292608"/>
           </a:xfrm>
           <a:prstGeom prst="rect">
             <a:avLst/>
           </a:prstGeom>
           <a:noFill/>
-          <a:ln/>
-        </p:spPr>
-        <p:txBody>
-          <a:bodyPr wrap="square" lIns="0" tIns="0" rIns="0" bIns="0" rtlCol="0" anchor="ctr"/>
-          <a:lstStyle/>
-          <a:p>
-            <a:pPr algn="l" indent="0" marL="0">
-              <a:buNone/>
-            </a:pPr>
-            <a:r>
-              <a:rPr lang="en-US" sz="900" dirty="0">
-                <a:solidFill>
-                  <a:srgbClr val="5D5D72"/>
-                </a:solidFill>
-                <a:latin typeface="Calibri" pitchFamily="34" charset="0"/>
-                <a:ea typeface="Calibri" pitchFamily="34" charset="-122"/>
-                <a:cs typeface="Calibri" pitchFamily="34" charset="-120"/>
-              </a:rPr>
-              <a:t>Usman Akram  •  COMSATS University Islamabad</a:t>
-            </a:r>
-            <a:endParaRPr lang="en-US" sz="900" dirty="0"/>
-          </a:p>
-        </p:txBody>
-      </p:sp>
-      <p:sp>
-        <p:nvSpPr>
-          <p:cNvPr id="10" name="Text 7"/>
-          <p:cNvSpPr txBox="1"/>
-          <p:nvPr/>
-        </p:nvSpPr>
-        <p:spPr>
-          <a:xfrm>
-            <a:off x="11155680" y="6446520"/>
-            <a:ext cx="457200" cy="292608"/>
-          </a:xfrm>
-          <a:prstGeom prst="rect">
-            <a:avLst/>
-          </a:prstGeom>
-          <a:noFill/>
-          <a:ln/>
-        </p:spPr>
-        <p:txBody>
-          <a:bodyPr wrap="square" lIns="0" tIns="0" rIns="0" bIns="0" rtlCol="0" anchor="ctr"/>
-          <a:lstStyle/>
-          <a:p>
-            <a:pPr algn="r" indent="0" marL="0">
-              <a:buNone/>
-            </a:pPr>
-            <a:r>
-              <a:rPr lang="en-US" sz="900" dirty="0">
-                <a:solidFill>
-                  <a:srgbClr val="5D5D72"/>
-                </a:solidFill>
-                <a:latin typeface="Calibri" pitchFamily="34" charset="0"/>
-                <a:ea typeface="Calibri" pitchFamily="34" charset="-122"/>
-                <a:cs typeface="Calibri" pitchFamily="34" charset="-120"/>
-              </a:rPr>
-              <a:t>23</a:t>
-            </a:r>
-            <a:endParaRPr lang="en-US" sz="900" dirty="0"/>
+        </p:spPr>
+        <p:txBody>
+          <a:bodyPr wrap="none" lIns="0" rIns="0" tIns="0" bIns="0">
+            <a:spAutoFit/>
+          </a:bodyPr>
+          <a:lstStyle/>
+          <a:p>
+            <a:pPr algn="r"/>
+            <a:r>
+              <a:rPr sz="1000">
+                <a:solidFill>
+                  <a:srgbClr val="8A939B"/>
+                </a:solidFill>
+                <a:hlinkClick r:id="rId4"/>
+              </a:rPr>
+              <a:t>cuinotes.com</a:t>
+            </a:r>
+            <a:r>
+              <a:rPr sz="1000">
+                <a:solidFill>
+                  <a:srgbClr val="8A939B"/>
+                </a:solidFill>
+              </a:rPr>
+              <a:t>  ·  23</a:t>
+            </a:r>
           </a:p>
         </p:txBody>
       </p:sp>
@@ -12139,79 +11715,44 @@
       </p:graphicFrame>
       <p:sp>
         <p:nvSpPr>
-          <p:cNvPr id="5" name="Text 2"/>
+          <p:cNvPr id="26" name="cuinotes-footer-mark"/>
           <p:cNvSpPr txBox="1"/>
           <p:nvPr/>
         </p:nvSpPr>
         <p:spPr>
           <a:xfrm>
-            <a:off x="640080" y="6446520"/>
-            <a:ext cx="8686800" cy="292608"/>
+            <a:off x="9951720" y="6455664"/>
+            <a:ext cx="2011680" cy="292608"/>
           </a:xfrm>
           <a:prstGeom prst="rect">
             <a:avLst/>
           </a:prstGeom>
           <a:noFill/>
-          <a:ln/>
-        </p:spPr>
-        <p:txBody>
-          <a:bodyPr wrap="square" lIns="0" tIns="0" rIns="0" bIns="0" rtlCol="0" anchor="ctr"/>
-          <a:lstStyle/>
-          <a:p>
-            <a:pPr algn="l" indent="0" marL="0">
-              <a:buNone/>
-            </a:pPr>
-            <a:r>
-              <a:rPr lang="en-US" sz="900" dirty="0">
-                <a:solidFill>
-                  <a:srgbClr val="5D5D72"/>
-                </a:solidFill>
-                <a:latin typeface="Calibri" pitchFamily="34" charset="0"/>
-                <a:ea typeface="Calibri" pitchFamily="34" charset="-122"/>
-                <a:cs typeface="Calibri" pitchFamily="34" charset="-120"/>
-              </a:rPr>
-              <a:t>Usman Akram  •  COMSATS University Islamabad</a:t>
-            </a:r>
-            <a:endParaRPr lang="en-US" sz="900" dirty="0"/>
-          </a:p>
-        </p:txBody>
-      </p:sp>
-      <p:sp>
-        <p:nvSpPr>
-          <p:cNvPr id="6" name="Text 3"/>
-          <p:cNvSpPr txBox="1"/>
-          <p:nvPr/>
-        </p:nvSpPr>
-        <p:spPr>
-          <a:xfrm>
-            <a:off x="11155680" y="6446520"/>
-            <a:ext cx="457200" cy="292608"/>
-          </a:xfrm>
-          <a:prstGeom prst="rect">
-            <a:avLst/>
-          </a:prstGeom>
-          <a:noFill/>
-          <a:ln/>
-        </p:spPr>
-        <p:txBody>
-          <a:bodyPr wrap="square" lIns="0" tIns="0" rIns="0" bIns="0" rtlCol="0" anchor="ctr"/>
-          <a:lstStyle/>
-          <a:p>
-            <a:pPr algn="r" indent="0" marL="0">
-              <a:buNone/>
-            </a:pPr>
-            <a:r>
-              <a:rPr lang="en-US" sz="900" dirty="0">
-                <a:solidFill>
-                  <a:srgbClr val="5D5D72"/>
-                </a:solidFill>
-                <a:latin typeface="Calibri" pitchFamily="34" charset="0"/>
-                <a:ea typeface="Calibri" pitchFamily="34" charset="-122"/>
-                <a:cs typeface="Calibri" pitchFamily="34" charset="-120"/>
-              </a:rPr>
-              <a:t>24</a:t>
-            </a:r>
-            <a:endParaRPr lang="en-US" sz="900" dirty="0"/>
+        </p:spPr>
+        <p:txBody>
+          <a:bodyPr wrap="none" lIns="0" rIns="0" tIns="0" bIns="0">
+            <a:spAutoFit/>
+          </a:bodyPr>
+          <a:lstStyle/>
+          <a:p>
+            <a:pPr algn="r"/>
+            <a:r>
+              <a:rPr sz="1000">
+                <a:solidFill>
+                  <a:srgbClr val="8A939B"/>
+                </a:solidFill>
+                <a:hlinkClick r:id="rId3"/>
+              </a:rPr>
+              <a:t>cuinotes.com</a:t>
+            </a:r>
+            <a:r>
+              <a:rPr sz="1000">
+                <a:solidFill>
+                  <a:srgbClr val="8A939B"/>
+                </a:solidFill>
+              </a:rPr>
+              <a:t>  ·  24</a:t>
+            </a:r>
           </a:p>
         </p:txBody>
       </p:sp>
@@ -12346,6 +11887,10 @@
           </a:solidFill>
           <a:ln/>
         </p:spPr>
+        <p:txBody>
+          <a:bodyPr/>
+          <a:p/>
+        </p:txBody>
       </p:sp>
       <p:sp>
         <p:nvSpPr>
@@ -12598,79 +12143,44 @@
       </p:sp>
       <p:sp>
         <p:nvSpPr>
-          <p:cNvPr id="6" name="Text 4"/>
+          <p:cNvPr id="8" name="cuinotes-footer-mark"/>
           <p:cNvSpPr txBox="1"/>
           <p:nvPr/>
         </p:nvSpPr>
         <p:spPr>
           <a:xfrm>
-            <a:off x="640080" y="6446520"/>
-            <a:ext cx="8686800" cy="292608"/>
+            <a:off x="9951720" y="6455664"/>
+            <a:ext cx="2011680" cy="292608"/>
           </a:xfrm>
           <a:prstGeom prst="rect">
             <a:avLst/>
           </a:prstGeom>
           <a:noFill/>
-          <a:ln/>
-        </p:spPr>
-        <p:txBody>
-          <a:bodyPr wrap="square" lIns="0" tIns="0" rIns="0" bIns="0" rtlCol="0" anchor="ctr"/>
-          <a:lstStyle/>
-          <a:p>
-            <a:pPr algn="l" indent="0" marL="0">
-              <a:buNone/>
-            </a:pPr>
-            <a:r>
-              <a:rPr lang="en-US" sz="900" dirty="0">
-                <a:solidFill>
-                  <a:srgbClr val="5D5D72"/>
-                </a:solidFill>
-                <a:latin typeface="Calibri" pitchFamily="34" charset="0"/>
-                <a:ea typeface="Calibri" pitchFamily="34" charset="-122"/>
-                <a:cs typeface="Calibri" pitchFamily="34" charset="-120"/>
-              </a:rPr>
-              <a:t>Usman Akram  •  COMSATS University Islamabad</a:t>
-            </a:r>
-            <a:endParaRPr lang="en-US" sz="900" dirty="0"/>
-          </a:p>
-        </p:txBody>
-      </p:sp>
-      <p:sp>
-        <p:nvSpPr>
-          <p:cNvPr id="7" name="Text 5"/>
-          <p:cNvSpPr txBox="1"/>
-          <p:nvPr/>
-        </p:nvSpPr>
-        <p:spPr>
-          <a:xfrm>
-            <a:off x="11155680" y="6446520"/>
-            <a:ext cx="457200" cy="292608"/>
-          </a:xfrm>
-          <a:prstGeom prst="rect">
-            <a:avLst/>
-          </a:prstGeom>
-          <a:noFill/>
-          <a:ln/>
-        </p:spPr>
-        <p:txBody>
-          <a:bodyPr wrap="square" lIns="0" tIns="0" rIns="0" bIns="0" rtlCol="0" anchor="ctr"/>
-          <a:lstStyle/>
-          <a:p>
-            <a:pPr algn="r" indent="0" marL="0">
-              <a:buNone/>
-            </a:pPr>
-            <a:r>
-              <a:rPr lang="en-US" sz="900" dirty="0">
-                <a:solidFill>
-                  <a:srgbClr val="5D5D72"/>
-                </a:solidFill>
-                <a:latin typeface="Calibri" pitchFamily="34" charset="0"/>
-                <a:ea typeface="Calibri" pitchFamily="34" charset="-122"/>
-                <a:cs typeface="Calibri" pitchFamily="34" charset="-120"/>
-              </a:rPr>
-              <a:t>25</a:t>
-            </a:r>
-            <a:endParaRPr lang="en-US" sz="900" dirty="0"/>
+        </p:spPr>
+        <p:txBody>
+          <a:bodyPr wrap="none" lIns="0" rIns="0" tIns="0" bIns="0">
+            <a:spAutoFit/>
+          </a:bodyPr>
+          <a:lstStyle/>
+          <a:p>
+            <a:pPr algn="r"/>
+            <a:r>
+              <a:rPr sz="1000">
+                <a:solidFill>
+                  <a:srgbClr val="8A939B"/>
+                </a:solidFill>
+                <a:hlinkClick r:id="rId3"/>
+              </a:rPr>
+              <a:t>cuinotes.com</a:t>
+            </a:r>
+            <a:r>
+              <a:rPr sz="1000">
+                <a:solidFill>
+                  <a:srgbClr val="8A939B"/>
+                </a:solidFill>
+              </a:rPr>
+              <a:t>  ·  25</a:t>
+            </a:r>
           </a:p>
         </p:txBody>
       </p:sp>
@@ -12856,6 +12366,10 @@
             </a:outerShdw>
           </a:effectLst>
         </p:spPr>
+        <p:txBody>
+          <a:bodyPr/>
+          <a:p/>
+        </p:txBody>
       </p:sp>
       <p:pic>
         <p:nvPicPr>
@@ -12883,79 +12397,44 @@
       </p:pic>
       <p:sp>
         <p:nvSpPr>
-          <p:cNvPr id="7" name="Text 4"/>
+          <p:cNvPr id="9" name="cuinotes-footer-mark"/>
           <p:cNvSpPr txBox="1"/>
           <p:nvPr/>
         </p:nvSpPr>
         <p:spPr>
           <a:xfrm>
-            <a:off x="640080" y="6446520"/>
-            <a:ext cx="8686800" cy="292608"/>
+            <a:off x="9951720" y="6455664"/>
+            <a:ext cx="2011680" cy="292608"/>
           </a:xfrm>
           <a:prstGeom prst="rect">
             <a:avLst/>
           </a:prstGeom>
           <a:noFill/>
-          <a:ln/>
-        </p:spPr>
-        <p:txBody>
-          <a:bodyPr wrap="square" lIns="0" tIns="0" rIns="0" bIns="0" rtlCol="0" anchor="ctr"/>
-          <a:lstStyle/>
-          <a:p>
-            <a:pPr algn="l" indent="0" marL="0">
-              <a:buNone/>
-            </a:pPr>
-            <a:r>
-              <a:rPr lang="en-US" sz="900" dirty="0">
-                <a:solidFill>
-                  <a:srgbClr val="5D5D72"/>
-                </a:solidFill>
-                <a:latin typeface="Calibri" pitchFamily="34" charset="0"/>
-                <a:ea typeface="Calibri" pitchFamily="34" charset="-122"/>
-                <a:cs typeface="Calibri" pitchFamily="34" charset="-120"/>
-              </a:rPr>
-              <a:t>Usman Akram  •  COMSATS University Islamabad</a:t>
-            </a:r>
-            <a:endParaRPr lang="en-US" sz="900" dirty="0"/>
-          </a:p>
-        </p:txBody>
-      </p:sp>
-      <p:sp>
-        <p:nvSpPr>
-          <p:cNvPr id="8" name="Text 5"/>
-          <p:cNvSpPr txBox="1"/>
-          <p:nvPr/>
-        </p:nvSpPr>
-        <p:spPr>
-          <a:xfrm>
-            <a:off x="11155680" y="6446520"/>
-            <a:ext cx="457200" cy="292608"/>
-          </a:xfrm>
-          <a:prstGeom prst="rect">
-            <a:avLst/>
-          </a:prstGeom>
-          <a:noFill/>
-          <a:ln/>
-        </p:spPr>
-        <p:txBody>
-          <a:bodyPr wrap="square" lIns="0" tIns="0" rIns="0" bIns="0" rtlCol="0" anchor="ctr"/>
-          <a:lstStyle/>
-          <a:p>
-            <a:pPr algn="r" indent="0" marL="0">
-              <a:buNone/>
-            </a:pPr>
-            <a:r>
-              <a:rPr lang="en-US" sz="900" dirty="0">
-                <a:solidFill>
-                  <a:srgbClr val="5D5D72"/>
-                </a:solidFill>
-                <a:latin typeface="Calibri" pitchFamily="34" charset="0"/>
-                <a:ea typeface="Calibri" pitchFamily="34" charset="-122"/>
-                <a:cs typeface="Calibri" pitchFamily="34" charset="-120"/>
-              </a:rPr>
-              <a:t>26</a:t>
-            </a:r>
-            <a:endParaRPr lang="en-US" sz="900" dirty="0"/>
+        </p:spPr>
+        <p:txBody>
+          <a:bodyPr wrap="none" lIns="0" rIns="0" tIns="0" bIns="0">
+            <a:spAutoFit/>
+          </a:bodyPr>
+          <a:lstStyle/>
+          <a:p>
+            <a:pPr algn="r"/>
+            <a:r>
+              <a:rPr sz="1000">
+                <a:solidFill>
+                  <a:srgbClr val="8A939B"/>
+                </a:solidFill>
+                <a:hlinkClick r:id="rId4"/>
+              </a:rPr>
+              <a:t>cuinotes.com</a:t>
+            </a:r>
+            <a:r>
+              <a:rPr sz="1000">
+                <a:solidFill>
+                  <a:srgbClr val="8A939B"/>
+                </a:solidFill>
+              </a:rPr>
+              <a:t>  ·  26</a:t>
+            </a:r>
           </a:p>
         </p:txBody>
       </p:sp>
@@ -13095,6 +12574,10 @@
             <a:prstDash val="solid"/>
           </a:ln>
         </p:spPr>
+        <p:txBody>
+          <a:bodyPr/>
+          <a:p/>
+        </p:txBody>
       </p:sp>
       <p:sp>
         <p:nvSpPr>
@@ -13176,79 +12659,44 @@
       </p:sp>
       <p:sp>
         <p:nvSpPr>
-          <p:cNvPr id="7" name="Text 5"/>
+          <p:cNvPr id="9" name="cuinotes-footer-mark"/>
           <p:cNvSpPr txBox="1"/>
           <p:nvPr/>
         </p:nvSpPr>
         <p:spPr>
           <a:xfrm>
-            <a:off x="640080" y="6446520"/>
-            <a:ext cx="8686800" cy="292608"/>
+            <a:off x="9951720" y="6455664"/>
+            <a:ext cx="2011680" cy="292608"/>
           </a:xfrm>
           <a:prstGeom prst="rect">
             <a:avLst/>
           </a:prstGeom>
           <a:noFill/>
-          <a:ln/>
-        </p:spPr>
-        <p:txBody>
-          <a:bodyPr wrap="square" lIns="0" tIns="0" rIns="0" bIns="0" rtlCol="0" anchor="ctr"/>
-          <a:lstStyle/>
-          <a:p>
-            <a:pPr algn="l" indent="0" marL="0">
-              <a:buNone/>
-            </a:pPr>
-            <a:r>
-              <a:rPr lang="en-US" sz="900" dirty="0">
-                <a:solidFill>
-                  <a:srgbClr val="5D5D72"/>
-                </a:solidFill>
-                <a:latin typeface="Calibri" pitchFamily="34" charset="0"/>
-                <a:ea typeface="Calibri" pitchFamily="34" charset="-122"/>
-                <a:cs typeface="Calibri" pitchFamily="34" charset="-120"/>
-              </a:rPr>
-              <a:t>Usman Akram  •  COMSATS University Islamabad</a:t>
-            </a:r>
-            <a:endParaRPr lang="en-US" sz="900" dirty="0"/>
-          </a:p>
-        </p:txBody>
-      </p:sp>
-      <p:sp>
-        <p:nvSpPr>
-          <p:cNvPr id="8" name="Text 6"/>
-          <p:cNvSpPr txBox="1"/>
-          <p:nvPr/>
-        </p:nvSpPr>
-        <p:spPr>
-          <a:xfrm>
-            <a:off x="11155680" y="6446520"/>
-            <a:ext cx="457200" cy="292608"/>
-          </a:xfrm>
-          <a:prstGeom prst="rect">
-            <a:avLst/>
-          </a:prstGeom>
-          <a:noFill/>
-          <a:ln/>
-        </p:spPr>
-        <p:txBody>
-          <a:bodyPr wrap="square" lIns="0" tIns="0" rIns="0" bIns="0" rtlCol="0" anchor="ctr"/>
-          <a:lstStyle/>
-          <a:p>
-            <a:pPr algn="r" indent="0" marL="0">
-              <a:buNone/>
-            </a:pPr>
-            <a:r>
-              <a:rPr lang="en-US" sz="900" dirty="0">
-                <a:solidFill>
-                  <a:srgbClr val="5D5D72"/>
-                </a:solidFill>
-                <a:latin typeface="Calibri" pitchFamily="34" charset="0"/>
-                <a:ea typeface="Calibri" pitchFamily="34" charset="-122"/>
-                <a:cs typeface="Calibri" pitchFamily="34" charset="-120"/>
-              </a:rPr>
-              <a:t>27</a:t>
-            </a:r>
-            <a:endParaRPr lang="en-US" sz="900" dirty="0"/>
+        </p:spPr>
+        <p:txBody>
+          <a:bodyPr wrap="none" lIns="0" rIns="0" tIns="0" bIns="0">
+            <a:spAutoFit/>
+          </a:bodyPr>
+          <a:lstStyle/>
+          <a:p>
+            <a:pPr algn="r"/>
+            <a:r>
+              <a:rPr sz="1000">
+                <a:solidFill>
+                  <a:srgbClr val="8A939B"/>
+                </a:solidFill>
+                <a:hlinkClick r:id="rId3"/>
+              </a:rPr>
+              <a:t>cuinotes.com</a:t>
+            </a:r>
+            <a:r>
+              <a:rPr sz="1000">
+                <a:solidFill>
+                  <a:srgbClr val="8A939B"/>
+                </a:solidFill>
+              </a:rPr>
+              <a:t>  ·  27</a:t>
+            </a:r>
           </a:p>
         </p:txBody>
       </p:sp>
@@ -13381,6 +12829,10 @@
           </a:solidFill>
           <a:ln/>
         </p:spPr>
+        <p:txBody>
+          <a:bodyPr/>
+          <a:p/>
+        </p:txBody>
       </p:sp>
       <p:sp>
         <p:nvSpPr>
@@ -13479,6 +12931,10 @@
           </a:solidFill>
           <a:ln/>
         </p:spPr>
+        <p:txBody>
+          <a:bodyPr/>
+          <a:p/>
+        </p:txBody>
       </p:sp>
       <p:sp>
         <p:nvSpPr>
@@ -13577,6 +13033,10 @@
           </a:solidFill>
           <a:ln/>
         </p:spPr>
+        <p:txBody>
+          <a:bodyPr/>
+          <a:p/>
+        </p:txBody>
       </p:sp>
       <p:sp>
         <p:nvSpPr>
@@ -13675,6 +13135,10 @@
           </a:solidFill>
           <a:ln/>
         </p:spPr>
+        <p:txBody>
+          <a:bodyPr/>
+          <a:p/>
+        </p:txBody>
       </p:sp>
       <p:sp>
         <p:nvSpPr>
@@ -13773,6 +13237,10 @@
           </a:solidFill>
           <a:ln/>
         </p:spPr>
+        <p:txBody>
+          <a:bodyPr/>
+          <a:p/>
+        </p:txBody>
       </p:sp>
       <p:sp>
         <p:nvSpPr>
@@ -13871,6 +13339,10 @@
           </a:solidFill>
           <a:ln/>
         </p:spPr>
+        <p:txBody>
+          <a:bodyPr/>
+          <a:p/>
+        </p:txBody>
       </p:sp>
       <p:sp>
         <p:nvSpPr>
@@ -13952,79 +13424,44 @@
       </p:sp>
       <p:sp>
         <p:nvSpPr>
-          <p:cNvPr id="22" name="Text 20"/>
+          <p:cNvPr id="24" name="cuinotes-footer-mark"/>
           <p:cNvSpPr txBox="1"/>
           <p:nvPr/>
         </p:nvSpPr>
         <p:spPr>
           <a:xfrm>
-            <a:off x="640080" y="6446520"/>
-            <a:ext cx="8686800" cy="292608"/>
+            <a:off x="9951720" y="6455664"/>
+            <a:ext cx="2011680" cy="292608"/>
           </a:xfrm>
           <a:prstGeom prst="rect">
             <a:avLst/>
           </a:prstGeom>
           <a:noFill/>
-          <a:ln/>
-        </p:spPr>
-        <p:txBody>
-          <a:bodyPr wrap="square" lIns="0" tIns="0" rIns="0" bIns="0" rtlCol="0" anchor="ctr"/>
-          <a:lstStyle/>
-          <a:p>
-            <a:pPr algn="l" indent="0" marL="0">
-              <a:buNone/>
-            </a:pPr>
-            <a:r>
-              <a:rPr lang="en-US" sz="900" dirty="0">
-                <a:solidFill>
-                  <a:srgbClr val="9AA3D8"/>
-                </a:solidFill>
-                <a:latin typeface="Calibri" pitchFamily="34" charset="0"/>
-                <a:ea typeface="Calibri" pitchFamily="34" charset="-122"/>
-                <a:cs typeface="Calibri" pitchFamily="34" charset="-120"/>
-              </a:rPr>
-              <a:t>Usman Akram  •  COMSATS University Islamabad</a:t>
-            </a:r>
-            <a:endParaRPr lang="en-US" sz="900" dirty="0"/>
-          </a:p>
-        </p:txBody>
-      </p:sp>
-      <p:sp>
-        <p:nvSpPr>
-          <p:cNvPr id="23" name="Text 21"/>
-          <p:cNvSpPr txBox="1"/>
-          <p:nvPr/>
-        </p:nvSpPr>
-        <p:spPr>
-          <a:xfrm>
-            <a:off x="11155680" y="6446520"/>
-            <a:ext cx="457200" cy="292608"/>
-          </a:xfrm>
-          <a:prstGeom prst="rect">
-            <a:avLst/>
-          </a:prstGeom>
-          <a:noFill/>
-          <a:ln/>
-        </p:spPr>
-        <p:txBody>
-          <a:bodyPr wrap="square" lIns="0" tIns="0" rIns="0" bIns="0" rtlCol="0" anchor="ctr"/>
-          <a:lstStyle/>
-          <a:p>
-            <a:pPr algn="r" indent="0" marL="0">
-              <a:buNone/>
-            </a:pPr>
-            <a:r>
-              <a:rPr lang="en-US" sz="900" dirty="0">
-                <a:solidFill>
-                  <a:srgbClr val="9AA3D8"/>
-                </a:solidFill>
-                <a:latin typeface="Calibri" pitchFamily="34" charset="0"/>
-                <a:ea typeface="Calibri" pitchFamily="34" charset="-122"/>
-                <a:cs typeface="Calibri" pitchFamily="34" charset="-120"/>
-              </a:rPr>
-              <a:t>28</a:t>
-            </a:r>
-            <a:endParaRPr lang="en-US" sz="900" dirty="0"/>
+        </p:spPr>
+        <p:txBody>
+          <a:bodyPr wrap="none" lIns="0" rIns="0" tIns="0" bIns="0">
+            <a:spAutoFit/>
+          </a:bodyPr>
+          <a:lstStyle/>
+          <a:p>
+            <a:pPr algn="r"/>
+            <a:r>
+              <a:rPr sz="1000">
+                <a:solidFill>
+                  <a:srgbClr val="8A939B"/>
+                </a:solidFill>
+                <a:hlinkClick r:id="rId3"/>
+              </a:rPr>
+              <a:t>cuinotes.com</a:t>
+            </a:r>
+            <a:r>
+              <a:rPr sz="1000">
+                <a:solidFill>
+                  <a:srgbClr val="8A939B"/>
+                </a:solidFill>
+              </a:rPr>
+              <a:t>  ·  28</a:t>
+            </a:r>
           </a:p>
         </p:txBody>
       </p:sp>
@@ -14198,6 +13635,10 @@
           </a:solidFill>
           <a:ln/>
         </p:spPr>
+        <p:txBody>
+          <a:bodyPr/>
+          <a:p/>
+        </p:txBody>
       </p:sp>
       <p:sp>
         <p:nvSpPr>
@@ -14343,6 +13784,10 @@
             </a:outerShdw>
           </a:effectLst>
         </p:spPr>
+        <p:txBody>
+          <a:bodyPr/>
+          <a:p/>
+        </p:txBody>
       </p:sp>
       <p:pic>
         <p:nvPicPr>
@@ -14370,79 +13815,44 @@
       </p:pic>
       <p:sp>
         <p:nvSpPr>
-          <p:cNvPr id="9" name="Text 6"/>
+          <p:cNvPr id="11" name="cuinotes-footer-mark"/>
           <p:cNvSpPr txBox="1"/>
           <p:nvPr/>
         </p:nvSpPr>
         <p:spPr>
           <a:xfrm>
-            <a:off x="640080" y="6446520"/>
-            <a:ext cx="8686800" cy="292608"/>
+            <a:off x="9951720" y="6455664"/>
+            <a:ext cx="2011680" cy="292608"/>
           </a:xfrm>
           <a:prstGeom prst="rect">
             <a:avLst/>
           </a:prstGeom>
           <a:noFill/>
-          <a:ln/>
-        </p:spPr>
-        <p:txBody>
-          <a:bodyPr wrap="square" lIns="0" tIns="0" rIns="0" bIns="0" rtlCol="0" anchor="ctr"/>
-          <a:lstStyle/>
-          <a:p>
-            <a:pPr algn="l" indent="0" marL="0">
-              <a:buNone/>
-            </a:pPr>
-            <a:r>
-              <a:rPr lang="en-US" sz="900" dirty="0">
-                <a:solidFill>
-                  <a:srgbClr val="5D5D72"/>
-                </a:solidFill>
-                <a:latin typeface="Calibri" pitchFamily="34" charset="0"/>
-                <a:ea typeface="Calibri" pitchFamily="34" charset="-122"/>
-                <a:cs typeface="Calibri" pitchFamily="34" charset="-120"/>
-              </a:rPr>
-              <a:t>Usman Akram  •  COMSATS University Islamabad</a:t>
-            </a:r>
-            <a:endParaRPr lang="en-US" sz="900" dirty="0"/>
-          </a:p>
-        </p:txBody>
-      </p:sp>
-      <p:sp>
-        <p:nvSpPr>
-          <p:cNvPr id="10" name="Text 7"/>
-          <p:cNvSpPr txBox="1"/>
-          <p:nvPr/>
-        </p:nvSpPr>
-        <p:spPr>
-          <a:xfrm>
-            <a:off x="11155680" y="6446520"/>
-            <a:ext cx="457200" cy="292608"/>
-          </a:xfrm>
-          <a:prstGeom prst="rect">
-            <a:avLst/>
-          </a:prstGeom>
-          <a:noFill/>
-          <a:ln/>
-        </p:spPr>
-        <p:txBody>
-          <a:bodyPr wrap="square" lIns="0" tIns="0" rIns="0" bIns="0" rtlCol="0" anchor="ctr"/>
-          <a:lstStyle/>
-          <a:p>
-            <a:pPr algn="r" indent="0" marL="0">
-              <a:buNone/>
-            </a:pPr>
-            <a:r>
-              <a:rPr lang="en-US" sz="900" dirty="0">
-                <a:solidFill>
-                  <a:srgbClr val="5D5D72"/>
-                </a:solidFill>
-                <a:latin typeface="Calibri" pitchFamily="34" charset="0"/>
-                <a:ea typeface="Calibri" pitchFamily="34" charset="-122"/>
-                <a:cs typeface="Calibri" pitchFamily="34" charset="-120"/>
-              </a:rPr>
-              <a:t>3</a:t>
-            </a:r>
-            <a:endParaRPr lang="en-US" sz="900" dirty="0"/>
+        </p:spPr>
+        <p:txBody>
+          <a:bodyPr wrap="none" lIns="0" rIns="0" tIns="0" bIns="0">
+            <a:spAutoFit/>
+          </a:bodyPr>
+          <a:lstStyle/>
+          <a:p>
+            <a:pPr algn="r"/>
+            <a:r>
+              <a:rPr sz="1000">
+                <a:solidFill>
+                  <a:srgbClr val="8A939B"/>
+                </a:solidFill>
+                <a:hlinkClick r:id="rId4"/>
+              </a:rPr>
+              <a:t>cuinotes.com</a:t>
+            </a:r>
+            <a:r>
+              <a:rPr sz="1000">
+                <a:solidFill>
+                  <a:srgbClr val="8A939B"/>
+                </a:solidFill>
+              </a:rPr>
+              <a:t>  ·  3</a:t>
+            </a:r>
           </a:p>
         </p:txBody>
       </p:sp>
@@ -14616,6 +14026,10 @@
           </a:solidFill>
           <a:ln/>
         </p:spPr>
+        <p:txBody>
+          <a:bodyPr/>
+          <a:p/>
+        </p:txBody>
       </p:sp>
       <p:sp>
         <p:nvSpPr>
@@ -14761,6 +14175,10 @@
             </a:outerShdw>
           </a:effectLst>
         </p:spPr>
+        <p:txBody>
+          <a:bodyPr/>
+          <a:p/>
+        </p:txBody>
       </p:sp>
       <p:pic>
         <p:nvPicPr>
@@ -14788,79 +14206,44 @@
       </p:pic>
       <p:sp>
         <p:nvSpPr>
-          <p:cNvPr id="9" name="Text 6"/>
+          <p:cNvPr id="11" name="cuinotes-footer-mark"/>
           <p:cNvSpPr txBox="1"/>
           <p:nvPr/>
         </p:nvSpPr>
         <p:spPr>
           <a:xfrm>
-            <a:off x="640080" y="6446520"/>
-            <a:ext cx="8686800" cy="292608"/>
+            <a:off x="9951720" y="6455664"/>
+            <a:ext cx="2011680" cy="292608"/>
           </a:xfrm>
           <a:prstGeom prst="rect">
             <a:avLst/>
           </a:prstGeom>
           <a:noFill/>
-          <a:ln/>
-        </p:spPr>
-        <p:txBody>
-          <a:bodyPr wrap="square" lIns="0" tIns="0" rIns="0" bIns="0" rtlCol="0" anchor="ctr"/>
-          <a:lstStyle/>
-          <a:p>
-            <a:pPr algn="l" indent="0" marL="0">
-              <a:buNone/>
-            </a:pPr>
-            <a:r>
-              <a:rPr lang="en-US" sz="900" dirty="0">
-                <a:solidFill>
-                  <a:srgbClr val="5D5D72"/>
-                </a:solidFill>
-                <a:latin typeface="Calibri" pitchFamily="34" charset="0"/>
-                <a:ea typeface="Calibri" pitchFamily="34" charset="-122"/>
-                <a:cs typeface="Calibri" pitchFamily="34" charset="-120"/>
-              </a:rPr>
-              <a:t>Usman Akram  •  COMSATS University Islamabad</a:t>
-            </a:r>
-            <a:endParaRPr lang="en-US" sz="900" dirty="0"/>
-          </a:p>
-        </p:txBody>
-      </p:sp>
-      <p:sp>
-        <p:nvSpPr>
-          <p:cNvPr id="10" name="Text 7"/>
-          <p:cNvSpPr txBox="1"/>
-          <p:nvPr/>
-        </p:nvSpPr>
-        <p:spPr>
-          <a:xfrm>
-            <a:off x="11155680" y="6446520"/>
-            <a:ext cx="457200" cy="292608"/>
-          </a:xfrm>
-          <a:prstGeom prst="rect">
-            <a:avLst/>
-          </a:prstGeom>
-          <a:noFill/>
-          <a:ln/>
-        </p:spPr>
-        <p:txBody>
-          <a:bodyPr wrap="square" lIns="0" tIns="0" rIns="0" bIns="0" rtlCol="0" anchor="ctr"/>
-          <a:lstStyle/>
-          <a:p>
-            <a:pPr algn="r" indent="0" marL="0">
-              <a:buNone/>
-            </a:pPr>
-            <a:r>
-              <a:rPr lang="en-US" sz="900" dirty="0">
-                <a:solidFill>
-                  <a:srgbClr val="5D5D72"/>
-                </a:solidFill>
-                <a:latin typeface="Calibri" pitchFamily="34" charset="0"/>
-                <a:ea typeface="Calibri" pitchFamily="34" charset="-122"/>
-                <a:cs typeface="Calibri" pitchFamily="34" charset="-120"/>
-              </a:rPr>
-              <a:t>4</a:t>
-            </a:r>
-            <a:endParaRPr lang="en-US" sz="900" dirty="0"/>
+        </p:spPr>
+        <p:txBody>
+          <a:bodyPr wrap="none" lIns="0" rIns="0" tIns="0" bIns="0">
+            <a:spAutoFit/>
+          </a:bodyPr>
+          <a:lstStyle/>
+          <a:p>
+            <a:pPr algn="r"/>
+            <a:r>
+              <a:rPr sz="1000">
+                <a:solidFill>
+                  <a:srgbClr val="8A939B"/>
+                </a:solidFill>
+                <a:hlinkClick r:id="rId4"/>
+              </a:rPr>
+              <a:t>cuinotes.com</a:t>
+            </a:r>
+            <a:r>
+              <a:rPr sz="1000">
+                <a:solidFill>
+                  <a:srgbClr val="8A939B"/>
+                </a:solidFill>
+              </a:rPr>
+              <a:t>  ·  4</a:t>
+            </a:r>
           </a:p>
         </p:txBody>
       </p:sp>
@@ -15000,6 +14383,10 @@
             <a:prstDash val="solid"/>
           </a:ln>
         </p:spPr>
+        <p:txBody>
+          <a:bodyPr/>
+          <a:p/>
+        </p:txBody>
       </p:sp>
       <p:sp>
         <p:nvSpPr>
@@ -15172,6 +14559,10 @@
             <a:prstDash val="solid"/>
           </a:ln>
         </p:spPr>
+        <p:txBody>
+          <a:bodyPr/>
+          <a:p/>
+        </p:txBody>
       </p:sp>
       <p:sp>
         <p:nvSpPr>
@@ -15320,79 +14711,44 @@
       </p:sp>
       <p:sp>
         <p:nvSpPr>
-          <p:cNvPr id="10" name="Text 8"/>
+          <p:cNvPr id="12" name="cuinotes-footer-mark"/>
           <p:cNvSpPr txBox="1"/>
           <p:nvPr/>
         </p:nvSpPr>
         <p:spPr>
           <a:xfrm>
-            <a:off x="640080" y="6446520"/>
-            <a:ext cx="8686800" cy="292608"/>
+            <a:off x="9951720" y="6455664"/>
+            <a:ext cx="2011680" cy="292608"/>
           </a:xfrm>
           <a:prstGeom prst="rect">
             <a:avLst/>
           </a:prstGeom>
           <a:noFill/>
-          <a:ln/>
-        </p:spPr>
-        <p:txBody>
-          <a:bodyPr wrap="square" lIns="0" tIns="0" rIns="0" bIns="0" rtlCol="0" anchor="ctr"/>
-          <a:lstStyle/>
-          <a:p>
-            <a:pPr algn="l" indent="0" marL="0">
-              <a:buNone/>
-            </a:pPr>
-            <a:r>
-              <a:rPr lang="en-US" sz="900" dirty="0">
-                <a:solidFill>
-                  <a:srgbClr val="5D5D72"/>
-                </a:solidFill>
-                <a:latin typeface="Calibri" pitchFamily="34" charset="0"/>
-                <a:ea typeface="Calibri" pitchFamily="34" charset="-122"/>
-                <a:cs typeface="Calibri" pitchFamily="34" charset="-120"/>
-              </a:rPr>
-              <a:t>Usman Akram  •  COMSATS University Islamabad</a:t>
-            </a:r>
-            <a:endParaRPr lang="en-US" sz="900" dirty="0"/>
-          </a:p>
-        </p:txBody>
-      </p:sp>
-      <p:sp>
-        <p:nvSpPr>
-          <p:cNvPr id="11" name="Text 9"/>
-          <p:cNvSpPr txBox="1"/>
-          <p:nvPr/>
-        </p:nvSpPr>
-        <p:spPr>
-          <a:xfrm>
-            <a:off x="11155680" y="6446520"/>
-            <a:ext cx="457200" cy="292608"/>
-          </a:xfrm>
-          <a:prstGeom prst="rect">
-            <a:avLst/>
-          </a:prstGeom>
-          <a:noFill/>
-          <a:ln/>
-        </p:spPr>
-        <p:txBody>
-          <a:bodyPr wrap="square" lIns="0" tIns="0" rIns="0" bIns="0" rtlCol="0" anchor="ctr"/>
-          <a:lstStyle/>
-          <a:p>
-            <a:pPr algn="r" indent="0" marL="0">
-              <a:buNone/>
-            </a:pPr>
-            <a:r>
-              <a:rPr lang="en-US" sz="900" dirty="0">
-                <a:solidFill>
-                  <a:srgbClr val="5D5D72"/>
-                </a:solidFill>
-                <a:latin typeface="Calibri" pitchFamily="34" charset="0"/>
-                <a:ea typeface="Calibri" pitchFamily="34" charset="-122"/>
-                <a:cs typeface="Calibri" pitchFamily="34" charset="-120"/>
-              </a:rPr>
-              <a:t>5</a:t>
-            </a:r>
-            <a:endParaRPr lang="en-US" sz="900" dirty="0"/>
+        </p:spPr>
+        <p:txBody>
+          <a:bodyPr wrap="none" lIns="0" rIns="0" tIns="0" bIns="0">
+            <a:spAutoFit/>
+          </a:bodyPr>
+          <a:lstStyle/>
+          <a:p>
+            <a:pPr algn="r"/>
+            <a:r>
+              <a:rPr sz="1000">
+                <a:solidFill>
+                  <a:srgbClr val="8A939B"/>
+                </a:solidFill>
+                <a:hlinkClick r:id="rId3"/>
+              </a:rPr>
+              <a:t>cuinotes.com</a:t>
+            </a:r>
+            <a:r>
+              <a:rPr sz="1000">
+                <a:solidFill>
+                  <a:srgbClr val="8A939B"/>
+                </a:solidFill>
+              </a:rPr>
+              <a:t>  ·  5</a:t>
+            </a:r>
           </a:p>
         </p:txBody>
       </p:sp>
@@ -16504,79 +15860,44 @@
       </p:graphicFrame>
       <p:sp>
         <p:nvSpPr>
-          <p:cNvPr id="5" name="Text 2"/>
+          <p:cNvPr id="8" name="cuinotes-footer-mark"/>
           <p:cNvSpPr txBox="1"/>
           <p:nvPr/>
         </p:nvSpPr>
         <p:spPr>
           <a:xfrm>
-            <a:off x="640080" y="6446520"/>
-            <a:ext cx="8686800" cy="292608"/>
+            <a:off x="9951720" y="6455664"/>
+            <a:ext cx="2011680" cy="292608"/>
           </a:xfrm>
           <a:prstGeom prst="rect">
             <a:avLst/>
           </a:prstGeom>
           <a:noFill/>
-          <a:ln/>
-        </p:spPr>
-        <p:txBody>
-          <a:bodyPr wrap="square" lIns="0" tIns="0" rIns="0" bIns="0" rtlCol="0" anchor="ctr"/>
-          <a:lstStyle/>
-          <a:p>
-            <a:pPr algn="l" indent="0" marL="0">
-              <a:buNone/>
-            </a:pPr>
-            <a:r>
-              <a:rPr lang="en-US" sz="900" dirty="0">
-                <a:solidFill>
-                  <a:srgbClr val="5D5D72"/>
-                </a:solidFill>
-                <a:latin typeface="Calibri" pitchFamily="34" charset="0"/>
-                <a:ea typeface="Calibri" pitchFamily="34" charset="-122"/>
-                <a:cs typeface="Calibri" pitchFamily="34" charset="-120"/>
-              </a:rPr>
-              <a:t>Usman Akram  •  COMSATS University Islamabad</a:t>
-            </a:r>
-            <a:endParaRPr lang="en-US" sz="900" dirty="0"/>
-          </a:p>
-        </p:txBody>
-      </p:sp>
-      <p:sp>
-        <p:nvSpPr>
-          <p:cNvPr id="6" name="Text 3"/>
-          <p:cNvSpPr txBox="1"/>
-          <p:nvPr/>
-        </p:nvSpPr>
-        <p:spPr>
-          <a:xfrm>
-            <a:off x="11155680" y="6446520"/>
-            <a:ext cx="457200" cy="292608"/>
-          </a:xfrm>
-          <a:prstGeom prst="rect">
-            <a:avLst/>
-          </a:prstGeom>
-          <a:noFill/>
-          <a:ln/>
-        </p:spPr>
-        <p:txBody>
-          <a:bodyPr wrap="square" lIns="0" tIns="0" rIns="0" bIns="0" rtlCol="0" anchor="ctr"/>
-          <a:lstStyle/>
-          <a:p>
-            <a:pPr algn="r" indent="0" marL="0">
-              <a:buNone/>
-            </a:pPr>
-            <a:r>
-              <a:rPr lang="en-US" sz="900" dirty="0">
-                <a:solidFill>
-                  <a:srgbClr val="5D5D72"/>
-                </a:solidFill>
-                <a:latin typeface="Calibri" pitchFamily="34" charset="0"/>
-                <a:ea typeface="Calibri" pitchFamily="34" charset="-122"/>
-                <a:cs typeface="Calibri" pitchFamily="34" charset="-120"/>
-              </a:rPr>
-              <a:t>6</a:t>
-            </a:r>
-            <a:endParaRPr lang="en-US" sz="900" dirty="0"/>
+        </p:spPr>
+        <p:txBody>
+          <a:bodyPr wrap="none" lIns="0" rIns="0" tIns="0" bIns="0">
+            <a:spAutoFit/>
+          </a:bodyPr>
+          <a:lstStyle/>
+          <a:p>
+            <a:pPr algn="r"/>
+            <a:r>
+              <a:rPr sz="1000">
+                <a:solidFill>
+                  <a:srgbClr val="8A939B"/>
+                </a:solidFill>
+                <a:hlinkClick r:id="rId3"/>
+              </a:rPr>
+              <a:t>cuinotes.com</a:t>
+            </a:r>
+            <a:r>
+              <a:rPr sz="1000">
+                <a:solidFill>
+                  <a:srgbClr val="8A939B"/>
+                </a:solidFill>
+              </a:rPr>
+              <a:t>  ·  6</a:t>
+            </a:r>
           </a:p>
         </p:txBody>
       </p:sp>
@@ -16711,6 +16032,10 @@
           </a:solidFill>
           <a:ln/>
         </p:spPr>
+        <p:txBody>
+          <a:bodyPr/>
+          <a:p/>
+        </p:txBody>
       </p:sp>
       <p:sp>
         <p:nvSpPr>
@@ -16916,79 +16241,44 @@
       </p:sp>
       <p:sp>
         <p:nvSpPr>
-          <p:cNvPr id="6" name="Text 4"/>
+          <p:cNvPr id="8" name="cuinotes-footer-mark"/>
           <p:cNvSpPr txBox="1"/>
           <p:nvPr/>
         </p:nvSpPr>
         <p:spPr>
           <a:xfrm>
-            <a:off x="640080" y="6446520"/>
-            <a:ext cx="8686800" cy="292608"/>
+            <a:off x="9951720" y="6455664"/>
+            <a:ext cx="2011680" cy="292608"/>
           </a:xfrm>
           <a:prstGeom prst="rect">
             <a:avLst/>
           </a:prstGeom>
           <a:noFill/>
-          <a:ln/>
-        </p:spPr>
-        <p:txBody>
-          <a:bodyPr wrap="square" lIns="0" tIns="0" rIns="0" bIns="0" rtlCol="0" anchor="ctr"/>
-          <a:lstStyle/>
-          <a:p>
-            <a:pPr algn="l" indent="0" marL="0">
-              <a:buNone/>
-            </a:pPr>
-            <a:r>
-              <a:rPr lang="en-US" sz="900" dirty="0">
-                <a:solidFill>
-                  <a:srgbClr val="5D5D72"/>
-                </a:solidFill>
-                <a:latin typeface="Calibri" pitchFamily="34" charset="0"/>
-                <a:ea typeface="Calibri" pitchFamily="34" charset="-122"/>
-                <a:cs typeface="Calibri" pitchFamily="34" charset="-120"/>
-              </a:rPr>
-              <a:t>Usman Akram  •  COMSATS University Islamabad</a:t>
-            </a:r>
-            <a:endParaRPr lang="en-US" sz="900" dirty="0"/>
-          </a:p>
-        </p:txBody>
-      </p:sp>
-      <p:sp>
-        <p:nvSpPr>
-          <p:cNvPr id="7" name="Text 5"/>
-          <p:cNvSpPr txBox="1"/>
-          <p:nvPr/>
-        </p:nvSpPr>
-        <p:spPr>
-          <a:xfrm>
-            <a:off x="11155680" y="6446520"/>
-            <a:ext cx="457200" cy="292608"/>
-          </a:xfrm>
-          <a:prstGeom prst="rect">
-            <a:avLst/>
-          </a:prstGeom>
-          <a:noFill/>
-          <a:ln/>
-        </p:spPr>
-        <p:txBody>
-          <a:bodyPr wrap="square" lIns="0" tIns="0" rIns="0" bIns="0" rtlCol="0" anchor="ctr"/>
-          <a:lstStyle/>
-          <a:p>
-            <a:pPr algn="r" indent="0" marL="0">
-              <a:buNone/>
-            </a:pPr>
-            <a:r>
-              <a:rPr lang="en-US" sz="900" dirty="0">
-                <a:solidFill>
-                  <a:srgbClr val="5D5D72"/>
-                </a:solidFill>
-                <a:latin typeface="Calibri" pitchFamily="34" charset="0"/>
-                <a:ea typeface="Calibri" pitchFamily="34" charset="-122"/>
-                <a:cs typeface="Calibri" pitchFamily="34" charset="-120"/>
-              </a:rPr>
-              <a:t>7</a:t>
-            </a:r>
-            <a:endParaRPr lang="en-US" sz="900" dirty="0"/>
+        </p:spPr>
+        <p:txBody>
+          <a:bodyPr wrap="none" lIns="0" rIns="0" tIns="0" bIns="0">
+            <a:spAutoFit/>
+          </a:bodyPr>
+          <a:lstStyle/>
+          <a:p>
+            <a:pPr algn="r"/>
+            <a:r>
+              <a:rPr sz="1000">
+                <a:solidFill>
+                  <a:srgbClr val="8A939B"/>
+                </a:solidFill>
+                <a:hlinkClick r:id="rId3"/>
+              </a:rPr>
+              <a:t>cuinotes.com</a:t>
+            </a:r>
+            <a:r>
+              <a:rPr sz="1000">
+                <a:solidFill>
+                  <a:srgbClr val="8A939B"/>
+                </a:solidFill>
+              </a:rPr>
+              <a:t>  ·  7</a:t>
+            </a:r>
           </a:p>
         </p:txBody>
       </p:sp>
@@ -17174,6 +16464,10 @@
             </a:outerShdw>
           </a:effectLst>
         </p:spPr>
+        <p:txBody>
+          <a:bodyPr/>
+          <a:p/>
+        </p:txBody>
       </p:sp>
       <p:pic>
         <p:nvPicPr>
@@ -17201,79 +16495,44 @@
       </p:pic>
       <p:sp>
         <p:nvSpPr>
-          <p:cNvPr id="7" name="Text 4"/>
+          <p:cNvPr id="9" name="cuinotes-footer-mark"/>
           <p:cNvSpPr txBox="1"/>
           <p:nvPr/>
         </p:nvSpPr>
         <p:spPr>
           <a:xfrm>
-            <a:off x="640080" y="6446520"/>
-            <a:ext cx="8686800" cy="292608"/>
+            <a:off x="9951720" y="6455664"/>
+            <a:ext cx="2011680" cy="292608"/>
           </a:xfrm>
           <a:prstGeom prst="rect">
             <a:avLst/>
           </a:prstGeom>
           <a:noFill/>
-          <a:ln/>
-        </p:spPr>
-        <p:txBody>
-          <a:bodyPr wrap="square" lIns="0" tIns="0" rIns="0" bIns="0" rtlCol="0" anchor="ctr"/>
-          <a:lstStyle/>
-          <a:p>
-            <a:pPr algn="l" indent="0" marL="0">
-              <a:buNone/>
-            </a:pPr>
-            <a:r>
-              <a:rPr lang="en-US" sz="900" dirty="0">
-                <a:solidFill>
-                  <a:srgbClr val="5D5D72"/>
-                </a:solidFill>
-                <a:latin typeface="Calibri" pitchFamily="34" charset="0"/>
-                <a:ea typeface="Calibri" pitchFamily="34" charset="-122"/>
-                <a:cs typeface="Calibri" pitchFamily="34" charset="-120"/>
-              </a:rPr>
-              <a:t>Usman Akram  •  COMSATS University Islamabad</a:t>
-            </a:r>
-            <a:endParaRPr lang="en-US" sz="900" dirty="0"/>
-          </a:p>
-        </p:txBody>
-      </p:sp>
-      <p:sp>
-        <p:nvSpPr>
-          <p:cNvPr id="8" name="Text 5"/>
-          <p:cNvSpPr txBox="1"/>
-          <p:nvPr/>
-        </p:nvSpPr>
-        <p:spPr>
-          <a:xfrm>
-            <a:off x="11155680" y="6446520"/>
-            <a:ext cx="457200" cy="292608"/>
-          </a:xfrm>
-          <a:prstGeom prst="rect">
-            <a:avLst/>
-          </a:prstGeom>
-          <a:noFill/>
-          <a:ln/>
-        </p:spPr>
-        <p:txBody>
-          <a:bodyPr wrap="square" lIns="0" tIns="0" rIns="0" bIns="0" rtlCol="0" anchor="ctr"/>
-          <a:lstStyle/>
-          <a:p>
-            <a:pPr algn="r" indent="0" marL="0">
-              <a:buNone/>
-            </a:pPr>
-            <a:r>
-              <a:rPr lang="en-US" sz="900" dirty="0">
-                <a:solidFill>
-                  <a:srgbClr val="5D5D72"/>
-                </a:solidFill>
-                <a:latin typeface="Calibri" pitchFamily="34" charset="0"/>
-                <a:ea typeface="Calibri" pitchFamily="34" charset="-122"/>
-                <a:cs typeface="Calibri" pitchFamily="34" charset="-120"/>
-              </a:rPr>
-              <a:t>8</a:t>
-            </a:r>
-            <a:endParaRPr lang="en-US" sz="900" dirty="0"/>
+        </p:spPr>
+        <p:txBody>
+          <a:bodyPr wrap="none" lIns="0" rIns="0" tIns="0" bIns="0">
+            <a:spAutoFit/>
+          </a:bodyPr>
+          <a:lstStyle/>
+          <a:p>
+            <a:pPr algn="r"/>
+            <a:r>
+              <a:rPr sz="1000">
+                <a:solidFill>
+                  <a:srgbClr val="8A939B"/>
+                </a:solidFill>
+                <a:hlinkClick r:id="rId4"/>
+              </a:rPr>
+              <a:t>cuinotes.com</a:t>
+            </a:r>
+            <a:r>
+              <a:rPr sz="1000">
+                <a:solidFill>
+                  <a:srgbClr val="8A939B"/>
+                </a:solidFill>
+              </a:rPr>
+              <a:t>  ·  8</a:t>
+            </a:r>
           </a:p>
         </p:txBody>
       </p:sp>
@@ -17406,6 +16665,10 @@
           </a:solidFill>
           <a:ln/>
         </p:spPr>
+        <p:txBody>
+          <a:bodyPr/>
+          <a:p/>
+        </p:txBody>
       </p:sp>
       <p:sp>
         <p:nvSpPr>
@@ -17465,6 +16728,10 @@
           </a:solidFill>
           <a:ln/>
         </p:spPr>
+        <p:txBody>
+          <a:bodyPr/>
+          <a:p/>
+        </p:txBody>
       </p:sp>
       <p:sp>
         <p:nvSpPr>
@@ -17524,6 +16791,10 @@
           </a:solidFill>
           <a:ln/>
         </p:spPr>
+        <p:txBody>
+          <a:bodyPr/>
+          <a:p/>
+        </p:txBody>
       </p:sp>
       <p:sp>
         <p:nvSpPr>
@@ -17566,79 +16837,44 @@
       </p:sp>
       <p:sp>
         <p:nvSpPr>
-          <p:cNvPr id="10" name="Text 8"/>
+          <p:cNvPr id="12" name="cuinotes-footer-mark"/>
           <p:cNvSpPr txBox="1"/>
           <p:nvPr/>
         </p:nvSpPr>
         <p:spPr>
           <a:xfrm>
-            <a:off x="640080" y="6446520"/>
-            <a:ext cx="8686800" cy="292608"/>
+            <a:off x="9951720" y="6455664"/>
+            <a:ext cx="2011680" cy="292608"/>
           </a:xfrm>
           <a:prstGeom prst="rect">
             <a:avLst/>
           </a:prstGeom>
           <a:noFill/>
-          <a:ln/>
-        </p:spPr>
-        <p:txBody>
-          <a:bodyPr wrap="square" lIns="0" tIns="0" rIns="0" bIns="0" rtlCol="0" anchor="ctr"/>
-          <a:lstStyle/>
-          <a:p>
-            <a:pPr algn="l" indent="0" marL="0">
-              <a:buNone/>
-            </a:pPr>
-            <a:r>
-              <a:rPr lang="en-US" sz="900" dirty="0">
-                <a:solidFill>
-                  <a:srgbClr val="5D5D72"/>
-                </a:solidFill>
-                <a:latin typeface="Calibri" pitchFamily="34" charset="0"/>
-                <a:ea typeface="Calibri" pitchFamily="34" charset="-122"/>
-                <a:cs typeface="Calibri" pitchFamily="34" charset="-120"/>
-              </a:rPr>
-              <a:t>Usman Akram  •  COMSATS University Islamabad</a:t>
-            </a:r>
-            <a:endParaRPr lang="en-US" sz="900" dirty="0"/>
-          </a:p>
-        </p:txBody>
-      </p:sp>
-      <p:sp>
-        <p:nvSpPr>
-          <p:cNvPr id="11" name="Text 9"/>
-          <p:cNvSpPr txBox="1"/>
-          <p:nvPr/>
-        </p:nvSpPr>
-        <p:spPr>
-          <a:xfrm>
-            <a:off x="11155680" y="6446520"/>
-            <a:ext cx="457200" cy="292608"/>
-          </a:xfrm>
-          <a:prstGeom prst="rect">
-            <a:avLst/>
-          </a:prstGeom>
-          <a:noFill/>
-          <a:ln/>
-        </p:spPr>
-        <p:txBody>
-          <a:bodyPr wrap="square" lIns="0" tIns="0" rIns="0" bIns="0" rtlCol="0" anchor="ctr"/>
-          <a:lstStyle/>
-          <a:p>
-            <a:pPr algn="r" indent="0" marL="0">
-              <a:buNone/>
-            </a:pPr>
-            <a:r>
-              <a:rPr lang="en-US" sz="900" dirty="0">
-                <a:solidFill>
-                  <a:srgbClr val="5D5D72"/>
-                </a:solidFill>
-                <a:latin typeface="Calibri" pitchFamily="34" charset="0"/>
-                <a:ea typeface="Calibri" pitchFamily="34" charset="-122"/>
-                <a:cs typeface="Calibri" pitchFamily="34" charset="-120"/>
-              </a:rPr>
-              <a:t>9</a:t>
-            </a:r>
-            <a:endParaRPr lang="en-US" sz="900" dirty="0"/>
+        </p:spPr>
+        <p:txBody>
+          <a:bodyPr wrap="none" lIns="0" rIns="0" tIns="0" bIns="0">
+            <a:spAutoFit/>
+          </a:bodyPr>
+          <a:lstStyle/>
+          <a:p>
+            <a:pPr algn="r"/>
+            <a:r>
+              <a:rPr sz="1000">
+                <a:solidFill>
+                  <a:srgbClr val="8A939B"/>
+                </a:solidFill>
+                <a:hlinkClick r:id="rId3"/>
+              </a:rPr>
+              <a:t>cuinotes.com</a:t>
+            </a:r>
+            <a:r>
+              <a:rPr sz="1000">
+                <a:solidFill>
+                  <a:srgbClr val="8A939B"/>
+                </a:solidFill>
+              </a:rPr>
+              <a:t>  ·  9</a:t>
+            </a:r>
           </a:p>
         </p:txBody>
       </p:sp>

--- a/slides/CSC336-Lecture-04-Semantic-HTML-and-Forms.pptx
+++ b/slides/CSC336-Lecture-04-Semantic-HTML-and-Forms.pptx
@@ -3627,9 +3627,13 @@
             </a:avLst>
           </a:prstGeom>
           <a:solidFill>
-            <a:srgbClr val="1E1E4C"/>
+            <a:srgbClr val="F7F8F9"/>
           </a:solidFill>
-          <a:ln/>
+          <a:ln w="9525">
+            <a:solidFill>
+              <a:srgbClr val="D0D5DD"/>
+            </a:solidFill>
+          </a:ln>
         </p:spPr>
         <p:txBody>
           <a:bodyPr/>
@@ -3666,7 +3670,7 @@
             <a:r>
               <a:rPr lang="en-US" sz="1250" dirty="0">
                 <a:solidFill>
-                  <a:srgbClr val="C9D3F5"/>
+                  <a:srgbClr val="1F2429"/>
                 </a:solidFill>
                 <a:latin typeface="Courier New" pitchFamily="34" charset="0"/>
                 <a:ea typeface="Courier New" pitchFamily="34" charset="-122"/>
@@ -3686,7 +3690,7 @@
             <a:r>
               <a:rPr lang="en-US" sz="1250" dirty="0">
                 <a:solidFill>
-                  <a:srgbClr val="C9D3F5"/>
+                  <a:srgbClr val="1F2429"/>
                 </a:solidFill>
                 <a:latin typeface="Courier New" pitchFamily="34" charset="0"/>
                 <a:ea typeface="Courier New" pitchFamily="34" charset="-122"/>
@@ -3706,7 +3710,7 @@
             <a:r>
               <a:rPr lang="en-US" sz="1250" dirty="0">
                 <a:solidFill>
-                  <a:srgbClr val="C9D3F5"/>
+                  <a:srgbClr val="1F2429"/>
                 </a:solidFill>
                 <a:latin typeface="Courier New" pitchFamily="34" charset="0"/>
                 <a:ea typeface="Courier New" pitchFamily="34" charset="-122"/>
@@ -3735,7 +3739,7 @@
             <a:r>
               <a:rPr lang="en-US" sz="1250" dirty="0">
                 <a:solidFill>
-                  <a:srgbClr val="C9D3F5"/>
+                  <a:srgbClr val="1F2429"/>
                 </a:solidFill>
                 <a:latin typeface="Courier New" pitchFamily="34" charset="0"/>
                 <a:ea typeface="Courier New" pitchFamily="34" charset="-122"/>
@@ -3755,7 +3759,7 @@
             <a:r>
               <a:rPr lang="en-US" sz="1250" dirty="0">
                 <a:solidFill>
-                  <a:srgbClr val="C9D3F5"/>
+                  <a:srgbClr val="1F2429"/>
                 </a:solidFill>
                 <a:latin typeface="Courier New" pitchFamily="34" charset="0"/>
                 <a:ea typeface="Courier New" pitchFamily="34" charset="-122"/>
@@ -3784,7 +3788,7 @@
             <a:r>
               <a:rPr lang="en-US" sz="1250" dirty="0">
                 <a:solidFill>
-                  <a:srgbClr val="C9D3F5"/>
+                  <a:srgbClr val="1F2429"/>
                 </a:solidFill>
                 <a:latin typeface="Courier New" pitchFamily="34" charset="0"/>
                 <a:ea typeface="Courier New" pitchFamily="34" charset="-122"/>
@@ -3804,7 +3808,7 @@
             <a:r>
               <a:rPr lang="en-US" sz="1250" dirty="0">
                 <a:solidFill>
-                  <a:srgbClr val="C9D3F5"/>
+                  <a:srgbClr val="1F2429"/>
                 </a:solidFill>
                 <a:latin typeface="Courier New" pitchFamily="34" charset="0"/>
                 <a:ea typeface="Courier New" pitchFamily="34" charset="-122"/>
@@ -5523,7 +5527,7 @@
         <p:spPr>
           <a:xfrm>
             <a:off x="640080" y="1965960"/>
-            <a:ext cx="10911535" cy="1554480"/>
+            <a:ext cx="10911535" cy="3657600"/>
           </a:xfrm>
           <a:prstGeom prst="roundRect">
             <a:avLst>
@@ -5554,7 +5558,7 @@
         <p:spPr>
           <a:xfrm>
             <a:off x="868680" y="2103120"/>
-            <a:ext cx="10454335" cy="274320"/>
+            <a:ext cx="10454335" cy="400000"/>
           </a:xfrm>
           <a:prstGeom prst="rect">
             <a:avLst/>
@@ -5570,7 +5574,7 @@
               <a:buNone/>
             </a:pPr>
             <a:r>
-              <a:rPr lang="en-US" sz="1000" b="1" spc="200" kern="0" dirty="0">
+              <a:rPr lang="en-US" sz="1800" b="1" spc="200" kern="0" dirty="0">
                 <a:solidFill>
                   <a:srgbClr val="8A3A12"/>
                 </a:solidFill>
@@ -5580,7 +5584,7 @@
               </a:rPr>
               <a:t>WARNING</a:t>
             </a:r>
-            <a:endParaRPr lang="en-US" sz="1000" dirty="0"/>
+            <a:endParaRPr lang="en-US" sz="1800" dirty="0"/>
           </a:p>
         </p:txBody>
       </p:sp>
@@ -5592,8 +5596,8 @@
         </p:nvSpPr>
         <p:spPr>
           <a:xfrm>
-            <a:off x="868680" y="2404872"/>
-            <a:ext cx="10454335" cy="960120"/>
+            <a:off x="868680" y="2795960"/>
+            <a:ext cx="10454335" cy="2500000"/>
           </a:xfrm>
           <a:prstGeom prst="rect">
             <a:avLst/>
@@ -5602,14 +5606,14 @@
           <a:ln/>
         </p:spPr>
         <p:txBody>
-          <a:bodyPr wrap="square" lIns="0" tIns="0" rIns="0" bIns="0" rtlCol="0" anchor="t"/>
+          <a:bodyPr wrap="square" lIns="0" tIns="0" rIns="0" bIns="0" rtlCol="0" anchor="ctr"/>
           <a:lstStyle/>
           <a:p>
             <a:pPr indent="0" marL="0">
               <a:buNone/>
             </a:pPr>
             <a:r>
-              <a:rPr lang="en-US" sz="1250" dirty="0">
+              <a:rPr lang="en-US" sz="2800" dirty="0">
                 <a:solidFill>
                   <a:srgbClr val="26262F"/>
                 </a:solidFill>
@@ -5619,7 +5623,7 @@
               </a:rPr>
               <a:t>GET puts form values directly into the URL, where they can end up saved in browser history, server logs, and shared links. Always use POST for passwords and other sensitive information.</a:t>
             </a:r>
-            <a:endParaRPr lang="en-US" sz="1250" dirty="0"/>
+            <a:endParaRPr lang="en-US" sz="2800" dirty="0"/>
           </a:p>
         </p:txBody>
       </p:sp>
@@ -5832,9 +5836,13 @@
             </a:avLst>
           </a:prstGeom>
           <a:solidFill>
-            <a:srgbClr val="1E1E4C"/>
+            <a:srgbClr val="F7F8F9"/>
           </a:solidFill>
-          <a:ln/>
+          <a:ln w="9525">
+            <a:solidFill>
+              <a:srgbClr val="D0D5DD"/>
+            </a:solidFill>
+          </a:ln>
         </p:spPr>
         <p:txBody>
           <a:bodyPr/>
@@ -5871,7 +5879,7 @@
             <a:r>
               <a:rPr lang="en-US" sz="1250" dirty="0">
                 <a:solidFill>
-                  <a:srgbClr val="C9D3F5"/>
+                  <a:srgbClr val="1F2429"/>
                 </a:solidFill>
                 <a:latin typeface="Courier New" pitchFamily="34" charset="0"/>
                 <a:ea typeface="Courier New" pitchFamily="34" charset="-122"/>
@@ -5891,7 +5899,7 @@
             <a:r>
               <a:rPr lang="en-US" sz="1250" dirty="0">
                 <a:solidFill>
-                  <a:srgbClr val="C9D3F5"/>
+                  <a:srgbClr val="1F2429"/>
                 </a:solidFill>
                 <a:latin typeface="Courier New" pitchFamily="34" charset="0"/>
                 <a:ea typeface="Courier New" pitchFamily="34" charset="-122"/>
@@ -5911,7 +5919,7 @@
             <a:r>
               <a:rPr lang="en-US" sz="1250" dirty="0">
                 <a:solidFill>
-                  <a:srgbClr val="C9D3F5"/>
+                  <a:srgbClr val="1F2429"/>
                 </a:solidFill>
                 <a:latin typeface="Courier New" pitchFamily="34" charset="0"/>
                 <a:ea typeface="Courier New" pitchFamily="34" charset="-122"/>
@@ -5931,7 +5939,7 @@
             <a:r>
               <a:rPr lang="en-US" sz="1250" dirty="0">
                 <a:solidFill>
-                  <a:srgbClr val="C9D3F5"/>
+                  <a:srgbClr val="1F2429"/>
                 </a:solidFill>
                 <a:latin typeface="Courier New" pitchFamily="34" charset="0"/>
                 <a:ea typeface="Courier New" pitchFamily="34" charset="-122"/>
@@ -5951,7 +5959,7 @@
             <a:r>
               <a:rPr lang="en-US" sz="1250" dirty="0">
                 <a:solidFill>
-                  <a:srgbClr val="C9D3F5"/>
+                  <a:srgbClr val="1F2429"/>
                 </a:solidFill>
                 <a:latin typeface="Courier New" pitchFamily="34" charset="0"/>
                 <a:ea typeface="Courier New" pitchFamily="34" charset="-122"/>
@@ -7344,9 +7352,13 @@
             </a:avLst>
           </a:prstGeom>
           <a:solidFill>
-            <a:srgbClr val="1E1E4C"/>
+            <a:srgbClr val="F7F8F9"/>
           </a:solidFill>
-          <a:ln/>
+          <a:ln w="9525">
+            <a:solidFill>
+              <a:srgbClr val="D0D5DD"/>
+            </a:solidFill>
+          </a:ln>
         </p:spPr>
         <p:txBody>
           <a:bodyPr/>
@@ -7383,7 +7395,7 @@
             <a:r>
               <a:rPr lang="en-US" sz="1400" dirty="0">
                 <a:solidFill>
-                  <a:srgbClr val="C9D3F5"/>
+                  <a:srgbClr val="1F2429"/>
                 </a:solidFill>
                 <a:latin typeface="Courier New" pitchFamily="34" charset="0"/>
                 <a:ea typeface="Courier New" pitchFamily="34" charset="-122"/>
@@ -7403,7 +7415,7 @@
             <a:r>
               <a:rPr lang="en-US" sz="1400" dirty="0">
                 <a:solidFill>
-                  <a:srgbClr val="C9D3F5"/>
+                  <a:srgbClr val="1F2429"/>
                 </a:solidFill>
                 <a:latin typeface="Courier New" pitchFamily="34" charset="0"/>
                 <a:ea typeface="Courier New" pitchFamily="34" charset="-122"/>
@@ -7423,7 +7435,7 @@
             <a:r>
               <a:rPr lang="en-US" sz="1400" dirty="0">
                 <a:solidFill>
-                  <a:srgbClr val="C9D3F5"/>
+                  <a:srgbClr val="1F2429"/>
                 </a:solidFill>
                 <a:latin typeface="Courier New" pitchFamily="34" charset="0"/>
                 <a:ea typeface="Courier New" pitchFamily="34" charset="-122"/>
@@ -7443,7 +7455,7 @@
             <a:r>
               <a:rPr lang="en-US" sz="1400" dirty="0">
                 <a:solidFill>
-                  <a:srgbClr val="C9D3F5"/>
+                  <a:srgbClr val="1F2429"/>
                 </a:solidFill>
                 <a:latin typeface="Courier New" pitchFamily="34" charset="0"/>
                 <a:ea typeface="Courier New" pitchFamily="34" charset="-122"/>
@@ -7463,7 +7475,7 @@
             <a:r>
               <a:rPr lang="en-US" sz="1400" dirty="0">
                 <a:solidFill>
-                  <a:srgbClr val="C9D3F5"/>
+                  <a:srgbClr val="1F2429"/>
                 </a:solidFill>
                 <a:latin typeface="Courier New" pitchFamily="34" charset="0"/>
                 <a:ea typeface="Courier New" pitchFamily="34" charset="-122"/>
@@ -7483,7 +7495,7 @@
             <a:r>
               <a:rPr lang="en-US" sz="1400" dirty="0">
                 <a:solidFill>
-                  <a:srgbClr val="C9D3F5"/>
+                  <a:srgbClr val="1F2429"/>
                 </a:solidFill>
                 <a:latin typeface="Courier New" pitchFamily="34" charset="0"/>
                 <a:ea typeface="Courier New" pitchFamily="34" charset="-122"/>
@@ -7503,7 +7515,7 @@
             <a:r>
               <a:rPr lang="en-US" sz="1400" dirty="0">
                 <a:solidFill>
-                  <a:srgbClr val="C9D3F5"/>
+                  <a:srgbClr val="1F2429"/>
                 </a:solidFill>
                 <a:latin typeface="Courier New" pitchFamily="34" charset="0"/>
                 <a:ea typeface="Courier New" pitchFamily="34" charset="-122"/>
@@ -7523,7 +7535,7 @@
             <a:r>
               <a:rPr lang="en-US" sz="1400" dirty="0">
                 <a:solidFill>
-                  <a:srgbClr val="C9D3F5"/>
+                  <a:srgbClr val="1F2429"/>
                 </a:solidFill>
                 <a:latin typeface="Courier New" pitchFamily="34" charset="0"/>
                 <a:ea typeface="Courier New" pitchFamily="34" charset="-122"/>
@@ -7543,7 +7555,7 @@
             <a:r>
               <a:rPr lang="en-US" sz="1400" dirty="0">
                 <a:solidFill>
-                  <a:srgbClr val="C9D3F5"/>
+                  <a:srgbClr val="1F2429"/>
                 </a:solidFill>
                 <a:latin typeface="Courier New" pitchFamily="34" charset="0"/>
                 <a:ea typeface="Courier New" pitchFamily="34" charset="-122"/>
@@ -7563,7 +7575,7 @@
             <a:r>
               <a:rPr lang="en-US" sz="1400" dirty="0">
                 <a:solidFill>
-                  <a:srgbClr val="C9D3F5"/>
+                  <a:srgbClr val="1F2429"/>
                 </a:solidFill>
                 <a:latin typeface="Courier New" pitchFamily="34" charset="0"/>
                 <a:ea typeface="Courier New" pitchFamily="34" charset="-122"/>
@@ -7583,7 +7595,7 @@
             <a:r>
               <a:rPr lang="en-US" sz="1400" dirty="0">
                 <a:solidFill>
-                  <a:srgbClr val="C9D3F5"/>
+                  <a:srgbClr val="1F2429"/>
                 </a:solidFill>
                 <a:latin typeface="Courier New" pitchFamily="34" charset="0"/>
                 <a:ea typeface="Courier New" pitchFamily="34" charset="-122"/>
@@ -7603,7 +7615,7 @@
             <a:r>
               <a:rPr lang="en-US" sz="1400" dirty="0">
                 <a:solidFill>
-                  <a:srgbClr val="C9D3F5"/>
+                  <a:srgbClr val="1F2429"/>
                 </a:solidFill>
                 <a:latin typeface="Courier New" pitchFamily="34" charset="0"/>
                 <a:ea typeface="Courier New" pitchFamily="34" charset="-122"/>
@@ -8381,9 +8393,13 @@
             </a:avLst>
           </a:prstGeom>
           <a:solidFill>
-            <a:srgbClr val="1E1E4C"/>
+            <a:srgbClr val="F7F8F9"/>
           </a:solidFill>
-          <a:ln/>
+          <a:ln w="9525">
+            <a:solidFill>
+              <a:srgbClr val="D0D5DD"/>
+            </a:solidFill>
+          </a:ln>
         </p:spPr>
         <p:txBody>
           <a:bodyPr/>
@@ -8420,7 +8436,7 @@
             <a:r>
               <a:rPr lang="en-US" sz="1400" dirty="0">
                 <a:solidFill>
-                  <a:srgbClr val="C9D3F5"/>
+                  <a:srgbClr val="1F2429"/>
                 </a:solidFill>
                 <a:latin typeface="Courier New" pitchFamily="34" charset="0"/>
                 <a:ea typeface="Courier New" pitchFamily="34" charset="-122"/>
@@ -8440,7 +8456,7 @@
             <a:r>
               <a:rPr lang="en-US" sz="1400" dirty="0">
                 <a:solidFill>
-                  <a:srgbClr val="C9D3F5"/>
+                  <a:srgbClr val="1F2429"/>
                 </a:solidFill>
                 <a:latin typeface="Courier New" pitchFamily="34" charset="0"/>
                 <a:ea typeface="Courier New" pitchFamily="34" charset="-122"/>
@@ -8469,7 +8485,7 @@
             <a:r>
               <a:rPr lang="en-US" sz="1400" dirty="0">
                 <a:solidFill>
-                  <a:srgbClr val="C9D3F5"/>
+                  <a:srgbClr val="1F2429"/>
                 </a:solidFill>
                 <a:latin typeface="Courier New" pitchFamily="34" charset="0"/>
                 <a:ea typeface="Courier New" pitchFamily="34" charset="-122"/>
@@ -8489,7 +8505,7 @@
             <a:r>
               <a:rPr lang="en-US" sz="1400" dirty="0">
                 <a:solidFill>
-                  <a:srgbClr val="C9D3F5"/>
+                  <a:srgbClr val="1F2429"/>
                 </a:solidFill>
                 <a:latin typeface="Courier New" pitchFamily="34" charset="0"/>
                 <a:ea typeface="Courier New" pitchFamily="34" charset="-122"/>
@@ -8518,7 +8534,7 @@
             <a:r>
               <a:rPr lang="en-US" sz="1400" dirty="0">
                 <a:solidFill>
-                  <a:srgbClr val="C9D3F5"/>
+                  <a:srgbClr val="1F2429"/>
                 </a:solidFill>
                 <a:latin typeface="Courier New" pitchFamily="34" charset="0"/>
                 <a:ea typeface="Courier New" pitchFamily="34" charset="-122"/>
@@ -8538,7 +8554,7 @@
             <a:r>
               <a:rPr lang="en-US" sz="1400" dirty="0">
                 <a:solidFill>
-                  <a:srgbClr val="C9D3F5"/>
+                  <a:srgbClr val="1F2429"/>
                 </a:solidFill>
                 <a:latin typeface="Courier New" pitchFamily="34" charset="0"/>
                 <a:ea typeface="Courier New" pitchFamily="34" charset="-122"/>
@@ -9983,9 +9999,13 @@
             </a:avLst>
           </a:prstGeom>
           <a:solidFill>
-            <a:srgbClr val="1E1E4C"/>
+            <a:srgbClr val="F7F8F9"/>
           </a:solidFill>
-          <a:ln/>
+          <a:ln w="9525">
+            <a:solidFill>
+              <a:srgbClr val="D0D5DD"/>
+            </a:solidFill>
+          </a:ln>
         </p:spPr>
         <p:txBody>
           <a:bodyPr/>
@@ -10022,7 +10042,7 @@
             <a:r>
               <a:rPr lang="en-US" sz="1400" dirty="0">
                 <a:solidFill>
-                  <a:srgbClr val="C9D3F5"/>
+                  <a:srgbClr val="1F2429"/>
                 </a:solidFill>
                 <a:latin typeface="Courier New" pitchFamily="34" charset="0"/>
                 <a:ea typeface="Courier New" pitchFamily="34" charset="-122"/>
@@ -10042,7 +10062,7 @@
             <a:r>
               <a:rPr lang="en-US" sz="1400" dirty="0">
                 <a:solidFill>
-                  <a:srgbClr val="C9D3F5"/>
+                  <a:srgbClr val="1F2429"/>
                 </a:solidFill>
                 <a:latin typeface="Courier New" pitchFamily="34" charset="0"/>
                 <a:ea typeface="Courier New" pitchFamily="34" charset="-122"/>
@@ -10062,7 +10082,7 @@
             <a:r>
               <a:rPr lang="en-US" sz="1400" dirty="0">
                 <a:solidFill>
-                  <a:srgbClr val="C9D3F5"/>
+                  <a:srgbClr val="1F2429"/>
                 </a:solidFill>
                 <a:latin typeface="Courier New" pitchFamily="34" charset="0"/>
                 <a:ea typeface="Courier New" pitchFamily="34" charset="-122"/>
@@ -10082,7 +10102,7 @@
             <a:r>
               <a:rPr lang="en-US" sz="1400" dirty="0">
                 <a:solidFill>
-                  <a:srgbClr val="C9D3F5"/>
+                  <a:srgbClr val="1F2429"/>
                 </a:solidFill>
                 <a:latin typeface="Courier New" pitchFamily="34" charset="0"/>
                 <a:ea typeface="Courier New" pitchFamily="34" charset="-122"/>
@@ -10111,7 +10131,7 @@
             <a:r>
               <a:rPr lang="en-US" sz="1400" dirty="0">
                 <a:solidFill>
-                  <a:srgbClr val="C9D3F5"/>
+                  <a:srgbClr val="1F2429"/>
                 </a:solidFill>
                 <a:latin typeface="Courier New" pitchFamily="34" charset="0"/>
                 <a:ea typeface="Courier New" pitchFamily="34" charset="-122"/>
@@ -10687,9 +10707,13 @@
             </a:avLst>
           </a:prstGeom>
           <a:solidFill>
-            <a:srgbClr val="1E1E4C"/>
+            <a:srgbClr val="F7F8F9"/>
           </a:solidFill>
-          <a:ln/>
+          <a:ln w="9525">
+            <a:solidFill>
+              <a:srgbClr val="D0D5DD"/>
+            </a:solidFill>
+          </a:ln>
         </p:spPr>
         <p:txBody>
           <a:bodyPr/>
@@ -10726,7 +10750,7 @@
             <a:r>
               <a:rPr lang="en-US" sz="1250" dirty="0">
                 <a:solidFill>
-                  <a:srgbClr val="C9D3F5"/>
+                  <a:srgbClr val="1F2429"/>
                 </a:solidFill>
                 <a:latin typeface="Courier New" pitchFamily="34" charset="0"/>
                 <a:ea typeface="Courier New" pitchFamily="34" charset="-122"/>
@@ -10746,7 +10770,7 @@
             <a:r>
               <a:rPr lang="en-US" sz="1250" dirty="0">
                 <a:solidFill>
-                  <a:srgbClr val="C9D3F5"/>
+                  <a:srgbClr val="1F2429"/>
                 </a:solidFill>
                 <a:latin typeface="Courier New" pitchFamily="34" charset="0"/>
                 <a:ea typeface="Courier New" pitchFamily="34" charset="-122"/>
@@ -10766,7 +10790,7 @@
             <a:r>
               <a:rPr lang="en-US" sz="1250" dirty="0">
                 <a:solidFill>
-                  <a:srgbClr val="C9D3F5"/>
+                  <a:srgbClr val="1F2429"/>
                 </a:solidFill>
                 <a:latin typeface="Courier New" pitchFamily="34" charset="0"/>
                 <a:ea typeface="Courier New" pitchFamily="34" charset="-122"/>
@@ -11883,9 +11907,13 @@
             </a:avLst>
           </a:prstGeom>
           <a:solidFill>
-            <a:srgbClr val="1E1E4C"/>
+            <a:srgbClr val="F7F8F9"/>
           </a:solidFill>
-          <a:ln/>
+          <a:ln w="9525">
+            <a:solidFill>
+              <a:srgbClr val="D0D5DD"/>
+            </a:solidFill>
+          </a:ln>
         </p:spPr>
         <p:txBody>
           <a:bodyPr/>
@@ -11922,7 +11950,7 @@
             <a:r>
               <a:rPr lang="en-US" sz="1366" dirty="0">
                 <a:solidFill>
-                  <a:srgbClr val="C9D3F5"/>
+                  <a:srgbClr val="1F2429"/>
                 </a:solidFill>
                 <a:latin typeface="Courier New" pitchFamily="34" charset="0"/>
                 <a:ea typeface="Courier New" pitchFamily="34" charset="-122"/>
@@ -11942,7 +11970,7 @@
             <a:r>
               <a:rPr lang="en-US" sz="1366" dirty="0">
                 <a:solidFill>
-                  <a:srgbClr val="C9D3F5"/>
+                  <a:srgbClr val="1F2429"/>
                 </a:solidFill>
                 <a:latin typeface="Courier New" pitchFamily="34" charset="0"/>
                 <a:ea typeface="Courier New" pitchFamily="34" charset="-122"/>
@@ -11962,7 +11990,7 @@
             <a:r>
               <a:rPr lang="en-US" sz="1366" dirty="0">
                 <a:solidFill>
-                  <a:srgbClr val="C9D3F5"/>
+                  <a:srgbClr val="1F2429"/>
                 </a:solidFill>
                 <a:latin typeface="Courier New" pitchFamily="34" charset="0"/>
                 <a:ea typeface="Courier New" pitchFamily="34" charset="-122"/>
@@ -11991,7 +12019,7 @@
             <a:r>
               <a:rPr lang="en-US" sz="1366" dirty="0">
                 <a:solidFill>
-                  <a:srgbClr val="C9D3F5"/>
+                  <a:srgbClr val="1F2429"/>
                 </a:solidFill>
                 <a:latin typeface="Courier New" pitchFamily="34" charset="0"/>
                 <a:ea typeface="Courier New" pitchFamily="34" charset="-122"/>
@@ -12011,7 +12039,7 @@
             <a:r>
               <a:rPr lang="en-US" sz="1366" dirty="0">
                 <a:solidFill>
-                  <a:srgbClr val="C9D3F5"/>
+                  <a:srgbClr val="1F2429"/>
                 </a:solidFill>
                 <a:latin typeface="Courier New" pitchFamily="34" charset="0"/>
                 <a:ea typeface="Courier New" pitchFamily="34" charset="-122"/>
@@ -12031,7 +12059,7 @@
             <a:r>
               <a:rPr lang="en-US" sz="1366" dirty="0">
                 <a:solidFill>
-                  <a:srgbClr val="C9D3F5"/>
+                  <a:srgbClr val="1F2429"/>
                 </a:solidFill>
                 <a:latin typeface="Courier New" pitchFamily="34" charset="0"/>
                 <a:ea typeface="Courier New" pitchFamily="34" charset="-122"/>
@@ -12060,7 +12088,7 @@
             <a:r>
               <a:rPr lang="en-US" sz="1366" dirty="0">
                 <a:solidFill>
-                  <a:srgbClr val="C9D3F5"/>
+                  <a:srgbClr val="1F2429"/>
                 </a:solidFill>
                 <a:latin typeface="Courier New" pitchFamily="34" charset="0"/>
                 <a:ea typeface="Courier New" pitchFamily="34" charset="-122"/>
@@ -12080,7 +12108,7 @@
             <a:r>
               <a:rPr lang="en-US" sz="1366" dirty="0">
                 <a:solidFill>
-                  <a:srgbClr val="C9D3F5"/>
+                  <a:srgbClr val="1F2429"/>
                 </a:solidFill>
                 <a:latin typeface="Courier New" pitchFamily="34" charset="0"/>
                 <a:ea typeface="Courier New" pitchFamily="34" charset="-122"/>
@@ -12109,7 +12137,7 @@
             <a:r>
               <a:rPr lang="en-US" sz="1366" dirty="0">
                 <a:solidFill>
-                  <a:srgbClr val="C9D3F5"/>
+                  <a:srgbClr val="1F2429"/>
                 </a:solidFill>
                 <a:latin typeface="Courier New" pitchFamily="34" charset="0"/>
                 <a:ea typeface="Courier New" pitchFamily="34" charset="-122"/>
@@ -12129,7 +12157,7 @@
             <a:r>
               <a:rPr lang="en-US" sz="1366" dirty="0">
                 <a:solidFill>
-                  <a:srgbClr val="C9D3F5"/>
+                  <a:srgbClr val="1F2429"/>
                 </a:solidFill>
                 <a:latin typeface="Courier New" pitchFamily="34" charset="0"/>
                 <a:ea typeface="Courier New" pitchFamily="34" charset="-122"/>
@@ -12557,7 +12585,7 @@
         <p:spPr>
           <a:xfrm>
             <a:off x="640080" y="1965960"/>
-            <a:ext cx="10911535" cy="1737360"/>
+            <a:ext cx="10911535" cy="3657600"/>
           </a:xfrm>
           <a:prstGeom prst="roundRect">
             <a:avLst>
@@ -12588,7 +12616,7 @@
         <p:spPr>
           <a:xfrm>
             <a:off x="868680" y="2103120"/>
-            <a:ext cx="10454335" cy="274320"/>
+            <a:ext cx="10454335" cy="400000"/>
           </a:xfrm>
           <a:prstGeom prst="rect">
             <a:avLst/>
@@ -12604,7 +12632,7 @@
               <a:buNone/>
             </a:pPr>
             <a:r>
-              <a:rPr lang="en-US" sz="1000" b="1" spc="200" kern="0" dirty="0">
+              <a:rPr lang="en-US" sz="1800" b="1" spc="200" kern="0" dirty="0">
                 <a:solidFill>
                   <a:srgbClr val="8A3A12"/>
                 </a:solidFill>
@@ -12614,7 +12642,7 @@
               </a:rPr>
               <a:t>WARNING</a:t>
             </a:r>
-            <a:endParaRPr lang="en-US" sz="1000" dirty="0"/>
+            <a:endParaRPr lang="en-US" sz="1800" dirty="0"/>
           </a:p>
         </p:txBody>
       </p:sp>
@@ -12626,8 +12654,8 @@
         </p:nvSpPr>
         <p:spPr>
           <a:xfrm>
-            <a:off x="868680" y="2404872"/>
-            <a:ext cx="10454335" cy="1143000"/>
+            <a:off x="868680" y="2795960"/>
+            <a:ext cx="10454335" cy="2500000"/>
           </a:xfrm>
           <a:prstGeom prst="rect">
             <a:avLst/>
@@ -12636,14 +12664,14 @@
           <a:ln/>
         </p:spPr>
         <p:txBody>
-          <a:bodyPr wrap="square" lIns="0" tIns="0" rIns="0" bIns="0" rtlCol="0" anchor="t"/>
+          <a:bodyPr wrap="square" lIns="0" tIns="0" rIns="0" bIns="0" rtlCol="0" anchor="ctr"/>
           <a:lstStyle/>
           <a:p>
             <a:pPr indent="0" marL="0">
               <a:buNone/>
             </a:pPr>
             <a:r>
-              <a:rPr lang="en-US" sz="1250" dirty="0">
+              <a:rPr lang="en-US" sz="2800" dirty="0">
                 <a:solidFill>
                   <a:srgbClr val="26262F"/>
                 </a:solidFill>
@@ -12653,7 +12681,7 @@
               </a:rPr>
               <a:t>A user can disable JavaScript or edit HTML in dev tools. Client-side validation is a convenience for instant feedback — it is not security. Every submission must also be validated again on the server.</a:t>
             </a:r>
-            <a:endParaRPr lang="en-US" sz="1250" dirty="0"/>
+            <a:endParaRPr lang="en-US" sz="2800" dirty="0"/>
           </a:p>
         </p:txBody>
       </p:sp>
@@ -13631,9 +13659,13 @@
             </a:avLst>
           </a:prstGeom>
           <a:solidFill>
-            <a:srgbClr val="1E1E4C"/>
+            <a:srgbClr val="F7F8F9"/>
           </a:solidFill>
-          <a:ln/>
+          <a:ln w="9525">
+            <a:solidFill>
+              <a:srgbClr val="D0D5DD"/>
+            </a:solidFill>
+          </a:ln>
         </p:spPr>
         <p:txBody>
           <a:bodyPr/>
@@ -13670,7 +13702,7 @@
             <a:r>
               <a:rPr lang="en-US" sz="1250" dirty="0">
                 <a:solidFill>
-                  <a:srgbClr val="C9D3F5"/>
+                  <a:srgbClr val="1F2429"/>
                 </a:solidFill>
                 <a:latin typeface="Courier New" pitchFamily="34" charset="0"/>
                 <a:ea typeface="Courier New" pitchFamily="34" charset="-122"/>
@@ -13690,7 +13722,7 @@
             <a:r>
               <a:rPr lang="en-US" sz="1250" dirty="0">
                 <a:solidFill>
-                  <a:srgbClr val="C9D3F5"/>
+                  <a:srgbClr val="1F2429"/>
                 </a:solidFill>
                 <a:latin typeface="Courier New" pitchFamily="34" charset="0"/>
                 <a:ea typeface="Courier New" pitchFamily="34" charset="-122"/>
@@ -13719,7 +13751,7 @@
             <a:r>
               <a:rPr lang="en-US" sz="1250" dirty="0">
                 <a:solidFill>
-                  <a:srgbClr val="C9D3F5"/>
+                  <a:srgbClr val="1F2429"/>
                 </a:solidFill>
                 <a:latin typeface="Courier New" pitchFamily="34" charset="0"/>
                 <a:ea typeface="Courier New" pitchFamily="34" charset="-122"/>
@@ -13739,7 +13771,7 @@
             <a:r>
               <a:rPr lang="en-US" sz="1250" dirty="0">
                 <a:solidFill>
-                  <a:srgbClr val="C9D3F5"/>
+                  <a:srgbClr val="1F2429"/>
                 </a:solidFill>
                 <a:latin typeface="Courier New" pitchFamily="34" charset="0"/>
                 <a:ea typeface="Courier New" pitchFamily="34" charset="-122"/>
@@ -14022,9 +14054,13 @@
             </a:avLst>
           </a:prstGeom>
           <a:solidFill>
-            <a:srgbClr val="1E1E4C"/>
+            <a:srgbClr val="F7F8F9"/>
           </a:solidFill>
-          <a:ln/>
+          <a:ln w="9525">
+            <a:solidFill>
+              <a:srgbClr val="D0D5DD"/>
+            </a:solidFill>
+          </a:ln>
         </p:spPr>
         <p:txBody>
           <a:bodyPr/>
@@ -14061,7 +14097,7 @@
             <a:r>
               <a:rPr lang="en-US" sz="1250" dirty="0">
                 <a:solidFill>
-                  <a:srgbClr val="C9D3F5"/>
+                  <a:srgbClr val="1F2429"/>
                 </a:solidFill>
                 <a:latin typeface="Courier New" pitchFamily="34" charset="0"/>
                 <a:ea typeface="Courier New" pitchFamily="34" charset="-122"/>
@@ -14081,7 +14117,7 @@
             <a:r>
               <a:rPr lang="en-US" sz="1250" dirty="0">
                 <a:solidFill>
-                  <a:srgbClr val="C9D3F5"/>
+                  <a:srgbClr val="1F2429"/>
                 </a:solidFill>
                 <a:latin typeface="Courier New" pitchFamily="34" charset="0"/>
                 <a:ea typeface="Courier New" pitchFamily="34" charset="-122"/>
@@ -14101,7 +14137,7 @@
             <a:r>
               <a:rPr lang="en-US" sz="1250" dirty="0">
                 <a:solidFill>
-                  <a:srgbClr val="C9D3F5"/>
+                  <a:srgbClr val="1F2429"/>
                 </a:solidFill>
                 <a:latin typeface="Courier New" pitchFamily="34" charset="0"/>
                 <a:ea typeface="Courier New" pitchFamily="34" charset="-122"/>
@@ -14130,7 +14166,7 @@
             <a:r>
               <a:rPr lang="en-US" sz="1250" dirty="0">
                 <a:solidFill>
-                  <a:srgbClr val="C9D3F5"/>
+                  <a:srgbClr val="1F2429"/>
                 </a:solidFill>
                 <a:latin typeface="Courier New" pitchFamily="34" charset="0"/>
                 <a:ea typeface="Courier New" pitchFamily="34" charset="-122"/>
@@ -16028,9 +16064,13 @@
             </a:avLst>
           </a:prstGeom>
           <a:solidFill>
-            <a:srgbClr val="1E1E4C"/>
+            <a:srgbClr val="F7F8F9"/>
           </a:solidFill>
-          <a:ln/>
+          <a:ln w="9525">
+            <a:solidFill>
+              <a:srgbClr val="D0D5DD"/>
+            </a:solidFill>
+          </a:ln>
         </p:spPr>
         <p:txBody>
           <a:bodyPr/>
@@ -16067,7 +16107,7 @@
             <a:r>
               <a:rPr lang="en-US" sz="1400" dirty="0">
                 <a:solidFill>
-                  <a:srgbClr val="C9D3F5"/>
+                  <a:srgbClr val="1F2429"/>
                 </a:solidFill>
                 <a:latin typeface="Courier New" pitchFamily="34" charset="0"/>
                 <a:ea typeface="Courier New" pitchFamily="34" charset="-122"/>
@@ -16087,7 +16127,7 @@
             <a:r>
               <a:rPr lang="en-US" sz="1400" dirty="0">
                 <a:solidFill>
-                  <a:srgbClr val="C9D3F5"/>
+                  <a:srgbClr val="1F2429"/>
                 </a:solidFill>
                 <a:latin typeface="Courier New" pitchFamily="34" charset="0"/>
                 <a:ea typeface="Courier New" pitchFamily="34" charset="-122"/>
@@ -16107,7 +16147,7 @@
             <a:r>
               <a:rPr lang="en-US" sz="1400" dirty="0">
                 <a:solidFill>
-                  <a:srgbClr val="C9D3F5"/>
+                  <a:srgbClr val="1F2429"/>
                 </a:solidFill>
                 <a:latin typeface="Courier New" pitchFamily="34" charset="0"/>
                 <a:ea typeface="Courier New" pitchFamily="34" charset="-122"/>
@@ -16127,7 +16167,7 @@
             <a:r>
               <a:rPr lang="en-US" sz="1400" dirty="0">
                 <a:solidFill>
-                  <a:srgbClr val="C9D3F5"/>
+                  <a:srgbClr val="1F2429"/>
                 </a:solidFill>
                 <a:latin typeface="Courier New" pitchFamily="34" charset="0"/>
                 <a:ea typeface="Courier New" pitchFamily="34" charset="-122"/>
@@ -16147,7 +16187,7 @@
             <a:r>
               <a:rPr lang="en-US" sz="1400" dirty="0">
                 <a:solidFill>
-                  <a:srgbClr val="C9D3F5"/>
+                  <a:srgbClr val="1F2429"/>
                 </a:solidFill>
                 <a:latin typeface="Courier New" pitchFamily="34" charset="0"/>
                 <a:ea typeface="Courier New" pitchFamily="34" charset="-122"/>
@@ -16167,7 +16207,7 @@
             <a:r>
               <a:rPr lang="en-US" sz="1400" dirty="0">
                 <a:solidFill>
-                  <a:srgbClr val="C9D3F5"/>
+                  <a:srgbClr val="1F2429"/>
                 </a:solidFill>
                 <a:latin typeface="Courier New" pitchFamily="34" charset="0"/>
                 <a:ea typeface="Courier New" pitchFamily="34" charset="-122"/>
@@ -16187,7 +16227,7 @@
             <a:r>
               <a:rPr lang="en-US" sz="1400" dirty="0">
                 <a:solidFill>
-                  <a:srgbClr val="C9D3F5"/>
+                  <a:srgbClr val="1F2429"/>
                 </a:solidFill>
                 <a:latin typeface="Courier New" pitchFamily="34" charset="0"/>
                 <a:ea typeface="Courier New" pitchFamily="34" charset="-122"/>
@@ -16207,7 +16247,7 @@
             <a:r>
               <a:rPr lang="en-US" sz="1400" dirty="0">
                 <a:solidFill>
-                  <a:srgbClr val="C9D3F5"/>
+                  <a:srgbClr val="1F2429"/>
                 </a:solidFill>
                 <a:latin typeface="Courier New" pitchFamily="34" charset="0"/>
                 <a:ea typeface="Courier New" pitchFamily="34" charset="-122"/>
@@ -16227,7 +16267,7 @@
             <a:r>
               <a:rPr lang="en-US" sz="1400" dirty="0">
                 <a:solidFill>
-                  <a:srgbClr val="C9D3F5"/>
+                  <a:srgbClr val="1F2429"/>
                 </a:solidFill>
                 <a:latin typeface="Courier New" pitchFamily="34" charset="0"/>
                 <a:ea typeface="Courier New" pitchFamily="34" charset="-122"/>
